--- a/decks/day3/module-4-middleware.pptx
+++ b/decks/day3/module-4-middleware.pptx
@@ -10320,17 +10320,14 @@
             <a:r>
               <a:rPr lang="en-US" sz="1280" dirty="0">
                 <a:solidFill>
-                  <a:srgbClr val="212121"/>
+                  <a:srgbClr val="1E2761"/>
                 </a:solidFill>
                 <a:latin typeface="Consolas" pitchFamily="34" charset="0"/>
                 <a:ea typeface="Consolas" pitchFamily="34" charset="-122"/>
                 <a:cs typeface="Consolas" pitchFamily="34" charset="-120"/>
               </a:rPr>
-              <a:t>async def timing(context, call_next):</a:t>
-            </a:r>
-            <a:endParaRPr lang="en-US" sz="1280" dirty="0"/>
-          </a:p>
-          <a:p>
+              <a:t>async</a:t>
+            </a:r>
             <a:pPr indent="0" marL="0">
               <a:buNone/>
             </a:pPr>
@@ -10343,28 +10340,22 @@
                 <a:ea typeface="Consolas" pitchFamily="34" charset="-122"/>
                 <a:cs typeface="Consolas" pitchFamily="34" charset="-120"/>
               </a:rPr>
-              <a:t>    started = perf_counter()</a:t>
-            </a:r>
-            <a:endParaRPr lang="en-US" sz="1280" dirty="0"/>
-          </a:p>
-          <a:p>
+              <a:t> </a:t>
+            </a:r>
             <a:pPr indent="0" marL="0">
               <a:buNone/>
             </a:pPr>
             <a:r>
               <a:rPr lang="en-US" sz="1280" dirty="0">
                 <a:solidFill>
-                  <a:srgbClr val="212121"/>
+                  <a:srgbClr val="1E2761"/>
                 </a:solidFill>
                 <a:latin typeface="Consolas" pitchFamily="34" charset="0"/>
                 <a:ea typeface="Consolas" pitchFamily="34" charset="-122"/>
                 <a:cs typeface="Consolas" pitchFamily="34" charset="-120"/>
               </a:rPr>
-              <a:t>    context.metadata["trace_id"] = new_trace_id()</a:t>
-            </a:r>
-            <a:endParaRPr lang="en-US" sz="1280" dirty="0"/>
-          </a:p>
-          <a:p>
+              <a:t>def</a:t>
+            </a:r>
             <a:pPr indent="0" marL="0">
               <a:buNone/>
             </a:pPr>
@@ -10377,7 +10368,7 @@
                 <a:ea typeface="Consolas" pitchFamily="34" charset="-122"/>
                 <a:cs typeface="Consolas" pitchFamily="34" charset="-120"/>
               </a:rPr>
-              <a:t>    try:</a:t>
+              <a:t> timing(context, call_next):</a:t>
             </a:r>
             <a:endParaRPr lang="en-US" sz="1280" dirty="0"/>
           </a:p>
@@ -10394,7 +10385,7 @@
                 <a:ea typeface="Consolas" pitchFamily="34" charset="-122"/>
                 <a:cs typeface="Consolas" pitchFamily="34" charset="-120"/>
               </a:rPr>
-              <a:t>        await call_next()</a:t>
+              <a:t>    started = perf_counter()</a:t>
             </a:r>
             <a:endParaRPr lang="en-US" sz="1280" dirty="0"/>
           </a:p>
@@ -10411,7 +10402,7 @@
                 <a:ea typeface="Consolas" pitchFamily="34" charset="-122"/>
                 <a:cs typeface="Consolas" pitchFamily="34" charset="-120"/>
               </a:rPr>
-              <a:t>    finally:</a:t>
+              <a:t>    context.metadata[</a:t>
             </a:r>
             <a:endParaRPr lang="en-US" sz="1280" dirty="0"/>
           </a:p>
@@ -10422,17 +10413,14 @@
             <a:r>
               <a:rPr lang="en-US" sz="1280" dirty="0">
                 <a:solidFill>
-                  <a:srgbClr val="212121"/>
+                  <a:srgbClr val="1F7A4D"/>
                 </a:solidFill>
                 <a:latin typeface="Consolas" pitchFamily="34" charset="0"/>
                 <a:ea typeface="Consolas" pitchFamily="34" charset="-122"/>
                 <a:cs typeface="Consolas" pitchFamily="34" charset="-120"/>
               </a:rPr>
-              <a:t>        record_duration(</a:t>
-            </a:r>
-            <a:endParaRPr lang="en-US" sz="1280" dirty="0"/>
-          </a:p>
-          <a:p>
+              <a:t>"trace_id"</a:t>
+            </a:r>
             <a:pPr indent="0" marL="0">
               <a:buNone/>
             </a:pPr>
@@ -10445,7 +10433,7 @@
                 <a:ea typeface="Consolas" pitchFamily="34" charset="-122"/>
                 <a:cs typeface="Consolas" pitchFamily="34" charset="-120"/>
               </a:rPr>
-              <a:t>            perf_counter() - started,</a:t>
+              <a:t>] = new_trace_id()</a:t>
             </a:r>
             <a:endParaRPr lang="en-US" sz="1280" dirty="0"/>
           </a:p>
@@ -10462,7 +10450,216 @@
                 <a:ea typeface="Consolas" pitchFamily="34" charset="-122"/>
                 <a:cs typeface="Consolas" pitchFamily="34" charset="-120"/>
               </a:rPr>
-              <a:t>            context.metadata["trace_id"],</a:t>
+              <a:t>    </a:t>
+            </a:r>
+            <a:endParaRPr lang="en-US" sz="1280" dirty="0"/>
+          </a:p>
+          <a:p>
+            <a:pPr indent="0" marL="0">
+              <a:buNone/>
+            </a:pPr>
+            <a:r>
+              <a:rPr lang="en-US" sz="1280" dirty="0">
+                <a:solidFill>
+                  <a:srgbClr val="1E2761"/>
+                </a:solidFill>
+                <a:latin typeface="Consolas" pitchFamily="34" charset="0"/>
+                <a:ea typeface="Consolas" pitchFamily="34" charset="-122"/>
+                <a:cs typeface="Consolas" pitchFamily="34" charset="-120"/>
+              </a:rPr>
+              <a:t>try</a:t>
+            </a:r>
+            <a:pPr indent="0" marL="0">
+              <a:buNone/>
+            </a:pPr>
+            <a:r>
+              <a:rPr lang="en-US" sz="1280" dirty="0">
+                <a:solidFill>
+                  <a:srgbClr val="212121"/>
+                </a:solidFill>
+                <a:latin typeface="Consolas" pitchFamily="34" charset="0"/>
+                <a:ea typeface="Consolas" pitchFamily="34" charset="-122"/>
+                <a:cs typeface="Consolas" pitchFamily="34" charset="-120"/>
+              </a:rPr>
+              <a:t>:</a:t>
+            </a:r>
+            <a:endParaRPr lang="en-US" sz="1280" dirty="0"/>
+          </a:p>
+          <a:p>
+            <a:pPr indent="0" marL="0">
+              <a:buNone/>
+            </a:pPr>
+            <a:r>
+              <a:rPr lang="en-US" sz="1280" dirty="0">
+                <a:solidFill>
+                  <a:srgbClr val="212121"/>
+                </a:solidFill>
+                <a:latin typeface="Consolas" pitchFamily="34" charset="0"/>
+                <a:ea typeface="Consolas" pitchFamily="34" charset="-122"/>
+                <a:cs typeface="Consolas" pitchFamily="34" charset="-120"/>
+              </a:rPr>
+              <a:t>        </a:t>
+            </a:r>
+            <a:endParaRPr lang="en-US" sz="1280" dirty="0"/>
+          </a:p>
+          <a:p>
+            <a:pPr indent="0" marL="0">
+              <a:buNone/>
+            </a:pPr>
+            <a:r>
+              <a:rPr lang="en-US" sz="1280" dirty="0">
+                <a:solidFill>
+                  <a:srgbClr val="1E2761"/>
+                </a:solidFill>
+                <a:latin typeface="Consolas" pitchFamily="34" charset="0"/>
+                <a:ea typeface="Consolas" pitchFamily="34" charset="-122"/>
+                <a:cs typeface="Consolas" pitchFamily="34" charset="-120"/>
+              </a:rPr>
+              <a:t>await</a:t>
+            </a:r>
+            <a:pPr indent="0" marL="0">
+              <a:buNone/>
+            </a:pPr>
+            <a:r>
+              <a:rPr lang="en-US" sz="1280" dirty="0">
+                <a:solidFill>
+                  <a:srgbClr val="212121"/>
+                </a:solidFill>
+                <a:latin typeface="Consolas" pitchFamily="34" charset="0"/>
+                <a:ea typeface="Consolas" pitchFamily="34" charset="-122"/>
+                <a:cs typeface="Consolas" pitchFamily="34" charset="-120"/>
+              </a:rPr>
+              <a:t> call_next()</a:t>
+            </a:r>
+            <a:endParaRPr lang="en-US" sz="1280" dirty="0"/>
+          </a:p>
+          <a:p>
+            <a:pPr indent="0" marL="0">
+              <a:buNone/>
+            </a:pPr>
+            <a:r>
+              <a:rPr lang="en-US" sz="1280" dirty="0">
+                <a:solidFill>
+                  <a:srgbClr val="212121"/>
+                </a:solidFill>
+                <a:latin typeface="Consolas" pitchFamily="34" charset="0"/>
+                <a:ea typeface="Consolas" pitchFamily="34" charset="-122"/>
+                <a:cs typeface="Consolas" pitchFamily="34" charset="-120"/>
+              </a:rPr>
+              <a:t>    </a:t>
+            </a:r>
+            <a:endParaRPr lang="en-US" sz="1280" dirty="0"/>
+          </a:p>
+          <a:p>
+            <a:pPr indent="0" marL="0">
+              <a:buNone/>
+            </a:pPr>
+            <a:r>
+              <a:rPr lang="en-US" sz="1280" dirty="0">
+                <a:solidFill>
+                  <a:srgbClr val="1E2761"/>
+                </a:solidFill>
+                <a:latin typeface="Consolas" pitchFamily="34" charset="0"/>
+                <a:ea typeface="Consolas" pitchFamily="34" charset="-122"/>
+                <a:cs typeface="Consolas" pitchFamily="34" charset="-120"/>
+              </a:rPr>
+              <a:t>finally</a:t>
+            </a:r>
+            <a:pPr indent="0" marL="0">
+              <a:buNone/>
+            </a:pPr>
+            <a:r>
+              <a:rPr lang="en-US" sz="1280" dirty="0">
+                <a:solidFill>
+                  <a:srgbClr val="212121"/>
+                </a:solidFill>
+                <a:latin typeface="Consolas" pitchFamily="34" charset="0"/>
+                <a:ea typeface="Consolas" pitchFamily="34" charset="-122"/>
+                <a:cs typeface="Consolas" pitchFamily="34" charset="-120"/>
+              </a:rPr>
+              <a:t>:</a:t>
+            </a:r>
+            <a:endParaRPr lang="en-US" sz="1280" dirty="0"/>
+          </a:p>
+          <a:p>
+            <a:pPr indent="0" marL="0">
+              <a:buNone/>
+            </a:pPr>
+            <a:r>
+              <a:rPr lang="en-US" sz="1280" dirty="0">
+                <a:solidFill>
+                  <a:srgbClr val="212121"/>
+                </a:solidFill>
+                <a:latin typeface="Consolas" pitchFamily="34" charset="0"/>
+                <a:ea typeface="Consolas" pitchFamily="34" charset="-122"/>
+                <a:cs typeface="Consolas" pitchFamily="34" charset="-120"/>
+              </a:rPr>
+              <a:t>        record_duration(</a:t>
+            </a:r>
+            <a:endParaRPr lang="en-US" sz="1280" dirty="0"/>
+          </a:p>
+          <a:p>
+            <a:pPr indent="0" marL="0">
+              <a:buNone/>
+            </a:pPr>
+            <a:r>
+              <a:rPr lang="en-US" sz="1280" dirty="0">
+                <a:solidFill>
+                  <a:srgbClr val="212121"/>
+                </a:solidFill>
+                <a:latin typeface="Consolas" pitchFamily="34" charset="0"/>
+                <a:ea typeface="Consolas" pitchFamily="34" charset="-122"/>
+                <a:cs typeface="Consolas" pitchFamily="34" charset="-120"/>
+              </a:rPr>
+              <a:t>            perf_counter() - started,</a:t>
+            </a:r>
+            <a:endParaRPr lang="en-US" sz="1280" dirty="0"/>
+          </a:p>
+          <a:p>
+            <a:pPr indent="0" marL="0">
+              <a:buNone/>
+            </a:pPr>
+            <a:r>
+              <a:rPr lang="en-US" sz="1280" dirty="0">
+                <a:solidFill>
+                  <a:srgbClr val="212121"/>
+                </a:solidFill>
+                <a:latin typeface="Consolas" pitchFamily="34" charset="0"/>
+                <a:ea typeface="Consolas" pitchFamily="34" charset="-122"/>
+                <a:cs typeface="Consolas" pitchFamily="34" charset="-120"/>
+              </a:rPr>
+              <a:t>            context.metadata[</a:t>
+            </a:r>
+            <a:endParaRPr lang="en-US" sz="1280" dirty="0"/>
+          </a:p>
+          <a:p>
+            <a:pPr indent="0" marL="0">
+              <a:buNone/>
+            </a:pPr>
+            <a:r>
+              <a:rPr lang="en-US" sz="1280" dirty="0">
+                <a:solidFill>
+                  <a:srgbClr val="1F7A4D"/>
+                </a:solidFill>
+                <a:latin typeface="Consolas" pitchFamily="34" charset="0"/>
+                <a:ea typeface="Consolas" pitchFamily="34" charset="-122"/>
+                <a:cs typeface="Consolas" pitchFamily="34" charset="-120"/>
+              </a:rPr>
+              <a:t>"trace_id"</a:t>
+            </a:r>
+            <a:pPr indent="0" marL="0">
+              <a:buNone/>
+            </a:pPr>
+            <a:r>
+              <a:rPr lang="en-US" sz="1280" dirty="0">
+                <a:solidFill>
+                  <a:srgbClr val="212121"/>
+                </a:solidFill>
+                <a:latin typeface="Consolas" pitchFamily="34" charset="0"/>
+                <a:ea typeface="Consolas" pitchFamily="34" charset="-122"/>
+                <a:cs typeface="Consolas" pitchFamily="34" charset="-120"/>
+              </a:rPr>
+              <a:t>],</a:t>
             </a:r>
             <a:endParaRPr lang="en-US" sz="1280" dirty="0"/>
           </a:p>
@@ -11665,17 +11862,14 @@
             <a:r>
               <a:rPr lang="en-US" sz="1280" dirty="0">
                 <a:solidFill>
-                  <a:srgbClr val="212121"/>
+                  <a:srgbClr val="1E2761"/>
                 </a:solidFill>
                 <a:latin typeface="Consolas" pitchFamily="34" charset="0"/>
                 <a:ea typeface="Consolas" pitchFamily="34" charset="-122"/>
                 <a:cs typeface="Consolas" pitchFamily="34" charset="-120"/>
               </a:rPr>
-              <a:t>if blocked(context.messages):</a:t>
-            </a:r>
-            <a:endParaRPr lang="en-US" sz="1280" dirty="0"/>
-          </a:p>
-          <a:p>
+              <a:t>if</a:t>
+            </a:r>
             <a:pPr indent="0" marL="0">
               <a:buNone/>
             </a:pPr>
@@ -11688,7 +11882,7 @@
                 <a:ea typeface="Consolas" pitchFamily="34" charset="-122"/>
                 <a:cs typeface="Consolas" pitchFamily="34" charset="-120"/>
               </a:rPr>
-              <a:t>    context.result = AgentResponse(</a:t>
+              <a:t> blocked(context.messages):</a:t>
             </a:r>
             <a:endParaRPr lang="en-US" sz="1280" dirty="0"/>
           </a:p>
@@ -11705,7 +11899,7 @@
                 <a:ea typeface="Consolas" pitchFamily="34" charset="-122"/>
                 <a:cs typeface="Consolas" pitchFamily="34" charset="-120"/>
               </a:rPr>
-              <a:t>        messages=[Message("assistant", ["I can't process this request."])]</a:t>
+              <a:t>    context.result = AgentResponse(</a:t>
             </a:r>
             <a:endParaRPr lang="en-US" sz="1280" dirty="0"/>
           </a:p>
@@ -11722,7 +11916,7 @@
                 <a:ea typeface="Consolas" pitchFamily="34" charset="-122"/>
                 <a:cs typeface="Consolas" pitchFamily="34" charset="-120"/>
               </a:rPr>
-              <a:t>    )</a:t>
+              <a:t>        messages=[Message(</a:t>
             </a:r>
             <a:endParaRPr lang="en-US" sz="1280" dirty="0"/>
           </a:p>
@@ -11733,23 +11927,14 @@
             <a:r>
               <a:rPr lang="en-US" sz="1280" dirty="0">
                 <a:solidFill>
-                  <a:srgbClr val="212121"/>
+                  <a:srgbClr val="1F7A4D"/>
                 </a:solidFill>
                 <a:latin typeface="Consolas" pitchFamily="34" charset="0"/>
                 <a:ea typeface="Consolas" pitchFamily="34" charset="-122"/>
                 <a:cs typeface="Consolas" pitchFamily="34" charset="-120"/>
               </a:rPr>
-              <a:t>    raise MiddlewareTermination()</a:t>
-            </a:r>
-            <a:endParaRPr lang="en-US" sz="1280" dirty="0"/>
-          </a:p>
-          <a:p>
-            <a:pPr indent="0" marL="0">
-              <a:buNone/>
-            </a:pPr>
-            <a:endParaRPr lang="en-US" sz="1280" dirty="0"/>
-          </a:p>
-          <a:p>
+              <a:t>"assistant"</a:t>
+            </a:r>
             <a:pPr indent="0" marL="0">
               <a:buNone/>
             </a:pPr>
@@ -11762,7 +11947,129 @@
                 <a:ea typeface="Consolas" pitchFamily="34" charset="-122"/>
                 <a:cs typeface="Consolas" pitchFamily="34" charset="-120"/>
               </a:rPr>
-              <a:t>await call_next()</a:t>
+              <a:t>, [</a:t>
+            </a:r>
+            <a:pPr indent="0" marL="0">
+              <a:buNone/>
+            </a:pPr>
+            <a:r>
+              <a:rPr lang="en-US" sz="1280" dirty="0">
+                <a:solidFill>
+                  <a:srgbClr val="1F7A4D"/>
+                </a:solidFill>
+                <a:latin typeface="Consolas" pitchFamily="34" charset="0"/>
+                <a:ea typeface="Consolas" pitchFamily="34" charset="-122"/>
+                <a:cs typeface="Consolas" pitchFamily="34" charset="-120"/>
+              </a:rPr>
+              <a:t>"I can't process this request."</a:t>
+            </a:r>
+            <a:pPr indent="0" marL="0">
+              <a:buNone/>
+            </a:pPr>
+            <a:r>
+              <a:rPr lang="en-US" sz="1280" dirty="0">
+                <a:solidFill>
+                  <a:srgbClr val="212121"/>
+                </a:solidFill>
+                <a:latin typeface="Consolas" pitchFamily="34" charset="0"/>
+                <a:ea typeface="Consolas" pitchFamily="34" charset="-122"/>
+                <a:cs typeface="Consolas" pitchFamily="34" charset="-120"/>
+              </a:rPr>
+              <a:t>])]</a:t>
+            </a:r>
+            <a:endParaRPr lang="en-US" sz="1280" dirty="0"/>
+          </a:p>
+          <a:p>
+            <a:pPr indent="0" marL="0">
+              <a:buNone/>
+            </a:pPr>
+            <a:r>
+              <a:rPr lang="en-US" sz="1280" dirty="0">
+                <a:solidFill>
+                  <a:srgbClr val="212121"/>
+                </a:solidFill>
+                <a:latin typeface="Consolas" pitchFamily="34" charset="0"/>
+                <a:ea typeface="Consolas" pitchFamily="34" charset="-122"/>
+                <a:cs typeface="Consolas" pitchFamily="34" charset="-120"/>
+              </a:rPr>
+              <a:t>    )</a:t>
+            </a:r>
+            <a:endParaRPr lang="en-US" sz="1280" dirty="0"/>
+          </a:p>
+          <a:p>
+            <a:pPr indent="0" marL="0">
+              <a:buNone/>
+            </a:pPr>
+            <a:r>
+              <a:rPr lang="en-US" sz="1280" dirty="0">
+                <a:solidFill>
+                  <a:srgbClr val="212121"/>
+                </a:solidFill>
+                <a:latin typeface="Consolas" pitchFamily="34" charset="0"/>
+                <a:ea typeface="Consolas" pitchFamily="34" charset="-122"/>
+                <a:cs typeface="Consolas" pitchFamily="34" charset="-120"/>
+              </a:rPr>
+              <a:t>    </a:t>
+            </a:r>
+            <a:endParaRPr lang="en-US" sz="1280" dirty="0"/>
+          </a:p>
+          <a:p>
+            <a:pPr indent="0" marL="0">
+              <a:buNone/>
+            </a:pPr>
+            <a:r>
+              <a:rPr lang="en-US" sz="1280" dirty="0">
+                <a:solidFill>
+                  <a:srgbClr val="1E2761"/>
+                </a:solidFill>
+                <a:latin typeface="Consolas" pitchFamily="34" charset="0"/>
+                <a:ea typeface="Consolas" pitchFamily="34" charset="-122"/>
+                <a:cs typeface="Consolas" pitchFamily="34" charset="-120"/>
+              </a:rPr>
+              <a:t>raise</a:t>
+            </a:r>
+            <a:pPr indent="0" marL="0">
+              <a:buNone/>
+            </a:pPr>
+            <a:r>
+              <a:rPr lang="en-US" sz="1280" dirty="0">
+                <a:solidFill>
+                  <a:srgbClr val="212121"/>
+                </a:solidFill>
+                <a:latin typeface="Consolas" pitchFamily="34" charset="0"/>
+                <a:ea typeface="Consolas" pitchFamily="34" charset="-122"/>
+                <a:cs typeface="Consolas" pitchFamily="34" charset="-120"/>
+              </a:rPr>
+              <a:t> MiddlewareTermination()
+</a:t>
+            </a:r>
+            <a:pPr indent="0" marL="0">
+              <a:buNone/>
+            </a:pPr>
+            <a:r>
+              <a:rPr lang="en-US" sz="1280" dirty="0">
+                <a:solidFill>
+                  <a:srgbClr val="1E2761"/>
+                </a:solidFill>
+                <a:latin typeface="Consolas" pitchFamily="34" charset="0"/>
+                <a:ea typeface="Consolas" pitchFamily="34" charset="-122"/>
+                <a:cs typeface="Consolas" pitchFamily="34" charset="-120"/>
+              </a:rPr>
+              <a:t>await</a:t>
+            </a:r>
+            <a:pPr indent="0" marL="0">
+              <a:buNone/>
+            </a:pPr>
+            <a:r>
+              <a:rPr lang="en-US" sz="1280" dirty="0">
+                <a:solidFill>
+                  <a:srgbClr val="212121"/>
+                </a:solidFill>
+                <a:latin typeface="Consolas" pitchFamily="34" charset="0"/>
+                <a:ea typeface="Consolas" pitchFamily="34" charset="-122"/>
+                <a:cs typeface="Consolas" pitchFamily="34" charset="-120"/>
+              </a:rPr>
+              <a:t> call_next()</a:t>
             </a:r>
             <a:endParaRPr lang="en-US" sz="1280" dirty="0"/>
           </a:p>

--- a/decks/day3/module-4-middleware.pptx
+++ b/decks/day3/module-4-middleware.pptx
@@ -10283,11 +10283,11 @@
             <a:avLst/>
           </a:prstGeom>
           <a:solidFill>
-            <a:srgbClr val="F3F4F6"/>
+            <a:srgbClr val="1D1E22"/>
           </a:solidFill>
-          <a:ln w="6350">
+          <a:ln w="9525">
             <a:solidFill>
-              <a:srgbClr val="D1D5DB"/>
+              <a:srgbClr val="2A2B2E"/>
             </a:solidFill>
             <a:prstDash val="solid"/>
           </a:ln>
@@ -10320,7 +10320,7 @@
             <a:r>
               <a:rPr lang="en-US" sz="1280" dirty="0">
                 <a:solidFill>
-                  <a:srgbClr val="1E2761"/>
+                  <a:srgbClr val="A996B6"/>
                 </a:solidFill>
                 <a:latin typeface="Consolas" pitchFamily="34" charset="0"/>
                 <a:ea typeface="Consolas" pitchFamily="34" charset="-122"/>
@@ -10334,7 +10334,7 @@
             <a:r>
               <a:rPr lang="en-US" sz="1280" dirty="0">
                 <a:solidFill>
-                  <a:srgbClr val="212121"/>
+                  <a:srgbClr val="FFFFFF"/>
                 </a:solidFill>
                 <a:latin typeface="Consolas" pitchFamily="34" charset="0"/>
                 <a:ea typeface="Consolas" pitchFamily="34" charset="-122"/>
@@ -10348,7 +10348,7 @@
             <a:r>
               <a:rPr lang="en-US" sz="1280" dirty="0">
                 <a:solidFill>
-                  <a:srgbClr val="1E2761"/>
+                  <a:srgbClr val="A996B6"/>
                 </a:solidFill>
                 <a:latin typeface="Consolas" pitchFamily="34" charset="0"/>
                 <a:ea typeface="Consolas" pitchFamily="34" charset="-122"/>
@@ -10362,7 +10362,7 @@
             <a:r>
               <a:rPr lang="en-US" sz="1280" dirty="0">
                 <a:solidFill>
-                  <a:srgbClr val="212121"/>
+                  <a:srgbClr val="FFFFFF"/>
                 </a:solidFill>
                 <a:latin typeface="Consolas" pitchFamily="34" charset="0"/>
                 <a:ea typeface="Consolas" pitchFamily="34" charset="-122"/>
@@ -10379,7 +10379,7 @@
             <a:r>
               <a:rPr lang="en-US" sz="1280" dirty="0">
                 <a:solidFill>
-                  <a:srgbClr val="212121"/>
+                  <a:srgbClr val="FFFFFF"/>
                 </a:solidFill>
                 <a:latin typeface="Consolas" pitchFamily="34" charset="0"/>
                 <a:ea typeface="Consolas" pitchFamily="34" charset="-122"/>
@@ -10396,7 +10396,7 @@
             <a:r>
               <a:rPr lang="en-US" sz="1280" dirty="0">
                 <a:solidFill>
-                  <a:srgbClr val="212121"/>
+                  <a:srgbClr val="FFFFFF"/>
                 </a:solidFill>
                 <a:latin typeface="Consolas" pitchFamily="34" charset="0"/>
                 <a:ea typeface="Consolas" pitchFamily="34" charset="-122"/>
@@ -10413,7 +10413,7 @@
             <a:r>
               <a:rPr lang="en-US" sz="1280" dirty="0">
                 <a:solidFill>
-                  <a:srgbClr val="1F7A4D"/>
+                  <a:srgbClr val="E4C98A"/>
                 </a:solidFill>
                 <a:latin typeface="Consolas" pitchFamily="34" charset="0"/>
                 <a:ea typeface="Consolas" pitchFamily="34" charset="-122"/>
@@ -10427,7 +10427,7 @@
             <a:r>
               <a:rPr lang="en-US" sz="1280" dirty="0">
                 <a:solidFill>
-                  <a:srgbClr val="212121"/>
+                  <a:srgbClr val="FFFFFF"/>
                 </a:solidFill>
                 <a:latin typeface="Consolas" pitchFamily="34" charset="0"/>
                 <a:ea typeface="Consolas" pitchFamily="34" charset="-122"/>
@@ -10444,7 +10444,7 @@
             <a:r>
               <a:rPr lang="en-US" sz="1280" dirty="0">
                 <a:solidFill>
-                  <a:srgbClr val="212121"/>
+                  <a:srgbClr val="FFFFFF"/>
                 </a:solidFill>
                 <a:latin typeface="Consolas" pitchFamily="34" charset="0"/>
                 <a:ea typeface="Consolas" pitchFamily="34" charset="-122"/>
@@ -10461,7 +10461,7 @@
             <a:r>
               <a:rPr lang="en-US" sz="1280" dirty="0">
                 <a:solidFill>
-                  <a:srgbClr val="1E2761"/>
+                  <a:srgbClr val="A996B6"/>
                 </a:solidFill>
                 <a:latin typeface="Consolas" pitchFamily="34" charset="0"/>
                 <a:ea typeface="Consolas" pitchFamily="34" charset="-122"/>
@@ -10475,7 +10475,7 @@
             <a:r>
               <a:rPr lang="en-US" sz="1280" dirty="0">
                 <a:solidFill>
-                  <a:srgbClr val="212121"/>
+                  <a:srgbClr val="FFFFFF"/>
                 </a:solidFill>
                 <a:latin typeface="Consolas" pitchFamily="34" charset="0"/>
                 <a:ea typeface="Consolas" pitchFamily="34" charset="-122"/>
@@ -10492,7 +10492,7 @@
             <a:r>
               <a:rPr lang="en-US" sz="1280" dirty="0">
                 <a:solidFill>
-                  <a:srgbClr val="212121"/>
+                  <a:srgbClr val="FFFFFF"/>
                 </a:solidFill>
                 <a:latin typeface="Consolas" pitchFamily="34" charset="0"/>
                 <a:ea typeface="Consolas" pitchFamily="34" charset="-122"/>
@@ -10509,7 +10509,7 @@
             <a:r>
               <a:rPr lang="en-US" sz="1280" dirty="0">
                 <a:solidFill>
-                  <a:srgbClr val="1E2761"/>
+                  <a:srgbClr val="A996B6"/>
                 </a:solidFill>
                 <a:latin typeface="Consolas" pitchFamily="34" charset="0"/>
                 <a:ea typeface="Consolas" pitchFamily="34" charset="-122"/>
@@ -10523,7 +10523,7 @@
             <a:r>
               <a:rPr lang="en-US" sz="1280" dirty="0">
                 <a:solidFill>
-                  <a:srgbClr val="212121"/>
+                  <a:srgbClr val="FFFFFF"/>
                 </a:solidFill>
                 <a:latin typeface="Consolas" pitchFamily="34" charset="0"/>
                 <a:ea typeface="Consolas" pitchFamily="34" charset="-122"/>
@@ -10540,7 +10540,7 @@
             <a:r>
               <a:rPr lang="en-US" sz="1280" dirty="0">
                 <a:solidFill>
-                  <a:srgbClr val="212121"/>
+                  <a:srgbClr val="FFFFFF"/>
                 </a:solidFill>
                 <a:latin typeface="Consolas" pitchFamily="34" charset="0"/>
                 <a:ea typeface="Consolas" pitchFamily="34" charset="-122"/>
@@ -10557,7 +10557,7 @@
             <a:r>
               <a:rPr lang="en-US" sz="1280" dirty="0">
                 <a:solidFill>
-                  <a:srgbClr val="1E2761"/>
+                  <a:srgbClr val="A996B6"/>
                 </a:solidFill>
                 <a:latin typeface="Consolas" pitchFamily="34" charset="0"/>
                 <a:ea typeface="Consolas" pitchFamily="34" charset="-122"/>
@@ -10571,7 +10571,7 @@
             <a:r>
               <a:rPr lang="en-US" sz="1280" dirty="0">
                 <a:solidFill>
-                  <a:srgbClr val="212121"/>
+                  <a:srgbClr val="FFFFFF"/>
                 </a:solidFill>
                 <a:latin typeface="Consolas" pitchFamily="34" charset="0"/>
                 <a:ea typeface="Consolas" pitchFamily="34" charset="-122"/>
@@ -10588,7 +10588,7 @@
             <a:r>
               <a:rPr lang="en-US" sz="1280" dirty="0">
                 <a:solidFill>
-                  <a:srgbClr val="212121"/>
+                  <a:srgbClr val="FFFFFF"/>
                 </a:solidFill>
                 <a:latin typeface="Consolas" pitchFamily="34" charset="0"/>
                 <a:ea typeface="Consolas" pitchFamily="34" charset="-122"/>
@@ -10605,7 +10605,7 @@
             <a:r>
               <a:rPr lang="en-US" sz="1280" dirty="0">
                 <a:solidFill>
-                  <a:srgbClr val="212121"/>
+                  <a:srgbClr val="FFFFFF"/>
                 </a:solidFill>
                 <a:latin typeface="Consolas" pitchFamily="34" charset="0"/>
                 <a:ea typeface="Consolas" pitchFamily="34" charset="-122"/>
@@ -10622,7 +10622,7 @@
             <a:r>
               <a:rPr lang="en-US" sz="1280" dirty="0">
                 <a:solidFill>
-                  <a:srgbClr val="212121"/>
+                  <a:srgbClr val="FFFFFF"/>
                 </a:solidFill>
                 <a:latin typeface="Consolas" pitchFamily="34" charset="0"/>
                 <a:ea typeface="Consolas" pitchFamily="34" charset="-122"/>
@@ -10639,7 +10639,7 @@
             <a:r>
               <a:rPr lang="en-US" sz="1280" dirty="0">
                 <a:solidFill>
-                  <a:srgbClr val="1F7A4D"/>
+                  <a:srgbClr val="E4C98A"/>
                 </a:solidFill>
                 <a:latin typeface="Consolas" pitchFamily="34" charset="0"/>
                 <a:ea typeface="Consolas" pitchFamily="34" charset="-122"/>
@@ -10653,7 +10653,7 @@
             <a:r>
               <a:rPr lang="en-US" sz="1280" dirty="0">
                 <a:solidFill>
-                  <a:srgbClr val="212121"/>
+                  <a:srgbClr val="FFFFFF"/>
                 </a:solidFill>
                 <a:latin typeface="Consolas" pitchFamily="34" charset="0"/>
                 <a:ea typeface="Consolas" pitchFamily="34" charset="-122"/>
@@ -10670,7 +10670,7 @@
             <a:r>
               <a:rPr lang="en-US" sz="1280" dirty="0">
                 <a:solidFill>
-                  <a:srgbClr val="212121"/>
+                  <a:srgbClr val="FFFFFF"/>
                 </a:solidFill>
                 <a:latin typeface="Consolas" pitchFamily="34" charset="0"/>
                 <a:ea typeface="Consolas" pitchFamily="34" charset="-122"/>
@@ -11825,11 +11825,11 @@
             <a:avLst/>
           </a:prstGeom>
           <a:solidFill>
-            <a:srgbClr val="F3F4F6"/>
+            <a:srgbClr val="1D1E22"/>
           </a:solidFill>
-          <a:ln w="6350">
+          <a:ln w="9525">
             <a:solidFill>
-              <a:srgbClr val="D1D5DB"/>
+              <a:srgbClr val="2A2B2E"/>
             </a:solidFill>
             <a:prstDash val="solid"/>
           </a:ln>
@@ -11862,7 +11862,7 @@
             <a:r>
               <a:rPr lang="en-US" sz="1280" dirty="0">
                 <a:solidFill>
-                  <a:srgbClr val="1E2761"/>
+                  <a:srgbClr val="A996B6"/>
                 </a:solidFill>
                 <a:latin typeface="Consolas" pitchFamily="34" charset="0"/>
                 <a:ea typeface="Consolas" pitchFamily="34" charset="-122"/>
@@ -11876,7 +11876,7 @@
             <a:r>
               <a:rPr lang="en-US" sz="1280" dirty="0">
                 <a:solidFill>
-                  <a:srgbClr val="212121"/>
+                  <a:srgbClr val="FFFFFF"/>
                 </a:solidFill>
                 <a:latin typeface="Consolas" pitchFamily="34" charset="0"/>
                 <a:ea typeface="Consolas" pitchFamily="34" charset="-122"/>
@@ -11893,7 +11893,7 @@
             <a:r>
               <a:rPr lang="en-US" sz="1280" dirty="0">
                 <a:solidFill>
-                  <a:srgbClr val="212121"/>
+                  <a:srgbClr val="FFFFFF"/>
                 </a:solidFill>
                 <a:latin typeface="Consolas" pitchFamily="34" charset="0"/>
                 <a:ea typeface="Consolas" pitchFamily="34" charset="-122"/>
@@ -11910,7 +11910,7 @@
             <a:r>
               <a:rPr lang="en-US" sz="1280" dirty="0">
                 <a:solidFill>
-                  <a:srgbClr val="212121"/>
+                  <a:srgbClr val="FFFFFF"/>
                 </a:solidFill>
                 <a:latin typeface="Consolas" pitchFamily="34" charset="0"/>
                 <a:ea typeface="Consolas" pitchFamily="34" charset="-122"/>
@@ -11927,7 +11927,7 @@
             <a:r>
               <a:rPr lang="en-US" sz="1280" dirty="0">
                 <a:solidFill>
-                  <a:srgbClr val="1F7A4D"/>
+                  <a:srgbClr val="E4C98A"/>
                 </a:solidFill>
                 <a:latin typeface="Consolas" pitchFamily="34" charset="0"/>
                 <a:ea typeface="Consolas" pitchFamily="34" charset="-122"/>
@@ -11941,7 +11941,7 @@
             <a:r>
               <a:rPr lang="en-US" sz="1280" dirty="0">
                 <a:solidFill>
-                  <a:srgbClr val="212121"/>
+                  <a:srgbClr val="FFFFFF"/>
                 </a:solidFill>
                 <a:latin typeface="Consolas" pitchFamily="34" charset="0"/>
                 <a:ea typeface="Consolas" pitchFamily="34" charset="-122"/>
@@ -11955,7 +11955,7 @@
             <a:r>
               <a:rPr lang="en-US" sz="1280" dirty="0">
                 <a:solidFill>
-                  <a:srgbClr val="1F7A4D"/>
+                  <a:srgbClr val="E4C98A"/>
                 </a:solidFill>
                 <a:latin typeface="Consolas" pitchFamily="34" charset="0"/>
                 <a:ea typeface="Consolas" pitchFamily="34" charset="-122"/>
@@ -11969,7 +11969,7 @@
             <a:r>
               <a:rPr lang="en-US" sz="1280" dirty="0">
                 <a:solidFill>
-                  <a:srgbClr val="212121"/>
+                  <a:srgbClr val="FFFFFF"/>
                 </a:solidFill>
                 <a:latin typeface="Consolas" pitchFamily="34" charset="0"/>
                 <a:ea typeface="Consolas" pitchFamily="34" charset="-122"/>
@@ -11986,7 +11986,7 @@
             <a:r>
               <a:rPr lang="en-US" sz="1280" dirty="0">
                 <a:solidFill>
-                  <a:srgbClr val="212121"/>
+                  <a:srgbClr val="FFFFFF"/>
                 </a:solidFill>
                 <a:latin typeface="Consolas" pitchFamily="34" charset="0"/>
                 <a:ea typeface="Consolas" pitchFamily="34" charset="-122"/>
@@ -12003,7 +12003,7 @@
             <a:r>
               <a:rPr lang="en-US" sz="1280" dirty="0">
                 <a:solidFill>
-                  <a:srgbClr val="212121"/>
+                  <a:srgbClr val="FFFFFF"/>
                 </a:solidFill>
                 <a:latin typeface="Consolas" pitchFamily="34" charset="0"/>
                 <a:ea typeface="Consolas" pitchFamily="34" charset="-122"/>
@@ -12020,7 +12020,7 @@
             <a:r>
               <a:rPr lang="en-US" sz="1280" dirty="0">
                 <a:solidFill>
-                  <a:srgbClr val="1E2761"/>
+                  <a:srgbClr val="A996B6"/>
                 </a:solidFill>
                 <a:latin typeface="Consolas" pitchFamily="34" charset="0"/>
                 <a:ea typeface="Consolas" pitchFamily="34" charset="-122"/>
@@ -12034,7 +12034,7 @@
             <a:r>
               <a:rPr lang="en-US" sz="1280" dirty="0">
                 <a:solidFill>
-                  <a:srgbClr val="212121"/>
+                  <a:srgbClr val="FFFFFF"/>
                 </a:solidFill>
                 <a:latin typeface="Consolas" pitchFamily="34" charset="0"/>
                 <a:ea typeface="Consolas" pitchFamily="34" charset="-122"/>
@@ -12049,7 +12049,7 @@
             <a:r>
               <a:rPr lang="en-US" sz="1280" dirty="0">
                 <a:solidFill>
-                  <a:srgbClr val="1E2761"/>
+                  <a:srgbClr val="A996B6"/>
                 </a:solidFill>
                 <a:latin typeface="Consolas" pitchFamily="34" charset="0"/>
                 <a:ea typeface="Consolas" pitchFamily="34" charset="-122"/>
@@ -12063,7 +12063,7 @@
             <a:r>
               <a:rPr lang="en-US" sz="1280" dirty="0">
                 <a:solidFill>
-                  <a:srgbClr val="212121"/>
+                  <a:srgbClr val="FFFFFF"/>
                 </a:solidFill>
                 <a:latin typeface="Consolas" pitchFamily="34" charset="0"/>
                 <a:ea typeface="Consolas" pitchFamily="34" charset="-122"/>

--- a/decks/day3/module-4-middleware.pptx
+++ b/decks/day3/module-4-middleware.pptx
@@ -21,9 +21,11 @@
     <p:sldId id="269" r:id="rId15"/>
     <p:sldId id="270" r:id="rId16"/>
     <p:sldId id="271" r:id="rId17"/>
+    <p:sldId id="272" r:id="rId18"/>
+    <p:sldId id="273" r:id="rId19"/>
   </p:sldIdLst>
   <p:notesMasterIdLst>
-    <p:notesMasterId r:id="rId18"/>
+    <p:notesMasterId r:id="rId20"/>
   </p:notesMasterIdLst>
   <p:sldSz cx="9144000" cy="5143500"/>
   <p:notesSz cx="5143500" cy="9144000"/>
@@ -606,8 +608,8 @@
           <a:p>
             <a:r>
               <a:rPr lang="en-US" dirty="0"/>
-              <a:t>• Placeholder marker slide — the runbook has full narration, setup, and fallback plan. Runs atr_validation_middleware.py (FunctionMiddleware + MiddlewareTermination, real deny-list fallback with no extra install required).
-• GROUNDING SOURCE: https://github.com/microsoft/agent-framework/blob/main/python/samples/02-agents/middleware/atr_validation_middleware.py</a:t>
+              <a:t>• The safe termination contract has two actions: set context.result to the response you want returned, then raise MiddlewareTermination. Do not simply return and assume the run is terminated.
+• GROUNDING SOURCE: https://learn.microsoft.com/en-us/agent-framework/concepts/agents/middleware/termination?tabs=python</a:t>
             </a:r>
             <a:endParaRPr lang="en-US" dirty="0"/>
           </a:p>
@@ -695,8 +697,8 @@
           <a:p>
             <a:r>
               <a:rPr lang="en-US" dirty="0"/>
-              <a:t>• A middleware should either recover deliberately or re-raise. Avoid swallowing exceptions and returning accidental success. Log sanitized context, preserve cancellation, and keep retry scope narrow.
-• GROUNDING SOURCE: https://learn.microsoft.com/en-us/agent-framework/concepts/agents/middleware/exception-handling?tabs=python</a:t>
+              <a:t>• Keep this conceptual rather than inventing policy logic. The exact AgentResponse construction is in the official sample; the invariant is context.result before MiddlewareTermination if the caller should receive a custom response.
+• GROUNDING SOURCE: https://learn.microsoft.com/en-us/agent-framework/concepts/agents/middleware/termination?tabs=python</a:t>
             </a:r>
             <a:endParaRPr lang="en-US" dirty="0"/>
           </a:p>
@@ -784,8 +786,8 @@
           <a:p>
             <a:r>
               <a:rPr lang="en-US" dirty="0"/>
-              <a:t>• Make the risk explicit: retrying a write tool can duplicate side effects. Limit attempts, retry only classified transient failures, honor cancellation, and use idempotency where the backend supports it.
-• GROUNDING SOURCE: https://learn.microsoft.com/en-us/agent-framework/concepts/agents/middleware/exception-handling?tabs=python</a:t>
+              <a:t>• Placeholder marker slide — the runbook has full narration, setup, and fallback plan. Runs atr_validation_middleware.py (FunctionMiddleware + MiddlewareTermination, real deny-list fallback with no extra install required).
+• GROUNDING SOURCE: https://github.com/microsoft/agent-framework/blob/main/python/samples/02-agents/middleware/atr_validation_middleware.py</a:t>
             </a:r>
             <a:endParaRPr lang="en-US" dirty="0"/>
           </a:p>
@@ -873,9 +875,8 @@
           <a:p>
             <a:r>
               <a:rPr lang="en-US" dirty="0"/>
-              <a:t>• Use built-in observability for standard traces, metrics, and spans. Write middleware when you need application-specific policy or transformation. Do not recreate OpenTelemetry plumbing unless you have a concrete gap.
-• GROUNDING SOURCE: https://learn.microsoft.com/en-us/agent-framework/agents/observability?tabs=python
-• GROUNDING SOURCE: https://learn.microsoft.com/en-us/agent-framework/concepts/agents/middleware/?tabs=python</a:t>
+              <a:t>• A middleware should either recover deliberately or re-raise. Avoid swallowing exceptions and returning accidental success. Log sanitized context, preserve cancellation, and keep retry scope narrow.
+• GROUNDING SOURCE: https://learn.microsoft.com/en-us/agent-framework/concepts/agents/middleware/exception-handling?tabs=python</a:t>
             </a:r>
             <a:endParaRPr lang="en-US" dirty="0"/>
           </a:p>
@@ -963,8 +964,8 @@
           <a:p>
             <a:r>
               <a:rPr lang="en-US" dirty="0"/>
-              <a:t>• Chat middleware is the easiest place to accidentally multiply work because it runs per model call. Put cheap rejects outside expensive work. Keep middleware focused so ordering remains auditable.
-• GROUNDING SOURCE: https://learn.microsoft.com/en-us/agent-framework/concepts/agents/middleware/?tabs=python</a:t>
+              <a:t>• Make the risk explicit: retrying a write tool can duplicate side effects. Limit attempts, retry only classified transient failures, honor cancellation, and use idempotency where the backend supports it.
+• GROUNDING SOURCE: https://learn.microsoft.com/en-us/agent-framework/concepts/agents/middleware/exception-handling?tabs=python</a:t>
             </a:r>
             <a:endParaRPr lang="en-US" dirty="0"/>
           </a:p>
@@ -1052,8 +1053,9 @@
           <a:p>
             <a:r>
               <a:rPr lang="en-US" dirty="0"/>
-              <a:t>• Clearly separate this experimental awareness item from normal middleware. Agent Hooks provide a standardized fail-closed governance boundary spanning agent, chat, and function stages, including streaming and persistence coordination. Do not make Hooks part of the core lab.
-• GROUNDING SOURCE: https://learn.microsoft.com/en-us/agent-framework/agents/agent-hooks?tabs=python</a:t>
+              <a:t>• Use built-in observability for standard traces, metrics, and spans. Write middleware when you need application-specific policy or transformation. Do not recreate OpenTelemetry plumbing unless you have a concrete gap.
+• GROUNDING SOURCE: https://learn.microsoft.com/en-us/agent-framework/agents/observability?tabs=python
+• GROUNDING SOURCE: https://learn.microsoft.com/en-us/agent-framework/concepts/agents/middleware/?tabs=python</a:t>
             </a:r>
             <a:endParaRPr lang="en-US" dirty="0"/>
           </a:p>
@@ -1141,7 +1143,7 @@
           <a:p>
             <a:r>
               <a:rPr lang="en-US" dirty="0"/>
-              <a:t>• Ask attendees which middleware type would validate Azure DevOps write arguments. The answer is function middleware, with an agent-level policy deciding whether writes are enabled for the run.
+              <a:t>• Chat middleware is the easiest place to accidentally multiply work because it runs per model call. Put cheap rejects outside expensive work. Keep middleware focused so ordering remains auditable.
 • GROUNDING SOURCE: https://learn.microsoft.com/en-us/agent-framework/concepts/agents/middleware/?tabs=python</a:t>
             </a:r>
             <a:endParaRPr lang="en-US" dirty="0"/>
@@ -1166,6 +1168,184 @@
             <a:fld id="{F7021451-1387-4CA6-816F-3879F97B5CBC}" type="slidenum">
               <a:rPr lang="en-US"/>
               <a:t>16</a:t>
+            </a:fld>
+            <a:endParaRPr lang="en-US"/>
+          </a:p>
+        </p:txBody>
+      </p:sp>
+    </p:spTree>
+    <p:extLst>
+      <p:ext uri="{BB962C8B-B14F-4D97-AF65-F5344CB8AC3E}">
+        <p14:creationId xmlns:p14="http://schemas.microsoft.com/office/powerpoint/2010/main" val="1024086991"/>
+      </p:ext>
+    </p:extLst>
+  </p:cSld>
+  <p:clrMapOvr>
+    <a:masterClrMapping/>
+  </p:clrMapOvr>
+</p:notes>
+</file>
+
+<file path=ppt/notesSlides/notesSlide17.xml><?xml version="1.0" encoding="utf-8"?>
+<p:notes xmlns:a="http://schemas.openxmlformats.org/drawingml/2006/main" xmlns:r="http://schemas.openxmlformats.org/officeDocument/2006/relationships" xmlns:p="http://schemas.openxmlformats.org/presentationml/2006/main">
+  <p:cSld>
+    <p:spTree>
+      <p:nvGrpSpPr>
+        <p:cNvPr id="1" name=""/>
+        <p:cNvGrpSpPr/>
+        <p:nvPr/>
+      </p:nvGrpSpPr>
+      <p:grpSpPr>
+        <a:xfrm>
+          <a:off x="0" y="0"/>
+          <a:ext cx="0" cy="0"/>
+          <a:chOff x="0" y="0"/>
+          <a:chExt cx="0" cy="0"/>
+        </a:xfrm>
+      </p:grpSpPr>
+      <p:sp>
+        <p:nvSpPr>
+          <p:cNvPr id="2" name="Slide Image Placeholder 1"/>
+          <p:cNvSpPr>
+            <a:spLocks noGrp="1" noRot="1" noChangeAspect="1"/>
+          </p:cNvSpPr>
+          <p:nvPr>
+            <p:ph type="sldImg"/>
+          </p:nvPr>
+        </p:nvSpPr>
+        <p:spPr/>
+      </p:sp>
+      <p:sp>
+        <p:nvSpPr>
+          <p:cNvPr id="3" name="Notes Placeholder 2"/>
+          <p:cNvSpPr>
+            <a:spLocks noGrp="1"/>
+          </p:cNvSpPr>
+          <p:nvPr>
+            <p:ph type="body" idx="1"/>
+          </p:nvPr>
+        </p:nvSpPr>
+        <p:spPr/>
+        <p:txBody>
+          <a:bodyPr/>
+          <a:lstStyle/>
+          <a:p>
+            <a:r>
+              <a:rPr lang="en-US" dirty="0"/>
+              <a:t>• Clearly separate this experimental awareness item from normal middleware. Agent Hooks provide a standardized fail-closed governance boundary spanning agent, chat, and function stages, including streaming and persistence coordination. Do not make Hooks part of the core lab.
+• GROUNDING SOURCE: https://learn.microsoft.com/en-us/agent-framework/agents/agent-hooks?tabs=python</a:t>
+            </a:r>
+            <a:endParaRPr lang="en-US" dirty="0"/>
+          </a:p>
+        </p:txBody>
+      </p:sp>
+      <p:sp>
+        <p:nvSpPr>
+          <p:cNvPr id="4" name="Slide Number Placeholder 3"/>
+          <p:cNvSpPr>
+            <a:spLocks noGrp="1"/>
+          </p:cNvSpPr>
+          <p:nvPr>
+            <p:ph type="sldNum" sz="quarter" idx="10"/>
+          </p:nvPr>
+        </p:nvSpPr>
+        <p:spPr/>
+        <p:txBody>
+          <a:bodyPr/>
+          <a:lstStyle/>
+          <a:p>
+            <a:fld id="{F7021451-1387-4CA6-816F-3879F97B5CBC}" type="slidenum">
+              <a:rPr lang="en-US"/>
+              <a:t>17</a:t>
+            </a:fld>
+            <a:endParaRPr lang="en-US"/>
+          </a:p>
+        </p:txBody>
+      </p:sp>
+    </p:spTree>
+    <p:extLst>
+      <p:ext uri="{BB962C8B-B14F-4D97-AF65-F5344CB8AC3E}">
+        <p14:creationId xmlns:p14="http://schemas.microsoft.com/office/powerpoint/2010/main" val="1024086991"/>
+      </p:ext>
+    </p:extLst>
+  </p:cSld>
+  <p:clrMapOvr>
+    <a:masterClrMapping/>
+  </p:clrMapOvr>
+</p:notes>
+</file>
+
+<file path=ppt/notesSlides/notesSlide18.xml><?xml version="1.0" encoding="utf-8"?>
+<p:notes xmlns:a="http://schemas.openxmlformats.org/drawingml/2006/main" xmlns:r="http://schemas.openxmlformats.org/officeDocument/2006/relationships" xmlns:p="http://schemas.openxmlformats.org/presentationml/2006/main">
+  <p:cSld>
+    <p:spTree>
+      <p:nvGrpSpPr>
+        <p:cNvPr id="1" name=""/>
+        <p:cNvGrpSpPr/>
+        <p:nvPr/>
+      </p:nvGrpSpPr>
+      <p:grpSpPr>
+        <a:xfrm>
+          <a:off x="0" y="0"/>
+          <a:ext cx="0" cy="0"/>
+          <a:chOff x="0" y="0"/>
+          <a:chExt cx="0" cy="0"/>
+        </a:xfrm>
+      </p:grpSpPr>
+      <p:sp>
+        <p:nvSpPr>
+          <p:cNvPr id="2" name="Slide Image Placeholder 1"/>
+          <p:cNvSpPr>
+            <a:spLocks noGrp="1" noRot="1" noChangeAspect="1"/>
+          </p:cNvSpPr>
+          <p:nvPr>
+            <p:ph type="sldImg"/>
+          </p:nvPr>
+        </p:nvSpPr>
+        <p:spPr/>
+      </p:sp>
+      <p:sp>
+        <p:nvSpPr>
+          <p:cNvPr id="3" name="Notes Placeholder 2"/>
+          <p:cNvSpPr>
+            <a:spLocks noGrp="1"/>
+          </p:cNvSpPr>
+          <p:nvPr>
+            <p:ph type="body" idx="1"/>
+          </p:nvPr>
+        </p:nvSpPr>
+        <p:spPr/>
+        <p:txBody>
+          <a:bodyPr/>
+          <a:lstStyle/>
+          <a:p>
+            <a:r>
+              <a:rPr lang="en-US" dirty="0"/>
+              <a:t>• Ask attendees which middleware type would validate Azure DevOps write arguments. The answer is function middleware, with an agent-level policy deciding whether writes are enabled for the run.
+• GROUNDING SOURCE: https://learn.microsoft.com/en-us/agent-framework/concepts/agents/middleware/?tabs=python</a:t>
+            </a:r>
+            <a:endParaRPr lang="en-US" dirty="0"/>
+          </a:p>
+        </p:txBody>
+      </p:sp>
+      <p:sp>
+        <p:nvSpPr>
+          <p:cNvPr id="4" name="Slide Number Placeholder 3"/>
+          <p:cNvSpPr>
+            <a:spLocks noGrp="1"/>
+          </p:cNvSpPr>
+          <p:nvPr>
+            <p:ph type="sldNum" sz="quarter" idx="10"/>
+          </p:nvPr>
+        </p:nvSpPr>
+        <p:spPr/>
+        <p:txBody>
+          <a:bodyPr/>
+          <a:lstStyle/>
+          <a:p>
+            <a:fld id="{F7021451-1387-4CA6-816F-3879F97B5CBC}" type="slidenum">
+              <a:rPr lang="en-US"/>
+              <a:t>18</a:t>
             </a:fld>
             <a:endParaRPr lang="en-US"/>
           </a:p>
@@ -1230,8 +1410,8 @@
           <a:p>
             <a:r>
               <a:rPr lang="en-US" dirty="0"/>
-              <a:t>• This frequency model drives both correctness and cost. Agent middleware runs once around a run. Function middleware runs for every invoked tool. Chat middleware runs for every model request, including tool-loop follow-ups.
-• GROUNDING SOURCE: https://learn.microsoft.com/en-us/agent-framework/concepts/agents/middleware/?tabs=python</a:t>
+              <a:t>• Mechanism for cross-cutting concerns. Agent-level middleware wraps run-level middleware.
+• GROUNDING SOURCE: https://learn.microsoft.com/en-us/agent-framework/concepts/agents/middleware/?tabs=python&amp;pivots=programming-language-python</a:t>
             </a:r>
             <a:endParaRPr lang="en-US" dirty="0"/>
           </a:p>
@@ -1319,8 +1499,8 @@
           <a:p>
             <a:r>
               <a:rPr lang="en-US" dirty="0"/>
-              <a:t>• Agent-level controls are persistent and outermost. Run-level middleware is request-specific and sits inside agent-level middleware. Use run scope for diagnostics or policy variations that truly belong to one request.
-• GROUNDING SOURCE: https://learn.microsoft.com/en-us/agent-framework/concepts/agents/middleware/agent-vs-run-scope?tabs=python</a:t>
+              <a:t>• This frequency model drives both correctness and cost. Agent middleware runs once around a run. Function middleware runs for every invoked tool. Chat middleware runs for every model request, including tool-loop follow-ups.
+• GROUNDING SOURCE: https://learn.microsoft.com/en-us/agent-framework/concepts/agents/middleware/?tabs=python</a:t>
             </a:r>
             <a:endParaRPr lang="en-US" dirty="0"/>
           </a:p>
@@ -1408,8 +1588,8 @@
           <a:p>
             <a:r>
               <a:rPr lang="en-US" dirty="0"/>
-              <a:t>• Read the documented order left to right and then back out. With A1, A2 and R1, R2: A1 enters first and exits last. The innermost component is the agent execution.
-• GROUNDING SOURCE: https://learn.microsoft.com/en-us/agent-framework/concepts/agents/middleware/?tabs=python</a:t>
+              <a:t>• Agent-level controls are persistent and outermost. Run-level middleware is request-specific and sits inside agent-level middleware. Use run scope for diagnostics or policy variations that truly belong to one request.
+• GROUNDING SOURCE: https://learn.microsoft.com/en-us/agent-framework/concepts/agents/middleware/agent-vs-run-scope?tabs=python</a:t>
             </a:r>
             <a:endParaRPr lang="en-US" dirty="0"/>
           </a:p>
@@ -1497,8 +1677,8 @@
           <a:p>
             <a:r>
               <a:rPr lang="en-US" dirty="0"/>
-              <a:t>• Placeholder marker slide — the runbook has full narration, setup, and fallback plan. Runs agent_and_run_level_middleware.py as-is.
-• GROUNDING SOURCE: https://github.com/microsoft/agent-framework/blob/main/python/samples/02-agents/middleware/agent_and_run_level_middleware.py</a:t>
+              <a:t>• Agent-level controls are persistent and outermost. Run-level middleware is request-specific and sits inside agent-level middleware. Use run scope for diagnostics or policy variations that truly belong to one request.
+• GROUNDING SOURCE: https://learn.microsoft.com/en-us/agent-framework/concepts/agents/middleware/agent-vs-run-scope?tabs=python</a:t>
             </a:r>
             <a:endParaRPr lang="en-US" dirty="0"/>
           </a:p>
@@ -1586,8 +1766,8 @@
           <a:p>
             <a:r>
               <a:rPr lang="en-US" dirty="0"/>
-              <a:t>• Use metadata for request-scoped coordination such as a correlation ID or start timestamp. Choose collision-resistant keys and do not put secrets or durable session state there.
-• GROUNDING SOURCE: https://learn.microsoft.com/en-us/agent-framework/concepts/agents/middleware/shared-state?tabs=python</a:t>
+              <a:t>• Read the documented order left to right and then back out. With A1, A2 and R1, R2: A1 enters first and exits last. The innermost component is the agent execution.
+• GROUNDING SOURCE: https://learn.microsoft.com/en-us/agent-framework/concepts/agents/middleware/?tabs=python</a:t>
             </a:r>
             <a:endParaRPr lang="en-US" dirty="0"/>
           </a:p>
@@ -1675,8 +1855,8 @@
           <a:p>
             <a:r>
               <a:rPr lang="en-US" dirty="0"/>
-              <a:t>• The shared context is mutated directly; call_next takes no context argument. A try/finally ensures timing is emitted when downstream execution fails.
-• GROUNDING SOURCE: https://learn.microsoft.com/en-us/agent-framework/concepts/agents/middleware/defining-middleware?tabs=python</a:t>
+              <a:t>• Placeholder marker slide — the runbook has full narration, setup, and fallback plan. Runs agent_and_run_level_middleware.py as-is.
+• GROUNDING SOURCE: https://github.com/microsoft/agent-framework/blob/main/python/samples/02-agents/middleware/agent_and_run_level_middleware.py</a:t>
             </a:r>
             <a:endParaRPr lang="en-US" dirty="0"/>
           </a:p>
@@ -1764,8 +1944,8 @@
           <a:p>
             <a:r>
               <a:rPr lang="en-US" dirty="0"/>
-              <a:t>• The safe termination contract has two actions: set context.result to the response you want returned, then raise MiddlewareTermination. Do not simply return and assume the run is terminated.
-• GROUNDING SOURCE: https://learn.microsoft.com/en-us/agent-framework/concepts/agents/middleware/termination?tabs=python</a:t>
+              <a:t>• Use metadata for request-scoped coordination such as a correlation ID or start timestamp. Choose collision-resistant keys and do not put secrets or durable session state there.
+• GROUNDING SOURCE: https://learn.microsoft.com/en-us/agent-framework/concepts/agents/middleware/shared-state?tabs=python</a:t>
             </a:r>
             <a:endParaRPr lang="en-US" dirty="0"/>
           </a:p>
@@ -1853,8 +2033,8 @@
           <a:p>
             <a:r>
               <a:rPr lang="en-US" dirty="0"/>
-              <a:t>• Keep this conceptual rather than inventing policy logic. The exact AgentResponse construction is in the official sample; the invariant is context.result before MiddlewareTermination if the caller should receive a custom response.
-• GROUNDING SOURCE: https://learn.microsoft.com/en-us/agent-framework/concepts/agents/middleware/termination?tabs=python</a:t>
+              <a:t>• The shared context is mutated directly; call_next takes no context argument. A try/finally ensures timing is emitted when downstream execution fails.
+• GROUNDING SOURCE: https://learn.microsoft.com/en-us/agent-framework/concepts/agents/middleware/defining-middleware?tabs=python</a:t>
             </a:r>
             <a:endParaRPr lang="en-US" dirty="0"/>
           </a:p>
@@ -2461,7 +2641,7 @@
     <p:bg>
       <p:bgPr>
         <a:solidFill>
-          <a:srgbClr val="CADCFC"/>
+          <a:srgbClr val="FFFFFF"/>
         </a:solidFill>
       </p:bgPr>
     </p:bg>
@@ -2488,7 +2668,7 @@
         <p:spPr>
           <a:xfrm>
             <a:off x="0" y="0"/>
-            <a:ext cx="146304" cy="5143500"/>
+            <a:ext cx="54864" cy="5143500"/>
           </a:xfrm>
           <a:prstGeom prst="rect">
             <a:avLst/>
@@ -2507,8 +2687,137 @@
         </p:nvSpPr>
         <p:spPr>
           <a:xfrm>
-            <a:off x="5669280" y="274320"/>
-            <a:ext cx="3291840" cy="274320"/>
+            <a:off x="5486400" y="256032"/>
+            <a:ext cx="3337560" cy="228600"/>
+          </a:xfrm>
+          <a:prstGeom prst="rect">
+            <a:avLst/>
+          </a:prstGeom>
+          <a:noFill/>
+          <a:ln/>
+        </p:spPr>
+        <p:txBody>
+          <a:bodyPr wrap="square" lIns="0" tIns="0" rIns="0" bIns="0" rtlCol="0" anchor="ctr">
+            <a:normAutofit/>
+          </a:bodyPr>
+          <a:lstStyle/>
+          <a:p>
+            <a:pPr algn="r" indent="0" marL="0">
+              <a:buNone/>
+            </a:pPr>
+            <a:r>
+              <a:rPr lang="en-US" sz="950" dirty="0">
+                <a:solidFill>
+                  <a:srgbClr val="6B7280"/>
+                </a:solidFill>
+                <a:latin typeface="Calibri" pitchFamily="34" charset="0"/>
+                <a:ea typeface="Calibri" pitchFamily="34" charset="-122"/>
+                <a:cs typeface="Calibri" pitchFamily="34" charset="-120"/>
+              </a:rPr>
+              <a:t>Day 3 · Module 4</a:t>
+            </a:r>
+            <a:endParaRPr lang="en-US" sz="950" dirty="0"/>
+          </a:p>
+        </p:txBody>
+      </p:sp>
+      <p:sp>
+        <p:nvSpPr>
+          <p:cNvPr id="4" name="Text 2"/>
+          <p:cNvSpPr/>
+          <p:nvPr/>
+        </p:nvSpPr>
+        <p:spPr>
+          <a:xfrm>
+            <a:off x="365760" y="310896"/>
+            <a:ext cx="6583680" cy="603504"/>
+          </a:xfrm>
+          <a:prstGeom prst="rect">
+            <a:avLst/>
+          </a:prstGeom>
+          <a:noFill/>
+          <a:ln/>
+        </p:spPr>
+        <p:txBody>
+          <a:bodyPr wrap="square" lIns="0" tIns="0" rIns="0" bIns="0" rtlCol="0" anchor="ctr">
+            <a:normAutofit/>
+          </a:bodyPr>
+          <a:lstStyle/>
+          <a:p>
+            <a:pPr indent="0" marL="0">
+              <a:buNone/>
+            </a:pPr>
+            <a:r>
+              <a:rPr lang="en-US" sz="2800" b="1" dirty="0">
+                <a:solidFill>
+                  <a:srgbClr val="1E2761"/>
+                </a:solidFill>
+                <a:latin typeface="Calibri" pitchFamily="34" charset="0"/>
+                <a:ea typeface="Calibri" pitchFamily="34" charset="-122"/>
+                <a:cs typeface="Calibri" pitchFamily="34" charset="-120"/>
+              </a:rPr>
+              <a:t>Guardrails can short-circuit</a:t>
+            </a:r>
+            <a:endParaRPr lang="en-US" sz="2800" dirty="0"/>
+          </a:p>
+        </p:txBody>
+      </p:sp>
+      <p:sp>
+        <p:nvSpPr>
+          <p:cNvPr id="5" name="Shape 3"/>
+          <p:cNvSpPr/>
+          <p:nvPr/>
+        </p:nvSpPr>
+        <p:spPr>
+          <a:xfrm>
+            <a:off x="365760" y="1216152"/>
+            <a:ext cx="1911096" cy="2148840"/>
+          </a:xfrm>
+          <a:prstGeom prst="roundRect">
+            <a:avLst>
+              <a:gd name="adj" fmla="val 2871"/>
+            </a:avLst>
+          </a:prstGeom>
+          <a:solidFill>
+            <a:srgbClr val="CADCFC"/>
+          </a:solidFill>
+          <a:ln w="10160">
+            <a:solidFill>
+              <a:srgbClr val="1E2761"/>
+            </a:solidFill>
+            <a:prstDash val="solid"/>
+          </a:ln>
+        </p:spPr>
+      </p:sp>
+      <p:sp>
+        <p:nvSpPr>
+          <p:cNvPr id="6" name="Shape 4"/>
+          <p:cNvSpPr/>
+          <p:nvPr/>
+        </p:nvSpPr>
+        <p:spPr>
+          <a:xfrm>
+            <a:off x="475488" y="1335024"/>
+            <a:ext cx="320040" cy="320040"/>
+          </a:xfrm>
+          <a:prstGeom prst="ellipse">
+            <a:avLst/>
+          </a:prstGeom>
+          <a:solidFill>
+            <a:srgbClr val="1E2761"/>
+          </a:solidFill>
+          <a:ln/>
+        </p:spPr>
+      </p:sp>
+      <p:sp>
+        <p:nvSpPr>
+          <p:cNvPr id="7" name="Text 5"/>
+          <p:cNvSpPr/>
+          <p:nvPr/>
+        </p:nvSpPr>
+        <p:spPr>
+          <a:xfrm>
+            <a:off x="475488" y="1385316"/>
+            <a:ext cx="320040" cy="146304"/>
           </a:xfrm>
           <a:prstGeom prst="rect">
             <a:avLst/>
@@ -2520,34 +2829,183 @@
           <a:bodyPr wrap="square" lIns="0" tIns="0" rIns="0" bIns="0" rtlCol="0" anchor="ctr"/>
           <a:lstStyle/>
           <a:p>
-            <a:pPr algn="r" indent="0" marL="0">
-              <a:buNone/>
-            </a:pPr>
-            <a:r>
-              <a:rPr lang="en-US" sz="1000" dirty="0">
-                <a:solidFill>
-                  <a:srgbClr val="6B7280"/>
-                </a:solidFill>
-                <a:latin typeface="Calibri" pitchFamily="34" charset="0"/>
-                <a:ea typeface="Calibri" pitchFamily="34" charset="-122"/>
-                <a:cs typeface="Calibri" pitchFamily="34" charset="-120"/>
-              </a:rPr>
-              <a:t>Day 3 · Module 4 · Demo</a:t>
-            </a:r>
-            <a:endParaRPr lang="en-US" sz="1000" dirty="0"/>
-          </a:p>
-        </p:txBody>
-      </p:sp>
-      <p:sp>
-        <p:nvSpPr>
-          <p:cNvPr id="4" name="Text 2"/>
-          <p:cNvSpPr/>
-          <p:nvPr/>
-        </p:nvSpPr>
-        <p:spPr>
-          <a:xfrm>
-            <a:off x="548640" y="1051560"/>
-            <a:ext cx="5486400" cy="502920"/>
+            <a:pPr algn="ctr" indent="0" marL="0">
+              <a:buNone/>
+            </a:pPr>
+            <a:r>
+              <a:rPr lang="en-US" sz="900" b="1" dirty="0">
+                <a:solidFill>
+                  <a:srgbClr val="FFFFFF"/>
+                </a:solidFill>
+                <a:latin typeface="Calibri" pitchFamily="34" charset="0"/>
+                <a:ea typeface="Calibri" pitchFamily="34" charset="-122"/>
+                <a:cs typeface="Calibri" pitchFamily="34" charset="-120"/>
+              </a:rPr>
+              <a:t>1</a:t>
+            </a:r>
+            <a:endParaRPr lang="en-US" sz="900" dirty="0"/>
+          </a:p>
+        </p:txBody>
+      </p:sp>
+      <p:sp>
+        <p:nvSpPr>
+          <p:cNvPr id="8" name="Text 6"/>
+          <p:cNvSpPr/>
+          <p:nvPr/>
+        </p:nvSpPr>
+        <p:spPr>
+          <a:xfrm>
+            <a:off x="896112" y="1335024"/>
+            <a:ext cx="1252728" cy="310896"/>
+          </a:xfrm>
+          <a:prstGeom prst="rect">
+            <a:avLst/>
+          </a:prstGeom>
+          <a:noFill/>
+          <a:ln/>
+        </p:spPr>
+        <p:txBody>
+          <a:bodyPr wrap="square" lIns="0" tIns="0" rIns="0" bIns="0" rtlCol="0" anchor="ctr">
+            <a:normAutofit/>
+          </a:bodyPr>
+          <a:lstStyle/>
+          <a:p>
+            <a:pPr indent="0" marL="0">
+              <a:buNone/>
+            </a:pPr>
+            <a:r>
+              <a:rPr lang="en-US" sz="1500" b="1" dirty="0">
+                <a:solidFill>
+                  <a:srgbClr val="1E2761"/>
+                </a:solidFill>
+                <a:latin typeface="Calibri" pitchFamily="34" charset="0"/>
+                <a:ea typeface="Calibri" pitchFamily="34" charset="-122"/>
+                <a:cs typeface="Calibri" pitchFamily="34" charset="-120"/>
+              </a:rPr>
+              <a:t>Inspect</a:t>
+            </a:r>
+            <a:endParaRPr lang="en-US" sz="1500" dirty="0"/>
+          </a:p>
+        </p:txBody>
+      </p:sp>
+      <p:sp>
+        <p:nvSpPr>
+          <p:cNvPr id="9" name="Text 7"/>
+          <p:cNvSpPr/>
+          <p:nvPr/>
+        </p:nvSpPr>
+        <p:spPr>
+          <a:xfrm>
+            <a:off x="512064" y="1719072"/>
+            <a:ext cx="1618488" cy="1527048"/>
+          </a:xfrm>
+          <a:prstGeom prst="rect">
+            <a:avLst/>
+          </a:prstGeom>
+          <a:noFill/>
+          <a:ln/>
+        </p:spPr>
+        <p:txBody>
+          <a:bodyPr wrap="square" lIns="0" tIns="0" rIns="0" bIns="0" rtlCol="0" anchor="t">
+            <a:normAutofit/>
+          </a:bodyPr>
+          <a:lstStyle/>
+          <a:p>
+            <a:pPr indent="0" marL="0">
+              <a:buNone/>
+            </a:pPr>
+            <a:r>
+              <a:rPr lang="en-US" sz="1150" dirty="0">
+                <a:solidFill>
+                  <a:srgbClr val="212121"/>
+                </a:solidFill>
+                <a:latin typeface="Calibri" pitchFamily="34" charset="0"/>
+                <a:ea typeface="Calibri" pitchFamily="34" charset="-122"/>
+                <a:cs typeface="Calibri" pitchFamily="34" charset="-120"/>
+              </a:rPr>
+              <a:t>Evaluate request, identity, quota, or policy</a:t>
+            </a:r>
+            <a:endParaRPr lang="en-US" sz="1150" dirty="0"/>
+          </a:p>
+        </p:txBody>
+      </p:sp>
+      <p:sp>
+        <p:nvSpPr>
+          <p:cNvPr id="10" name="Shape 8"/>
+          <p:cNvSpPr/>
+          <p:nvPr/>
+        </p:nvSpPr>
+        <p:spPr>
+          <a:xfrm>
+            <a:off x="2313432" y="2180844"/>
+            <a:ext cx="164592" cy="219456"/>
+          </a:xfrm>
+          <a:prstGeom prst="chevron">
+            <a:avLst/>
+          </a:prstGeom>
+          <a:solidFill>
+            <a:srgbClr val="E8A87C"/>
+          </a:solidFill>
+          <a:ln/>
+        </p:spPr>
+      </p:sp>
+      <p:sp>
+        <p:nvSpPr>
+          <p:cNvPr id="11" name="Shape 9"/>
+          <p:cNvSpPr/>
+          <p:nvPr/>
+        </p:nvSpPr>
+        <p:spPr>
+          <a:xfrm>
+            <a:off x="2532888" y="1216152"/>
+            <a:ext cx="1911096" cy="2148840"/>
+          </a:xfrm>
+          <a:prstGeom prst="roundRect">
+            <a:avLst>
+              <a:gd name="adj" fmla="val 2871"/>
+            </a:avLst>
+          </a:prstGeom>
+          <a:solidFill>
+            <a:srgbClr val="F3F4F6"/>
+          </a:solidFill>
+          <a:ln w="10160">
+            <a:solidFill>
+              <a:srgbClr val="D1D5DB"/>
+            </a:solidFill>
+            <a:prstDash val="solid"/>
+          </a:ln>
+        </p:spPr>
+      </p:sp>
+      <p:sp>
+        <p:nvSpPr>
+          <p:cNvPr id="12" name="Shape 10"/>
+          <p:cNvSpPr/>
+          <p:nvPr/>
+        </p:nvSpPr>
+        <p:spPr>
+          <a:xfrm>
+            <a:off x="2642616" y="1335024"/>
+            <a:ext cx="320040" cy="320040"/>
+          </a:xfrm>
+          <a:prstGeom prst="ellipse">
+            <a:avLst/>
+          </a:prstGeom>
+          <a:solidFill>
+            <a:srgbClr val="1E2761"/>
+          </a:solidFill>
+          <a:ln/>
+        </p:spPr>
+      </p:sp>
+      <p:sp>
+        <p:nvSpPr>
+          <p:cNvPr id="13" name="Text 11"/>
+          <p:cNvSpPr/>
+          <p:nvPr/>
+        </p:nvSpPr>
+        <p:spPr>
+          <a:xfrm>
+            <a:off x="2642616" y="1385316"/>
+            <a:ext cx="320040" cy="146304"/>
           </a:xfrm>
           <a:prstGeom prst="rect">
             <a:avLst/>
@@ -2559,11 +3017,52 @@
           <a:bodyPr wrap="square" lIns="0" tIns="0" rIns="0" bIns="0" rtlCol="0" anchor="ctr"/>
           <a:lstStyle/>
           <a:p>
+            <a:pPr algn="ctr" indent="0" marL="0">
+              <a:buNone/>
+            </a:pPr>
+            <a:r>
+              <a:rPr lang="en-US" sz="900" b="1" dirty="0">
+                <a:solidFill>
+                  <a:srgbClr val="FFFFFF"/>
+                </a:solidFill>
+                <a:latin typeface="Calibri" pitchFamily="34" charset="0"/>
+                <a:ea typeface="Calibri" pitchFamily="34" charset="-122"/>
+                <a:cs typeface="Calibri" pitchFamily="34" charset="-120"/>
+              </a:rPr>
+              <a:t>2</a:t>
+            </a:r>
+            <a:endParaRPr lang="en-US" sz="900" dirty="0"/>
+          </a:p>
+        </p:txBody>
+      </p:sp>
+      <p:sp>
+        <p:nvSpPr>
+          <p:cNvPr id="14" name="Text 12"/>
+          <p:cNvSpPr/>
+          <p:nvPr/>
+        </p:nvSpPr>
+        <p:spPr>
+          <a:xfrm>
+            <a:off x="3063240" y="1335024"/>
+            <a:ext cx="1252728" cy="310896"/>
+          </a:xfrm>
+          <a:prstGeom prst="rect">
+            <a:avLst/>
+          </a:prstGeom>
+          <a:noFill/>
+          <a:ln/>
+        </p:spPr>
+        <p:txBody>
+          <a:bodyPr wrap="square" lIns="0" tIns="0" rIns="0" bIns="0" rtlCol="0" anchor="ctr">
+            <a:normAutofit/>
+          </a:bodyPr>
+          <a:lstStyle/>
+          <a:p>
             <a:pPr indent="0" marL="0">
               <a:buNone/>
             </a:pPr>
             <a:r>
-              <a:rPr lang="en-US" sz="3200" b="1" spc="800" kern="0" dirty="0">
+              <a:rPr lang="en-US" sz="1500" b="1" dirty="0">
                 <a:solidFill>
                   <a:srgbClr val="1E2761"/>
                 </a:solidFill>
@@ -2571,22 +3070,130 @@
                 <a:ea typeface="Calibri" pitchFamily="34" charset="-122"/>
                 <a:cs typeface="Calibri" pitchFamily="34" charset="-120"/>
               </a:rPr>
-              <a:t>DEMO</a:t>
-            </a:r>
-            <a:endParaRPr lang="en-US" sz="3200" dirty="0"/>
-          </a:p>
-        </p:txBody>
-      </p:sp>
-      <p:sp>
-        <p:nvSpPr>
-          <p:cNvPr id="5" name="Text 3"/>
-          <p:cNvSpPr/>
-          <p:nvPr/>
-        </p:nvSpPr>
-        <p:spPr>
-          <a:xfrm>
-            <a:off x="548640" y="1691640"/>
-            <a:ext cx="8046720" cy="914400"/>
+              <a:t>Allow</a:t>
+            </a:r>
+            <a:endParaRPr lang="en-US" sz="1500" dirty="0"/>
+          </a:p>
+        </p:txBody>
+      </p:sp>
+      <p:sp>
+        <p:nvSpPr>
+          <p:cNvPr id="15" name="Text 13"/>
+          <p:cNvSpPr/>
+          <p:nvPr/>
+        </p:nvSpPr>
+        <p:spPr>
+          <a:xfrm>
+            <a:off x="2679192" y="1719072"/>
+            <a:ext cx="1618488" cy="1527048"/>
+          </a:xfrm>
+          <a:prstGeom prst="rect">
+            <a:avLst/>
+          </a:prstGeom>
+          <a:noFill/>
+          <a:ln/>
+        </p:spPr>
+        <p:txBody>
+          <a:bodyPr wrap="square" lIns="0" tIns="0" rIns="0" bIns="0" rtlCol="0" anchor="t">
+            <a:normAutofit/>
+          </a:bodyPr>
+          <a:lstStyle/>
+          <a:p>
+            <a:pPr indent="0" marL="0">
+              <a:buNone/>
+            </a:pPr>
+            <a:r>
+              <a:rPr lang="en-US" sz="1150" dirty="0">
+                <a:solidFill>
+                  <a:srgbClr val="212121"/>
+                </a:solidFill>
+                <a:latin typeface="Calibri" pitchFamily="34" charset="0"/>
+                <a:ea typeface="Calibri" pitchFamily="34" charset="-122"/>
+                <a:cs typeface="Calibri" pitchFamily="34" charset="-120"/>
+              </a:rPr>
+              <a:t>Await call_next() when the request is permitted</a:t>
+            </a:r>
+            <a:endParaRPr lang="en-US" sz="1150" dirty="0"/>
+          </a:p>
+        </p:txBody>
+      </p:sp>
+      <p:sp>
+        <p:nvSpPr>
+          <p:cNvPr id="16" name="Shape 14"/>
+          <p:cNvSpPr/>
+          <p:nvPr/>
+        </p:nvSpPr>
+        <p:spPr>
+          <a:xfrm>
+            <a:off x="4480560" y="2180844"/>
+            <a:ext cx="164592" cy="219456"/>
+          </a:xfrm>
+          <a:prstGeom prst="chevron">
+            <a:avLst/>
+          </a:prstGeom>
+          <a:solidFill>
+            <a:srgbClr val="E8A87C"/>
+          </a:solidFill>
+          <a:ln/>
+        </p:spPr>
+      </p:sp>
+      <p:sp>
+        <p:nvSpPr>
+          <p:cNvPr id="17" name="Shape 15"/>
+          <p:cNvSpPr/>
+          <p:nvPr/>
+        </p:nvSpPr>
+        <p:spPr>
+          <a:xfrm>
+            <a:off x="4700016" y="1216152"/>
+            <a:ext cx="1911096" cy="2148840"/>
+          </a:xfrm>
+          <a:prstGeom prst="roundRect">
+            <a:avLst>
+              <a:gd name="adj" fmla="val 2871"/>
+            </a:avLst>
+          </a:prstGeom>
+          <a:solidFill>
+            <a:srgbClr val="F3F4F6"/>
+          </a:solidFill>
+          <a:ln w="10160">
+            <a:solidFill>
+              <a:srgbClr val="D1D5DB"/>
+            </a:solidFill>
+            <a:prstDash val="solid"/>
+          </a:ln>
+        </p:spPr>
+      </p:sp>
+      <p:sp>
+        <p:nvSpPr>
+          <p:cNvPr id="18" name="Shape 16"/>
+          <p:cNvSpPr/>
+          <p:nvPr/>
+        </p:nvSpPr>
+        <p:spPr>
+          <a:xfrm>
+            <a:off x="4809744" y="1335024"/>
+            <a:ext cx="320040" cy="320040"/>
+          </a:xfrm>
+          <a:prstGeom prst="ellipse">
+            <a:avLst/>
+          </a:prstGeom>
+          <a:solidFill>
+            <a:srgbClr val="1E2761"/>
+          </a:solidFill>
+          <a:ln/>
+        </p:spPr>
+      </p:sp>
+      <p:sp>
+        <p:nvSpPr>
+          <p:cNvPr id="19" name="Text 17"/>
+          <p:cNvSpPr/>
+          <p:nvPr/>
+        </p:nvSpPr>
+        <p:spPr>
+          <a:xfrm>
+            <a:off x="4809744" y="1385316"/>
+            <a:ext cx="320040" cy="146304"/>
           </a:xfrm>
           <a:prstGeom prst="rect">
             <a:avLst/>
@@ -2598,11 +3205,52 @@
           <a:bodyPr wrap="square" lIns="0" tIns="0" rIns="0" bIns="0" rtlCol="0" anchor="ctr"/>
           <a:lstStyle/>
           <a:p>
+            <a:pPr algn="ctr" indent="0" marL="0">
+              <a:buNone/>
+            </a:pPr>
+            <a:r>
+              <a:rPr lang="en-US" sz="900" b="1" dirty="0">
+                <a:solidFill>
+                  <a:srgbClr val="FFFFFF"/>
+                </a:solidFill>
+                <a:latin typeface="Calibri" pitchFamily="34" charset="0"/>
+                <a:ea typeface="Calibri" pitchFamily="34" charset="-122"/>
+                <a:cs typeface="Calibri" pitchFamily="34" charset="-120"/>
+              </a:rPr>
+              <a:t>3</a:t>
+            </a:r>
+            <a:endParaRPr lang="en-US" sz="900" dirty="0"/>
+          </a:p>
+        </p:txBody>
+      </p:sp>
+      <p:sp>
+        <p:nvSpPr>
+          <p:cNvPr id="20" name="Text 18"/>
+          <p:cNvSpPr/>
+          <p:nvPr/>
+        </p:nvSpPr>
+        <p:spPr>
+          <a:xfrm>
+            <a:off x="5230368" y="1335024"/>
+            <a:ext cx="1252728" cy="310896"/>
+          </a:xfrm>
+          <a:prstGeom prst="rect">
+            <a:avLst/>
+          </a:prstGeom>
+          <a:noFill/>
+          <a:ln/>
+        </p:spPr>
+        <p:txBody>
+          <a:bodyPr wrap="square" lIns="0" tIns="0" rIns="0" bIns="0" rtlCol="0" anchor="ctr">
+            <a:normAutofit/>
+          </a:bodyPr>
+          <a:lstStyle/>
+          <a:p>
             <a:pPr indent="0" marL="0">
               <a:buNone/>
             </a:pPr>
             <a:r>
-              <a:rPr lang="en-US" sz="3000" b="1" dirty="0">
+              <a:rPr lang="en-US" sz="1500" b="1" dirty="0">
                 <a:solidFill>
                   <a:srgbClr val="1E2761"/>
                 </a:solidFill>
@@ -2610,22 +3258,130 @@
                 <a:ea typeface="Calibri" pitchFamily="34" charset="-122"/>
                 <a:cs typeface="Calibri" pitchFamily="34" charset="-120"/>
               </a:rPr>
-              <a:t>Guardrail blocks a request, live</a:t>
-            </a:r>
-            <a:endParaRPr lang="en-US" sz="3000" dirty="0"/>
-          </a:p>
-        </p:txBody>
-      </p:sp>
-      <p:sp>
-        <p:nvSpPr>
-          <p:cNvPr id="6" name="Text 4"/>
-          <p:cNvSpPr/>
-          <p:nvPr/>
-        </p:nvSpPr>
-        <p:spPr>
-          <a:xfrm>
-            <a:off x="6583680" y="1051560"/>
-            <a:ext cx="2194560" cy="502920"/>
+              <a:t>Set result</a:t>
+            </a:r>
+            <a:endParaRPr lang="en-US" sz="1500" dirty="0"/>
+          </a:p>
+        </p:txBody>
+      </p:sp>
+      <p:sp>
+        <p:nvSpPr>
+          <p:cNvPr id="21" name="Text 19"/>
+          <p:cNvSpPr/>
+          <p:nvPr/>
+        </p:nvSpPr>
+        <p:spPr>
+          <a:xfrm>
+            <a:off x="4846320" y="1719072"/>
+            <a:ext cx="1618488" cy="1527048"/>
+          </a:xfrm>
+          <a:prstGeom prst="rect">
+            <a:avLst/>
+          </a:prstGeom>
+          <a:noFill/>
+          <a:ln/>
+        </p:spPr>
+        <p:txBody>
+          <a:bodyPr wrap="square" lIns="0" tIns="0" rIns="0" bIns="0" rtlCol="0" anchor="t">
+            <a:normAutofit/>
+          </a:bodyPr>
+          <a:lstStyle/>
+          <a:p>
+            <a:pPr indent="0" marL="0">
+              <a:buNone/>
+            </a:pPr>
+            <a:r>
+              <a:rPr lang="en-US" sz="1150" dirty="0">
+                <a:solidFill>
+                  <a:srgbClr val="212121"/>
+                </a:solidFill>
+                <a:latin typeface="Calibri" pitchFamily="34" charset="0"/>
+                <a:ea typeface="Calibri" pitchFamily="34" charset="-122"/>
+                <a:cs typeface="Calibri" pitchFamily="34" charset="-120"/>
+              </a:rPr>
+              <a:t>Supply a controlled AgentResponse when blocked</a:t>
+            </a:r>
+            <a:endParaRPr lang="en-US" sz="1150" dirty="0"/>
+          </a:p>
+        </p:txBody>
+      </p:sp>
+      <p:sp>
+        <p:nvSpPr>
+          <p:cNvPr id="22" name="Shape 20"/>
+          <p:cNvSpPr/>
+          <p:nvPr/>
+        </p:nvSpPr>
+        <p:spPr>
+          <a:xfrm>
+            <a:off x="6647688" y="2180844"/>
+            <a:ext cx="164592" cy="219456"/>
+          </a:xfrm>
+          <a:prstGeom prst="chevron">
+            <a:avLst/>
+          </a:prstGeom>
+          <a:solidFill>
+            <a:srgbClr val="E8A87C"/>
+          </a:solidFill>
+          <a:ln/>
+        </p:spPr>
+      </p:sp>
+      <p:sp>
+        <p:nvSpPr>
+          <p:cNvPr id="23" name="Shape 21"/>
+          <p:cNvSpPr/>
+          <p:nvPr/>
+        </p:nvSpPr>
+        <p:spPr>
+          <a:xfrm>
+            <a:off x="6867144" y="1216152"/>
+            <a:ext cx="1911096" cy="2148840"/>
+          </a:xfrm>
+          <a:prstGeom prst="roundRect">
+            <a:avLst>
+              <a:gd name="adj" fmla="val 2871"/>
+            </a:avLst>
+          </a:prstGeom>
+          <a:solidFill>
+            <a:srgbClr val="CADCFC"/>
+          </a:solidFill>
+          <a:ln w="10160">
+            <a:solidFill>
+              <a:srgbClr val="1E2761"/>
+            </a:solidFill>
+            <a:prstDash val="solid"/>
+          </a:ln>
+        </p:spPr>
+      </p:sp>
+      <p:sp>
+        <p:nvSpPr>
+          <p:cNvPr id="24" name="Shape 22"/>
+          <p:cNvSpPr/>
+          <p:nvPr/>
+        </p:nvSpPr>
+        <p:spPr>
+          <a:xfrm>
+            <a:off x="6976872" y="1335024"/>
+            <a:ext cx="320040" cy="320040"/>
+          </a:xfrm>
+          <a:prstGeom prst="ellipse">
+            <a:avLst/>
+          </a:prstGeom>
+          <a:solidFill>
+            <a:srgbClr val="1E2761"/>
+          </a:solidFill>
+          <a:ln/>
+        </p:spPr>
+      </p:sp>
+      <p:sp>
+        <p:nvSpPr>
+          <p:cNvPr id="25" name="Text 23"/>
+          <p:cNvSpPr/>
+          <p:nvPr/>
+        </p:nvSpPr>
+        <p:spPr>
+          <a:xfrm>
+            <a:off x="6976872" y="1385316"/>
+            <a:ext cx="320040" cy="146304"/>
           </a:xfrm>
           <a:prstGeom prst="rect">
             <a:avLst/>
@@ -2637,92 +3393,137 @@
           <a:bodyPr wrap="square" lIns="0" tIns="0" rIns="0" bIns="0" rtlCol="0" anchor="ctr"/>
           <a:lstStyle/>
           <a:p>
-            <a:pPr algn="r" indent="0" marL="0">
-              <a:buNone/>
-            </a:pPr>
-            <a:r>
-              <a:rPr lang="en-US" sz="1800" i="1" dirty="0">
-                <a:solidFill>
-                  <a:srgbClr val="6B7280"/>
-                </a:solidFill>
-                <a:latin typeface="Calibri" pitchFamily="34" charset="0"/>
-                <a:ea typeface="Calibri" pitchFamily="34" charset="-122"/>
-                <a:cs typeface="Calibri" pitchFamily="34" charset="-120"/>
-              </a:rPr>
-              <a:t>~4 min</a:t>
-            </a:r>
-            <a:endParaRPr lang="en-US" sz="1800" dirty="0"/>
-          </a:p>
-        </p:txBody>
-      </p:sp>
-      <p:sp>
-        <p:nvSpPr>
-          <p:cNvPr id="7" name="Text 5"/>
-          <p:cNvSpPr/>
-          <p:nvPr/>
-        </p:nvSpPr>
-        <p:spPr>
-          <a:xfrm>
-            <a:off x="548640" y="2788920"/>
-            <a:ext cx="8046720" cy="1371600"/>
-          </a:xfrm>
-          <a:prstGeom prst="rect">
-            <a:avLst/>
-          </a:prstGeom>
-          <a:noFill/>
-          <a:ln/>
-        </p:spPr>
-        <p:txBody>
-          <a:bodyPr wrap="square" lIns="0" tIns="0" rIns="0" bIns="0" rtlCol="0" anchor="ctr"/>
+            <a:pPr algn="ctr" indent="0" marL="0">
+              <a:buNone/>
+            </a:pPr>
+            <a:r>
+              <a:rPr lang="en-US" sz="900" b="1" dirty="0">
+                <a:solidFill>
+                  <a:srgbClr val="FFFFFF"/>
+                </a:solidFill>
+                <a:latin typeface="Calibri" pitchFamily="34" charset="0"/>
+                <a:ea typeface="Calibri" pitchFamily="34" charset="-122"/>
+                <a:cs typeface="Calibri" pitchFamily="34" charset="-120"/>
+              </a:rPr>
+              <a:t>4</a:t>
+            </a:r>
+            <a:endParaRPr lang="en-US" sz="900" dirty="0"/>
+          </a:p>
+        </p:txBody>
+      </p:sp>
+      <p:sp>
+        <p:nvSpPr>
+          <p:cNvPr id="26" name="Text 24"/>
+          <p:cNvSpPr/>
+          <p:nvPr/>
+        </p:nvSpPr>
+        <p:spPr>
+          <a:xfrm>
+            <a:off x="7397496" y="1335024"/>
+            <a:ext cx="1252728" cy="310896"/>
+          </a:xfrm>
+          <a:prstGeom prst="rect">
+            <a:avLst/>
+          </a:prstGeom>
+          <a:noFill/>
+          <a:ln/>
+        </p:spPr>
+        <p:txBody>
+          <a:bodyPr wrap="square" lIns="0" tIns="0" rIns="0" bIns="0" rtlCol="0" anchor="ctr">
+            <a:normAutofit/>
+          </a:bodyPr>
+          <a:lstStyle/>
+          <a:p>
+            <a:pPr indent="0" marL="0">
+              <a:buNone/>
+            </a:pPr>
+            <a:r>
+              <a:rPr lang="en-US" sz="1500" b="1" dirty="0">
+                <a:solidFill>
+                  <a:srgbClr val="1E2761"/>
+                </a:solidFill>
+                <a:latin typeface="Calibri" pitchFamily="34" charset="0"/>
+                <a:ea typeface="Calibri" pitchFamily="34" charset="-122"/>
+                <a:cs typeface="Calibri" pitchFamily="34" charset="-120"/>
+              </a:rPr>
+              <a:t>Raise</a:t>
+            </a:r>
+            <a:endParaRPr lang="en-US" sz="1500" dirty="0"/>
+          </a:p>
+        </p:txBody>
+      </p:sp>
+      <p:sp>
+        <p:nvSpPr>
+          <p:cNvPr id="27" name="Text 25"/>
+          <p:cNvSpPr/>
+          <p:nvPr/>
+        </p:nvSpPr>
+        <p:spPr>
+          <a:xfrm>
+            <a:off x="7013448" y="1719072"/>
+            <a:ext cx="1618488" cy="1527048"/>
+          </a:xfrm>
+          <a:prstGeom prst="rect">
+            <a:avLst/>
+          </a:prstGeom>
+          <a:noFill/>
+          <a:ln/>
+        </p:spPr>
+        <p:txBody>
+          <a:bodyPr wrap="square" lIns="0" tIns="0" rIns="0" bIns="0" rtlCol="0" anchor="t">
+            <a:normAutofit/>
+          </a:bodyPr>
+          <a:lstStyle/>
+          <a:p>
+            <a:pPr indent="0" marL="0">
+              <a:buNone/>
+            </a:pPr>
+            <a:r>
+              <a:rPr lang="en-US" sz="1150" dirty="0">
+                <a:solidFill>
+                  <a:srgbClr val="212121"/>
+                </a:solidFill>
+                <a:latin typeface="Calibri" pitchFamily="34" charset="0"/>
+                <a:ea typeface="Calibri" pitchFamily="34" charset="-122"/>
+                <a:cs typeface="Calibri" pitchFamily="34" charset="-120"/>
+              </a:rPr>
+              <a:t>MiddlewareTermination ends the pipeline deliberately</a:t>
+            </a:r>
+            <a:endParaRPr lang="en-US" sz="1150" dirty="0"/>
+          </a:p>
+        </p:txBody>
+      </p:sp>
+      <p:sp>
+        <p:nvSpPr>
+          <p:cNvPr id="28" name="Text 26"/>
+          <p:cNvSpPr/>
+          <p:nvPr/>
+        </p:nvSpPr>
+        <p:spPr>
+          <a:xfrm>
+            <a:off x="365760" y="4131818"/>
+            <a:ext cx="8412480" cy="577342"/>
+          </a:xfrm>
+          <a:prstGeom prst="rect">
+            <a:avLst/>
+          </a:prstGeom>
+          <a:noFill/>
+          <a:ln/>
+        </p:spPr>
+        <p:txBody>
+          <a:bodyPr wrap="square" lIns="0" tIns="0" rIns="0" bIns="0" rtlCol="0" anchor="t">
+            <a:normAutofit/>
+          </a:bodyPr>
           <a:lstStyle/>
           <a:p>
             <a:pPr indent="0" marL="0">
               <a:spcAft>
-                <a:spcPts val="600"/>
+                <a:spcPts val="800"/>
               </a:spcAft>
               <a:buNone/>
             </a:pPr>
             <a:r>
-              <a:rPr lang="en-US" sz="1600" dirty="0">
-                <a:solidFill>
-                  <a:srgbClr val="212121"/>
-                </a:solidFill>
-                <a:latin typeface="Calibri" pitchFamily="34" charset="0"/>
-                <a:ea typeface="Calibri" pitchFamily="34" charset="-122"/>
-                <a:cs typeface="Calibri" pitchFamily="34" charset="-120"/>
-              </a:rPr>
-              <a:t>Run the official atr_validation_middleware.py sample live: a benign query passes through normally, then a query matching a deny-list rule is blocked before the tool executes — context.result set, MiddlewareTermination raised, exactly as the previous slide's code shows.</a:t>
-            </a:r>
-            <a:endParaRPr lang="en-US" sz="1600" dirty="0"/>
-          </a:p>
-        </p:txBody>
-      </p:sp>
-      <p:sp>
-        <p:nvSpPr>
-          <p:cNvPr id="8" name="Text 6"/>
-          <p:cNvSpPr/>
-          <p:nvPr/>
-        </p:nvSpPr>
-        <p:spPr>
-          <a:xfrm>
-            <a:off x="548640" y="4434840"/>
-            <a:ext cx="8046720" cy="320040"/>
-          </a:xfrm>
-          <a:prstGeom prst="rect">
-            <a:avLst/>
-          </a:prstGeom>
-          <a:noFill/>
-          <a:ln/>
-        </p:spPr>
-        <p:txBody>
-          <a:bodyPr wrap="square" lIns="0" tIns="0" rIns="0" bIns="0" rtlCol="0" anchor="ctr"/>
-          <a:lstStyle/>
-          <a:p>
-            <a:pPr indent="0" marL="0">
-              <a:buNone/>
-            </a:pPr>
-            <a:r>
-              <a:rPr lang="en-US" sz="1100" i="1" dirty="0">
+              <a:rPr lang="en-US" sz="1300" dirty="0">
                 <a:solidFill>
                   <a:srgbClr val="6B7280"/>
                 </a:solidFill>
@@ -2730,15 +3531,15 @@
                 <a:ea typeface="Calibri" pitchFamily="34" charset="-122"/>
                 <a:cs typeface="Calibri" pitchFamily="34" charset="-120"/>
               </a:rPr>
-              <a:t>Runbook: demos/day3/module-4-demo-2-guardrail-termination.md</a:t>
-            </a:r>
-            <a:endParaRPr lang="en-US" sz="1100" dirty="0"/>
-          </a:p>
-        </p:txBody>
-      </p:sp>
-      <p:sp>
-        <p:nvSpPr>
-          <p:cNvPr id="9" name="Shape 7"/>
+              <a:t>In Python, middleware stops execution by setting context.result when needed and raising MiddlewareTermination, or by short-circuiting the chain without calling call_next()</a:t>
+            </a:r>
+            <a:endParaRPr lang="en-US" sz="1300" dirty="0"/>
+          </a:p>
+        </p:txBody>
+      </p:sp>
+      <p:sp>
+        <p:nvSpPr>
+          <p:cNvPr id="29" name="Shape 27"/>
           <p:cNvSpPr/>
           <p:nvPr/>
         </p:nvSpPr>
@@ -2761,7 +3562,7 @@
       </p:sp>
       <p:sp>
         <p:nvSpPr>
-          <p:cNvPr id="10" name="Text 8"/>
+          <p:cNvPr id="30" name="Text 28"/>
           <p:cNvSpPr/>
           <p:nvPr/>
         </p:nvSpPr>
@@ -2794,7 +3595,7 @@
                 <a:ea typeface="Calibri" pitchFamily="34" charset="-122"/>
                 <a:cs typeface="Calibri" pitchFamily="34" charset="-120"/>
               </a:rPr>
-              <a:t>Source: https://github.com/microsoft/agent-framework/blob/main/python/samples/02-agents/middleware/atr_validation_middleware.py</a:t>
+              <a:t>Source: https://learn.microsoft.com/en-us/agent-framework/concepts/agents/middleware/termination?tabs=python</a:t>
             </a:r>
             <a:endParaRPr lang="en-US" sz="820" dirty="0"/>
           </a:p>
@@ -2920,6 +3721,826 @@
               <a:buNone/>
             </a:pPr>
             <a:r>
+              <a:rPr lang="en-US" sz="2800" b="1" dirty="0">
+                <a:solidFill>
+                  <a:srgbClr val="1E2761"/>
+                </a:solidFill>
+                <a:latin typeface="Calibri" pitchFamily="34" charset="0"/>
+                <a:ea typeface="Calibri" pitchFamily="34" charset="-122"/>
+                <a:cs typeface="Calibri" pitchFamily="34" charset="-120"/>
+              </a:rPr>
+              <a:t>Termination has an explicit result</a:t>
+            </a:r>
+            <a:endParaRPr lang="en-US" sz="2800" dirty="0"/>
+          </a:p>
+        </p:txBody>
+      </p:sp>
+      <p:sp>
+        <p:nvSpPr>
+          <p:cNvPr id="5" name="Shape 3"/>
+          <p:cNvSpPr/>
+          <p:nvPr/>
+        </p:nvSpPr>
+        <p:spPr>
+          <a:xfrm>
+            <a:off x="365760" y="1115568"/>
+            <a:ext cx="8412480" cy="1929384"/>
+          </a:xfrm>
+          <a:prstGeom prst="rect">
+            <a:avLst/>
+          </a:prstGeom>
+          <a:solidFill>
+            <a:srgbClr val="1D1E22"/>
+          </a:solidFill>
+          <a:ln w="9525">
+            <a:solidFill>
+              <a:srgbClr val="2A2B2E"/>
+            </a:solidFill>
+            <a:prstDash val="solid"/>
+          </a:ln>
+        </p:spPr>
+      </p:sp>
+      <p:sp>
+        <p:nvSpPr>
+          <p:cNvPr id="6" name="Text 4"/>
+          <p:cNvSpPr/>
+          <p:nvPr/>
+        </p:nvSpPr>
+        <p:spPr>
+          <a:xfrm>
+            <a:off x="502920" y="1207008"/>
+            <a:ext cx="8138160" cy="1746504"/>
+          </a:xfrm>
+          <a:prstGeom prst="rect">
+            <a:avLst/>
+          </a:prstGeom>
+          <a:noFill/>
+          <a:ln/>
+        </p:spPr>
+        <p:txBody>
+          <a:bodyPr wrap="square" lIns="0" tIns="0" rIns="0" bIns="0" rtlCol="0" anchor="t">
+            <a:normAutofit/>
+          </a:bodyPr>
+          <a:lstStyle/>
+          <a:p>
+            <a:pPr indent="0" marL="0">
+              <a:buNone/>
+            </a:pPr>
+            <a:r>
+              <a:rPr lang="en-US" sz="1280" dirty="0">
+                <a:solidFill>
+                  <a:srgbClr val="A996B6"/>
+                </a:solidFill>
+                <a:latin typeface="Consolas" pitchFamily="34" charset="0"/>
+                <a:ea typeface="Consolas" pitchFamily="34" charset="-122"/>
+                <a:cs typeface="Consolas" pitchFamily="34" charset="-120"/>
+              </a:rPr>
+              <a:t>if</a:t>
+            </a:r>
+            <a:pPr indent="0" marL="0">
+              <a:buNone/>
+            </a:pPr>
+            <a:r>
+              <a:rPr lang="en-US" sz="1280" dirty="0">
+                <a:solidFill>
+                  <a:srgbClr val="FFFFFF"/>
+                </a:solidFill>
+                <a:latin typeface="Consolas" pitchFamily="34" charset="0"/>
+                <a:ea typeface="Consolas" pitchFamily="34" charset="-122"/>
+                <a:cs typeface="Consolas" pitchFamily="34" charset="-120"/>
+              </a:rPr>
+              <a:t> blocked(context.messages):</a:t>
+            </a:r>
+            <a:endParaRPr lang="en-US" sz="1280" dirty="0"/>
+          </a:p>
+          <a:p>
+            <a:pPr indent="0" marL="0">
+              <a:buNone/>
+            </a:pPr>
+            <a:r>
+              <a:rPr lang="en-US" sz="1280" dirty="0">
+                <a:solidFill>
+                  <a:srgbClr val="FFFFFF"/>
+                </a:solidFill>
+                <a:latin typeface="Consolas" pitchFamily="34" charset="0"/>
+                <a:ea typeface="Consolas" pitchFamily="34" charset="-122"/>
+                <a:cs typeface="Consolas" pitchFamily="34" charset="-120"/>
+              </a:rPr>
+              <a:t>    context.result = AgentResponse(</a:t>
+            </a:r>
+            <a:endParaRPr lang="en-US" sz="1280" dirty="0"/>
+          </a:p>
+          <a:p>
+            <a:pPr indent="0" marL="0">
+              <a:buNone/>
+            </a:pPr>
+            <a:r>
+              <a:rPr lang="en-US" sz="1280" dirty="0">
+                <a:solidFill>
+                  <a:srgbClr val="FFFFFF"/>
+                </a:solidFill>
+                <a:latin typeface="Consolas" pitchFamily="34" charset="0"/>
+                <a:ea typeface="Consolas" pitchFamily="34" charset="-122"/>
+                <a:cs typeface="Consolas" pitchFamily="34" charset="-120"/>
+              </a:rPr>
+              <a:t>        messages=[Message(</a:t>
+            </a:r>
+            <a:pPr indent="0" marL="0">
+              <a:buNone/>
+            </a:pPr>
+            <a:r>
+              <a:rPr lang="en-US" sz="1280" dirty="0">
+                <a:solidFill>
+                  <a:srgbClr val="E4C98A"/>
+                </a:solidFill>
+                <a:latin typeface="Consolas" pitchFamily="34" charset="0"/>
+                <a:ea typeface="Consolas" pitchFamily="34" charset="-122"/>
+                <a:cs typeface="Consolas" pitchFamily="34" charset="-120"/>
+              </a:rPr>
+              <a:t>"assistant"</a:t>
+            </a:r>
+            <a:pPr indent="0" marL="0">
+              <a:buNone/>
+            </a:pPr>
+            <a:r>
+              <a:rPr lang="en-US" sz="1280" dirty="0">
+                <a:solidFill>
+                  <a:srgbClr val="FFFFFF"/>
+                </a:solidFill>
+                <a:latin typeface="Consolas" pitchFamily="34" charset="0"/>
+                <a:ea typeface="Consolas" pitchFamily="34" charset="-122"/>
+                <a:cs typeface="Consolas" pitchFamily="34" charset="-120"/>
+              </a:rPr>
+              <a:t>, [</a:t>
+            </a:r>
+            <a:pPr indent="0" marL="0">
+              <a:buNone/>
+            </a:pPr>
+            <a:r>
+              <a:rPr lang="en-US" sz="1280" dirty="0">
+                <a:solidFill>
+                  <a:srgbClr val="E4C98A"/>
+                </a:solidFill>
+                <a:latin typeface="Consolas" pitchFamily="34" charset="0"/>
+                <a:ea typeface="Consolas" pitchFamily="34" charset="-122"/>
+                <a:cs typeface="Consolas" pitchFamily="34" charset="-120"/>
+              </a:rPr>
+              <a:t>"I can't process this request."</a:t>
+            </a:r>
+            <a:pPr indent="0" marL="0">
+              <a:buNone/>
+            </a:pPr>
+            <a:r>
+              <a:rPr lang="en-US" sz="1280" dirty="0">
+                <a:solidFill>
+                  <a:srgbClr val="FFFFFF"/>
+                </a:solidFill>
+                <a:latin typeface="Consolas" pitchFamily="34" charset="0"/>
+                <a:ea typeface="Consolas" pitchFamily="34" charset="-122"/>
+                <a:cs typeface="Consolas" pitchFamily="34" charset="-120"/>
+              </a:rPr>
+              <a:t>])]</a:t>
+            </a:r>
+            <a:endParaRPr lang="en-US" sz="1280" dirty="0"/>
+          </a:p>
+          <a:p>
+            <a:pPr indent="0" marL="0">
+              <a:buNone/>
+            </a:pPr>
+            <a:r>
+              <a:rPr lang="en-US" sz="1280" dirty="0">
+                <a:solidFill>
+                  <a:srgbClr val="FFFFFF"/>
+                </a:solidFill>
+                <a:latin typeface="Consolas" pitchFamily="34" charset="0"/>
+                <a:ea typeface="Consolas" pitchFamily="34" charset="-122"/>
+                <a:cs typeface="Consolas" pitchFamily="34" charset="-120"/>
+              </a:rPr>
+              <a:t>    )</a:t>
+            </a:r>
+            <a:endParaRPr lang="en-US" sz="1280" dirty="0"/>
+          </a:p>
+          <a:p>
+            <a:pPr indent="0" marL="0">
+              <a:buNone/>
+            </a:pPr>
+            <a:r>
+              <a:rPr lang="en-US" sz="1280" dirty="0">
+                <a:solidFill>
+                  <a:srgbClr val="FFFFFF"/>
+                </a:solidFill>
+                <a:latin typeface="Consolas" pitchFamily="34" charset="0"/>
+                <a:ea typeface="Consolas" pitchFamily="34" charset="-122"/>
+                <a:cs typeface="Consolas" pitchFamily="34" charset="-120"/>
+              </a:rPr>
+              <a:t>    </a:t>
+            </a:r>
+            <a:pPr indent="0" marL="0">
+              <a:buNone/>
+            </a:pPr>
+            <a:r>
+              <a:rPr lang="en-US" sz="1280" dirty="0">
+                <a:solidFill>
+                  <a:srgbClr val="A996B6"/>
+                </a:solidFill>
+                <a:latin typeface="Consolas" pitchFamily="34" charset="0"/>
+                <a:ea typeface="Consolas" pitchFamily="34" charset="-122"/>
+                <a:cs typeface="Consolas" pitchFamily="34" charset="-120"/>
+              </a:rPr>
+              <a:t>raise</a:t>
+            </a:r>
+            <a:pPr indent="0" marL="0">
+              <a:buNone/>
+            </a:pPr>
+            <a:r>
+              <a:rPr lang="en-US" sz="1280" dirty="0">
+                <a:solidFill>
+                  <a:srgbClr val="FFFFFF"/>
+                </a:solidFill>
+                <a:latin typeface="Consolas" pitchFamily="34" charset="0"/>
+                <a:ea typeface="Consolas" pitchFamily="34" charset="-122"/>
+                <a:cs typeface="Consolas" pitchFamily="34" charset="-120"/>
+              </a:rPr>
+              <a:t> MiddlewareTermination()</a:t>
+            </a:r>
+            <a:endParaRPr lang="en-US" sz="1280" dirty="0"/>
+          </a:p>
+          <a:p>
+            <a:pPr indent="0" marL="0">
+              <a:buNone/>
+            </a:pPr>
+            <a:endParaRPr lang="en-US" sz="1280" dirty="0"/>
+          </a:p>
+          <a:p>
+            <a:pPr indent="0" marL="0">
+              <a:buNone/>
+            </a:pPr>
+            <a:r>
+              <a:rPr lang="en-US" sz="1280" dirty="0">
+                <a:solidFill>
+                  <a:srgbClr val="A996B6"/>
+                </a:solidFill>
+                <a:latin typeface="Consolas" pitchFamily="34" charset="0"/>
+                <a:ea typeface="Consolas" pitchFamily="34" charset="-122"/>
+                <a:cs typeface="Consolas" pitchFamily="34" charset="-120"/>
+              </a:rPr>
+              <a:t>await</a:t>
+            </a:r>
+            <a:pPr indent="0" marL="0">
+              <a:buNone/>
+            </a:pPr>
+            <a:r>
+              <a:rPr lang="en-US" sz="1280" dirty="0">
+                <a:solidFill>
+                  <a:srgbClr val="FFFFFF"/>
+                </a:solidFill>
+                <a:latin typeface="Consolas" pitchFamily="34" charset="0"/>
+                <a:ea typeface="Consolas" pitchFamily="34" charset="-122"/>
+                <a:cs typeface="Consolas" pitchFamily="34" charset="-120"/>
+              </a:rPr>
+              <a:t> call_next()</a:t>
+            </a:r>
+            <a:endParaRPr lang="en-US" sz="1280" dirty="0"/>
+          </a:p>
+        </p:txBody>
+      </p:sp>
+      <p:sp>
+        <p:nvSpPr>
+          <p:cNvPr id="7" name="Shape 5"/>
+          <p:cNvSpPr/>
+          <p:nvPr/>
+        </p:nvSpPr>
+        <p:spPr>
+          <a:xfrm>
+            <a:off x="365760" y="4773168"/>
+            <a:ext cx="8412480" cy="0"/>
+          </a:xfrm>
+          <a:prstGeom prst="line">
+            <a:avLst/>
+          </a:prstGeom>
+          <a:noFill/>
+          <a:ln w="6350">
+            <a:solidFill>
+              <a:srgbClr val="D1D5DB"/>
+            </a:solidFill>
+            <a:prstDash val="solid"/>
+          </a:ln>
+        </p:spPr>
+      </p:sp>
+      <p:sp>
+        <p:nvSpPr>
+          <p:cNvPr id="8" name="Text 6"/>
+          <p:cNvSpPr/>
+          <p:nvPr/>
+        </p:nvSpPr>
+        <p:spPr>
+          <a:xfrm>
+            <a:off x="384048" y="4818888"/>
+            <a:ext cx="8275320" cy="182880"/>
+          </a:xfrm>
+          <a:prstGeom prst="rect">
+            <a:avLst/>
+          </a:prstGeom>
+          <a:noFill/>
+          <a:ln/>
+        </p:spPr>
+        <p:txBody>
+          <a:bodyPr wrap="square" lIns="0" tIns="0" rIns="0" bIns="0" rtlCol="0" anchor="ctr">
+            <a:normAutofit/>
+          </a:bodyPr>
+          <a:lstStyle/>
+          <a:p>
+            <a:pPr indent="0" marL="0">
+              <a:buNone/>
+            </a:pPr>
+            <a:r>
+              <a:rPr lang="en-US" sz="820" dirty="0">
+                <a:solidFill>
+                  <a:srgbClr val="6B7280"/>
+                </a:solidFill>
+                <a:latin typeface="Calibri" pitchFamily="34" charset="0"/>
+                <a:ea typeface="Calibri" pitchFamily="34" charset="-122"/>
+                <a:cs typeface="Calibri" pitchFamily="34" charset="-120"/>
+              </a:rPr>
+              <a:t>Source: https://learn.microsoft.com/en-us/agent-framework/concepts/agents/middleware/termination?tabs=python</a:t>
+            </a:r>
+            <a:endParaRPr lang="en-US" sz="820" dirty="0"/>
+          </a:p>
+        </p:txBody>
+      </p:sp>
+    </p:spTree>
+  </p:cSld>
+  <p:clrMapOvr>
+    <a:masterClrMapping/>
+  </p:clrMapOvr>
+</p:sld>
+</file>
+
+<file path=ppt/slides/slide12.xml><?xml version="1.0" encoding="utf-8"?>
+<p:sld xmlns:a="http://schemas.openxmlformats.org/drawingml/2006/main" xmlns:r="http://schemas.openxmlformats.org/officeDocument/2006/relationships" xmlns:p="http://schemas.openxmlformats.org/presentationml/2006/main">
+  <p:cSld name="Slide 12">
+    <p:bg>
+      <p:bgPr>
+        <a:solidFill>
+          <a:srgbClr val="CADCFC"/>
+        </a:solidFill>
+      </p:bgPr>
+    </p:bg>
+    <p:spTree>
+      <p:nvGrpSpPr>
+        <p:cNvPr id="1" name=""/>
+        <p:cNvGrpSpPr/>
+        <p:nvPr/>
+      </p:nvGrpSpPr>
+      <p:grpSpPr>
+        <a:xfrm>
+          <a:off x="0" y="0"/>
+          <a:ext cx="0" cy="0"/>
+          <a:chOff x="0" y="0"/>
+          <a:chExt cx="0" cy="0"/>
+        </a:xfrm>
+      </p:grpSpPr>
+      <p:sp>
+        <p:nvSpPr>
+          <p:cNvPr id="2" name="Shape 0"/>
+          <p:cNvSpPr/>
+          <p:nvPr/>
+        </p:nvSpPr>
+        <p:spPr>
+          <a:xfrm>
+            <a:off x="0" y="0"/>
+            <a:ext cx="146304" cy="5143500"/>
+          </a:xfrm>
+          <a:prstGeom prst="rect">
+            <a:avLst/>
+          </a:prstGeom>
+          <a:solidFill>
+            <a:srgbClr val="1E2761"/>
+          </a:solidFill>
+          <a:ln/>
+        </p:spPr>
+      </p:sp>
+      <p:sp>
+        <p:nvSpPr>
+          <p:cNvPr id="3" name="Text 1"/>
+          <p:cNvSpPr/>
+          <p:nvPr/>
+        </p:nvSpPr>
+        <p:spPr>
+          <a:xfrm>
+            <a:off x="5669280" y="274320"/>
+            <a:ext cx="3291840" cy="274320"/>
+          </a:xfrm>
+          <a:prstGeom prst="rect">
+            <a:avLst/>
+          </a:prstGeom>
+          <a:noFill/>
+          <a:ln/>
+        </p:spPr>
+        <p:txBody>
+          <a:bodyPr wrap="square" lIns="0" tIns="0" rIns="0" bIns="0" rtlCol="0" anchor="ctr"/>
+          <a:lstStyle/>
+          <a:p>
+            <a:pPr algn="r" indent="0" marL="0">
+              <a:buNone/>
+            </a:pPr>
+            <a:r>
+              <a:rPr lang="en-US" sz="1000" dirty="0">
+                <a:solidFill>
+                  <a:srgbClr val="6B7280"/>
+                </a:solidFill>
+                <a:latin typeface="Calibri" pitchFamily="34" charset="0"/>
+                <a:ea typeface="Calibri" pitchFamily="34" charset="-122"/>
+                <a:cs typeface="Calibri" pitchFamily="34" charset="-120"/>
+              </a:rPr>
+              <a:t>Day 3 · Module 4 · Demo</a:t>
+            </a:r>
+            <a:endParaRPr lang="en-US" sz="1000" dirty="0"/>
+          </a:p>
+        </p:txBody>
+      </p:sp>
+      <p:sp>
+        <p:nvSpPr>
+          <p:cNvPr id="4" name="Text 2"/>
+          <p:cNvSpPr/>
+          <p:nvPr/>
+        </p:nvSpPr>
+        <p:spPr>
+          <a:xfrm>
+            <a:off x="548640" y="1051560"/>
+            <a:ext cx="5486400" cy="502920"/>
+          </a:xfrm>
+          <a:prstGeom prst="rect">
+            <a:avLst/>
+          </a:prstGeom>
+          <a:noFill/>
+          <a:ln/>
+        </p:spPr>
+        <p:txBody>
+          <a:bodyPr wrap="square" lIns="0" tIns="0" rIns="0" bIns="0" rtlCol="0" anchor="ctr"/>
+          <a:lstStyle/>
+          <a:p>
+            <a:pPr indent="0" marL="0">
+              <a:buNone/>
+            </a:pPr>
+            <a:r>
+              <a:rPr lang="en-US" sz="3200" b="1" spc="800" kern="0" dirty="0">
+                <a:solidFill>
+                  <a:srgbClr val="1E2761"/>
+                </a:solidFill>
+                <a:latin typeface="Calibri" pitchFamily="34" charset="0"/>
+                <a:ea typeface="Calibri" pitchFamily="34" charset="-122"/>
+                <a:cs typeface="Calibri" pitchFamily="34" charset="-120"/>
+              </a:rPr>
+              <a:t>DEMO</a:t>
+            </a:r>
+            <a:endParaRPr lang="en-US" sz="3200" dirty="0"/>
+          </a:p>
+        </p:txBody>
+      </p:sp>
+      <p:sp>
+        <p:nvSpPr>
+          <p:cNvPr id="5" name="Text 3"/>
+          <p:cNvSpPr/>
+          <p:nvPr/>
+        </p:nvSpPr>
+        <p:spPr>
+          <a:xfrm>
+            <a:off x="548640" y="1691640"/>
+            <a:ext cx="8046720" cy="914400"/>
+          </a:xfrm>
+          <a:prstGeom prst="rect">
+            <a:avLst/>
+          </a:prstGeom>
+          <a:noFill/>
+          <a:ln/>
+        </p:spPr>
+        <p:txBody>
+          <a:bodyPr wrap="square" lIns="0" tIns="0" rIns="0" bIns="0" rtlCol="0" anchor="ctr"/>
+          <a:lstStyle/>
+          <a:p>
+            <a:pPr indent="0" marL="0">
+              <a:buNone/>
+            </a:pPr>
+            <a:r>
+              <a:rPr lang="en-US" sz="3000" b="1" dirty="0">
+                <a:solidFill>
+                  <a:srgbClr val="1E2761"/>
+                </a:solidFill>
+                <a:latin typeface="Calibri" pitchFamily="34" charset="0"/>
+                <a:ea typeface="Calibri" pitchFamily="34" charset="-122"/>
+                <a:cs typeface="Calibri" pitchFamily="34" charset="-120"/>
+              </a:rPr>
+              <a:t>Guardrail blocks a request, live</a:t>
+            </a:r>
+            <a:endParaRPr lang="en-US" sz="3000" dirty="0"/>
+          </a:p>
+        </p:txBody>
+      </p:sp>
+      <p:sp>
+        <p:nvSpPr>
+          <p:cNvPr id="6" name="Text 4"/>
+          <p:cNvSpPr/>
+          <p:nvPr/>
+        </p:nvSpPr>
+        <p:spPr>
+          <a:xfrm>
+            <a:off x="6583680" y="1051560"/>
+            <a:ext cx="2194560" cy="502920"/>
+          </a:xfrm>
+          <a:prstGeom prst="rect">
+            <a:avLst/>
+          </a:prstGeom>
+          <a:noFill/>
+          <a:ln/>
+        </p:spPr>
+        <p:txBody>
+          <a:bodyPr wrap="square" lIns="0" tIns="0" rIns="0" bIns="0" rtlCol="0" anchor="ctr"/>
+          <a:lstStyle/>
+          <a:p>
+            <a:pPr algn="r" indent="0" marL="0">
+              <a:buNone/>
+            </a:pPr>
+            <a:r>
+              <a:rPr lang="en-US" sz="1800" i="1" dirty="0">
+                <a:solidFill>
+                  <a:srgbClr val="6B7280"/>
+                </a:solidFill>
+                <a:latin typeface="Calibri" pitchFamily="34" charset="0"/>
+                <a:ea typeface="Calibri" pitchFamily="34" charset="-122"/>
+                <a:cs typeface="Calibri" pitchFamily="34" charset="-120"/>
+              </a:rPr>
+              <a:t>~4 min</a:t>
+            </a:r>
+            <a:endParaRPr lang="en-US" sz="1800" dirty="0"/>
+          </a:p>
+        </p:txBody>
+      </p:sp>
+      <p:sp>
+        <p:nvSpPr>
+          <p:cNvPr id="7" name="Text 5"/>
+          <p:cNvSpPr/>
+          <p:nvPr/>
+        </p:nvSpPr>
+        <p:spPr>
+          <a:xfrm>
+            <a:off x="548640" y="2788920"/>
+            <a:ext cx="8046720" cy="1371600"/>
+          </a:xfrm>
+          <a:prstGeom prst="rect">
+            <a:avLst/>
+          </a:prstGeom>
+          <a:noFill/>
+          <a:ln/>
+        </p:spPr>
+        <p:txBody>
+          <a:bodyPr wrap="square" lIns="0" tIns="0" rIns="0" bIns="0" rtlCol="0" anchor="ctr"/>
+          <a:lstStyle/>
+          <a:p>
+            <a:pPr indent="0" marL="0">
+              <a:spcAft>
+                <a:spcPts val="600"/>
+              </a:spcAft>
+              <a:buNone/>
+            </a:pPr>
+            <a:r>
+              <a:rPr lang="en-US" sz="1600" dirty="0">
+                <a:solidFill>
+                  <a:srgbClr val="212121"/>
+                </a:solidFill>
+                <a:latin typeface="Calibri" pitchFamily="34" charset="0"/>
+                <a:ea typeface="Calibri" pitchFamily="34" charset="-122"/>
+                <a:cs typeface="Calibri" pitchFamily="34" charset="-120"/>
+              </a:rPr>
+              <a:t>Run the official atr_validation_middleware.py sample live: a benign query passes through normally, then a query matching a deny-list rule is blocked before the tool executes — context.result set, MiddlewareTermination raised, exactly as the previous slide's code shows.</a:t>
+            </a:r>
+            <a:endParaRPr lang="en-US" sz="1600" dirty="0"/>
+          </a:p>
+        </p:txBody>
+      </p:sp>
+      <p:sp>
+        <p:nvSpPr>
+          <p:cNvPr id="8" name="Text 6"/>
+          <p:cNvSpPr/>
+          <p:nvPr/>
+        </p:nvSpPr>
+        <p:spPr>
+          <a:xfrm>
+            <a:off x="548640" y="4434840"/>
+            <a:ext cx="8046720" cy="320040"/>
+          </a:xfrm>
+          <a:prstGeom prst="rect">
+            <a:avLst/>
+          </a:prstGeom>
+          <a:noFill/>
+          <a:ln/>
+        </p:spPr>
+        <p:txBody>
+          <a:bodyPr wrap="square" lIns="0" tIns="0" rIns="0" bIns="0" rtlCol="0" anchor="ctr"/>
+          <a:lstStyle/>
+          <a:p>
+            <a:pPr indent="0" marL="0">
+              <a:buNone/>
+            </a:pPr>
+            <a:r>
+              <a:rPr lang="en-US" sz="1100" i="1" dirty="0">
+                <a:solidFill>
+                  <a:srgbClr val="6B7280"/>
+                </a:solidFill>
+                <a:latin typeface="Calibri" pitchFamily="34" charset="0"/>
+                <a:ea typeface="Calibri" pitchFamily="34" charset="-122"/>
+                <a:cs typeface="Calibri" pitchFamily="34" charset="-120"/>
+              </a:rPr>
+              <a:t>Runbook: demos/day3/module-4-demo-2-guardrail-termination.md</a:t>
+            </a:r>
+            <a:endParaRPr lang="en-US" sz="1100" dirty="0"/>
+          </a:p>
+        </p:txBody>
+      </p:sp>
+      <p:sp>
+        <p:nvSpPr>
+          <p:cNvPr id="9" name="Shape 7"/>
+          <p:cNvSpPr/>
+          <p:nvPr/>
+        </p:nvSpPr>
+        <p:spPr>
+          <a:xfrm>
+            <a:off x="365760" y="4773168"/>
+            <a:ext cx="8412480" cy="0"/>
+          </a:xfrm>
+          <a:prstGeom prst="line">
+            <a:avLst/>
+          </a:prstGeom>
+          <a:noFill/>
+          <a:ln w="6350">
+            <a:solidFill>
+              <a:srgbClr val="D1D5DB"/>
+            </a:solidFill>
+            <a:prstDash val="solid"/>
+          </a:ln>
+        </p:spPr>
+      </p:sp>
+      <p:sp>
+        <p:nvSpPr>
+          <p:cNvPr id="10" name="Text 8"/>
+          <p:cNvSpPr/>
+          <p:nvPr/>
+        </p:nvSpPr>
+        <p:spPr>
+          <a:xfrm>
+            <a:off x="384048" y="4818888"/>
+            <a:ext cx="8275320" cy="182880"/>
+          </a:xfrm>
+          <a:prstGeom prst="rect">
+            <a:avLst/>
+          </a:prstGeom>
+          <a:noFill/>
+          <a:ln/>
+        </p:spPr>
+        <p:txBody>
+          <a:bodyPr wrap="square" lIns="0" tIns="0" rIns="0" bIns="0" rtlCol="0" anchor="ctr">
+            <a:normAutofit/>
+          </a:bodyPr>
+          <a:lstStyle/>
+          <a:p>
+            <a:pPr indent="0" marL="0">
+              <a:buNone/>
+            </a:pPr>
+            <a:r>
+              <a:rPr lang="en-US" sz="820" dirty="0">
+                <a:solidFill>
+                  <a:srgbClr val="6B7280"/>
+                </a:solidFill>
+                <a:latin typeface="Calibri" pitchFamily="34" charset="0"/>
+                <a:ea typeface="Calibri" pitchFamily="34" charset="-122"/>
+                <a:cs typeface="Calibri" pitchFamily="34" charset="-120"/>
+              </a:rPr>
+              <a:t>Source: https://github.com/microsoft/agent-framework/blob/main/python/samples/02-agents/middleware/atr_validation_middleware.py</a:t>
+            </a:r>
+            <a:endParaRPr lang="en-US" sz="820" dirty="0"/>
+          </a:p>
+        </p:txBody>
+      </p:sp>
+    </p:spTree>
+  </p:cSld>
+  <p:clrMapOvr>
+    <a:masterClrMapping/>
+  </p:clrMapOvr>
+</p:sld>
+</file>
+
+<file path=ppt/slides/slide13.xml><?xml version="1.0" encoding="utf-8"?>
+<p:sld xmlns:a="http://schemas.openxmlformats.org/drawingml/2006/main" xmlns:r="http://schemas.openxmlformats.org/officeDocument/2006/relationships" xmlns:p="http://schemas.openxmlformats.org/presentationml/2006/main">
+  <p:cSld name="Slide 13">
+    <p:bg>
+      <p:bgPr>
+        <a:solidFill>
+          <a:srgbClr val="FFFFFF"/>
+        </a:solidFill>
+      </p:bgPr>
+    </p:bg>
+    <p:spTree>
+      <p:nvGrpSpPr>
+        <p:cNvPr id="1" name=""/>
+        <p:cNvGrpSpPr/>
+        <p:nvPr/>
+      </p:nvGrpSpPr>
+      <p:grpSpPr>
+        <a:xfrm>
+          <a:off x="0" y="0"/>
+          <a:ext cx="0" cy="0"/>
+          <a:chOff x="0" y="0"/>
+          <a:chExt cx="0" cy="0"/>
+        </a:xfrm>
+      </p:grpSpPr>
+      <p:sp>
+        <p:nvSpPr>
+          <p:cNvPr id="2" name="Shape 0"/>
+          <p:cNvSpPr/>
+          <p:nvPr/>
+        </p:nvSpPr>
+        <p:spPr>
+          <a:xfrm>
+            <a:off x="0" y="0"/>
+            <a:ext cx="54864" cy="5143500"/>
+          </a:xfrm>
+          <a:prstGeom prst="rect">
+            <a:avLst/>
+          </a:prstGeom>
+          <a:solidFill>
+            <a:srgbClr val="1E2761"/>
+          </a:solidFill>
+          <a:ln/>
+        </p:spPr>
+      </p:sp>
+      <p:sp>
+        <p:nvSpPr>
+          <p:cNvPr id="3" name="Text 1"/>
+          <p:cNvSpPr/>
+          <p:nvPr/>
+        </p:nvSpPr>
+        <p:spPr>
+          <a:xfrm>
+            <a:off x="5486400" y="256032"/>
+            <a:ext cx="3337560" cy="228600"/>
+          </a:xfrm>
+          <a:prstGeom prst="rect">
+            <a:avLst/>
+          </a:prstGeom>
+          <a:noFill/>
+          <a:ln/>
+        </p:spPr>
+        <p:txBody>
+          <a:bodyPr wrap="square" lIns="0" tIns="0" rIns="0" bIns="0" rtlCol="0" anchor="ctr">
+            <a:normAutofit/>
+          </a:bodyPr>
+          <a:lstStyle/>
+          <a:p>
+            <a:pPr algn="r" indent="0" marL="0">
+              <a:buNone/>
+            </a:pPr>
+            <a:r>
+              <a:rPr lang="en-US" sz="950" dirty="0">
+                <a:solidFill>
+                  <a:srgbClr val="6B7280"/>
+                </a:solidFill>
+                <a:latin typeface="Calibri" pitchFamily="34" charset="0"/>
+                <a:ea typeface="Calibri" pitchFamily="34" charset="-122"/>
+                <a:cs typeface="Calibri" pitchFamily="34" charset="-120"/>
+              </a:rPr>
+              <a:t>Day 3 · Module 4</a:t>
+            </a:r>
+            <a:endParaRPr lang="en-US" sz="950" dirty="0"/>
+          </a:p>
+        </p:txBody>
+      </p:sp>
+      <p:sp>
+        <p:nvSpPr>
+          <p:cNvPr id="4" name="Text 2"/>
+          <p:cNvSpPr/>
+          <p:nvPr/>
+        </p:nvSpPr>
+        <p:spPr>
+          <a:xfrm>
+            <a:off x="365760" y="310896"/>
+            <a:ext cx="6583680" cy="603504"/>
+          </a:xfrm>
+          <a:prstGeom prst="rect">
+            <a:avLst/>
+          </a:prstGeom>
+          <a:noFill/>
+          <a:ln/>
+        </p:spPr>
+        <p:txBody>
+          <a:bodyPr wrap="square" lIns="0" tIns="0" rIns="0" bIns="0" rtlCol="0" anchor="ctr">
+            <a:normAutofit/>
+          </a:bodyPr>
+          <a:lstStyle/>
+          <a:p>
+            <a:pPr indent="0" marL="0">
+              <a:buNone/>
+            </a:pPr>
+            <a:r>
               <a:rPr lang="en-US" sz="2500" b="1" dirty="0">
                 <a:solidFill>
                   <a:srgbClr val="1E2761"/>
@@ -2936,7 +4557,7 @@
       </p:sp>
       <p:graphicFrame>
         <p:nvGraphicFramePr>
-          <p:cNvPr id="12" name="Table 0"/>
+          <p:cNvPr id="14" name="Table 0"/>
           <p:cNvGraphicFramePr>
             <a:graphicFrameLocks noGrp="1"/>
           </p:cNvGraphicFramePr>
@@ -4067,1126 +5688,6 @@
 </p:sld>
 </file>
 
-<file path=ppt/slides/slide12.xml><?xml version="1.0" encoding="utf-8"?>
-<p:sld xmlns:a="http://schemas.openxmlformats.org/drawingml/2006/main" xmlns:r="http://schemas.openxmlformats.org/officeDocument/2006/relationships" xmlns:p="http://schemas.openxmlformats.org/presentationml/2006/main">
-  <p:cSld name="Slide 12">
-    <p:bg>
-      <p:bgPr>
-        <a:solidFill>
-          <a:srgbClr val="FFFFFF"/>
-        </a:solidFill>
-      </p:bgPr>
-    </p:bg>
-    <p:spTree>
-      <p:nvGrpSpPr>
-        <p:cNvPr id="1" name=""/>
-        <p:cNvGrpSpPr/>
-        <p:nvPr/>
-      </p:nvGrpSpPr>
-      <p:grpSpPr>
-        <a:xfrm>
-          <a:off x="0" y="0"/>
-          <a:ext cx="0" cy="0"/>
-          <a:chOff x="0" y="0"/>
-          <a:chExt cx="0" cy="0"/>
-        </a:xfrm>
-      </p:grpSpPr>
-      <p:sp>
-        <p:nvSpPr>
-          <p:cNvPr id="2" name="Shape 0"/>
-          <p:cNvSpPr/>
-          <p:nvPr/>
-        </p:nvSpPr>
-        <p:spPr>
-          <a:xfrm>
-            <a:off x="0" y="0"/>
-            <a:ext cx="54864" cy="5143500"/>
-          </a:xfrm>
-          <a:prstGeom prst="rect">
-            <a:avLst/>
-          </a:prstGeom>
-          <a:solidFill>
-            <a:srgbClr val="1E2761"/>
-          </a:solidFill>
-          <a:ln/>
-        </p:spPr>
-      </p:sp>
-      <p:sp>
-        <p:nvSpPr>
-          <p:cNvPr id="3" name="Text 1"/>
-          <p:cNvSpPr/>
-          <p:nvPr/>
-        </p:nvSpPr>
-        <p:spPr>
-          <a:xfrm>
-            <a:off x="5486400" y="256032"/>
-            <a:ext cx="3337560" cy="228600"/>
-          </a:xfrm>
-          <a:prstGeom prst="rect">
-            <a:avLst/>
-          </a:prstGeom>
-          <a:noFill/>
-          <a:ln/>
-        </p:spPr>
-        <p:txBody>
-          <a:bodyPr wrap="square" lIns="0" tIns="0" rIns="0" bIns="0" rtlCol="0" anchor="ctr">
-            <a:normAutofit/>
-          </a:bodyPr>
-          <a:lstStyle/>
-          <a:p>
-            <a:pPr algn="r" indent="0" marL="0">
-              <a:buNone/>
-            </a:pPr>
-            <a:r>
-              <a:rPr lang="en-US" sz="950" dirty="0">
-                <a:solidFill>
-                  <a:srgbClr val="6B7280"/>
-                </a:solidFill>
-                <a:latin typeface="Calibri" pitchFamily="34" charset="0"/>
-                <a:ea typeface="Calibri" pitchFamily="34" charset="-122"/>
-                <a:cs typeface="Calibri" pitchFamily="34" charset="-120"/>
-              </a:rPr>
-              <a:t>Day 3 · Module 4</a:t>
-            </a:r>
-            <a:endParaRPr lang="en-US" sz="950" dirty="0"/>
-          </a:p>
-        </p:txBody>
-      </p:sp>
-      <p:sp>
-        <p:nvSpPr>
-          <p:cNvPr id="4" name="Text 2"/>
-          <p:cNvSpPr/>
-          <p:nvPr/>
-        </p:nvSpPr>
-        <p:spPr>
-          <a:xfrm>
-            <a:off x="365760" y="310896"/>
-            <a:ext cx="6583680" cy="603504"/>
-          </a:xfrm>
-          <a:prstGeom prst="rect">
-            <a:avLst/>
-          </a:prstGeom>
-          <a:noFill/>
-          <a:ln/>
-        </p:spPr>
-        <p:txBody>
-          <a:bodyPr wrap="square" lIns="0" tIns="0" rIns="0" bIns="0" rtlCol="0" anchor="ctr">
-            <a:normAutofit/>
-          </a:bodyPr>
-          <a:lstStyle/>
-          <a:p>
-            <a:pPr indent="0" marL="0">
-              <a:buNone/>
-            </a:pPr>
-            <a:r>
-              <a:rPr lang="en-US" sz="2500" b="1" dirty="0">
-                <a:solidFill>
-                  <a:srgbClr val="1E2761"/>
-                </a:solidFill>
-                <a:latin typeface="Calibri" pitchFamily="34" charset="0"/>
-                <a:ea typeface="Calibri" pitchFamily="34" charset="-122"/>
-                <a:cs typeface="Calibri" pitchFamily="34" charset="-120"/>
-              </a:rPr>
-              <a:t>Retry must be bounded and idempotent</a:t>
-            </a:r>
-            <a:endParaRPr lang="en-US" sz="2500" dirty="0"/>
-          </a:p>
-        </p:txBody>
-      </p:sp>
-      <p:sp>
-        <p:nvSpPr>
-          <p:cNvPr id="5" name="Shape 3"/>
-          <p:cNvSpPr/>
-          <p:nvPr/>
-        </p:nvSpPr>
-        <p:spPr>
-          <a:xfrm>
-            <a:off x="365760" y="1078992"/>
-            <a:ext cx="4105656" cy="1655064"/>
-          </a:xfrm>
-          <a:prstGeom prst="roundRect">
-            <a:avLst>
-              <a:gd name="adj" fmla="val 3315"/>
-            </a:avLst>
-          </a:prstGeom>
-          <a:solidFill>
-            <a:srgbClr val="CADCFC"/>
-          </a:solidFill>
-          <a:ln w="10160">
-            <a:solidFill>
-              <a:srgbClr val="1E2761"/>
-            </a:solidFill>
-            <a:prstDash val="solid"/>
-          </a:ln>
-        </p:spPr>
-      </p:sp>
-      <p:sp>
-        <p:nvSpPr>
-          <p:cNvPr id="6" name="Text 4"/>
-          <p:cNvSpPr/>
-          <p:nvPr/>
-        </p:nvSpPr>
-        <p:spPr>
-          <a:xfrm>
-            <a:off x="512064" y="1197864"/>
-            <a:ext cx="3813048" cy="310896"/>
-          </a:xfrm>
-          <a:prstGeom prst="rect">
-            <a:avLst/>
-          </a:prstGeom>
-          <a:noFill/>
-          <a:ln/>
-        </p:spPr>
-        <p:txBody>
-          <a:bodyPr wrap="square" lIns="0" tIns="0" rIns="0" bIns="0" rtlCol="0" anchor="ctr">
-            <a:normAutofit/>
-          </a:bodyPr>
-          <a:lstStyle/>
-          <a:p>
-            <a:pPr indent="0" marL="0">
-              <a:buNone/>
-            </a:pPr>
-            <a:r>
-              <a:rPr lang="en-US" sz="1500" b="1" dirty="0">
-                <a:solidFill>
-                  <a:srgbClr val="1E2761"/>
-                </a:solidFill>
-                <a:latin typeface="Calibri" pitchFamily="34" charset="0"/>
-                <a:ea typeface="Calibri" pitchFamily="34" charset="-122"/>
-                <a:cs typeface="Calibri" pitchFamily="34" charset="-120"/>
-              </a:rPr>
-              <a:t>Classify</a:t>
-            </a:r>
-            <a:endParaRPr lang="en-US" sz="1500" dirty="0"/>
-          </a:p>
-        </p:txBody>
-      </p:sp>
-      <p:sp>
-        <p:nvSpPr>
-          <p:cNvPr id="7" name="Text 5"/>
-          <p:cNvSpPr/>
-          <p:nvPr/>
-        </p:nvSpPr>
-        <p:spPr>
-          <a:xfrm>
-            <a:off x="512064" y="1581912"/>
-            <a:ext cx="3813048" cy="1033272"/>
-          </a:xfrm>
-          <a:prstGeom prst="rect">
-            <a:avLst/>
-          </a:prstGeom>
-          <a:noFill/>
-          <a:ln/>
-        </p:spPr>
-        <p:txBody>
-          <a:bodyPr wrap="square" lIns="0" tIns="0" rIns="0" bIns="0" rtlCol="0" anchor="t">
-            <a:normAutofit/>
-          </a:bodyPr>
-          <a:lstStyle/>
-          <a:p>
-            <a:pPr indent="0" marL="0">
-              <a:buNone/>
-            </a:pPr>
-            <a:r>
-              <a:rPr lang="en-US" sz="1150" dirty="0">
-                <a:solidFill>
-                  <a:srgbClr val="212121"/>
-                </a:solidFill>
-                <a:latin typeface="Calibri" pitchFamily="34" charset="0"/>
-                <a:ea typeface="Calibri" pitchFamily="34" charset="-122"/>
-                <a:cs typeface="Calibri" pitchFamily="34" charset="-120"/>
-              </a:rPr>
-              <a:t>Retry only known transient failures</a:t>
-            </a:r>
-            <a:endParaRPr lang="en-US" sz="1150" dirty="0"/>
-          </a:p>
-        </p:txBody>
-      </p:sp>
-      <p:sp>
-        <p:nvSpPr>
-          <p:cNvPr id="8" name="Shape 6"/>
-          <p:cNvSpPr/>
-          <p:nvPr/>
-        </p:nvSpPr>
-        <p:spPr>
-          <a:xfrm>
-            <a:off x="4672584" y="1078992"/>
-            <a:ext cx="4105656" cy="1655064"/>
-          </a:xfrm>
-          <a:prstGeom prst="roundRect">
-            <a:avLst>
-              <a:gd name="adj" fmla="val 3315"/>
-            </a:avLst>
-          </a:prstGeom>
-          <a:solidFill>
-            <a:srgbClr val="F3F4F6"/>
-          </a:solidFill>
-          <a:ln w="10160">
-            <a:solidFill>
-              <a:srgbClr val="D1D5DB"/>
-            </a:solidFill>
-            <a:prstDash val="solid"/>
-          </a:ln>
-        </p:spPr>
-      </p:sp>
-      <p:sp>
-        <p:nvSpPr>
-          <p:cNvPr id="9" name="Text 7"/>
-          <p:cNvSpPr/>
-          <p:nvPr/>
-        </p:nvSpPr>
-        <p:spPr>
-          <a:xfrm>
-            <a:off x="4818888" y="1197864"/>
-            <a:ext cx="3813048" cy="310896"/>
-          </a:xfrm>
-          <a:prstGeom prst="rect">
-            <a:avLst/>
-          </a:prstGeom>
-          <a:noFill/>
-          <a:ln/>
-        </p:spPr>
-        <p:txBody>
-          <a:bodyPr wrap="square" lIns="0" tIns="0" rIns="0" bIns="0" rtlCol="0" anchor="ctr">
-            <a:normAutofit/>
-          </a:bodyPr>
-          <a:lstStyle/>
-          <a:p>
-            <a:pPr indent="0" marL="0">
-              <a:buNone/>
-            </a:pPr>
-            <a:r>
-              <a:rPr lang="en-US" sz="1500" b="1" dirty="0">
-                <a:solidFill>
-                  <a:srgbClr val="1E2761"/>
-                </a:solidFill>
-                <a:latin typeface="Calibri" pitchFamily="34" charset="0"/>
-                <a:ea typeface="Calibri" pitchFamily="34" charset="-122"/>
-                <a:cs typeface="Calibri" pitchFamily="34" charset="-120"/>
-              </a:rPr>
-              <a:t>Check safety</a:t>
-            </a:r>
-            <a:endParaRPr lang="en-US" sz="1500" dirty="0"/>
-          </a:p>
-        </p:txBody>
-      </p:sp>
-      <p:sp>
-        <p:nvSpPr>
-          <p:cNvPr id="10" name="Text 8"/>
-          <p:cNvSpPr/>
-          <p:nvPr/>
-        </p:nvSpPr>
-        <p:spPr>
-          <a:xfrm>
-            <a:off x="4818888" y="1581912"/>
-            <a:ext cx="3813048" cy="1033272"/>
-          </a:xfrm>
-          <a:prstGeom prst="rect">
-            <a:avLst/>
-          </a:prstGeom>
-          <a:noFill/>
-          <a:ln/>
-        </p:spPr>
-        <p:txBody>
-          <a:bodyPr wrap="square" lIns="0" tIns="0" rIns="0" bIns="0" rtlCol="0" anchor="t">
-            <a:normAutofit/>
-          </a:bodyPr>
-          <a:lstStyle/>
-          <a:p>
-            <a:pPr indent="0" marL="0">
-              <a:buNone/>
-            </a:pPr>
-            <a:r>
-              <a:rPr lang="en-US" sz="1150" dirty="0">
-                <a:solidFill>
-                  <a:srgbClr val="212121"/>
-                </a:solidFill>
-                <a:latin typeface="Calibri" pitchFamily="34" charset="0"/>
-                <a:ea typeface="Calibri" pitchFamily="34" charset="-122"/>
-                <a:cs typeface="Calibri" pitchFamily="34" charset="-120"/>
-              </a:rPr>
-              <a:t>Read or idempotent operation?</a:t>
-            </a:r>
-            <a:endParaRPr lang="en-US" sz="1150" dirty="0"/>
-          </a:p>
-        </p:txBody>
-      </p:sp>
-      <p:sp>
-        <p:nvSpPr>
-          <p:cNvPr id="11" name="Shape 9"/>
-          <p:cNvSpPr/>
-          <p:nvPr/>
-        </p:nvSpPr>
-        <p:spPr>
-          <a:xfrm>
-            <a:off x="365760" y="2935224"/>
-            <a:ext cx="4105656" cy="1655064"/>
-          </a:xfrm>
-          <a:prstGeom prst="roundRect">
-            <a:avLst>
-              <a:gd name="adj" fmla="val 3315"/>
-            </a:avLst>
-          </a:prstGeom>
-          <a:solidFill>
-            <a:srgbClr val="F3F4F6"/>
-          </a:solidFill>
-          <a:ln w="10160">
-            <a:solidFill>
-              <a:srgbClr val="D1D5DB"/>
-            </a:solidFill>
-            <a:prstDash val="solid"/>
-          </a:ln>
-        </p:spPr>
-      </p:sp>
-      <p:sp>
-        <p:nvSpPr>
-          <p:cNvPr id="12" name="Text 10"/>
-          <p:cNvSpPr/>
-          <p:nvPr/>
-        </p:nvSpPr>
-        <p:spPr>
-          <a:xfrm>
-            <a:off x="512064" y="3054096"/>
-            <a:ext cx="3813048" cy="310896"/>
-          </a:xfrm>
-          <a:prstGeom prst="rect">
-            <a:avLst/>
-          </a:prstGeom>
-          <a:noFill/>
-          <a:ln/>
-        </p:spPr>
-        <p:txBody>
-          <a:bodyPr wrap="square" lIns="0" tIns="0" rIns="0" bIns="0" rtlCol="0" anchor="ctr">
-            <a:normAutofit/>
-          </a:bodyPr>
-          <a:lstStyle/>
-          <a:p>
-            <a:pPr indent="0" marL="0">
-              <a:buNone/>
-            </a:pPr>
-            <a:r>
-              <a:rPr lang="en-US" sz="1500" b="1" dirty="0">
-                <a:solidFill>
-                  <a:srgbClr val="1E2761"/>
-                </a:solidFill>
-                <a:latin typeface="Calibri" pitchFamily="34" charset="0"/>
-                <a:ea typeface="Calibri" pitchFamily="34" charset="-122"/>
-                <a:cs typeface="Calibri" pitchFamily="34" charset="-120"/>
-              </a:rPr>
-              <a:t>Back off</a:t>
-            </a:r>
-            <a:endParaRPr lang="en-US" sz="1500" dirty="0"/>
-          </a:p>
-        </p:txBody>
-      </p:sp>
-      <p:sp>
-        <p:nvSpPr>
-          <p:cNvPr id="13" name="Text 11"/>
-          <p:cNvSpPr/>
-          <p:nvPr/>
-        </p:nvSpPr>
-        <p:spPr>
-          <a:xfrm>
-            <a:off x="512064" y="3438144"/>
-            <a:ext cx="3813048" cy="1033272"/>
-          </a:xfrm>
-          <a:prstGeom prst="rect">
-            <a:avLst/>
-          </a:prstGeom>
-          <a:noFill/>
-          <a:ln/>
-        </p:spPr>
-        <p:txBody>
-          <a:bodyPr wrap="square" lIns="0" tIns="0" rIns="0" bIns="0" rtlCol="0" anchor="t">
-            <a:normAutofit/>
-          </a:bodyPr>
-          <a:lstStyle/>
-          <a:p>
-            <a:pPr indent="0" marL="0">
-              <a:buNone/>
-            </a:pPr>
-            <a:r>
-              <a:rPr lang="en-US" sz="1150" dirty="0">
-                <a:solidFill>
-                  <a:srgbClr val="212121"/>
-                </a:solidFill>
-                <a:latin typeface="Calibri" pitchFamily="34" charset="0"/>
-                <a:ea typeface="Calibri" pitchFamily="34" charset="-122"/>
-                <a:cs typeface="Calibri" pitchFamily="34" charset="-120"/>
-              </a:rPr>
-              <a:t>Delay with a fixed maximum attempt count</a:t>
-            </a:r>
-            <a:endParaRPr lang="en-US" sz="1150" dirty="0"/>
-          </a:p>
-        </p:txBody>
-      </p:sp>
-      <p:sp>
-        <p:nvSpPr>
-          <p:cNvPr id="14" name="Shape 12"/>
-          <p:cNvSpPr/>
-          <p:nvPr/>
-        </p:nvSpPr>
-        <p:spPr>
-          <a:xfrm>
-            <a:off x="4672584" y="2935224"/>
-            <a:ext cx="4105656" cy="1655064"/>
-          </a:xfrm>
-          <a:prstGeom prst="roundRect">
-            <a:avLst>
-              <a:gd name="adj" fmla="val 3315"/>
-            </a:avLst>
-          </a:prstGeom>
-          <a:solidFill>
-            <a:srgbClr val="F3F4F6"/>
-          </a:solidFill>
-          <a:ln w="10160">
-            <a:solidFill>
-              <a:srgbClr val="D1D5DB"/>
-            </a:solidFill>
-            <a:prstDash val="solid"/>
-          </a:ln>
-        </p:spPr>
-      </p:sp>
-      <p:sp>
-        <p:nvSpPr>
-          <p:cNvPr id="15" name="Text 13"/>
-          <p:cNvSpPr/>
-          <p:nvPr/>
-        </p:nvSpPr>
-        <p:spPr>
-          <a:xfrm>
-            <a:off x="4818888" y="3054096"/>
-            <a:ext cx="3813048" cy="310896"/>
-          </a:xfrm>
-          <a:prstGeom prst="rect">
-            <a:avLst/>
-          </a:prstGeom>
-          <a:noFill/>
-          <a:ln/>
-        </p:spPr>
-        <p:txBody>
-          <a:bodyPr wrap="square" lIns="0" tIns="0" rIns="0" bIns="0" rtlCol="0" anchor="ctr">
-            <a:normAutofit/>
-          </a:bodyPr>
-          <a:lstStyle/>
-          <a:p>
-            <a:pPr indent="0" marL="0">
-              <a:buNone/>
-            </a:pPr>
-            <a:r>
-              <a:rPr lang="en-US" sz="1500" b="1" dirty="0">
-                <a:solidFill>
-                  <a:srgbClr val="1E2761"/>
-                </a:solidFill>
-                <a:latin typeface="Calibri" pitchFamily="34" charset="0"/>
-                <a:ea typeface="Calibri" pitchFamily="34" charset="-122"/>
-                <a:cs typeface="Calibri" pitchFamily="34" charset="-120"/>
-              </a:rPr>
-              <a:t>Stop</a:t>
-            </a:r>
-            <a:endParaRPr lang="en-US" sz="1500" dirty="0"/>
-          </a:p>
-        </p:txBody>
-      </p:sp>
-      <p:sp>
-        <p:nvSpPr>
-          <p:cNvPr id="16" name="Text 14"/>
-          <p:cNvSpPr/>
-          <p:nvPr/>
-        </p:nvSpPr>
-        <p:spPr>
-          <a:xfrm>
-            <a:off x="4818888" y="3438144"/>
-            <a:ext cx="3813048" cy="1033272"/>
-          </a:xfrm>
-          <a:prstGeom prst="rect">
-            <a:avLst/>
-          </a:prstGeom>
-          <a:noFill/>
-          <a:ln/>
-        </p:spPr>
-        <p:txBody>
-          <a:bodyPr wrap="square" lIns="0" tIns="0" rIns="0" bIns="0" rtlCol="0" anchor="t">
-            <a:normAutofit/>
-          </a:bodyPr>
-          <a:lstStyle/>
-          <a:p>
-            <a:pPr indent="0" marL="0">
-              <a:buNone/>
-            </a:pPr>
-            <a:r>
-              <a:rPr lang="en-US" sz="1150" dirty="0">
-                <a:solidFill>
-                  <a:srgbClr val="212121"/>
-                </a:solidFill>
-                <a:latin typeface="Calibri" pitchFamily="34" charset="0"/>
-                <a:ea typeface="Calibri" pitchFamily="34" charset="-122"/>
-                <a:cs typeface="Calibri" pitchFamily="34" charset="-120"/>
-              </a:rPr>
-              <a:t>Surface the last failure; never loop forever</a:t>
-            </a:r>
-            <a:endParaRPr lang="en-US" sz="1150" dirty="0"/>
-          </a:p>
-        </p:txBody>
-      </p:sp>
-      <p:sp>
-        <p:nvSpPr>
-          <p:cNvPr id="17" name="Shape 15"/>
-          <p:cNvSpPr/>
-          <p:nvPr/>
-        </p:nvSpPr>
-        <p:spPr>
-          <a:xfrm>
-            <a:off x="365760" y="4773168"/>
-            <a:ext cx="8412480" cy="0"/>
-          </a:xfrm>
-          <a:prstGeom prst="line">
-            <a:avLst/>
-          </a:prstGeom>
-          <a:noFill/>
-          <a:ln w="6350">
-            <a:solidFill>
-              <a:srgbClr val="D1D5DB"/>
-            </a:solidFill>
-            <a:prstDash val="solid"/>
-          </a:ln>
-        </p:spPr>
-      </p:sp>
-      <p:sp>
-        <p:nvSpPr>
-          <p:cNvPr id="18" name="Text 16"/>
-          <p:cNvSpPr/>
-          <p:nvPr/>
-        </p:nvSpPr>
-        <p:spPr>
-          <a:xfrm>
-            <a:off x="384048" y="4818888"/>
-            <a:ext cx="8275320" cy="182880"/>
-          </a:xfrm>
-          <a:prstGeom prst="rect">
-            <a:avLst/>
-          </a:prstGeom>
-          <a:noFill/>
-          <a:ln/>
-        </p:spPr>
-        <p:txBody>
-          <a:bodyPr wrap="square" lIns="0" tIns="0" rIns="0" bIns="0" rtlCol="0" anchor="ctr">
-            <a:normAutofit/>
-          </a:bodyPr>
-          <a:lstStyle/>
-          <a:p>
-            <a:pPr indent="0" marL="0">
-              <a:buNone/>
-            </a:pPr>
-            <a:r>
-              <a:rPr lang="en-US" sz="820" dirty="0">
-                <a:solidFill>
-                  <a:srgbClr val="6B7280"/>
-                </a:solidFill>
-                <a:latin typeface="Calibri" pitchFamily="34" charset="0"/>
-                <a:ea typeface="Calibri" pitchFamily="34" charset="-122"/>
-                <a:cs typeface="Calibri" pitchFamily="34" charset="-120"/>
-              </a:rPr>
-              <a:t>Source: https://learn.microsoft.com/en-us/agent-framework/concepts/agents/middleware/exception-handling?tabs=python</a:t>
-            </a:r>
-            <a:endParaRPr lang="en-US" sz="820" dirty="0"/>
-          </a:p>
-        </p:txBody>
-      </p:sp>
-    </p:spTree>
-  </p:cSld>
-  <p:clrMapOvr>
-    <a:masterClrMapping/>
-  </p:clrMapOvr>
-</p:sld>
-</file>
-
-<file path=ppt/slides/slide13.xml><?xml version="1.0" encoding="utf-8"?>
-<p:sld xmlns:a="http://schemas.openxmlformats.org/drawingml/2006/main" xmlns:r="http://schemas.openxmlformats.org/officeDocument/2006/relationships" xmlns:p="http://schemas.openxmlformats.org/presentationml/2006/main">
-  <p:cSld name="Slide 13">
-    <p:bg>
-      <p:bgPr>
-        <a:solidFill>
-          <a:srgbClr val="FFFFFF"/>
-        </a:solidFill>
-      </p:bgPr>
-    </p:bg>
-    <p:spTree>
-      <p:nvGrpSpPr>
-        <p:cNvPr id="1" name=""/>
-        <p:cNvGrpSpPr/>
-        <p:nvPr/>
-      </p:nvGrpSpPr>
-      <p:grpSpPr>
-        <a:xfrm>
-          <a:off x="0" y="0"/>
-          <a:ext cx="0" cy="0"/>
-          <a:chOff x="0" y="0"/>
-          <a:chExt cx="0" cy="0"/>
-        </a:xfrm>
-      </p:grpSpPr>
-      <p:sp>
-        <p:nvSpPr>
-          <p:cNvPr id="2" name="Shape 0"/>
-          <p:cNvSpPr/>
-          <p:nvPr/>
-        </p:nvSpPr>
-        <p:spPr>
-          <a:xfrm>
-            <a:off x="0" y="0"/>
-            <a:ext cx="54864" cy="5143500"/>
-          </a:xfrm>
-          <a:prstGeom prst="rect">
-            <a:avLst/>
-          </a:prstGeom>
-          <a:solidFill>
-            <a:srgbClr val="1E2761"/>
-          </a:solidFill>
-          <a:ln/>
-        </p:spPr>
-      </p:sp>
-      <p:sp>
-        <p:nvSpPr>
-          <p:cNvPr id="3" name="Text 1"/>
-          <p:cNvSpPr/>
-          <p:nvPr/>
-        </p:nvSpPr>
-        <p:spPr>
-          <a:xfrm>
-            <a:off x="5486400" y="256032"/>
-            <a:ext cx="3337560" cy="228600"/>
-          </a:xfrm>
-          <a:prstGeom prst="rect">
-            <a:avLst/>
-          </a:prstGeom>
-          <a:noFill/>
-          <a:ln/>
-        </p:spPr>
-        <p:txBody>
-          <a:bodyPr wrap="square" lIns="0" tIns="0" rIns="0" bIns="0" rtlCol="0" anchor="ctr">
-            <a:normAutofit/>
-          </a:bodyPr>
-          <a:lstStyle/>
-          <a:p>
-            <a:pPr algn="r" indent="0" marL="0">
-              <a:buNone/>
-            </a:pPr>
-            <a:r>
-              <a:rPr lang="en-US" sz="950" dirty="0">
-                <a:solidFill>
-                  <a:srgbClr val="6B7280"/>
-                </a:solidFill>
-                <a:latin typeface="Calibri" pitchFamily="34" charset="0"/>
-                <a:ea typeface="Calibri" pitchFamily="34" charset="-122"/>
-                <a:cs typeface="Calibri" pitchFamily="34" charset="-120"/>
-              </a:rPr>
-              <a:t>Day 3 · Module 4</a:t>
-            </a:r>
-            <a:endParaRPr lang="en-US" sz="950" dirty="0"/>
-          </a:p>
-        </p:txBody>
-      </p:sp>
-      <p:sp>
-        <p:nvSpPr>
-          <p:cNvPr id="4" name="Text 2"/>
-          <p:cNvSpPr/>
-          <p:nvPr/>
-        </p:nvSpPr>
-        <p:spPr>
-          <a:xfrm>
-            <a:off x="365760" y="310896"/>
-            <a:ext cx="6583680" cy="603504"/>
-          </a:xfrm>
-          <a:prstGeom prst="rect">
-            <a:avLst/>
-          </a:prstGeom>
-          <a:noFill/>
-          <a:ln/>
-        </p:spPr>
-        <p:txBody>
-          <a:bodyPr wrap="square" lIns="0" tIns="0" rIns="0" bIns="0" rtlCol="0" anchor="ctr">
-            <a:normAutofit/>
-          </a:bodyPr>
-          <a:lstStyle/>
-          <a:p>
-            <a:pPr indent="0" marL="0">
-              <a:buNone/>
-            </a:pPr>
-            <a:r>
-              <a:rPr lang="en-US" sz="2500" b="1" dirty="0">
-                <a:solidFill>
-                  <a:srgbClr val="1E2761"/>
-                </a:solidFill>
-                <a:latin typeface="Calibri" pitchFamily="34" charset="0"/>
-                <a:ea typeface="Calibri" pitchFamily="34" charset="-122"/>
-                <a:cs typeface="Calibri" pitchFamily="34" charset="-120"/>
-              </a:rPr>
-              <a:t>Built-in OTel is not custom middleware</a:t>
-            </a:r>
-            <a:endParaRPr lang="en-US" sz="2500" dirty="0"/>
-          </a:p>
-        </p:txBody>
-      </p:sp>
-      <p:sp>
-        <p:nvSpPr>
-          <p:cNvPr id="5" name="Shape 3"/>
-          <p:cNvSpPr/>
-          <p:nvPr/>
-        </p:nvSpPr>
-        <p:spPr>
-          <a:xfrm>
-            <a:off x="365760" y="1078992"/>
-            <a:ext cx="4114800" cy="3493008"/>
-          </a:xfrm>
-          <a:prstGeom prst="roundRect">
-            <a:avLst/>
-          </a:prstGeom>
-          <a:solidFill>
-            <a:srgbClr val="F3F4F6"/>
-          </a:solidFill>
-          <a:ln w="11430">
-            <a:solidFill>
-              <a:srgbClr val="D1D5DB"/>
-            </a:solidFill>
-            <a:prstDash val="solid"/>
-          </a:ln>
-        </p:spPr>
-      </p:sp>
-      <p:sp>
-        <p:nvSpPr>
-          <p:cNvPr id="6" name="Text 4"/>
-          <p:cNvSpPr/>
-          <p:nvPr/>
-        </p:nvSpPr>
-        <p:spPr>
-          <a:xfrm>
-            <a:off x="566928" y="1298448"/>
-            <a:ext cx="3712464" cy="411480"/>
-          </a:xfrm>
-          <a:prstGeom prst="rect">
-            <a:avLst/>
-          </a:prstGeom>
-          <a:noFill/>
-          <a:ln/>
-        </p:spPr>
-        <p:txBody>
-          <a:bodyPr wrap="square" lIns="0" tIns="0" rIns="0" bIns="0" rtlCol="0" anchor="ctr">
-            <a:normAutofit/>
-          </a:bodyPr>
-          <a:lstStyle/>
-          <a:p>
-            <a:pPr indent="0" marL="0">
-              <a:buNone/>
-            </a:pPr>
-            <a:r>
-              <a:rPr lang="en-US" sz="2000" b="1" dirty="0">
-                <a:solidFill>
-                  <a:srgbClr val="1E2761"/>
-                </a:solidFill>
-                <a:latin typeface="Calibri" pitchFamily="34" charset="0"/>
-                <a:ea typeface="Calibri" pitchFamily="34" charset="-122"/>
-                <a:cs typeface="Calibri" pitchFamily="34" charset="-120"/>
-              </a:rPr>
-              <a:t>Built-in observability</a:t>
-            </a:r>
-            <a:endParaRPr lang="en-US" sz="2000" dirty="0"/>
-          </a:p>
-        </p:txBody>
-      </p:sp>
-      <p:sp>
-        <p:nvSpPr>
-          <p:cNvPr id="7" name="Text 5"/>
-          <p:cNvSpPr/>
-          <p:nvPr/>
-        </p:nvSpPr>
-        <p:spPr>
-          <a:xfrm>
-            <a:off x="594360" y="1828800"/>
-            <a:ext cx="3639312" cy="2395728"/>
-          </a:xfrm>
-          <a:prstGeom prst="rect">
-            <a:avLst/>
-          </a:prstGeom>
-          <a:noFill/>
-          <a:ln/>
-        </p:spPr>
-        <p:txBody>
-          <a:bodyPr wrap="square" lIns="381" tIns="381" rIns="381" bIns="381" rtlCol="0" anchor="ctr">
-            <a:normAutofit/>
-          </a:bodyPr>
-          <a:lstStyle/>
-          <a:p>
-            <a:pPr marL="342900" indent="-342900">
-              <a:buSzPct val="100000"/>
-              <a:buChar char="•"/>
-            </a:pPr>
-            <a:r>
-              <a:rPr lang="en-US" sz="1300" dirty="0">
-                <a:solidFill>
-                  <a:srgbClr val="212121"/>
-                </a:solidFill>
-                <a:latin typeface="Calibri" pitchFamily="34" charset="0"/>
-                <a:ea typeface="Calibri" pitchFamily="34" charset="-122"/>
-                <a:cs typeface="Calibri" pitchFamily="34" charset="-120"/>
-              </a:rPr>
-              <a:t>Standard OpenTelemetry integration</a:t>
-            </a:r>
-            <a:endParaRPr lang="en-US" sz="1300" dirty="0"/>
-          </a:p>
-          <a:p>
-            <a:pPr marL="342900" indent="-342900">
-              <a:buSzPct val="100000"/>
-              <a:buChar char="•"/>
-            </a:pPr>
-            <a:r>
-              <a:rPr lang="en-US" sz="1300" dirty="0">
-                <a:solidFill>
-                  <a:srgbClr val="212121"/>
-                </a:solidFill>
-                <a:latin typeface="Calibri" pitchFamily="34" charset="0"/>
-                <a:ea typeface="Calibri" pitchFamily="34" charset="-122"/>
-                <a:cs typeface="Calibri" pitchFamily="34" charset="-120"/>
-              </a:rPr>
-              <a:t>Agent/model/tool spans and metrics</a:t>
-            </a:r>
-            <a:endParaRPr lang="en-US" sz="1300" dirty="0"/>
-          </a:p>
-          <a:p>
-            <a:pPr marL="342900" indent="-342900">
-              <a:buSzPct val="100000"/>
-              <a:buChar char="•"/>
-            </a:pPr>
-            <a:r>
-              <a:rPr lang="en-US" sz="1300" dirty="0">
-                <a:solidFill>
-                  <a:srgbClr val="212121"/>
-                </a:solidFill>
-                <a:latin typeface="Calibri" pitchFamily="34" charset="0"/>
-                <a:ea typeface="Calibri" pitchFamily="34" charset="-122"/>
-                <a:cs typeface="Calibri" pitchFamily="34" charset="-120"/>
-              </a:rPr>
-              <a:t>Prefer for baseline telemetry</a:t>
-            </a:r>
-            <a:endParaRPr lang="en-US" sz="1300" dirty="0"/>
-          </a:p>
-        </p:txBody>
-      </p:sp>
-      <p:sp>
-        <p:nvSpPr>
-          <p:cNvPr id="8" name="Shape 6"/>
-          <p:cNvSpPr/>
-          <p:nvPr/>
-        </p:nvSpPr>
-        <p:spPr>
-          <a:xfrm>
-            <a:off x="4663440" y="1078992"/>
-            <a:ext cx="4114800" cy="3493008"/>
-          </a:xfrm>
-          <a:prstGeom prst="roundRect">
-            <a:avLst/>
-          </a:prstGeom>
-          <a:solidFill>
-            <a:srgbClr val="CADCFC"/>
-          </a:solidFill>
-          <a:ln w="11430">
-            <a:solidFill>
-              <a:srgbClr val="1E2761"/>
-            </a:solidFill>
-            <a:prstDash val="solid"/>
-          </a:ln>
-        </p:spPr>
-      </p:sp>
-      <p:sp>
-        <p:nvSpPr>
-          <p:cNvPr id="9" name="Text 7"/>
-          <p:cNvSpPr/>
-          <p:nvPr/>
-        </p:nvSpPr>
-        <p:spPr>
-          <a:xfrm>
-            <a:off x="4864608" y="1298448"/>
-            <a:ext cx="3712464" cy="411480"/>
-          </a:xfrm>
-          <a:prstGeom prst="rect">
-            <a:avLst/>
-          </a:prstGeom>
-          <a:noFill/>
-          <a:ln/>
-        </p:spPr>
-        <p:txBody>
-          <a:bodyPr wrap="square" lIns="0" tIns="0" rIns="0" bIns="0" rtlCol="0" anchor="ctr">
-            <a:normAutofit/>
-          </a:bodyPr>
-          <a:lstStyle/>
-          <a:p>
-            <a:pPr indent="0" marL="0">
-              <a:buNone/>
-            </a:pPr>
-            <a:r>
-              <a:rPr lang="en-US" sz="2000" b="1" dirty="0">
-                <a:solidFill>
-                  <a:srgbClr val="1E2761"/>
-                </a:solidFill>
-                <a:latin typeface="Calibri" pitchFamily="34" charset="0"/>
-                <a:ea typeface="Calibri" pitchFamily="34" charset="-122"/>
-                <a:cs typeface="Calibri" pitchFamily="34" charset="-120"/>
-              </a:rPr>
-              <a:t>Custom middleware</a:t>
-            </a:r>
-            <a:endParaRPr lang="en-US" sz="2000" dirty="0"/>
-          </a:p>
-        </p:txBody>
-      </p:sp>
-      <p:sp>
-        <p:nvSpPr>
-          <p:cNvPr id="10" name="Text 8"/>
-          <p:cNvSpPr/>
-          <p:nvPr/>
-        </p:nvSpPr>
-        <p:spPr>
-          <a:xfrm>
-            <a:off x="4892040" y="1828800"/>
-            <a:ext cx="3639312" cy="2395728"/>
-          </a:xfrm>
-          <a:prstGeom prst="rect">
-            <a:avLst/>
-          </a:prstGeom>
-          <a:noFill/>
-          <a:ln/>
-        </p:spPr>
-        <p:txBody>
-          <a:bodyPr wrap="square" lIns="381" tIns="381" rIns="381" bIns="381" rtlCol="0" anchor="ctr">
-            <a:normAutofit/>
-          </a:bodyPr>
-          <a:lstStyle/>
-          <a:p>
-            <a:pPr marL="342900" indent="-342900">
-              <a:buSzPct val="100000"/>
-              <a:buChar char="•"/>
-            </a:pPr>
-            <a:r>
-              <a:rPr lang="en-US" sz="1300" dirty="0">
-                <a:solidFill>
-                  <a:srgbClr val="212121"/>
-                </a:solidFill>
-                <a:latin typeface="Calibri" pitchFamily="34" charset="0"/>
-                <a:ea typeface="Calibri" pitchFamily="34" charset="-122"/>
-                <a:cs typeface="Calibri" pitchFamily="34" charset="-120"/>
-              </a:rPr>
-              <a:t>Domain policy and validation</a:t>
-            </a:r>
-            <a:endParaRPr lang="en-US" sz="1300" dirty="0"/>
-          </a:p>
-          <a:p>
-            <a:pPr marL="342900" indent="-342900">
-              <a:buSzPct val="100000"/>
-              <a:buChar char="•"/>
-            </a:pPr>
-            <a:r>
-              <a:rPr lang="en-US" sz="1300" dirty="0">
-                <a:solidFill>
-                  <a:srgbClr val="212121"/>
-                </a:solidFill>
-                <a:latin typeface="Calibri" pitchFamily="34" charset="0"/>
-                <a:ea typeface="Calibri" pitchFamily="34" charset="-122"/>
-                <a:cs typeface="Calibri" pitchFamily="34" charset="-120"/>
-              </a:rPr>
-              <a:t>Result transformation or short-circuit</a:t>
-            </a:r>
-            <a:endParaRPr lang="en-US" sz="1300" dirty="0"/>
-          </a:p>
-          <a:p>
-            <a:pPr marL="342900" indent="-342900">
-              <a:buSzPct val="100000"/>
-              <a:buChar char="•"/>
-            </a:pPr>
-            <a:r>
-              <a:rPr lang="en-US" sz="1300" dirty="0">
-                <a:solidFill>
-                  <a:srgbClr val="212121"/>
-                </a:solidFill>
-                <a:latin typeface="Calibri" pitchFamily="34" charset="0"/>
-                <a:ea typeface="Calibri" pitchFamily="34" charset="-122"/>
-                <a:cs typeface="Calibri" pitchFamily="34" charset="-120"/>
-              </a:rPr>
-              <a:t>Add only what standard instrumentation does not provide</a:t>
-            </a:r>
-            <a:endParaRPr lang="en-US" sz="1300" dirty="0"/>
-          </a:p>
-        </p:txBody>
-      </p:sp>
-      <p:sp>
-        <p:nvSpPr>
-          <p:cNvPr id="11" name="Shape 9"/>
-          <p:cNvSpPr/>
-          <p:nvPr/>
-        </p:nvSpPr>
-        <p:spPr>
-          <a:xfrm>
-            <a:off x="365760" y="4773168"/>
-            <a:ext cx="8412480" cy="0"/>
-          </a:xfrm>
-          <a:prstGeom prst="line">
-            <a:avLst/>
-          </a:prstGeom>
-          <a:noFill/>
-          <a:ln w="6350">
-            <a:solidFill>
-              <a:srgbClr val="D1D5DB"/>
-            </a:solidFill>
-            <a:prstDash val="solid"/>
-          </a:ln>
-        </p:spPr>
-      </p:sp>
-      <p:sp>
-        <p:nvSpPr>
-          <p:cNvPr id="12" name="Text 10"/>
-          <p:cNvSpPr/>
-          <p:nvPr/>
-        </p:nvSpPr>
-        <p:spPr>
-          <a:xfrm>
-            <a:off x="384048" y="4818888"/>
-            <a:ext cx="8275320" cy="182880"/>
-          </a:xfrm>
-          <a:prstGeom prst="rect">
-            <a:avLst/>
-          </a:prstGeom>
-          <a:noFill/>
-          <a:ln/>
-        </p:spPr>
-        <p:txBody>
-          <a:bodyPr wrap="square" lIns="0" tIns="0" rIns="0" bIns="0" rtlCol="0" anchor="ctr">
-            <a:normAutofit/>
-          </a:bodyPr>
-          <a:lstStyle/>
-          <a:p>
-            <a:pPr indent="0" marL="0">
-              <a:buNone/>
-            </a:pPr>
-            <a:r>
-              <a:rPr lang="en-US" sz="820" dirty="0">
-                <a:solidFill>
-                  <a:srgbClr val="6B7280"/>
-                </a:solidFill>
-                <a:latin typeface="Calibri" pitchFamily="34" charset="0"/>
-                <a:ea typeface="Calibri" pitchFamily="34" charset="-122"/>
-                <a:cs typeface="Calibri" pitchFamily="34" charset="-120"/>
-              </a:rPr>
-              <a:t>Source: https://learn.microsoft.com/en-us/agent-framework/agents/observability?tabs=python  ·  +1 in notes</a:t>
-            </a:r>
-            <a:endParaRPr lang="en-US" sz="820" dirty="0"/>
-          </a:p>
-        </p:txBody>
-      </p:sp>
-    </p:spTree>
-  </p:cSld>
-  <p:clrMapOvr>
-    <a:masterClrMapping/>
-  </p:clrMapOvr>
-</p:sld>
-</file>
-
 <file path=ppt/slides/slide14.xml><?xml version="1.0" encoding="utf-8"?>
 <p:sld xmlns:a="http://schemas.openxmlformats.org/drawingml/2006/main" xmlns:r="http://schemas.openxmlformats.org/officeDocument/2006/relationships" xmlns:p="http://schemas.openxmlformats.org/presentationml/2006/main">
   <p:cSld name="Slide 14">
@@ -5307,7 +5808,7 @@
                 <a:ea typeface="Calibri" pitchFamily="34" charset="-122"/>
                 <a:cs typeface="Calibri" pitchFamily="34" charset="-120"/>
               </a:rPr>
-              <a:t>Ordering and performance trade-offs</a:t>
+              <a:t>Retry must be bounded and idempotent</a:t>
             </a:r>
             <a:endParaRPr lang="en-US" sz="2500" dirty="0"/>
           </a:p>
@@ -5375,7 +5876,7 @@
                 <a:ea typeface="Calibri" pitchFamily="34" charset="-122"/>
                 <a:cs typeface="Calibri" pitchFamily="34" charset="-120"/>
               </a:rPr>
-              <a:t>Outermost first</a:t>
+              <a:t>Classify</a:t>
             </a:r>
             <a:endParaRPr lang="en-US" sz="1500" dirty="0"/>
           </a:p>
@@ -5416,7 +5917,7 @@
                 <a:ea typeface="Calibri" pitchFamily="34" charset="-122"/>
                 <a:cs typeface="Calibri" pitchFamily="34" charset="-120"/>
               </a:rPr>
-              <a:t>Authentication and cheap rejection</a:t>
+              <a:t>Retry only known transient failures</a:t>
             </a:r>
             <a:endParaRPr lang="en-US" sz="1150" dirty="0"/>
           </a:p>
@@ -5484,7 +5985,7 @@
                 <a:ea typeface="Calibri" pitchFamily="34" charset="-122"/>
                 <a:cs typeface="Calibri" pitchFamily="34" charset="-120"/>
               </a:rPr>
-              <a:t>Per-call cost</a:t>
+              <a:t>Check safety</a:t>
             </a:r>
             <a:endParaRPr lang="en-US" sz="1500" dirty="0"/>
           </a:p>
@@ -5525,7 +6026,7 @@
                 <a:ea typeface="Calibri" pitchFamily="34" charset="-122"/>
                 <a:cs typeface="Calibri" pitchFamily="34" charset="-120"/>
               </a:rPr>
-              <a:t>Chat and function middleware can run many times</a:t>
+              <a:t>Read or idempotent operation?</a:t>
             </a:r>
             <a:endParaRPr lang="en-US" sz="1150" dirty="0"/>
           </a:p>
@@ -5593,7 +6094,7 @@
                 <a:ea typeface="Calibri" pitchFamily="34" charset="-122"/>
                 <a:cs typeface="Calibri" pitchFamily="34" charset="-120"/>
               </a:rPr>
-              <a:t>Mutation risk</a:t>
+              <a:t>Back off</a:t>
             </a:r>
             <a:endParaRPr lang="en-US" sz="1500" dirty="0"/>
           </a:p>
@@ -5634,7 +6135,7 @@
                 <a:ea typeface="Calibri" pitchFamily="34" charset="-122"/>
                 <a:cs typeface="Calibri" pitchFamily="34" charset="-120"/>
               </a:rPr>
-              <a:t>Document which layer changes messages, options, or results</a:t>
+              <a:t>Delay with a fixed maximum attempt count</a:t>
             </a:r>
             <a:endParaRPr lang="en-US" sz="1150" dirty="0"/>
           </a:p>
@@ -5702,7 +6203,7 @@
                 <a:ea typeface="Calibri" pitchFamily="34" charset="-122"/>
                 <a:cs typeface="Calibri" pitchFamily="34" charset="-120"/>
               </a:rPr>
-              <a:t>Streaming</a:t>
+              <a:t>Stop</a:t>
             </a:r>
             <a:endParaRPr lang="en-US" sz="1500" dirty="0"/>
           </a:p>
@@ -5743,7 +6244,7 @@
                 <a:ea typeface="Calibri" pitchFamily="34" charset="-122"/>
                 <a:cs typeface="Calibri" pitchFamily="34" charset="-120"/>
               </a:rPr>
-              <a:t>Preserve streaming behavior; do not buffer unless required</a:t>
+              <a:t>Surface the last failure; never loop forever</a:t>
             </a:r>
             <a:endParaRPr lang="en-US" sz="1150" dirty="0"/>
           </a:p>
@@ -5807,7 +6308,7 @@
                 <a:ea typeface="Calibri" pitchFamily="34" charset="-122"/>
                 <a:cs typeface="Calibri" pitchFamily="34" charset="-120"/>
               </a:rPr>
-              <a:t>Source: https://learn.microsoft.com/en-us/agent-framework/concepts/agents/middleware/?tabs=python</a:t>
+              <a:t>Source: https://learn.microsoft.com/en-us/agent-framework/concepts/agents/middleware/exception-handling?tabs=python</a:t>
             </a:r>
             <a:endParaRPr lang="en-US" sz="820" dirty="0"/>
           </a:p>
@@ -5933,7 +6434,7 @@
               <a:buNone/>
             </a:pPr>
             <a:r>
-              <a:rPr lang="en-US" sz="2800" b="1" dirty="0">
+              <a:rPr lang="en-US" sz="2500" b="1" dirty="0">
                 <a:solidFill>
                   <a:srgbClr val="1E2761"/>
                 </a:solidFill>
@@ -5941,9 +6442,9 @@
                 <a:ea typeface="Calibri" pitchFamily="34" charset="-122"/>
                 <a:cs typeface="Calibri" pitchFamily="34" charset="-120"/>
               </a:rPr>
-              <a:t>OPTIONAL awareness: Agent Hooks</a:t>
-            </a:r>
-            <a:endParaRPr lang="en-US" sz="2800" dirty="0"/>
+              <a:t>Built-in OTel is not custom middleware</a:t>
+            </a:r>
+            <a:endParaRPr lang="en-US" sz="2500" dirty="0"/>
           </a:p>
         </p:txBody>
       </p:sp>
@@ -6007,7 +6508,7 @@
                 <a:ea typeface="Calibri" pitchFamily="34" charset="-122"/>
                 <a:cs typeface="Calibri" pitchFamily="34" charset="-120"/>
               </a:rPr>
-              <a:t>Normal middleware</a:t>
+              <a:t>Built-in observability</a:t>
             </a:r>
             <a:endParaRPr lang="en-US" sz="2000" dirty="0"/>
           </a:p>
@@ -6049,7 +6550,7 @@
                 <a:ea typeface="Calibri" pitchFamily="34" charset="-122"/>
                 <a:cs typeface="Calibri" pitchFamily="34" charset="-120"/>
               </a:rPr>
-              <a:t>General interception and composition</a:t>
+              <a:t>Standard OpenTelemetry integration</a:t>
             </a:r>
             <a:endParaRPr lang="en-US" sz="1300" dirty="0"/>
           </a:p>
@@ -6067,7 +6568,7 @@
                 <a:ea typeface="Calibri" pitchFamily="34" charset="-122"/>
                 <a:cs typeface="Calibri" pitchFamily="34" charset="-120"/>
               </a:rPr>
-              <a:t>App-defined ordering and behavior</a:t>
+              <a:t>Agent/model/tool spans and metrics</a:t>
             </a:r>
             <a:endParaRPr lang="en-US" sz="1300" dirty="0"/>
           </a:p>
@@ -6085,7 +6586,7 @@
                 <a:ea typeface="Calibri" pitchFamily="34" charset="-122"/>
                 <a:cs typeface="Calibri" pitchFamily="34" charset="-120"/>
               </a:rPr>
-              <a:t>Core pattern for this workshop</a:t>
+              <a:t>Prefer for baseline telemetry</a:t>
             </a:r>
             <a:endParaRPr lang="en-US" sz="1300" dirty="0"/>
           </a:p>
@@ -6151,7 +6652,7 @@
                 <a:ea typeface="Calibri" pitchFamily="34" charset="-122"/>
                 <a:cs typeface="Calibri" pitchFamily="34" charset="-120"/>
               </a:rPr>
-              <a:t>Agent Hooks — EXPERIMENTAL</a:t>
+              <a:t>Custom middleware</a:t>
             </a:r>
             <a:endParaRPr lang="en-US" sz="2000" dirty="0"/>
           </a:p>
@@ -6193,7 +6694,7 @@
                 <a:ea typeface="Calibri" pitchFamily="34" charset="-122"/>
                 <a:cs typeface="Calibri" pitchFamily="34" charset="-120"/>
               </a:rPr>
-              <a:t>Standardized fail-closed governance boundary</a:t>
+              <a:t>Domain policy and validation</a:t>
             </a:r>
             <a:endParaRPr lang="en-US" sz="1300" dirty="0"/>
           </a:p>
@@ -6211,7 +6712,7 @@
                 <a:ea typeface="Calibri" pitchFamily="34" charset="-122"/>
                 <a:cs typeface="Calibri" pitchFamily="34" charset="-120"/>
               </a:rPr>
-              <a:t>Coordinates agent, chat, and function stages</a:t>
+              <a:t>Result transformation or short-circuit</a:t>
             </a:r>
             <a:endParaRPr lang="en-US" sz="1300" dirty="0"/>
           </a:p>
@@ -6229,7 +6730,7 @@
                 <a:ea typeface="Calibri" pitchFamily="34" charset="-122"/>
                 <a:cs typeface="Calibri" pitchFamily="34" charset="-120"/>
               </a:rPr>
-              <a:t>Awareness only; verify current API before adoption</a:t>
+              <a:t>Add only what standard instrumentation does not provide</a:t>
             </a:r>
             <a:endParaRPr lang="en-US" sz="1300" dirty="0"/>
           </a:p>
@@ -6293,7 +6794,7 @@
                 <a:ea typeface="Calibri" pitchFamily="34" charset="-122"/>
                 <a:cs typeface="Calibri" pitchFamily="34" charset="-120"/>
               </a:rPr>
-              <a:t>Source: https://learn.microsoft.com/en-us/agent-framework/agents/agent-hooks?tabs=python</a:t>
+              <a:t>Source: https://learn.microsoft.com/en-us/agent-framework/agents/observability?tabs=python  ·  +1 in notes</a:t>
             </a:r>
             <a:endParaRPr lang="en-US" sz="820" dirty="0"/>
           </a:p>
@@ -6419,6 +6920,884 @@
               <a:buNone/>
             </a:pPr>
             <a:r>
+              <a:rPr lang="en-US" sz="2500" b="1" dirty="0">
+                <a:solidFill>
+                  <a:srgbClr val="1E2761"/>
+                </a:solidFill>
+                <a:latin typeface="Calibri" pitchFamily="34" charset="0"/>
+                <a:ea typeface="Calibri" pitchFamily="34" charset="-122"/>
+                <a:cs typeface="Calibri" pitchFamily="34" charset="-120"/>
+              </a:rPr>
+              <a:t>Ordering and performance trade-offs</a:t>
+            </a:r>
+            <a:endParaRPr lang="en-US" sz="2500" dirty="0"/>
+          </a:p>
+        </p:txBody>
+      </p:sp>
+      <p:sp>
+        <p:nvSpPr>
+          <p:cNvPr id="5" name="Text 3"/>
+          <p:cNvSpPr/>
+          <p:nvPr/>
+        </p:nvSpPr>
+        <p:spPr>
+          <a:xfrm>
+            <a:off x="502920" y="1170432"/>
+            <a:ext cx="7955280" cy="3520440"/>
+          </a:xfrm>
+          <a:prstGeom prst="rect">
+            <a:avLst/>
+          </a:prstGeom>
+          <a:noFill/>
+          <a:ln/>
+        </p:spPr>
+        <p:txBody>
+          <a:bodyPr wrap="square" lIns="0" tIns="0" rIns="0" bIns="0" rtlCol="0" anchor="t">
+            <a:normAutofit/>
+          </a:bodyPr>
+          <a:lstStyle/>
+          <a:p>
+            <a:pPr marL="342900" indent="-342900">
+              <a:spcAft>
+                <a:spcPts val="1000"/>
+              </a:spcAft>
+              <a:buSzPct val="100000"/>
+              <a:buChar char="•"/>
+            </a:pPr>
+            <a:r>
+              <a:rPr lang="en-US" sz="1600" b="1" dirty="0">
+                <a:solidFill>
+                  <a:srgbClr val="1E2761"/>
+                </a:solidFill>
+                <a:latin typeface="Calibri" pitchFamily="34" charset="0"/>
+                <a:ea typeface="Calibri" pitchFamily="34" charset="-122"/>
+                <a:cs typeface="Calibri" pitchFamily="34" charset="-120"/>
+              </a:rPr>
+              <a:t>Outermost first</a:t>
+            </a:r>
+            <a:pPr indent="0" marL="0">
+              <a:spcAft>
+                <a:spcPts val="1000"/>
+              </a:spcAft>
+              <a:buNone/>
+            </a:pPr>
+            <a:r>
+              <a:rPr lang="en-US" sz="1600" dirty="0">
+                <a:solidFill>
+                  <a:srgbClr val="212121"/>
+                </a:solidFill>
+                <a:latin typeface="Calibri" pitchFamily="34" charset="0"/>
+                <a:ea typeface="Calibri" pitchFamily="34" charset="-122"/>
+                <a:cs typeface="Calibri" pitchFamily="34" charset="-120"/>
+              </a:rPr>
+              <a:t>  —  Authentication and cheap rejection</a:t>
+            </a:r>
+            <a:endParaRPr lang="en-US" sz="1600" dirty="0"/>
+          </a:p>
+          <a:p>
+            <a:pPr marL="342900" indent="-342900">
+              <a:spcAft>
+                <a:spcPts val="1000"/>
+              </a:spcAft>
+              <a:buSzPct val="100000"/>
+              <a:buChar char="•"/>
+            </a:pPr>
+            <a:r>
+              <a:rPr lang="en-US" sz="1600" b="1" dirty="0">
+                <a:solidFill>
+                  <a:srgbClr val="1E2761"/>
+                </a:solidFill>
+                <a:latin typeface="Calibri" pitchFamily="34" charset="0"/>
+                <a:ea typeface="Calibri" pitchFamily="34" charset="-122"/>
+                <a:cs typeface="Calibri" pitchFamily="34" charset="-120"/>
+              </a:rPr>
+              <a:t>Per-call cost</a:t>
+            </a:r>
+            <a:pPr indent="0" marL="0">
+              <a:spcAft>
+                <a:spcPts val="1000"/>
+              </a:spcAft>
+              <a:buNone/>
+            </a:pPr>
+            <a:r>
+              <a:rPr lang="en-US" sz="1600" dirty="0">
+                <a:solidFill>
+                  <a:srgbClr val="212121"/>
+                </a:solidFill>
+                <a:latin typeface="Calibri" pitchFamily="34" charset="0"/>
+                <a:ea typeface="Calibri" pitchFamily="34" charset="-122"/>
+                <a:cs typeface="Calibri" pitchFamily="34" charset="-120"/>
+              </a:rPr>
+              <a:t>  —  Chat and function middleware can run many times</a:t>
+            </a:r>
+            <a:endParaRPr lang="en-US" sz="1600" dirty="0"/>
+          </a:p>
+          <a:p>
+            <a:pPr marL="342900" indent="-342900">
+              <a:spcAft>
+                <a:spcPts val="1000"/>
+              </a:spcAft>
+              <a:buSzPct val="100000"/>
+              <a:buChar char="•"/>
+            </a:pPr>
+            <a:r>
+              <a:rPr lang="en-US" sz="1600" b="1" dirty="0">
+                <a:solidFill>
+                  <a:srgbClr val="1E2761"/>
+                </a:solidFill>
+                <a:latin typeface="Calibri" pitchFamily="34" charset="0"/>
+                <a:ea typeface="Calibri" pitchFamily="34" charset="-122"/>
+                <a:cs typeface="Calibri" pitchFamily="34" charset="-120"/>
+              </a:rPr>
+              <a:t>Mutation risk</a:t>
+            </a:r>
+            <a:pPr indent="0" marL="0">
+              <a:spcAft>
+                <a:spcPts val="1000"/>
+              </a:spcAft>
+              <a:buNone/>
+            </a:pPr>
+            <a:r>
+              <a:rPr lang="en-US" sz="1600" dirty="0">
+                <a:solidFill>
+                  <a:srgbClr val="212121"/>
+                </a:solidFill>
+                <a:latin typeface="Calibri" pitchFamily="34" charset="0"/>
+                <a:ea typeface="Calibri" pitchFamily="34" charset="-122"/>
+                <a:cs typeface="Calibri" pitchFamily="34" charset="-120"/>
+              </a:rPr>
+              <a:t>  —  Document which layer changes messages, options, or results</a:t>
+            </a:r>
+            <a:endParaRPr lang="en-US" sz="1600" dirty="0"/>
+          </a:p>
+          <a:p>
+            <a:pPr marL="342900" indent="-342900">
+              <a:spcAft>
+                <a:spcPts val="1000"/>
+              </a:spcAft>
+              <a:buSzPct val="100000"/>
+              <a:buChar char="•"/>
+            </a:pPr>
+            <a:r>
+              <a:rPr lang="en-US" sz="1600" b="1" dirty="0">
+                <a:solidFill>
+                  <a:srgbClr val="1E2761"/>
+                </a:solidFill>
+                <a:latin typeface="Calibri" pitchFamily="34" charset="0"/>
+                <a:ea typeface="Calibri" pitchFamily="34" charset="-122"/>
+                <a:cs typeface="Calibri" pitchFamily="34" charset="-120"/>
+              </a:rPr>
+              <a:t>Streaming</a:t>
+            </a:r>
+            <a:pPr indent="0" marL="0">
+              <a:spcAft>
+                <a:spcPts val="1000"/>
+              </a:spcAft>
+              <a:buNone/>
+            </a:pPr>
+            <a:r>
+              <a:rPr lang="en-US" sz="1600" dirty="0">
+                <a:solidFill>
+                  <a:srgbClr val="212121"/>
+                </a:solidFill>
+                <a:latin typeface="Calibri" pitchFamily="34" charset="0"/>
+                <a:ea typeface="Calibri" pitchFamily="34" charset="-122"/>
+                <a:cs typeface="Calibri" pitchFamily="34" charset="-120"/>
+              </a:rPr>
+              <a:t>  —  Preserve streaming behavior; do not buffer unless required</a:t>
+            </a:r>
+            <a:endParaRPr lang="en-US" sz="1600" dirty="0"/>
+          </a:p>
+        </p:txBody>
+      </p:sp>
+      <p:sp>
+        <p:nvSpPr>
+          <p:cNvPr id="6" name="Shape 4"/>
+          <p:cNvSpPr/>
+          <p:nvPr/>
+        </p:nvSpPr>
+        <p:spPr>
+          <a:xfrm>
+            <a:off x="365760" y="4773168"/>
+            <a:ext cx="8412480" cy="0"/>
+          </a:xfrm>
+          <a:prstGeom prst="line">
+            <a:avLst/>
+          </a:prstGeom>
+          <a:noFill/>
+          <a:ln w="6350">
+            <a:solidFill>
+              <a:srgbClr val="D1D5DB"/>
+            </a:solidFill>
+            <a:prstDash val="solid"/>
+          </a:ln>
+        </p:spPr>
+      </p:sp>
+      <p:sp>
+        <p:nvSpPr>
+          <p:cNvPr id="7" name="Text 5"/>
+          <p:cNvSpPr/>
+          <p:nvPr/>
+        </p:nvSpPr>
+        <p:spPr>
+          <a:xfrm>
+            <a:off x="384048" y="4818888"/>
+            <a:ext cx="8275320" cy="182880"/>
+          </a:xfrm>
+          <a:prstGeom prst="rect">
+            <a:avLst/>
+          </a:prstGeom>
+          <a:noFill/>
+          <a:ln/>
+        </p:spPr>
+        <p:txBody>
+          <a:bodyPr wrap="square" lIns="0" tIns="0" rIns="0" bIns="0" rtlCol="0" anchor="ctr">
+            <a:normAutofit/>
+          </a:bodyPr>
+          <a:lstStyle/>
+          <a:p>
+            <a:pPr indent="0" marL="0">
+              <a:buNone/>
+            </a:pPr>
+            <a:r>
+              <a:rPr lang="en-US" sz="820" dirty="0">
+                <a:solidFill>
+                  <a:srgbClr val="6B7280"/>
+                </a:solidFill>
+                <a:latin typeface="Calibri" pitchFamily="34" charset="0"/>
+                <a:ea typeface="Calibri" pitchFamily="34" charset="-122"/>
+                <a:cs typeface="Calibri" pitchFamily="34" charset="-120"/>
+              </a:rPr>
+              <a:t>Source: https://learn.microsoft.com/en-us/agent-framework/concepts/agents/middleware/?tabs=python</a:t>
+            </a:r>
+            <a:endParaRPr lang="en-US" sz="820" dirty="0"/>
+          </a:p>
+        </p:txBody>
+      </p:sp>
+    </p:spTree>
+  </p:cSld>
+  <p:clrMapOvr>
+    <a:masterClrMapping/>
+  </p:clrMapOvr>
+</p:sld>
+</file>
+
+<file path=ppt/slides/slide17.xml><?xml version="1.0" encoding="utf-8"?>
+<p:sld xmlns:a="http://schemas.openxmlformats.org/drawingml/2006/main" xmlns:r="http://schemas.openxmlformats.org/officeDocument/2006/relationships" xmlns:p="http://schemas.openxmlformats.org/presentationml/2006/main">
+  <p:cSld name="Slide 17">
+    <p:bg>
+      <p:bgPr>
+        <a:solidFill>
+          <a:srgbClr val="FFFFFF"/>
+        </a:solidFill>
+      </p:bgPr>
+    </p:bg>
+    <p:spTree>
+      <p:nvGrpSpPr>
+        <p:cNvPr id="1" name=""/>
+        <p:cNvGrpSpPr/>
+        <p:nvPr/>
+      </p:nvGrpSpPr>
+      <p:grpSpPr>
+        <a:xfrm>
+          <a:off x="0" y="0"/>
+          <a:ext cx="0" cy="0"/>
+          <a:chOff x="0" y="0"/>
+          <a:chExt cx="0" cy="0"/>
+        </a:xfrm>
+      </p:grpSpPr>
+      <p:sp>
+        <p:nvSpPr>
+          <p:cNvPr id="2" name="Shape 0"/>
+          <p:cNvSpPr/>
+          <p:nvPr/>
+        </p:nvSpPr>
+        <p:spPr>
+          <a:xfrm>
+            <a:off x="0" y="0"/>
+            <a:ext cx="54864" cy="5143500"/>
+          </a:xfrm>
+          <a:prstGeom prst="rect">
+            <a:avLst/>
+          </a:prstGeom>
+          <a:solidFill>
+            <a:srgbClr val="1E2761"/>
+          </a:solidFill>
+          <a:ln/>
+        </p:spPr>
+      </p:sp>
+      <p:sp>
+        <p:nvSpPr>
+          <p:cNvPr id="3" name="Text 1"/>
+          <p:cNvSpPr/>
+          <p:nvPr/>
+        </p:nvSpPr>
+        <p:spPr>
+          <a:xfrm>
+            <a:off x="5486400" y="256032"/>
+            <a:ext cx="3337560" cy="228600"/>
+          </a:xfrm>
+          <a:prstGeom prst="rect">
+            <a:avLst/>
+          </a:prstGeom>
+          <a:noFill/>
+          <a:ln/>
+        </p:spPr>
+        <p:txBody>
+          <a:bodyPr wrap="square" lIns="0" tIns="0" rIns="0" bIns="0" rtlCol="0" anchor="ctr">
+            <a:normAutofit/>
+          </a:bodyPr>
+          <a:lstStyle/>
+          <a:p>
+            <a:pPr algn="r" indent="0" marL="0">
+              <a:buNone/>
+            </a:pPr>
+            <a:r>
+              <a:rPr lang="en-US" sz="950" dirty="0">
+                <a:solidFill>
+                  <a:srgbClr val="6B7280"/>
+                </a:solidFill>
+                <a:latin typeface="Calibri" pitchFamily="34" charset="0"/>
+                <a:ea typeface="Calibri" pitchFamily="34" charset="-122"/>
+                <a:cs typeface="Calibri" pitchFamily="34" charset="-120"/>
+              </a:rPr>
+              <a:t>Day 3 · Module 4</a:t>
+            </a:r>
+            <a:endParaRPr lang="en-US" sz="950" dirty="0"/>
+          </a:p>
+        </p:txBody>
+      </p:sp>
+      <p:sp>
+        <p:nvSpPr>
+          <p:cNvPr id="4" name="Text 2"/>
+          <p:cNvSpPr/>
+          <p:nvPr/>
+        </p:nvSpPr>
+        <p:spPr>
+          <a:xfrm>
+            <a:off x="365760" y="310896"/>
+            <a:ext cx="6583680" cy="603504"/>
+          </a:xfrm>
+          <a:prstGeom prst="rect">
+            <a:avLst/>
+          </a:prstGeom>
+          <a:noFill/>
+          <a:ln/>
+        </p:spPr>
+        <p:txBody>
+          <a:bodyPr wrap="square" lIns="0" tIns="0" rIns="0" bIns="0" rtlCol="0" anchor="ctr">
+            <a:normAutofit/>
+          </a:bodyPr>
+          <a:lstStyle/>
+          <a:p>
+            <a:pPr indent="0" marL="0">
+              <a:buNone/>
+            </a:pPr>
+            <a:r>
+              <a:rPr lang="en-US" sz="2800" b="1" dirty="0">
+                <a:solidFill>
+                  <a:srgbClr val="1E2761"/>
+                </a:solidFill>
+                <a:latin typeface="Calibri" pitchFamily="34" charset="0"/>
+                <a:ea typeface="Calibri" pitchFamily="34" charset="-122"/>
+                <a:cs typeface="Calibri" pitchFamily="34" charset="-120"/>
+              </a:rPr>
+              <a:t>Experimental: Agent Hooks</a:t>
+            </a:r>
+            <a:endParaRPr lang="en-US" sz="2800" dirty="0"/>
+          </a:p>
+        </p:txBody>
+      </p:sp>
+      <p:sp>
+        <p:nvSpPr>
+          <p:cNvPr id="5" name="Shape 3"/>
+          <p:cNvSpPr/>
+          <p:nvPr/>
+        </p:nvSpPr>
+        <p:spPr>
+          <a:xfrm>
+            <a:off x="365760" y="1078992"/>
+            <a:ext cx="4114800" cy="3493008"/>
+          </a:xfrm>
+          <a:prstGeom prst="roundRect">
+            <a:avLst/>
+          </a:prstGeom>
+          <a:solidFill>
+            <a:srgbClr val="F3F4F6"/>
+          </a:solidFill>
+          <a:ln w="11430">
+            <a:solidFill>
+              <a:srgbClr val="D1D5DB"/>
+            </a:solidFill>
+            <a:prstDash val="solid"/>
+          </a:ln>
+        </p:spPr>
+      </p:sp>
+      <p:sp>
+        <p:nvSpPr>
+          <p:cNvPr id="6" name="Text 4"/>
+          <p:cNvSpPr/>
+          <p:nvPr/>
+        </p:nvSpPr>
+        <p:spPr>
+          <a:xfrm>
+            <a:off x="566928" y="1298448"/>
+            <a:ext cx="3712464" cy="411480"/>
+          </a:xfrm>
+          <a:prstGeom prst="rect">
+            <a:avLst/>
+          </a:prstGeom>
+          <a:noFill/>
+          <a:ln/>
+        </p:spPr>
+        <p:txBody>
+          <a:bodyPr wrap="square" lIns="0" tIns="0" rIns="0" bIns="0" rtlCol="0" anchor="ctr">
+            <a:normAutofit/>
+          </a:bodyPr>
+          <a:lstStyle/>
+          <a:p>
+            <a:pPr indent="0" marL="0">
+              <a:buNone/>
+            </a:pPr>
+            <a:r>
+              <a:rPr lang="en-US" sz="2000" b="1" dirty="0">
+                <a:solidFill>
+                  <a:srgbClr val="1E2761"/>
+                </a:solidFill>
+                <a:latin typeface="Calibri" pitchFamily="34" charset="0"/>
+                <a:ea typeface="Calibri" pitchFamily="34" charset="-122"/>
+                <a:cs typeface="Calibri" pitchFamily="34" charset="-120"/>
+              </a:rPr>
+              <a:t>Normal middleware</a:t>
+            </a:r>
+            <a:endParaRPr lang="en-US" sz="2000" dirty="0"/>
+          </a:p>
+        </p:txBody>
+      </p:sp>
+      <p:sp>
+        <p:nvSpPr>
+          <p:cNvPr id="7" name="Text 5"/>
+          <p:cNvSpPr/>
+          <p:nvPr/>
+        </p:nvSpPr>
+        <p:spPr>
+          <a:xfrm>
+            <a:off x="594360" y="1828800"/>
+            <a:ext cx="3639312" cy="2395728"/>
+          </a:xfrm>
+          <a:prstGeom prst="rect">
+            <a:avLst/>
+          </a:prstGeom>
+          <a:noFill/>
+          <a:ln/>
+        </p:spPr>
+        <p:txBody>
+          <a:bodyPr wrap="square" lIns="381" tIns="381" rIns="381" bIns="381" rtlCol="0" anchor="ctr">
+            <a:normAutofit/>
+          </a:bodyPr>
+          <a:lstStyle/>
+          <a:p>
+            <a:pPr marL="342900" indent="-342900">
+              <a:buSzPct val="100000"/>
+              <a:buChar char="•"/>
+            </a:pPr>
+            <a:r>
+              <a:rPr lang="en-US" sz="1300" dirty="0">
+                <a:solidFill>
+                  <a:srgbClr val="212121"/>
+                </a:solidFill>
+                <a:latin typeface="Calibri" pitchFamily="34" charset="0"/>
+                <a:ea typeface="Calibri" pitchFamily="34" charset="-122"/>
+                <a:cs typeface="Calibri" pitchFamily="34" charset="-120"/>
+              </a:rPr>
+              <a:t>General interception and composition</a:t>
+            </a:r>
+            <a:endParaRPr lang="en-US" sz="1300" dirty="0"/>
+          </a:p>
+          <a:p>
+            <a:pPr marL="342900" indent="-342900">
+              <a:buSzPct val="100000"/>
+              <a:buChar char="•"/>
+            </a:pPr>
+            <a:r>
+              <a:rPr lang="en-US" sz="1300" dirty="0">
+                <a:solidFill>
+                  <a:srgbClr val="212121"/>
+                </a:solidFill>
+                <a:latin typeface="Calibri" pitchFamily="34" charset="0"/>
+                <a:ea typeface="Calibri" pitchFamily="34" charset="-122"/>
+                <a:cs typeface="Calibri" pitchFamily="34" charset="-120"/>
+              </a:rPr>
+              <a:t>Application specific ordering and behavior</a:t>
+            </a:r>
+            <a:endParaRPr lang="en-US" sz="1300" dirty="0"/>
+          </a:p>
+          <a:p>
+            <a:pPr marL="342900" indent="-342900">
+              <a:buSzPct val="100000"/>
+              <a:buChar char="•"/>
+            </a:pPr>
+            <a:r>
+              <a:rPr lang="en-US" sz="1300" dirty="0">
+                <a:solidFill>
+                  <a:srgbClr val="212121"/>
+                </a:solidFill>
+                <a:latin typeface="Calibri" pitchFamily="34" charset="0"/>
+                <a:ea typeface="Calibri" pitchFamily="34" charset="-122"/>
+                <a:cs typeface="Calibri" pitchFamily="34" charset="-120"/>
+              </a:rPr>
+              <a:t>Core pattern for this workshop</a:t>
+            </a:r>
+            <a:endParaRPr lang="en-US" sz="1300" dirty="0"/>
+          </a:p>
+        </p:txBody>
+      </p:sp>
+      <p:sp>
+        <p:nvSpPr>
+          <p:cNvPr id="8" name="Shape 6"/>
+          <p:cNvSpPr/>
+          <p:nvPr/>
+        </p:nvSpPr>
+        <p:spPr>
+          <a:xfrm>
+            <a:off x="4663440" y="1078992"/>
+            <a:ext cx="4114800" cy="3493008"/>
+          </a:xfrm>
+          <a:prstGeom prst="roundRect">
+            <a:avLst/>
+          </a:prstGeom>
+          <a:solidFill>
+            <a:srgbClr val="CADCFC"/>
+          </a:solidFill>
+          <a:ln w="11430">
+            <a:solidFill>
+              <a:srgbClr val="1E2761"/>
+            </a:solidFill>
+            <a:prstDash val="solid"/>
+          </a:ln>
+        </p:spPr>
+      </p:sp>
+      <p:sp>
+        <p:nvSpPr>
+          <p:cNvPr id="9" name="Text 7"/>
+          <p:cNvSpPr/>
+          <p:nvPr/>
+        </p:nvSpPr>
+        <p:spPr>
+          <a:xfrm>
+            <a:off x="4864608" y="1298448"/>
+            <a:ext cx="3712464" cy="411480"/>
+          </a:xfrm>
+          <a:prstGeom prst="rect">
+            <a:avLst/>
+          </a:prstGeom>
+          <a:noFill/>
+          <a:ln/>
+        </p:spPr>
+        <p:txBody>
+          <a:bodyPr wrap="square" lIns="0" tIns="0" rIns="0" bIns="0" rtlCol="0" anchor="ctr">
+            <a:normAutofit/>
+          </a:bodyPr>
+          <a:lstStyle/>
+          <a:p>
+            <a:pPr indent="0" marL="0">
+              <a:buNone/>
+            </a:pPr>
+            <a:r>
+              <a:rPr lang="en-US" sz="2000" b="1" dirty="0">
+                <a:solidFill>
+                  <a:srgbClr val="1E2761"/>
+                </a:solidFill>
+                <a:latin typeface="Calibri" pitchFamily="34" charset="0"/>
+                <a:ea typeface="Calibri" pitchFamily="34" charset="-122"/>
+                <a:cs typeface="Calibri" pitchFamily="34" charset="-120"/>
+              </a:rPr>
+              <a:t>Agent Hooks — EXPERIMENTAL</a:t>
+            </a:r>
+            <a:endParaRPr lang="en-US" sz="2000" dirty="0"/>
+          </a:p>
+        </p:txBody>
+      </p:sp>
+      <p:sp>
+        <p:nvSpPr>
+          <p:cNvPr id="10" name="Text 8"/>
+          <p:cNvSpPr/>
+          <p:nvPr/>
+        </p:nvSpPr>
+        <p:spPr>
+          <a:xfrm>
+            <a:off x="4892040" y="1828800"/>
+            <a:ext cx="3639312" cy="2395728"/>
+          </a:xfrm>
+          <a:prstGeom prst="rect">
+            <a:avLst/>
+          </a:prstGeom>
+          <a:noFill/>
+          <a:ln/>
+        </p:spPr>
+        <p:txBody>
+          <a:bodyPr wrap="square" lIns="381" tIns="381" rIns="381" bIns="381" rtlCol="0" anchor="ctr">
+            <a:normAutofit/>
+          </a:bodyPr>
+          <a:lstStyle/>
+          <a:p>
+            <a:pPr marL="342900" indent="-342900">
+              <a:buSzPct val="100000"/>
+              <a:buChar char="•"/>
+            </a:pPr>
+            <a:r>
+              <a:rPr lang="en-US" sz="1300" dirty="0">
+                <a:solidFill>
+                  <a:srgbClr val="212121"/>
+                </a:solidFill>
+                <a:latin typeface="Calibri" pitchFamily="34" charset="0"/>
+                <a:ea typeface="Calibri" pitchFamily="34" charset="-122"/>
+                <a:cs typeface="Calibri" pitchFamily="34" charset="-120"/>
+              </a:rPr>
+              <a:t>Apply standard governance and runtime controls at well-defined points</a:t>
+            </a:r>
+            <a:endParaRPr lang="en-US" sz="1300" dirty="0"/>
+          </a:p>
+          <a:p>
+            <a:pPr marL="342900" indent="-342900">
+              <a:buSzPct val="100000"/>
+              <a:buChar char="•"/>
+            </a:pPr>
+            <a:r>
+              <a:rPr lang="en-US" sz="1300" dirty="0">
+                <a:solidFill>
+                  <a:srgbClr val="212121"/>
+                </a:solidFill>
+                <a:latin typeface="Calibri" pitchFamily="34" charset="0"/>
+                <a:ea typeface="Calibri" pitchFamily="34" charset="-122"/>
+                <a:cs typeface="Calibri" pitchFamily="34" charset="-120"/>
+              </a:rPr>
+              <a:t>Implements Agent Hooks Specification</a:t>
+            </a:r>
+            <a:endParaRPr lang="en-US" sz="1300" dirty="0"/>
+          </a:p>
+          <a:p>
+            <a:pPr marL="342900" indent="-342900">
+              <a:buSzPct val="100000"/>
+              <a:buChar char="•"/>
+            </a:pPr>
+            <a:r>
+              <a:rPr lang="en-US" sz="1300" dirty="0">
+                <a:solidFill>
+                  <a:srgbClr val="212121"/>
+                </a:solidFill>
+                <a:latin typeface="Calibri" pitchFamily="34" charset="0"/>
+                <a:ea typeface="Calibri" pitchFamily="34" charset="-122"/>
+                <a:cs typeface="Calibri" pitchFamily="34" charset="-120"/>
+              </a:rPr>
+              <a:t>Control plane, not telemetry plane</a:t>
+            </a:r>
+            <a:endParaRPr lang="en-US" sz="1300" dirty="0"/>
+          </a:p>
+          <a:p>
+            <a:pPr marL="342900" indent="-342900">
+              <a:buSzPct val="100000"/>
+              <a:buChar char="•"/>
+            </a:pPr>
+            <a:r>
+              <a:rPr lang="en-US" sz="1300" dirty="0">
+                <a:solidFill>
+                  <a:srgbClr val="212121"/>
+                </a:solidFill>
+                <a:latin typeface="Calibri" pitchFamily="34" charset="0"/>
+                <a:ea typeface="Calibri" pitchFamily="34" charset="-122"/>
+                <a:cs typeface="Calibri" pitchFamily="34" charset="-120"/>
+              </a:rPr>
+              <a:t>Interceptors return a verdit that can optionally be enforced</a:t>
+            </a:r>
+            <a:endParaRPr lang="en-US" sz="1300" dirty="0"/>
+          </a:p>
+        </p:txBody>
+      </p:sp>
+      <p:sp>
+        <p:nvSpPr>
+          <p:cNvPr id="11" name="Shape 9"/>
+          <p:cNvSpPr/>
+          <p:nvPr/>
+        </p:nvSpPr>
+        <p:spPr>
+          <a:xfrm>
+            <a:off x="365760" y="4773168"/>
+            <a:ext cx="8412480" cy="0"/>
+          </a:xfrm>
+          <a:prstGeom prst="line">
+            <a:avLst/>
+          </a:prstGeom>
+          <a:noFill/>
+          <a:ln w="6350">
+            <a:solidFill>
+              <a:srgbClr val="D1D5DB"/>
+            </a:solidFill>
+            <a:prstDash val="solid"/>
+          </a:ln>
+        </p:spPr>
+      </p:sp>
+      <p:sp>
+        <p:nvSpPr>
+          <p:cNvPr id="12" name="Text 10"/>
+          <p:cNvSpPr/>
+          <p:nvPr/>
+        </p:nvSpPr>
+        <p:spPr>
+          <a:xfrm>
+            <a:off x="384048" y="4818888"/>
+            <a:ext cx="8275320" cy="182880"/>
+          </a:xfrm>
+          <a:prstGeom prst="rect">
+            <a:avLst/>
+          </a:prstGeom>
+          <a:noFill/>
+          <a:ln/>
+        </p:spPr>
+        <p:txBody>
+          <a:bodyPr wrap="square" lIns="0" tIns="0" rIns="0" bIns="0" rtlCol="0" anchor="ctr">
+            <a:normAutofit/>
+          </a:bodyPr>
+          <a:lstStyle/>
+          <a:p>
+            <a:pPr indent="0" marL="0">
+              <a:buNone/>
+            </a:pPr>
+            <a:r>
+              <a:rPr lang="en-US" sz="820" dirty="0">
+                <a:solidFill>
+                  <a:srgbClr val="6B7280"/>
+                </a:solidFill>
+                <a:latin typeface="Calibri" pitchFamily="34" charset="0"/>
+                <a:ea typeface="Calibri" pitchFamily="34" charset="-122"/>
+                <a:cs typeface="Calibri" pitchFamily="34" charset="-120"/>
+              </a:rPr>
+              <a:t>Source: https://learn.microsoft.com/en-us/agent-framework/agents/agent-hooks?tabs=python</a:t>
+            </a:r>
+            <a:endParaRPr lang="en-US" sz="820" dirty="0"/>
+          </a:p>
+        </p:txBody>
+      </p:sp>
+    </p:spTree>
+  </p:cSld>
+  <p:clrMapOvr>
+    <a:masterClrMapping/>
+  </p:clrMapOvr>
+</p:sld>
+</file>
+
+<file path=ppt/slides/slide18.xml><?xml version="1.0" encoding="utf-8"?>
+<p:sld xmlns:a="http://schemas.openxmlformats.org/drawingml/2006/main" xmlns:r="http://schemas.openxmlformats.org/officeDocument/2006/relationships" xmlns:p="http://schemas.openxmlformats.org/presentationml/2006/main">
+  <p:cSld name="Slide 18">
+    <p:bg>
+      <p:bgPr>
+        <a:solidFill>
+          <a:srgbClr val="FFFFFF"/>
+        </a:solidFill>
+      </p:bgPr>
+    </p:bg>
+    <p:spTree>
+      <p:nvGrpSpPr>
+        <p:cNvPr id="1" name=""/>
+        <p:cNvGrpSpPr/>
+        <p:nvPr/>
+      </p:nvGrpSpPr>
+      <p:grpSpPr>
+        <a:xfrm>
+          <a:off x="0" y="0"/>
+          <a:ext cx="0" cy="0"/>
+          <a:chOff x="0" y="0"/>
+          <a:chExt cx="0" cy="0"/>
+        </a:xfrm>
+      </p:grpSpPr>
+      <p:sp>
+        <p:nvSpPr>
+          <p:cNvPr id="2" name="Shape 0"/>
+          <p:cNvSpPr/>
+          <p:nvPr/>
+        </p:nvSpPr>
+        <p:spPr>
+          <a:xfrm>
+            <a:off x="0" y="0"/>
+            <a:ext cx="54864" cy="5143500"/>
+          </a:xfrm>
+          <a:prstGeom prst="rect">
+            <a:avLst/>
+          </a:prstGeom>
+          <a:solidFill>
+            <a:srgbClr val="1E2761"/>
+          </a:solidFill>
+          <a:ln/>
+        </p:spPr>
+      </p:sp>
+      <p:sp>
+        <p:nvSpPr>
+          <p:cNvPr id="3" name="Text 1"/>
+          <p:cNvSpPr/>
+          <p:nvPr/>
+        </p:nvSpPr>
+        <p:spPr>
+          <a:xfrm>
+            <a:off x="5486400" y="256032"/>
+            <a:ext cx="3337560" cy="228600"/>
+          </a:xfrm>
+          <a:prstGeom prst="rect">
+            <a:avLst/>
+          </a:prstGeom>
+          <a:noFill/>
+          <a:ln/>
+        </p:spPr>
+        <p:txBody>
+          <a:bodyPr wrap="square" lIns="0" tIns="0" rIns="0" bIns="0" rtlCol="0" anchor="ctr">
+            <a:normAutofit/>
+          </a:bodyPr>
+          <a:lstStyle/>
+          <a:p>
+            <a:pPr algn="r" indent="0" marL="0">
+              <a:buNone/>
+            </a:pPr>
+            <a:r>
+              <a:rPr lang="en-US" sz="950" dirty="0">
+                <a:solidFill>
+                  <a:srgbClr val="6B7280"/>
+                </a:solidFill>
+                <a:latin typeface="Calibri" pitchFamily="34" charset="0"/>
+                <a:ea typeface="Calibri" pitchFamily="34" charset="-122"/>
+                <a:cs typeface="Calibri" pitchFamily="34" charset="-120"/>
+              </a:rPr>
+              <a:t>Day 3 · Module 4</a:t>
+            </a:r>
+            <a:endParaRPr lang="en-US" sz="950" dirty="0"/>
+          </a:p>
+        </p:txBody>
+      </p:sp>
+      <p:sp>
+        <p:nvSpPr>
+          <p:cNvPr id="4" name="Text 2"/>
+          <p:cNvSpPr/>
+          <p:nvPr/>
+        </p:nvSpPr>
+        <p:spPr>
+          <a:xfrm>
+            <a:off x="365760" y="310896"/>
+            <a:ext cx="6583680" cy="603504"/>
+          </a:xfrm>
+          <a:prstGeom prst="rect">
+            <a:avLst/>
+          </a:prstGeom>
+          <a:noFill/>
+          <a:ln/>
+        </p:spPr>
+        <p:txBody>
+          <a:bodyPr wrap="square" lIns="0" tIns="0" rIns="0" bIns="0" rtlCol="0" anchor="ctr">
+            <a:normAutofit/>
+          </a:bodyPr>
+          <a:lstStyle/>
+          <a:p>
+            <a:pPr indent="0" marL="0">
+              <a:buNone/>
+            </a:pPr>
+            <a:r>
               <a:rPr lang="en-US" sz="2800" b="1" dirty="0">
                 <a:solidFill>
                   <a:srgbClr val="1E2761"/>
@@ -6948,7 +8327,7 @@
             <a:avLst/>
           </a:prstGeom>
           <a:solidFill>
-            <a:srgbClr val="CADCFC"/>
+            <a:srgbClr val="F3F4F6"/>
           </a:solidFill>
           <a:ln w="6350">
             <a:solidFill>
@@ -7242,7 +8621,7 @@
               <a:buNone/>
             </a:pPr>
             <a:r>
-              <a:rPr lang="en-US" sz="2500" b="1" dirty="0">
+              <a:rPr lang="en-US" sz="2800" b="1" dirty="0">
                 <a:solidFill>
                   <a:srgbClr val="1E2761"/>
                 </a:solidFill>
@@ -7250,15 +8629,427 @@
                 <a:ea typeface="Calibri" pitchFamily="34" charset="-122"/>
                 <a:cs typeface="Calibri" pitchFamily="34" charset="-120"/>
               </a:rPr>
-              <a:t>Three layers fire at different frequencies</a:t>
-            </a:r>
-            <a:endParaRPr lang="en-US" sz="2500" dirty="0"/>
+              <a:t>Overview</a:t>
+            </a:r>
+            <a:endParaRPr lang="en-US" sz="2800" dirty="0"/>
+          </a:p>
+        </p:txBody>
+      </p:sp>
+      <p:sp>
+        <p:nvSpPr>
+          <p:cNvPr id="5" name="Text 3"/>
+          <p:cNvSpPr/>
+          <p:nvPr/>
+        </p:nvSpPr>
+        <p:spPr>
+          <a:xfrm>
+            <a:off x="502920" y="1078992"/>
+            <a:ext cx="7955280" cy="2204085"/>
+          </a:xfrm>
+          <a:prstGeom prst="rect">
+            <a:avLst/>
+          </a:prstGeom>
+          <a:noFill/>
+          <a:ln/>
+        </p:spPr>
+        <p:txBody>
+          <a:bodyPr wrap="square" lIns="0" tIns="0" rIns="0" bIns="0" rtlCol="0" anchor="t">
+            <a:normAutofit/>
+          </a:bodyPr>
+          <a:lstStyle/>
+          <a:p>
+            <a:pPr marL="342900" indent="-342900">
+              <a:spcAft>
+                <a:spcPts val="1000"/>
+              </a:spcAft>
+              <a:buSzPct val="100000"/>
+              <a:buChar char="•"/>
+            </a:pPr>
+            <a:r>
+              <a:rPr lang="en-US" sz="1600" dirty="0">
+                <a:solidFill>
+                  <a:srgbClr val="212121"/>
+                </a:solidFill>
+                <a:latin typeface="Calibri" pitchFamily="34" charset="0"/>
+                <a:ea typeface="Calibri" pitchFamily="34" charset="-122"/>
+                <a:cs typeface="Calibri" pitchFamily="34" charset="-120"/>
+              </a:rPr>
+              <a:t>Middleware implements cross-cutting concerns</a:t>
+            </a:r>
+            <a:endParaRPr lang="en-US" sz="1600" dirty="0"/>
+          </a:p>
+          <a:p>
+            <a:pPr lvl="1" marL="457200" indent="-228600">
+              <a:spcAft>
+                <a:spcPts val="1000"/>
+              </a:spcAft>
+              <a:buSzPct val="100000"/>
+              <a:buChar char="•"/>
+            </a:pPr>
+            <a:r>
+              <a:rPr lang="en-US" sz="1600" dirty="0">
+                <a:solidFill>
+                  <a:srgbClr val="212121"/>
+                </a:solidFill>
+                <a:latin typeface="Calibri" pitchFamily="34" charset="0"/>
+                <a:ea typeface="Calibri" pitchFamily="34" charset="-122"/>
+                <a:cs typeface="Calibri" pitchFamily="34" charset="-120"/>
+              </a:rPr>
+              <a:t>Logging</a:t>
+            </a:r>
+            <a:endParaRPr lang="en-US" sz="1600" dirty="0"/>
+          </a:p>
+          <a:p>
+            <a:pPr lvl="1" marL="457200" indent="-228600">
+              <a:spcAft>
+                <a:spcPts val="1000"/>
+              </a:spcAft>
+              <a:buSzPct val="100000"/>
+              <a:buChar char="•"/>
+            </a:pPr>
+            <a:r>
+              <a:rPr lang="en-US" sz="1600" dirty="0">
+                <a:solidFill>
+                  <a:srgbClr val="212121"/>
+                </a:solidFill>
+                <a:latin typeface="Calibri" pitchFamily="34" charset="0"/>
+                <a:ea typeface="Calibri" pitchFamily="34" charset="-122"/>
+                <a:cs typeface="Calibri" pitchFamily="34" charset="-120"/>
+              </a:rPr>
+              <a:t>Security valication</a:t>
+            </a:r>
+            <a:endParaRPr lang="en-US" sz="1600" dirty="0"/>
+          </a:p>
+          <a:p>
+            <a:pPr lvl="1" marL="457200" indent="-228600">
+              <a:spcAft>
+                <a:spcPts val="1000"/>
+              </a:spcAft>
+              <a:buSzPct val="100000"/>
+              <a:buChar char="•"/>
+            </a:pPr>
+            <a:r>
+              <a:rPr lang="en-US" sz="1600" dirty="0">
+                <a:solidFill>
+                  <a:srgbClr val="212121"/>
+                </a:solidFill>
+                <a:latin typeface="Calibri" pitchFamily="34" charset="0"/>
+                <a:ea typeface="Calibri" pitchFamily="34" charset="-122"/>
+                <a:cs typeface="Calibri" pitchFamily="34" charset="-120"/>
+              </a:rPr>
+              <a:t>Error handling</a:t>
+            </a:r>
+            <a:endParaRPr lang="en-US" sz="1600" dirty="0"/>
+          </a:p>
+          <a:p>
+            <a:pPr lvl="1" marL="457200" indent="-228600">
+              <a:spcAft>
+                <a:spcPts val="1000"/>
+              </a:spcAft>
+              <a:buSzPct val="100000"/>
+              <a:buChar char="•"/>
+            </a:pPr>
+            <a:r>
+              <a:rPr lang="en-US" sz="1600" dirty="0">
+                <a:solidFill>
+                  <a:srgbClr val="212121"/>
+                </a:solidFill>
+                <a:latin typeface="Calibri" pitchFamily="34" charset="0"/>
+                <a:ea typeface="Calibri" pitchFamily="34" charset="-122"/>
+                <a:cs typeface="Calibri" pitchFamily="34" charset="-120"/>
+              </a:rPr>
+              <a:t>Transformation of results</a:t>
+            </a:r>
+            <a:endParaRPr lang="en-US" sz="1600" dirty="0"/>
+          </a:p>
+          <a:p>
+            <a:pPr marL="342900" indent="-342900">
+              <a:spcAft>
+                <a:spcPts val="1000"/>
+              </a:spcAft>
+              <a:buSzPct val="100000"/>
+              <a:buChar char="•"/>
+            </a:pPr>
+            <a:r>
+              <a:rPr lang="en-US" sz="1600" dirty="0">
+                <a:solidFill>
+                  <a:srgbClr val="212121"/>
+                </a:solidFill>
+                <a:latin typeface="Calibri" pitchFamily="34" charset="0"/>
+                <a:ea typeface="Calibri" pitchFamily="34" charset="-122"/>
+                <a:cs typeface="Calibri" pitchFamily="34" charset="-120"/>
+              </a:rPr>
+              <a:t>Separate from your core logic</a:t>
+            </a:r>
+            <a:endParaRPr lang="en-US" sz="1600" dirty="0"/>
+          </a:p>
+        </p:txBody>
+      </p:sp>
+      <p:sp>
+        <p:nvSpPr>
+          <p:cNvPr id="6" name="Text 4"/>
+          <p:cNvSpPr/>
+          <p:nvPr/>
+        </p:nvSpPr>
+        <p:spPr>
+          <a:xfrm>
+            <a:off x="365760" y="3411093"/>
+            <a:ext cx="8412480" cy="1298067"/>
+          </a:xfrm>
+          <a:prstGeom prst="rect">
+            <a:avLst/>
+          </a:prstGeom>
+          <a:noFill/>
+          <a:ln/>
+        </p:spPr>
+        <p:txBody>
+          <a:bodyPr wrap="square" lIns="0" tIns="0" rIns="0" bIns="0" rtlCol="0" anchor="t">
+            <a:normAutofit/>
+          </a:bodyPr>
+          <a:lstStyle/>
+          <a:p>
+            <a:pPr indent="0" marL="0">
+              <a:spcAft>
+                <a:spcPts val="800"/>
+              </a:spcAft>
+              <a:buNone/>
+            </a:pPr>
+            <a:r>
+              <a:rPr lang="en-US" sz="1300" dirty="0">
+                <a:solidFill>
+                  <a:srgbClr val="6B7280"/>
+                </a:solidFill>
+                <a:latin typeface="Calibri" pitchFamily="34" charset="0"/>
+                <a:ea typeface="Calibri" pitchFamily="34" charset="-122"/>
+                <a:cs typeface="Calibri" pitchFamily="34" charset="-120"/>
+              </a:rPr>
+              <a:t>When multiple middleware of the same type are registered, they form a chain where each calls the call_next() callback to continue processing.</a:t>
+            </a:r>
+            <a:endParaRPr lang="en-US" sz="1300" dirty="0"/>
+          </a:p>
+          <a:p>
+            <a:pPr indent="0" marL="0">
+              <a:spcAft>
+                <a:spcPts val="800"/>
+              </a:spcAft>
+              <a:buNone/>
+            </a:pPr>
+            <a:r>
+              <a:rPr lang="en-US" sz="1300" dirty="0">
+                <a:solidFill>
+                  <a:srgbClr val="6B7280"/>
+                </a:solidFill>
+                <a:latin typeface="Calibri" pitchFamily="34" charset="0"/>
+                <a:ea typeface="Calibri" pitchFamily="34" charset="-122"/>
+                <a:cs typeface="Calibri" pitchFamily="34" charset="-120"/>
+              </a:rPr>
+              <a:t>call_next() does not take the context as an argument; middleware mutates the shared context object directly and then awaits call_next(). The call_next callback continues the middleware chain or executes the agent if it's the last middleware.</a:t>
+            </a:r>
+            <a:endParaRPr lang="en-US" sz="1300" dirty="0"/>
+          </a:p>
+        </p:txBody>
+      </p:sp>
+      <p:sp>
+        <p:nvSpPr>
+          <p:cNvPr id="7" name="Shape 5"/>
+          <p:cNvSpPr/>
+          <p:nvPr/>
+        </p:nvSpPr>
+        <p:spPr>
+          <a:xfrm>
+            <a:off x="365760" y="4773168"/>
+            <a:ext cx="8412480" cy="0"/>
+          </a:xfrm>
+          <a:prstGeom prst="line">
+            <a:avLst/>
+          </a:prstGeom>
+          <a:noFill/>
+          <a:ln w="6350">
+            <a:solidFill>
+              <a:srgbClr val="D1D5DB"/>
+            </a:solidFill>
+            <a:prstDash val="solid"/>
+          </a:ln>
+        </p:spPr>
+      </p:sp>
+      <p:sp>
+        <p:nvSpPr>
+          <p:cNvPr id="8" name="Text 6"/>
+          <p:cNvSpPr/>
+          <p:nvPr/>
+        </p:nvSpPr>
+        <p:spPr>
+          <a:xfrm>
+            <a:off x="384048" y="4818888"/>
+            <a:ext cx="8275320" cy="182880"/>
+          </a:xfrm>
+          <a:prstGeom prst="rect">
+            <a:avLst/>
+          </a:prstGeom>
+          <a:noFill/>
+          <a:ln/>
+        </p:spPr>
+        <p:txBody>
+          <a:bodyPr wrap="square" lIns="0" tIns="0" rIns="0" bIns="0" rtlCol="0" anchor="ctr">
+            <a:normAutofit/>
+          </a:bodyPr>
+          <a:lstStyle/>
+          <a:p>
+            <a:pPr indent="0" marL="0">
+              <a:buNone/>
+            </a:pPr>
+            <a:r>
+              <a:rPr lang="en-US" sz="820" dirty="0">
+                <a:solidFill>
+                  <a:srgbClr val="6B7280"/>
+                </a:solidFill>
+                <a:latin typeface="Calibri" pitchFamily="34" charset="0"/>
+                <a:ea typeface="Calibri" pitchFamily="34" charset="-122"/>
+                <a:cs typeface="Calibri" pitchFamily="34" charset="-120"/>
+              </a:rPr>
+              <a:t>Source: https://learn.microsoft.com/en-us/agent-framework/concepts/agents/middleware/?tabs=python&amp;pivots=programming-language-python</a:t>
+            </a:r>
+            <a:endParaRPr lang="en-US" sz="820" dirty="0"/>
+          </a:p>
+        </p:txBody>
+      </p:sp>
+    </p:spTree>
+  </p:cSld>
+  <p:clrMapOvr>
+    <a:masterClrMapping/>
+  </p:clrMapOvr>
+</p:sld>
+</file>
+
+<file path=ppt/slides/slide3.xml><?xml version="1.0" encoding="utf-8"?>
+<p:sld xmlns:a="http://schemas.openxmlformats.org/drawingml/2006/main" xmlns:r="http://schemas.openxmlformats.org/officeDocument/2006/relationships" xmlns:p="http://schemas.openxmlformats.org/presentationml/2006/main">
+  <p:cSld name="Slide 3">
+    <p:bg>
+      <p:bgPr>
+        <a:solidFill>
+          <a:srgbClr val="FFFFFF"/>
+        </a:solidFill>
+      </p:bgPr>
+    </p:bg>
+    <p:spTree>
+      <p:nvGrpSpPr>
+        <p:cNvPr id="1" name=""/>
+        <p:cNvGrpSpPr/>
+        <p:nvPr/>
+      </p:nvGrpSpPr>
+      <p:grpSpPr>
+        <a:xfrm>
+          <a:off x="0" y="0"/>
+          <a:ext cx="0" cy="0"/>
+          <a:chOff x="0" y="0"/>
+          <a:chExt cx="0" cy="0"/>
+        </a:xfrm>
+      </p:grpSpPr>
+      <p:sp>
+        <p:nvSpPr>
+          <p:cNvPr id="2" name="Shape 0"/>
+          <p:cNvSpPr/>
+          <p:nvPr/>
+        </p:nvSpPr>
+        <p:spPr>
+          <a:xfrm>
+            <a:off x="0" y="0"/>
+            <a:ext cx="54864" cy="5143500"/>
+          </a:xfrm>
+          <a:prstGeom prst="rect">
+            <a:avLst/>
+          </a:prstGeom>
+          <a:solidFill>
+            <a:srgbClr val="1E2761"/>
+          </a:solidFill>
+          <a:ln/>
+        </p:spPr>
+      </p:sp>
+      <p:sp>
+        <p:nvSpPr>
+          <p:cNvPr id="3" name="Text 1"/>
+          <p:cNvSpPr/>
+          <p:nvPr/>
+        </p:nvSpPr>
+        <p:spPr>
+          <a:xfrm>
+            <a:off x="5486400" y="256032"/>
+            <a:ext cx="3337560" cy="228600"/>
+          </a:xfrm>
+          <a:prstGeom prst="rect">
+            <a:avLst/>
+          </a:prstGeom>
+          <a:noFill/>
+          <a:ln/>
+        </p:spPr>
+        <p:txBody>
+          <a:bodyPr wrap="square" lIns="0" tIns="0" rIns="0" bIns="0" rtlCol="0" anchor="ctr">
+            <a:normAutofit/>
+          </a:bodyPr>
+          <a:lstStyle/>
+          <a:p>
+            <a:pPr algn="r" indent="0" marL="0">
+              <a:buNone/>
+            </a:pPr>
+            <a:r>
+              <a:rPr lang="en-US" sz="950" dirty="0">
+                <a:solidFill>
+                  <a:srgbClr val="6B7280"/>
+                </a:solidFill>
+                <a:latin typeface="Calibri" pitchFamily="34" charset="0"/>
+                <a:ea typeface="Calibri" pitchFamily="34" charset="-122"/>
+                <a:cs typeface="Calibri" pitchFamily="34" charset="-120"/>
+              </a:rPr>
+              <a:t>Day 3 · Module 4</a:t>
+            </a:r>
+            <a:endParaRPr lang="en-US" sz="950" dirty="0"/>
+          </a:p>
+        </p:txBody>
+      </p:sp>
+      <p:sp>
+        <p:nvSpPr>
+          <p:cNvPr id="4" name="Text 2"/>
+          <p:cNvSpPr/>
+          <p:nvPr/>
+        </p:nvSpPr>
+        <p:spPr>
+          <a:xfrm>
+            <a:off x="365760" y="310896"/>
+            <a:ext cx="6583680" cy="603504"/>
+          </a:xfrm>
+          <a:prstGeom prst="rect">
+            <a:avLst/>
+          </a:prstGeom>
+          <a:noFill/>
+          <a:ln/>
+        </p:spPr>
+        <p:txBody>
+          <a:bodyPr wrap="square" lIns="0" tIns="0" rIns="0" bIns="0" rtlCol="0" anchor="ctr">
+            <a:normAutofit/>
+          </a:bodyPr>
+          <a:lstStyle/>
+          <a:p>
+            <a:pPr indent="0" marL="0">
+              <a:buNone/>
+            </a:pPr>
+            <a:r>
+              <a:rPr lang="en-US" sz="2800" b="1" dirty="0">
+                <a:solidFill>
+                  <a:srgbClr val="1E2761"/>
+                </a:solidFill>
+                <a:latin typeface="Calibri" pitchFamily="34" charset="0"/>
+                <a:ea typeface="Calibri" pitchFamily="34" charset="-122"/>
+                <a:cs typeface="Calibri" pitchFamily="34" charset="-120"/>
+              </a:rPr>
+              <a:t>Three Types of Middleware</a:t>
+            </a:r>
+            <a:endParaRPr lang="en-US" sz="2800" dirty="0"/>
           </a:p>
         </p:txBody>
       </p:sp>
       <p:graphicFrame>
         <p:nvGraphicFramePr>
-          <p:cNvPr id="3" name="Table 0"/>
+          <p:cNvPr id="4" name="Table 0"/>
           <p:cNvGraphicFramePr>
             <a:graphicFrameLocks noGrp="1"/>
           </p:cNvGraphicFramePr>
@@ -7713,7 +9504,7 @@
                           <a:ea typeface="Calibri" pitchFamily="34" charset="-122"/>
                           <a:cs typeface="Calibri" pitchFamily="34" charset="-120"/>
                         </a:rPr>
-                        <a:t>Function middleware</a:t>
+                        <a:t>Function (tool) middleware</a:t>
                       </a:r>
                       <a:endParaRPr lang="en-US" sz="1100" dirty="0">
                         <a:latin typeface="Calibri" charset="0"/>
@@ -8113,7 +9904,51 @@
       </p:graphicFrame>
       <p:sp>
         <p:nvSpPr>
-          <p:cNvPr id="6" name="Shape 3"/>
+          <p:cNvPr id="6" name="Text 3"/>
+          <p:cNvSpPr/>
+          <p:nvPr/>
+        </p:nvSpPr>
+        <p:spPr>
+          <a:xfrm>
+            <a:off x="365760" y="4338193"/>
+            <a:ext cx="8412480" cy="370967"/>
+          </a:xfrm>
+          <a:prstGeom prst="rect">
+            <a:avLst/>
+          </a:prstGeom>
+          <a:noFill/>
+          <a:ln/>
+        </p:spPr>
+        <p:txBody>
+          <a:bodyPr wrap="square" lIns="0" tIns="0" rIns="0" bIns="0" rtlCol="0" anchor="t">
+            <a:normAutofit/>
+          </a:bodyPr>
+          <a:lstStyle/>
+          <a:p>
+            <a:pPr indent="0" marL="0">
+              <a:spcAft>
+                <a:spcPts val="800"/>
+              </a:spcAft>
+              <a:buNone/>
+            </a:pPr>
+            <a:r>
+              <a:rPr lang="en-US" sz="1300" dirty="0">
+                <a:solidFill>
+                  <a:srgbClr val="6B7280"/>
+                </a:solidFill>
+                <a:latin typeface="Calibri" pitchFamily="34" charset="0"/>
+                <a:ea typeface="Calibri" pitchFamily="34" charset="-122"/>
+                <a:cs typeface="Calibri" pitchFamily="34" charset="-120"/>
+              </a:rPr>
+              <a:t>All types support both function-based and class-based implementations</a:t>
+            </a:r>
+            <a:endParaRPr lang="en-US" sz="1300" dirty="0"/>
+          </a:p>
+        </p:txBody>
+      </p:sp>
+      <p:sp>
+        <p:nvSpPr>
+          <p:cNvPr id="7" name="Shape 4"/>
           <p:cNvSpPr/>
           <p:nvPr/>
         </p:nvSpPr>
@@ -8136,7 +9971,7 @@
       </p:sp>
       <p:sp>
         <p:nvSpPr>
-          <p:cNvPr id="7" name="Text 4"/>
+          <p:cNvPr id="8" name="Text 5"/>
           <p:cNvSpPr/>
           <p:nvPr/>
         </p:nvSpPr>
@@ -8170,492 +10005,6 @@
                 <a:cs typeface="Calibri" pitchFamily="34" charset="-120"/>
               </a:rPr>
               <a:t>Source: https://learn.microsoft.com/en-us/agent-framework/concepts/agents/middleware/?tabs=python</a:t>
-            </a:r>
-            <a:endParaRPr lang="en-US" sz="820" dirty="0"/>
-          </a:p>
-        </p:txBody>
-      </p:sp>
-    </p:spTree>
-  </p:cSld>
-  <p:clrMapOvr>
-    <a:masterClrMapping/>
-  </p:clrMapOvr>
-</p:sld>
-</file>
-
-<file path=ppt/slides/slide3.xml><?xml version="1.0" encoding="utf-8"?>
-<p:sld xmlns:a="http://schemas.openxmlformats.org/drawingml/2006/main" xmlns:r="http://schemas.openxmlformats.org/officeDocument/2006/relationships" xmlns:p="http://schemas.openxmlformats.org/presentationml/2006/main">
-  <p:cSld name="Slide 3">
-    <p:bg>
-      <p:bgPr>
-        <a:solidFill>
-          <a:srgbClr val="FFFFFF"/>
-        </a:solidFill>
-      </p:bgPr>
-    </p:bg>
-    <p:spTree>
-      <p:nvGrpSpPr>
-        <p:cNvPr id="1" name=""/>
-        <p:cNvGrpSpPr/>
-        <p:nvPr/>
-      </p:nvGrpSpPr>
-      <p:grpSpPr>
-        <a:xfrm>
-          <a:off x="0" y="0"/>
-          <a:ext cx="0" cy="0"/>
-          <a:chOff x="0" y="0"/>
-          <a:chExt cx="0" cy="0"/>
-        </a:xfrm>
-      </p:grpSpPr>
-      <p:sp>
-        <p:nvSpPr>
-          <p:cNvPr id="2" name="Shape 0"/>
-          <p:cNvSpPr/>
-          <p:nvPr/>
-        </p:nvSpPr>
-        <p:spPr>
-          <a:xfrm>
-            <a:off x="0" y="0"/>
-            <a:ext cx="54864" cy="5143500"/>
-          </a:xfrm>
-          <a:prstGeom prst="rect">
-            <a:avLst/>
-          </a:prstGeom>
-          <a:solidFill>
-            <a:srgbClr val="1E2761"/>
-          </a:solidFill>
-          <a:ln/>
-        </p:spPr>
-      </p:sp>
-      <p:sp>
-        <p:nvSpPr>
-          <p:cNvPr id="3" name="Text 1"/>
-          <p:cNvSpPr/>
-          <p:nvPr/>
-        </p:nvSpPr>
-        <p:spPr>
-          <a:xfrm>
-            <a:off x="5486400" y="256032"/>
-            <a:ext cx="3337560" cy="228600"/>
-          </a:xfrm>
-          <a:prstGeom prst="rect">
-            <a:avLst/>
-          </a:prstGeom>
-          <a:noFill/>
-          <a:ln/>
-        </p:spPr>
-        <p:txBody>
-          <a:bodyPr wrap="square" lIns="0" tIns="0" rIns="0" bIns="0" rtlCol="0" anchor="ctr">
-            <a:normAutofit/>
-          </a:bodyPr>
-          <a:lstStyle/>
-          <a:p>
-            <a:pPr algn="r" indent="0" marL="0">
-              <a:buNone/>
-            </a:pPr>
-            <a:r>
-              <a:rPr lang="en-US" sz="950" dirty="0">
-                <a:solidFill>
-                  <a:srgbClr val="6B7280"/>
-                </a:solidFill>
-                <a:latin typeface="Calibri" pitchFamily="34" charset="0"/>
-                <a:ea typeface="Calibri" pitchFamily="34" charset="-122"/>
-                <a:cs typeface="Calibri" pitchFamily="34" charset="-120"/>
-              </a:rPr>
-              <a:t>Day 3 · Module 4</a:t>
-            </a:r>
-            <a:endParaRPr lang="en-US" sz="950" dirty="0"/>
-          </a:p>
-        </p:txBody>
-      </p:sp>
-      <p:sp>
-        <p:nvSpPr>
-          <p:cNvPr id="4" name="Text 2"/>
-          <p:cNvSpPr/>
-          <p:nvPr/>
-        </p:nvSpPr>
-        <p:spPr>
-          <a:xfrm>
-            <a:off x="365760" y="310896"/>
-            <a:ext cx="6583680" cy="603504"/>
-          </a:xfrm>
-          <a:prstGeom prst="rect">
-            <a:avLst/>
-          </a:prstGeom>
-          <a:noFill/>
-          <a:ln/>
-        </p:spPr>
-        <p:txBody>
-          <a:bodyPr wrap="square" lIns="0" tIns="0" rIns="0" bIns="0" rtlCol="0" anchor="ctr">
-            <a:normAutofit/>
-          </a:bodyPr>
-          <a:lstStyle/>
-          <a:p>
-            <a:pPr indent="0" marL="0">
-              <a:buNone/>
-            </a:pPr>
-            <a:r>
-              <a:rPr lang="en-US" sz="2500" b="1" dirty="0">
-                <a:solidFill>
-                  <a:srgbClr val="1E2761"/>
-                </a:solidFill>
-                <a:latin typeface="Calibri" pitchFamily="34" charset="0"/>
-                <a:ea typeface="Calibri" pitchFamily="34" charset="-122"/>
-                <a:cs typeface="Calibri" pitchFamily="34" charset="-120"/>
-              </a:rPr>
-              <a:t>Pick agent-level or run-level scope</a:t>
-            </a:r>
-            <a:endParaRPr lang="en-US" sz="2500" dirty="0"/>
-          </a:p>
-        </p:txBody>
-      </p:sp>
-      <p:sp>
-        <p:nvSpPr>
-          <p:cNvPr id="5" name="Shape 3"/>
-          <p:cNvSpPr/>
-          <p:nvPr/>
-        </p:nvSpPr>
-        <p:spPr>
-          <a:xfrm>
-            <a:off x="365760" y="1078992"/>
-            <a:ext cx="4114800" cy="3493008"/>
-          </a:xfrm>
-          <a:prstGeom prst="roundRect">
-            <a:avLst/>
-          </a:prstGeom>
-          <a:solidFill>
-            <a:srgbClr val="F3F4F6"/>
-          </a:solidFill>
-          <a:ln w="11430">
-            <a:solidFill>
-              <a:srgbClr val="D1D5DB"/>
-            </a:solidFill>
-            <a:prstDash val="solid"/>
-          </a:ln>
-        </p:spPr>
-      </p:sp>
-      <p:sp>
-        <p:nvSpPr>
-          <p:cNvPr id="6" name="Text 4"/>
-          <p:cNvSpPr/>
-          <p:nvPr/>
-        </p:nvSpPr>
-        <p:spPr>
-          <a:xfrm>
-            <a:off x="566928" y="1298448"/>
-            <a:ext cx="3712464" cy="411480"/>
-          </a:xfrm>
-          <a:prstGeom prst="rect">
-            <a:avLst/>
-          </a:prstGeom>
-          <a:noFill/>
-          <a:ln/>
-        </p:spPr>
-        <p:txBody>
-          <a:bodyPr wrap="square" lIns="0" tIns="0" rIns="0" bIns="0" rtlCol="0" anchor="ctr">
-            <a:normAutofit/>
-          </a:bodyPr>
-          <a:lstStyle/>
-          <a:p>
-            <a:pPr indent="0" marL="0">
-              <a:buNone/>
-            </a:pPr>
-            <a:r>
-              <a:rPr lang="en-US" sz="2000" b="1" dirty="0">
-                <a:solidFill>
-                  <a:srgbClr val="1E2761"/>
-                </a:solidFill>
-                <a:latin typeface="Calibri" pitchFamily="34" charset="0"/>
-                <a:ea typeface="Calibri" pitchFamily="34" charset="-122"/>
-                <a:cs typeface="Calibri" pitchFamily="34" charset="-120"/>
-              </a:rPr>
-              <a:t>Agent-level</a:t>
-            </a:r>
-            <a:endParaRPr lang="en-US" sz="2000" dirty="0"/>
-          </a:p>
-        </p:txBody>
-      </p:sp>
-      <p:sp>
-        <p:nvSpPr>
-          <p:cNvPr id="7" name="Text 5"/>
-          <p:cNvSpPr/>
-          <p:nvPr/>
-        </p:nvSpPr>
-        <p:spPr>
-          <a:xfrm>
-            <a:off x="594360" y="1828800"/>
-            <a:ext cx="3639312" cy="2395728"/>
-          </a:xfrm>
-          <a:prstGeom prst="rect">
-            <a:avLst/>
-          </a:prstGeom>
-          <a:noFill/>
-          <a:ln/>
-        </p:spPr>
-        <p:txBody>
-          <a:bodyPr wrap="square" lIns="381" tIns="381" rIns="381" bIns="381" rtlCol="0" anchor="ctr">
-            <a:normAutofit/>
-          </a:bodyPr>
-          <a:lstStyle/>
-          <a:p>
-            <a:pPr marL="342900" indent="-342900">
-              <a:buSzPct val="100000"/>
-              <a:buChar char="•"/>
-            </a:pPr>
-            <a:r>
-              <a:rPr lang="en-US" sz="1300" dirty="0">
-                <a:solidFill>
-                  <a:srgbClr val="212121"/>
-                </a:solidFill>
-                <a:latin typeface="Calibri" pitchFamily="34" charset="0"/>
-                <a:ea typeface="Calibri" pitchFamily="34" charset="-122"/>
-                <a:cs typeface="Calibri" pitchFamily="34" charset="-120"/>
-              </a:rPr>
-              <a:t>Configured once on the Agent</a:t>
-            </a:r>
-            <a:endParaRPr lang="en-US" sz="1300" dirty="0"/>
-          </a:p>
-          <a:p>
-            <a:pPr marL="342900" indent="-342900">
-              <a:buSzPct val="100000"/>
-              <a:buChar char="•"/>
-            </a:pPr>
-            <a:r>
-              <a:rPr lang="en-US" sz="1300" dirty="0">
-                <a:solidFill>
-                  <a:srgbClr val="212121"/>
-                </a:solidFill>
-                <a:latin typeface="Calibri" pitchFamily="34" charset="0"/>
-                <a:ea typeface="Calibri" pitchFamily="34" charset="-122"/>
-                <a:cs typeface="Calibri" pitchFamily="34" charset="-120"/>
-              </a:rPr>
-              <a:t>Applies to every run</a:t>
-            </a:r>
-            <a:endParaRPr lang="en-US" sz="1300" dirty="0"/>
-          </a:p>
-          <a:p>
-            <a:pPr marL="342900" indent="-342900">
-              <a:buSzPct val="100000"/>
-              <a:buChar char="•"/>
-            </a:pPr>
-            <a:r>
-              <a:rPr lang="en-US" sz="1300" dirty="0">
-                <a:solidFill>
-                  <a:srgbClr val="212121"/>
-                </a:solidFill>
-                <a:latin typeface="Calibri" pitchFamily="34" charset="0"/>
-                <a:ea typeface="Calibri" pitchFamily="34" charset="-122"/>
-                <a:cs typeface="Calibri" pitchFamily="34" charset="-120"/>
-              </a:rPr>
-              <a:t>Best for baseline security, telemetry, and policy</a:t>
-            </a:r>
-            <a:endParaRPr lang="en-US" sz="1300" dirty="0"/>
-          </a:p>
-        </p:txBody>
-      </p:sp>
-      <p:sp>
-        <p:nvSpPr>
-          <p:cNvPr id="8" name="Shape 6"/>
-          <p:cNvSpPr/>
-          <p:nvPr/>
-        </p:nvSpPr>
-        <p:spPr>
-          <a:xfrm>
-            <a:off x="4663440" y="1078992"/>
-            <a:ext cx="4114800" cy="3493008"/>
-          </a:xfrm>
-          <a:prstGeom prst="roundRect">
-            <a:avLst/>
-          </a:prstGeom>
-          <a:solidFill>
-            <a:srgbClr val="CADCFC"/>
-          </a:solidFill>
-          <a:ln w="11430">
-            <a:solidFill>
-              <a:srgbClr val="1E2761"/>
-            </a:solidFill>
-            <a:prstDash val="solid"/>
-          </a:ln>
-        </p:spPr>
-      </p:sp>
-      <p:sp>
-        <p:nvSpPr>
-          <p:cNvPr id="9" name="Text 7"/>
-          <p:cNvSpPr/>
-          <p:nvPr/>
-        </p:nvSpPr>
-        <p:spPr>
-          <a:xfrm>
-            <a:off x="4864608" y="1298448"/>
-            <a:ext cx="3712464" cy="411480"/>
-          </a:xfrm>
-          <a:prstGeom prst="rect">
-            <a:avLst/>
-          </a:prstGeom>
-          <a:noFill/>
-          <a:ln/>
-        </p:spPr>
-        <p:txBody>
-          <a:bodyPr wrap="square" lIns="0" tIns="0" rIns="0" bIns="0" rtlCol="0" anchor="ctr">
-            <a:normAutofit/>
-          </a:bodyPr>
-          <a:lstStyle/>
-          <a:p>
-            <a:pPr indent="0" marL="0">
-              <a:buNone/>
-            </a:pPr>
-            <a:r>
-              <a:rPr lang="en-US" sz="2000" b="1" dirty="0">
-                <a:solidFill>
-                  <a:srgbClr val="1E2761"/>
-                </a:solidFill>
-                <a:latin typeface="Calibri" pitchFamily="34" charset="0"/>
-                <a:ea typeface="Calibri" pitchFamily="34" charset="-122"/>
-                <a:cs typeface="Calibri" pitchFamily="34" charset="-120"/>
-              </a:rPr>
-              <a:t>Run-level</a:t>
-            </a:r>
-            <a:endParaRPr lang="en-US" sz="2000" dirty="0"/>
-          </a:p>
-        </p:txBody>
-      </p:sp>
-      <p:sp>
-        <p:nvSpPr>
-          <p:cNvPr id="10" name="Text 8"/>
-          <p:cNvSpPr/>
-          <p:nvPr/>
-        </p:nvSpPr>
-        <p:spPr>
-          <a:xfrm>
-            <a:off x="4892040" y="1828800"/>
-            <a:ext cx="3639312" cy="2395728"/>
-          </a:xfrm>
-          <a:prstGeom prst="rect">
-            <a:avLst/>
-          </a:prstGeom>
-          <a:noFill/>
-          <a:ln/>
-        </p:spPr>
-        <p:txBody>
-          <a:bodyPr wrap="square" lIns="381" tIns="381" rIns="381" bIns="381" rtlCol="0" anchor="ctr">
-            <a:normAutofit/>
-          </a:bodyPr>
-          <a:lstStyle/>
-          <a:p>
-            <a:pPr marL="342900" indent="-342900">
-              <a:buSzPct val="100000"/>
-              <a:buChar char="•"/>
-            </a:pPr>
-            <a:r>
-              <a:rPr lang="en-US" sz="1300" dirty="0">
-                <a:solidFill>
-                  <a:srgbClr val="212121"/>
-                </a:solidFill>
-                <a:latin typeface="Calibri" pitchFamily="34" charset="0"/>
-                <a:ea typeface="Calibri" pitchFamily="34" charset="-122"/>
-                <a:cs typeface="Calibri" pitchFamily="34" charset="-120"/>
-              </a:rPr>
-              <a:t>Passed to one agent.run(...)</a:t>
-            </a:r>
-            <a:endParaRPr lang="en-US" sz="1300" dirty="0"/>
-          </a:p>
-          <a:p>
-            <a:pPr marL="342900" indent="-342900">
-              <a:buSzPct val="100000"/>
-              <a:buChar char="•"/>
-            </a:pPr>
-            <a:r>
-              <a:rPr lang="en-US" sz="1300" dirty="0">
-                <a:solidFill>
-                  <a:srgbClr val="212121"/>
-                </a:solidFill>
-                <a:latin typeface="Calibri" pitchFamily="34" charset="0"/>
-                <a:ea typeface="Calibri" pitchFamily="34" charset="-122"/>
-                <a:cs typeface="Calibri" pitchFamily="34" charset="-120"/>
-              </a:rPr>
-              <a:t>Applies only to that invocation</a:t>
-            </a:r>
-            <a:endParaRPr lang="en-US" sz="1300" dirty="0"/>
-          </a:p>
-          <a:p>
-            <a:pPr marL="342900" indent="-342900">
-              <a:buSzPct val="100000"/>
-              <a:buChar char="•"/>
-            </a:pPr>
-            <a:r>
-              <a:rPr lang="en-US" sz="1300" dirty="0">
-                <a:solidFill>
-                  <a:srgbClr val="212121"/>
-                </a:solidFill>
-                <a:latin typeface="Calibri" pitchFamily="34" charset="0"/>
-                <a:ea typeface="Calibri" pitchFamily="34" charset="-122"/>
-                <a:cs typeface="Calibri" pitchFamily="34" charset="-120"/>
-              </a:rPr>
-              <a:t>Best for targeted diagnostics or request policy</a:t>
-            </a:r>
-            <a:endParaRPr lang="en-US" sz="1300" dirty="0"/>
-          </a:p>
-        </p:txBody>
-      </p:sp>
-      <p:sp>
-        <p:nvSpPr>
-          <p:cNvPr id="11" name="Shape 9"/>
-          <p:cNvSpPr/>
-          <p:nvPr/>
-        </p:nvSpPr>
-        <p:spPr>
-          <a:xfrm>
-            <a:off x="365760" y="4773168"/>
-            <a:ext cx="8412480" cy="0"/>
-          </a:xfrm>
-          <a:prstGeom prst="line">
-            <a:avLst/>
-          </a:prstGeom>
-          <a:noFill/>
-          <a:ln w="6350">
-            <a:solidFill>
-              <a:srgbClr val="D1D5DB"/>
-            </a:solidFill>
-            <a:prstDash val="solid"/>
-          </a:ln>
-        </p:spPr>
-      </p:sp>
-      <p:sp>
-        <p:nvSpPr>
-          <p:cNvPr id="12" name="Text 10"/>
-          <p:cNvSpPr/>
-          <p:nvPr/>
-        </p:nvSpPr>
-        <p:spPr>
-          <a:xfrm>
-            <a:off x="384048" y="4818888"/>
-            <a:ext cx="8275320" cy="182880"/>
-          </a:xfrm>
-          <a:prstGeom prst="rect">
-            <a:avLst/>
-          </a:prstGeom>
-          <a:noFill/>
-          <a:ln/>
-        </p:spPr>
-        <p:txBody>
-          <a:bodyPr wrap="square" lIns="0" tIns="0" rIns="0" bIns="0" rtlCol="0" anchor="ctr">
-            <a:normAutofit/>
-          </a:bodyPr>
-          <a:lstStyle/>
-          <a:p>
-            <a:pPr indent="0" marL="0">
-              <a:buNone/>
-            </a:pPr>
-            <a:r>
-              <a:rPr lang="en-US" sz="820" dirty="0">
-                <a:solidFill>
-                  <a:srgbClr val="6B7280"/>
-                </a:solidFill>
-                <a:latin typeface="Calibri" pitchFamily="34" charset="0"/>
-                <a:ea typeface="Calibri" pitchFamily="34" charset="-122"/>
-                <a:cs typeface="Calibri" pitchFamily="34" charset="-120"/>
-              </a:rPr>
-              <a:t>Source: https://learn.microsoft.com/en-us/agent-framework/concepts/agents/middleware/agent-vs-run-scope?tabs=python</a:t>
             </a:r>
             <a:endParaRPr lang="en-US" sz="820" dirty="0"/>
           </a:p>
@@ -8789,7 +10138,7 @@
                 <a:ea typeface="Calibri" pitchFamily="34" charset="-122"/>
                 <a:cs typeface="Calibri" pitchFamily="34" charset="-120"/>
               </a:rPr>
-              <a:t>Middleware executes like an onion</a:t>
+              <a:t>Agent Middleware</a:t>
             </a:r>
             <a:endParaRPr lang="en-US" sz="2800" dirty="0"/>
           </a:p>
@@ -8797,99 +10146,36 @@
       </p:sp>
       <p:sp>
         <p:nvSpPr>
-          <p:cNvPr id="5" name="Shape 3"/>
-          <p:cNvSpPr/>
-          <p:nvPr/>
-        </p:nvSpPr>
-        <p:spPr>
-          <a:xfrm>
-            <a:off x="365760" y="1078992"/>
-            <a:ext cx="4114800" cy="3493008"/>
-          </a:xfrm>
-          <a:prstGeom prst="roundRect">
-            <a:avLst/>
-          </a:prstGeom>
-          <a:solidFill>
-            <a:srgbClr val="F3F4F6"/>
-          </a:solidFill>
-          <a:ln w="11430">
-            <a:solidFill>
-              <a:srgbClr val="D1D5DB"/>
-            </a:solidFill>
-            <a:prstDash val="solid"/>
-          </a:ln>
-        </p:spPr>
-      </p:sp>
-      <p:sp>
-        <p:nvSpPr>
-          <p:cNvPr id="6" name="Text 4"/>
-          <p:cNvSpPr/>
-          <p:nvPr/>
-        </p:nvSpPr>
-        <p:spPr>
-          <a:xfrm>
-            <a:off x="566928" y="1298448"/>
-            <a:ext cx="3712464" cy="411480"/>
-          </a:xfrm>
-          <a:prstGeom prst="rect">
-            <a:avLst/>
-          </a:prstGeom>
-          <a:noFill/>
-          <a:ln/>
-        </p:spPr>
-        <p:txBody>
-          <a:bodyPr wrap="square" lIns="0" tIns="0" rIns="0" bIns="0" rtlCol="0" anchor="ctr">
+          <p:cNvPr id="5" name="Text 3"/>
+          <p:cNvSpPr/>
+          <p:nvPr/>
+        </p:nvSpPr>
+        <p:spPr>
+          <a:xfrm>
+            <a:off x="502920" y="1170432"/>
+            <a:ext cx="7955280" cy="3520440"/>
+          </a:xfrm>
+          <a:prstGeom prst="rect">
+            <a:avLst/>
+          </a:prstGeom>
+          <a:noFill/>
+          <a:ln/>
+        </p:spPr>
+        <p:txBody>
+          <a:bodyPr wrap="square" lIns="0" tIns="0" rIns="0" bIns="0" rtlCol="0" anchor="t">
             <a:normAutofit/>
           </a:bodyPr>
           <a:lstStyle/>
           <a:p>
-            <a:pPr indent="0" marL="0">
-              <a:buNone/>
-            </a:pPr>
-            <a:r>
-              <a:rPr lang="en-US" sz="2000" b="1" dirty="0">
-                <a:solidFill>
-                  <a:srgbClr val="1E2761"/>
-                </a:solidFill>
-                <a:latin typeface="Calibri" pitchFamily="34" charset="0"/>
-                <a:ea typeface="Calibri" pitchFamily="34" charset="-122"/>
-                <a:cs typeface="Calibri" pitchFamily="34" charset="-120"/>
-              </a:rPr>
-              <a:t>Request path</a:t>
-            </a:r>
-            <a:endParaRPr lang="en-US" sz="2000" dirty="0"/>
-          </a:p>
-        </p:txBody>
-      </p:sp>
-      <p:sp>
-        <p:nvSpPr>
-          <p:cNvPr id="7" name="Text 5"/>
-          <p:cNvSpPr/>
-          <p:nvPr/>
-        </p:nvSpPr>
-        <p:spPr>
-          <a:xfrm>
-            <a:off x="594360" y="1828800"/>
-            <a:ext cx="3639312" cy="2395728"/>
-          </a:xfrm>
-          <a:prstGeom prst="rect">
-            <a:avLst/>
-          </a:prstGeom>
-          <a:noFill/>
-          <a:ln/>
-        </p:spPr>
-        <p:txBody>
-          <a:bodyPr wrap="square" lIns="381" tIns="381" rIns="381" bIns="381" rtlCol="0" anchor="ctr">
-            <a:normAutofit/>
-          </a:bodyPr>
-          <a:lstStyle/>
-          <a:p>
             <a:pPr marL="342900" indent="-342900">
+              <a:spcAft>
+                <a:spcPts val="1000"/>
+              </a:spcAft>
               <a:buSzPct val="100000"/>
               <a:buChar char="•"/>
             </a:pPr>
             <a:r>
-              <a:rPr lang="en-US" sz="1300" dirty="0">
+              <a:rPr lang="en-US" sz="1600" dirty="0">
                 <a:solidFill>
                   <a:srgbClr val="212121"/>
                 </a:solidFill>
@@ -8897,17 +10183,20 @@
                 <a:ea typeface="Calibri" pitchFamily="34" charset="-122"/>
                 <a:cs typeface="Calibri" pitchFamily="34" charset="-120"/>
               </a:rPr>
-              <a:t>A1 enters, then A2</a:t>
-            </a:r>
-            <a:endParaRPr lang="en-US" sz="1300" dirty="0"/>
-          </a:p>
-          <a:p>
-            <a:pPr marL="342900" indent="-342900">
+              <a:t>Agent middleware intercepts and modifies agent run execution</a:t>
+            </a:r>
+            <a:endParaRPr lang="en-US" sz="1600" dirty="0"/>
+          </a:p>
+          <a:p>
+            <a:pPr lvl="1" marL="457200" indent="-228600">
+              <a:spcAft>
+                <a:spcPts val="1000"/>
+              </a:spcAft>
               <a:buSzPct val="100000"/>
               <a:buChar char="•"/>
             </a:pPr>
             <a:r>
-              <a:rPr lang="en-US" sz="1300" dirty="0">
+              <a:rPr lang="en-US" sz="1600" dirty="0">
                 <a:solidFill>
                   <a:srgbClr val="212121"/>
                 </a:solidFill>
@@ -8915,17 +10204,20 @@
                 <a:ea typeface="Calibri" pitchFamily="34" charset="-122"/>
                 <a:cs typeface="Calibri" pitchFamily="34" charset="-120"/>
               </a:rPr>
-              <a:t>R1 enters, then R2</a:t>
-            </a:r>
-            <a:endParaRPr lang="en-US" sz="1300" dirty="0"/>
+              <a:t>Uses AgentContext</a:t>
+            </a:r>
+            <a:endParaRPr lang="en-US" sz="1600" dirty="0"/>
           </a:p>
           <a:p>
             <a:pPr marL="342900" indent="-342900">
+              <a:spcAft>
+                <a:spcPts val="1000"/>
+              </a:spcAft>
               <a:buSzPct val="100000"/>
               <a:buChar char="•"/>
             </a:pPr>
             <a:r>
-              <a:rPr lang="en-US" sz="1300" dirty="0">
+              <a:rPr lang="en-US" sz="1600" dirty="0">
                 <a:solidFill>
                   <a:srgbClr val="212121"/>
                 </a:solidFill>
@@ -8933,107 +10225,20 @@
                 <a:ea typeface="Calibri" pitchFamily="34" charset="-122"/>
                 <a:cs typeface="Calibri" pitchFamily="34" charset="-120"/>
               </a:rPr>
-              <a:t>Agent executes at the center</a:t>
-            </a:r>
-            <a:endParaRPr lang="en-US" sz="1300" dirty="0"/>
-          </a:p>
-        </p:txBody>
-      </p:sp>
-      <p:sp>
-        <p:nvSpPr>
-          <p:cNvPr id="8" name="Shape 6"/>
-          <p:cNvSpPr/>
-          <p:nvPr/>
-        </p:nvSpPr>
-        <p:spPr>
-          <a:xfrm>
-            <a:off x="4663440" y="1078992"/>
-            <a:ext cx="4114800" cy="3493008"/>
-          </a:xfrm>
-          <a:prstGeom prst="roundRect">
-            <a:avLst/>
-          </a:prstGeom>
-          <a:solidFill>
-            <a:srgbClr val="CADCFC"/>
-          </a:solidFill>
-          <a:ln w="11430">
-            <a:solidFill>
-              <a:srgbClr val="1E2761"/>
-            </a:solidFill>
-            <a:prstDash val="solid"/>
-          </a:ln>
-        </p:spPr>
-      </p:sp>
-      <p:sp>
-        <p:nvSpPr>
-          <p:cNvPr id="9" name="Text 7"/>
-          <p:cNvSpPr/>
-          <p:nvPr/>
-        </p:nvSpPr>
-        <p:spPr>
-          <a:xfrm>
-            <a:off x="4864608" y="1298448"/>
-            <a:ext cx="3712464" cy="411480"/>
-          </a:xfrm>
-          <a:prstGeom prst="rect">
-            <a:avLst/>
-          </a:prstGeom>
-          <a:noFill/>
-          <a:ln/>
-        </p:spPr>
-        <p:txBody>
-          <a:bodyPr wrap="square" lIns="0" tIns="0" rIns="0" bIns="0" rtlCol="0" anchor="ctr">
-            <a:normAutofit/>
-          </a:bodyPr>
-          <a:lstStyle/>
-          <a:p>
-            <a:pPr indent="0" marL="0">
-              <a:buNone/>
-            </a:pPr>
-            <a:r>
-              <a:rPr lang="en-US" sz="2000" b="1" dirty="0">
-                <a:solidFill>
-                  <a:srgbClr val="1E2761"/>
-                </a:solidFill>
-                <a:latin typeface="Calibri" pitchFamily="34" charset="0"/>
-                <a:ea typeface="Calibri" pitchFamily="34" charset="-122"/>
-                <a:cs typeface="Calibri" pitchFamily="34" charset="-120"/>
-              </a:rPr>
-              <a:t>Response path</a:t>
-            </a:r>
-            <a:endParaRPr lang="en-US" sz="2000" dirty="0"/>
-          </a:p>
-        </p:txBody>
-      </p:sp>
-      <p:sp>
-        <p:nvSpPr>
-          <p:cNvPr id="10" name="Text 8"/>
-          <p:cNvSpPr/>
-          <p:nvPr/>
-        </p:nvSpPr>
-        <p:spPr>
-          <a:xfrm>
-            <a:off x="4892040" y="1828800"/>
-            <a:ext cx="3639312" cy="2395728"/>
-          </a:xfrm>
-          <a:prstGeom prst="rect">
-            <a:avLst/>
-          </a:prstGeom>
-          <a:noFill/>
-          <a:ln/>
-        </p:spPr>
-        <p:txBody>
-          <a:bodyPr wrap="square" lIns="381" tIns="381" rIns="381" bIns="381" rtlCol="0" anchor="ctr">
-            <a:normAutofit/>
-          </a:bodyPr>
-          <a:lstStyle/>
+              <a:t>Agent-level middleware wraps run-level middleware</a:t>
+            </a:r>
+            <a:endParaRPr lang="en-US" sz="1600" dirty="0"/>
+          </a:p>
           <a:p>
             <a:pPr marL="342900" indent="-342900">
+              <a:spcAft>
+                <a:spcPts val="1000"/>
+              </a:spcAft>
               <a:buSzPct val="100000"/>
               <a:buChar char="•"/>
             </a:pPr>
             <a:r>
-              <a:rPr lang="en-US" sz="1300" dirty="0">
+              <a:rPr lang="en-US" sz="1600" dirty="0">
                 <a:solidFill>
                   <a:srgbClr val="212121"/>
                 </a:solidFill>
@@ -9041,51 +10246,15 @@
                 <a:ea typeface="Calibri" pitchFamily="34" charset="-122"/>
                 <a:cs typeface="Calibri" pitchFamily="34" charset="-120"/>
               </a:rPr>
-              <a:t>R2 exits, then R1</a:t>
-            </a:r>
-            <a:endParaRPr lang="en-US" sz="1300" dirty="0"/>
-          </a:p>
-          <a:p>
-            <a:pPr marL="342900" indent="-342900">
-              <a:buSzPct val="100000"/>
-              <a:buChar char="•"/>
-            </a:pPr>
-            <a:r>
-              <a:rPr lang="en-US" sz="1300" dirty="0">
-                <a:solidFill>
-                  <a:srgbClr val="212121"/>
-                </a:solidFill>
-                <a:latin typeface="Calibri" pitchFamily="34" charset="0"/>
-                <a:ea typeface="Calibri" pitchFamily="34" charset="-122"/>
-                <a:cs typeface="Calibri" pitchFamily="34" charset="-120"/>
-              </a:rPr>
-              <a:t>A2 exits, then A1</a:t>
-            </a:r>
-            <a:endParaRPr lang="en-US" sz="1300" dirty="0"/>
-          </a:p>
-          <a:p>
-            <a:pPr marL="342900" indent="-342900">
-              <a:buSzPct val="100000"/>
-              <a:buChar char="•"/>
-            </a:pPr>
-            <a:r>
-              <a:rPr lang="en-US" sz="1300" dirty="0">
-                <a:solidFill>
-                  <a:srgbClr val="212121"/>
-                </a:solidFill>
-                <a:latin typeface="Calibri" pitchFamily="34" charset="0"/>
-                <a:ea typeface="Calibri" pitchFamily="34" charset="-122"/>
-                <a:cs typeface="Calibri" pitchFamily="34" charset="-120"/>
-              </a:rPr>
-              <a:t>The outermost layer finishes last</a:t>
-            </a:r>
-            <a:endParaRPr lang="en-US" sz="1300" dirty="0"/>
-          </a:p>
-        </p:txBody>
-      </p:sp>
-      <p:sp>
-        <p:nvSpPr>
-          <p:cNvPr id="11" name="Shape 9"/>
+              <a:t>Function/chat middleware follows the same wrapping principle</a:t>
+            </a:r>
+            <a:endParaRPr lang="en-US" sz="1600" dirty="0"/>
+          </a:p>
+        </p:txBody>
+      </p:sp>
+      <p:sp>
+        <p:nvSpPr>
+          <p:cNvPr id="6" name="Shape 4"/>
           <p:cNvSpPr/>
           <p:nvPr/>
         </p:nvSpPr>
@@ -9108,7 +10277,7 @@
       </p:sp>
       <p:sp>
         <p:nvSpPr>
-          <p:cNvPr id="12" name="Text 10"/>
+          <p:cNvPr id="7" name="Text 5"/>
           <p:cNvSpPr/>
           <p:nvPr/>
         </p:nvSpPr>
@@ -9141,7 +10310,7 @@
                 <a:ea typeface="Calibri" pitchFamily="34" charset="-122"/>
                 <a:cs typeface="Calibri" pitchFamily="34" charset="-120"/>
               </a:rPr>
-              <a:t>Source: https://learn.microsoft.com/en-us/agent-framework/concepts/agents/middleware/?tabs=python</a:t>
+              <a:t>Source: https://learn.microsoft.com/en-us/agent-framework/concepts/agents/middleware/agent-vs-run-scope?tabs=python</a:t>
             </a:r>
             <a:endParaRPr lang="en-US" sz="820" dirty="0"/>
           </a:p>
@@ -9161,7 +10330,7 @@
     <p:bg>
       <p:bgPr>
         <a:solidFill>
-          <a:srgbClr val="CADCFC"/>
+          <a:srgbClr val="FFFFFF"/>
         </a:solidFill>
       </p:bgPr>
     </p:bg>
@@ -9188,7 +10357,7 @@
         <p:spPr>
           <a:xfrm>
             <a:off x="0" y="0"/>
-            <a:ext cx="146304" cy="5143500"/>
+            <a:ext cx="54864" cy="5143500"/>
           </a:xfrm>
           <a:prstGeom prst="rect">
             <a:avLst/>
@@ -9207,24 +10376,26 @@
         </p:nvSpPr>
         <p:spPr>
           <a:xfrm>
-            <a:off x="5669280" y="274320"/>
-            <a:ext cx="3291840" cy="274320"/>
-          </a:xfrm>
-          <a:prstGeom prst="rect">
-            <a:avLst/>
-          </a:prstGeom>
-          <a:noFill/>
-          <a:ln/>
-        </p:spPr>
-        <p:txBody>
-          <a:bodyPr wrap="square" lIns="0" tIns="0" rIns="0" bIns="0" rtlCol="0" anchor="ctr"/>
+            <a:off x="5486400" y="256032"/>
+            <a:ext cx="3337560" cy="228600"/>
+          </a:xfrm>
+          <a:prstGeom prst="rect">
+            <a:avLst/>
+          </a:prstGeom>
+          <a:noFill/>
+          <a:ln/>
+        </p:spPr>
+        <p:txBody>
+          <a:bodyPr wrap="square" lIns="0" tIns="0" rIns="0" bIns="0" rtlCol="0" anchor="ctr">
+            <a:normAutofit/>
+          </a:bodyPr>
           <a:lstStyle/>
           <a:p>
             <a:pPr algn="r" indent="0" marL="0">
               <a:buNone/>
             </a:pPr>
             <a:r>
-              <a:rPr lang="en-US" sz="1000" dirty="0">
+              <a:rPr lang="en-US" sz="950" dirty="0">
                 <a:solidFill>
                   <a:srgbClr val="6B7280"/>
                 </a:solidFill>
@@ -9232,9 +10403,9 @@
                 <a:ea typeface="Calibri" pitchFamily="34" charset="-122"/>
                 <a:cs typeface="Calibri" pitchFamily="34" charset="-120"/>
               </a:rPr>
-              <a:t>Day 3 · Module 4 · Demo</a:t>
-            </a:r>
-            <a:endParaRPr lang="en-US" sz="1000" dirty="0"/>
+              <a:t>Day 3 · Module 4</a:t>
+            </a:r>
+            <a:endParaRPr lang="en-US" sz="950" dirty="0"/>
           </a:p>
         </p:txBody>
       </p:sp>
@@ -9246,24 +10417,26 @@
         </p:nvSpPr>
         <p:spPr>
           <a:xfrm>
-            <a:off x="548640" y="1051560"/>
-            <a:ext cx="5486400" cy="502920"/>
-          </a:xfrm>
-          <a:prstGeom prst="rect">
-            <a:avLst/>
-          </a:prstGeom>
-          <a:noFill/>
-          <a:ln/>
-        </p:spPr>
-        <p:txBody>
-          <a:bodyPr wrap="square" lIns="0" tIns="0" rIns="0" bIns="0" rtlCol="0" anchor="ctr"/>
+            <a:off x="365760" y="310896"/>
+            <a:ext cx="6583680" cy="603504"/>
+          </a:xfrm>
+          <a:prstGeom prst="rect">
+            <a:avLst/>
+          </a:prstGeom>
+          <a:noFill/>
+          <a:ln/>
+        </p:spPr>
+        <p:txBody>
+          <a:bodyPr wrap="square" lIns="0" tIns="0" rIns="0" bIns="0" rtlCol="0" anchor="ctr">
+            <a:normAutofit/>
+          </a:bodyPr>
           <a:lstStyle/>
           <a:p>
             <a:pPr indent="0" marL="0">
               <a:buNone/>
             </a:pPr>
             <a:r>
-              <a:rPr lang="en-US" sz="3200" b="1" spc="800" kern="0" dirty="0">
+              <a:rPr lang="en-US" sz="2800" b="1" dirty="0">
                 <a:solidFill>
                   <a:srgbClr val="1E2761"/>
                 </a:solidFill>
@@ -9271,38 +10444,65 @@
                 <a:ea typeface="Calibri" pitchFamily="34" charset="-122"/>
                 <a:cs typeface="Calibri" pitchFamily="34" charset="-120"/>
               </a:rPr>
-              <a:t>DEMO</a:t>
-            </a:r>
-            <a:endParaRPr lang="en-US" sz="3200" dirty="0"/>
-          </a:p>
-        </p:txBody>
-      </p:sp>
-      <p:sp>
-        <p:nvSpPr>
-          <p:cNvPr id="5" name="Text 3"/>
-          <p:cNvSpPr/>
-          <p:nvPr/>
-        </p:nvSpPr>
-        <p:spPr>
-          <a:xfrm>
-            <a:off x="548640" y="1691640"/>
-            <a:ext cx="8046720" cy="914400"/>
-          </a:xfrm>
-          <a:prstGeom prst="rect">
-            <a:avLst/>
-          </a:prstGeom>
-          <a:noFill/>
-          <a:ln/>
-        </p:spPr>
-        <p:txBody>
-          <a:bodyPr wrap="square" lIns="0" tIns="0" rIns="0" bIns="0" rtlCol="0" anchor="ctr"/>
+              <a:t>Agent vs Run Scope</a:t>
+            </a:r>
+            <a:endParaRPr lang="en-US" sz="2800" dirty="0"/>
+          </a:p>
+        </p:txBody>
+      </p:sp>
+      <p:sp>
+        <p:nvSpPr>
+          <p:cNvPr id="5" name="Shape 3"/>
+          <p:cNvSpPr/>
+          <p:nvPr/>
+        </p:nvSpPr>
+        <p:spPr>
+          <a:xfrm>
+            <a:off x="365760" y="1078992"/>
+            <a:ext cx="4114800" cy="3493008"/>
+          </a:xfrm>
+          <a:prstGeom prst="roundRect">
+            <a:avLst/>
+          </a:prstGeom>
+          <a:solidFill>
+            <a:srgbClr val="F3F4F6"/>
+          </a:solidFill>
+          <a:ln w="11430">
+            <a:solidFill>
+              <a:srgbClr val="D1D5DB"/>
+            </a:solidFill>
+            <a:prstDash val="solid"/>
+          </a:ln>
+        </p:spPr>
+      </p:sp>
+      <p:sp>
+        <p:nvSpPr>
+          <p:cNvPr id="6" name="Text 4"/>
+          <p:cNvSpPr/>
+          <p:nvPr/>
+        </p:nvSpPr>
+        <p:spPr>
+          <a:xfrm>
+            <a:off x="566928" y="1298448"/>
+            <a:ext cx="3712464" cy="411480"/>
+          </a:xfrm>
+          <a:prstGeom prst="rect">
+            <a:avLst/>
+          </a:prstGeom>
+          <a:noFill/>
+          <a:ln/>
+        </p:spPr>
+        <p:txBody>
+          <a:bodyPr wrap="square" lIns="0" tIns="0" rIns="0" bIns="0" rtlCol="0" anchor="ctr">
+            <a:normAutofit/>
+          </a:bodyPr>
           <a:lstStyle/>
           <a:p>
             <a:pPr indent="0" marL="0">
               <a:buNone/>
             </a:pPr>
             <a:r>
-              <a:rPr lang="en-US" sz="3000" b="1" dirty="0">
+              <a:rPr lang="en-US" sz="2000" b="1" dirty="0">
                 <a:solidFill>
                   <a:srgbClr val="1E2761"/>
                 </a:solidFill>
@@ -9310,48 +10510,9 @@
                 <a:ea typeface="Calibri" pitchFamily="34" charset="-122"/>
                 <a:cs typeface="Calibri" pitchFamily="34" charset="-120"/>
               </a:rPr>
-              <a:t>The onion, printed</a:t>
-            </a:r>
-            <a:endParaRPr lang="en-US" sz="3000" dirty="0"/>
-          </a:p>
-        </p:txBody>
-      </p:sp>
-      <p:sp>
-        <p:nvSpPr>
-          <p:cNvPr id="6" name="Text 4"/>
-          <p:cNvSpPr/>
-          <p:nvPr/>
-        </p:nvSpPr>
-        <p:spPr>
-          <a:xfrm>
-            <a:off x="6583680" y="1051560"/>
-            <a:ext cx="2194560" cy="502920"/>
-          </a:xfrm>
-          <a:prstGeom prst="rect">
-            <a:avLst/>
-          </a:prstGeom>
-          <a:noFill/>
-          <a:ln/>
-        </p:spPr>
-        <p:txBody>
-          <a:bodyPr wrap="square" lIns="0" tIns="0" rIns="0" bIns="0" rtlCol="0" anchor="ctr"/>
-          <a:lstStyle/>
-          <a:p>
-            <a:pPr algn="r" indent="0" marL="0">
-              <a:buNone/>
-            </a:pPr>
-            <a:r>
-              <a:rPr lang="en-US" sz="1800" i="1" dirty="0">
-                <a:solidFill>
-                  <a:srgbClr val="6B7280"/>
-                </a:solidFill>
-                <a:latin typeface="Calibri" pitchFamily="34" charset="0"/>
-                <a:ea typeface="Calibri" pitchFamily="34" charset="-122"/>
-                <a:cs typeface="Calibri" pitchFamily="34" charset="-120"/>
-              </a:rPr>
-              <a:t>~5 min</a:t>
-            </a:r>
-            <a:endParaRPr lang="en-US" sz="1800" dirty="0"/>
+              <a:t>Agent-level</a:t>
+            </a:r>
+            <a:endParaRPr lang="en-US" sz="2000" dirty="0"/>
           </a:p>
         </p:txBody>
       </p:sp>
@@ -9363,27 +10524,171 @@
         </p:nvSpPr>
         <p:spPr>
           <a:xfrm>
-            <a:off x="548640" y="2788920"/>
-            <a:ext cx="8046720" cy="1371600"/>
-          </a:xfrm>
-          <a:prstGeom prst="rect">
-            <a:avLst/>
-          </a:prstGeom>
-          <a:noFill/>
-          <a:ln/>
-        </p:spPr>
-        <p:txBody>
-          <a:bodyPr wrap="square" lIns="0" tIns="0" rIns="0" bIns="0" rtlCol="0" anchor="ctr"/>
+            <a:off x="594360" y="1828800"/>
+            <a:ext cx="3639312" cy="2395728"/>
+          </a:xfrm>
+          <a:prstGeom prst="rect">
+            <a:avLst/>
+          </a:prstGeom>
+          <a:noFill/>
+          <a:ln/>
+        </p:spPr>
+        <p:txBody>
+          <a:bodyPr wrap="square" lIns="381" tIns="381" rIns="381" bIns="381" rtlCol="0" anchor="ctr">
+            <a:normAutofit/>
+          </a:bodyPr>
+          <a:lstStyle/>
+          <a:p>
+            <a:pPr marL="342900" indent="-342900">
+              <a:buSzPct val="100000"/>
+              <a:buChar char="•"/>
+            </a:pPr>
+            <a:r>
+              <a:rPr lang="en-US" sz="1300" dirty="0">
+                <a:solidFill>
+                  <a:srgbClr val="212121"/>
+                </a:solidFill>
+                <a:latin typeface="Calibri" pitchFamily="34" charset="0"/>
+                <a:ea typeface="Calibri" pitchFamily="34" charset="-122"/>
+                <a:cs typeface="Calibri" pitchFamily="34" charset="-120"/>
+              </a:rPr>
+              <a:t>Configured once on the Agent</a:t>
+            </a:r>
+            <a:endParaRPr lang="en-US" sz="1300" dirty="0"/>
+          </a:p>
+          <a:p>
+            <a:pPr marL="342900" indent="-342900">
+              <a:buSzPct val="100000"/>
+              <a:buChar char="•"/>
+            </a:pPr>
+            <a:r>
+              <a:rPr lang="en-US" sz="1300" dirty="0">
+                <a:solidFill>
+                  <a:srgbClr val="212121"/>
+                </a:solidFill>
+                <a:latin typeface="Calibri" pitchFamily="34" charset="0"/>
+                <a:ea typeface="Calibri" pitchFamily="34" charset="-122"/>
+                <a:cs typeface="Calibri" pitchFamily="34" charset="-120"/>
+              </a:rPr>
+              <a:t>Applies to every run</a:t>
+            </a:r>
+            <a:endParaRPr lang="en-US" sz="1300" dirty="0"/>
+          </a:p>
+          <a:p>
+            <a:pPr marL="342900" indent="-342900">
+              <a:buSzPct val="100000"/>
+              <a:buChar char="•"/>
+            </a:pPr>
+            <a:r>
+              <a:rPr lang="en-US" sz="1300" dirty="0">
+                <a:solidFill>
+                  <a:srgbClr val="212121"/>
+                </a:solidFill>
+                <a:latin typeface="Calibri" pitchFamily="34" charset="0"/>
+                <a:ea typeface="Calibri" pitchFamily="34" charset="-122"/>
+                <a:cs typeface="Calibri" pitchFamily="34" charset="-120"/>
+              </a:rPr>
+              <a:t>Best for baseline security, telemetry, and policy</a:t>
+            </a:r>
+            <a:endParaRPr lang="en-US" sz="1300" dirty="0"/>
+          </a:p>
+        </p:txBody>
+      </p:sp>
+      <p:sp>
+        <p:nvSpPr>
+          <p:cNvPr id="8" name="Shape 6"/>
+          <p:cNvSpPr/>
+          <p:nvPr/>
+        </p:nvSpPr>
+        <p:spPr>
+          <a:xfrm>
+            <a:off x="4663440" y="1078992"/>
+            <a:ext cx="4114800" cy="3493008"/>
+          </a:xfrm>
+          <a:prstGeom prst="roundRect">
+            <a:avLst/>
+          </a:prstGeom>
+          <a:solidFill>
+            <a:srgbClr val="CADCFC"/>
+          </a:solidFill>
+          <a:ln w="11430">
+            <a:solidFill>
+              <a:srgbClr val="1E2761"/>
+            </a:solidFill>
+            <a:prstDash val="solid"/>
+          </a:ln>
+        </p:spPr>
+      </p:sp>
+      <p:sp>
+        <p:nvSpPr>
+          <p:cNvPr id="9" name="Text 7"/>
+          <p:cNvSpPr/>
+          <p:nvPr/>
+        </p:nvSpPr>
+        <p:spPr>
+          <a:xfrm>
+            <a:off x="4864608" y="1298448"/>
+            <a:ext cx="3712464" cy="411480"/>
+          </a:xfrm>
+          <a:prstGeom prst="rect">
+            <a:avLst/>
+          </a:prstGeom>
+          <a:noFill/>
+          <a:ln/>
+        </p:spPr>
+        <p:txBody>
+          <a:bodyPr wrap="square" lIns="0" tIns="0" rIns="0" bIns="0" rtlCol="0" anchor="ctr">
+            <a:normAutofit/>
+          </a:bodyPr>
           <a:lstStyle/>
           <a:p>
             <a:pPr indent="0" marL="0">
-              <a:spcAft>
-                <a:spcPts val="600"/>
-              </a:spcAft>
-              <a:buNone/>
-            </a:pPr>
-            <a:r>
-              <a:rPr lang="en-US" sz="1600" dirty="0">
+              <a:buNone/>
+            </a:pPr>
+            <a:r>
+              <a:rPr lang="en-US" sz="2000" b="1" dirty="0">
+                <a:solidFill>
+                  <a:srgbClr val="1E2761"/>
+                </a:solidFill>
+                <a:latin typeface="Calibri" pitchFamily="34" charset="0"/>
+                <a:ea typeface="Calibri" pitchFamily="34" charset="-122"/>
+                <a:cs typeface="Calibri" pitchFamily="34" charset="-120"/>
+              </a:rPr>
+              <a:t>Run-level</a:t>
+            </a:r>
+            <a:endParaRPr lang="en-US" sz="2000" dirty="0"/>
+          </a:p>
+        </p:txBody>
+      </p:sp>
+      <p:sp>
+        <p:nvSpPr>
+          <p:cNvPr id="10" name="Text 8"/>
+          <p:cNvSpPr/>
+          <p:nvPr/>
+        </p:nvSpPr>
+        <p:spPr>
+          <a:xfrm>
+            <a:off x="4892040" y="1828800"/>
+            <a:ext cx="3639312" cy="2395728"/>
+          </a:xfrm>
+          <a:prstGeom prst="rect">
+            <a:avLst/>
+          </a:prstGeom>
+          <a:noFill/>
+          <a:ln/>
+        </p:spPr>
+        <p:txBody>
+          <a:bodyPr wrap="square" lIns="381" tIns="381" rIns="381" bIns="381" rtlCol="0" anchor="ctr">
+            <a:normAutofit/>
+          </a:bodyPr>
+          <a:lstStyle/>
+          <a:p>
+            <a:pPr marL="342900" indent="-342900">
+              <a:buSzPct val="100000"/>
+              <a:buChar char="•"/>
+            </a:pPr>
+            <a:r>
+              <a:rPr lang="en-US" sz="1300" dirty="0">
                 <a:solidFill>
                   <a:srgbClr val="212121"/>
                 </a:solidFill>
@@ -9391,54 +10696,51 @@
                 <a:ea typeface="Calibri" pitchFamily="34" charset="-122"/>
                 <a:cs typeface="Calibri" pitchFamily="34" charset="-120"/>
               </a:rPr>
-              <a:t>Run the official agent_and_run_level_middleware.py sample live: printed enter/exit lines match the previous slide's onion diagram exactly — agent-level middleware outermost, run-level middleware inside it, the agent execution at the center.</a:t>
-            </a:r>
-            <a:endParaRPr lang="en-US" sz="1600" dirty="0"/>
-          </a:p>
-        </p:txBody>
-      </p:sp>
-      <p:sp>
-        <p:nvSpPr>
-          <p:cNvPr id="8" name="Text 6"/>
-          <p:cNvSpPr/>
-          <p:nvPr/>
-        </p:nvSpPr>
-        <p:spPr>
-          <a:xfrm>
-            <a:off x="548640" y="4434840"/>
-            <a:ext cx="8046720" cy="320040"/>
-          </a:xfrm>
-          <a:prstGeom prst="rect">
-            <a:avLst/>
-          </a:prstGeom>
-          <a:noFill/>
-          <a:ln/>
-        </p:spPr>
-        <p:txBody>
-          <a:bodyPr wrap="square" lIns="0" tIns="0" rIns="0" bIns="0" rtlCol="0" anchor="ctr"/>
-          <a:lstStyle/>
-          <a:p>
-            <a:pPr indent="0" marL="0">
-              <a:buNone/>
-            </a:pPr>
-            <a:r>
-              <a:rPr lang="en-US" sz="1100" i="1" dirty="0">
-                <a:solidFill>
-                  <a:srgbClr val="6B7280"/>
-                </a:solidFill>
-                <a:latin typeface="Calibri" pitchFamily="34" charset="0"/>
-                <a:ea typeface="Calibri" pitchFamily="34" charset="-122"/>
-                <a:cs typeface="Calibri" pitchFamily="34" charset="-120"/>
-              </a:rPr>
-              <a:t>Runbook: demos/day3/module-4-demo-1-onion-order.md</a:t>
-            </a:r>
-            <a:endParaRPr lang="en-US" sz="1100" dirty="0"/>
-          </a:p>
-        </p:txBody>
-      </p:sp>
-      <p:sp>
-        <p:nvSpPr>
-          <p:cNvPr id="9" name="Shape 7"/>
+              <a:t>Passed to one agent.run(...)</a:t>
+            </a:r>
+            <a:endParaRPr lang="en-US" sz="1300" dirty="0"/>
+          </a:p>
+          <a:p>
+            <a:pPr marL="342900" indent="-342900">
+              <a:buSzPct val="100000"/>
+              <a:buChar char="•"/>
+            </a:pPr>
+            <a:r>
+              <a:rPr lang="en-US" sz="1300" dirty="0">
+                <a:solidFill>
+                  <a:srgbClr val="212121"/>
+                </a:solidFill>
+                <a:latin typeface="Calibri" pitchFamily="34" charset="0"/>
+                <a:ea typeface="Calibri" pitchFamily="34" charset="-122"/>
+                <a:cs typeface="Calibri" pitchFamily="34" charset="-120"/>
+              </a:rPr>
+              <a:t>Applies only to that invocation</a:t>
+            </a:r>
+            <a:endParaRPr lang="en-US" sz="1300" dirty="0"/>
+          </a:p>
+          <a:p>
+            <a:pPr marL="342900" indent="-342900">
+              <a:buSzPct val="100000"/>
+              <a:buChar char="•"/>
+            </a:pPr>
+            <a:r>
+              <a:rPr lang="en-US" sz="1300" dirty="0">
+                <a:solidFill>
+                  <a:srgbClr val="212121"/>
+                </a:solidFill>
+                <a:latin typeface="Calibri" pitchFamily="34" charset="0"/>
+                <a:ea typeface="Calibri" pitchFamily="34" charset="-122"/>
+                <a:cs typeface="Calibri" pitchFamily="34" charset="-120"/>
+              </a:rPr>
+              <a:t>Best for targeted diagnostics or per-request customization</a:t>
+            </a:r>
+            <a:endParaRPr lang="en-US" sz="1300" dirty="0"/>
+          </a:p>
+        </p:txBody>
+      </p:sp>
+      <p:sp>
+        <p:nvSpPr>
+          <p:cNvPr id="11" name="Shape 9"/>
           <p:cNvSpPr/>
           <p:nvPr/>
         </p:nvSpPr>
@@ -9461,7 +10763,7 @@
       </p:sp>
       <p:sp>
         <p:nvSpPr>
-          <p:cNvPr id="10" name="Text 8"/>
+          <p:cNvPr id="12" name="Text 10"/>
           <p:cNvSpPr/>
           <p:nvPr/>
         </p:nvSpPr>
@@ -9494,7 +10796,7 @@
                 <a:ea typeface="Calibri" pitchFamily="34" charset="-122"/>
                 <a:cs typeface="Calibri" pitchFamily="34" charset="-120"/>
               </a:rPr>
-              <a:t>Source: https://github.com/microsoft/agent-framework/blob/main/python/samples/02-agents/middleware/agent_and_run_level_middleware.py</a:t>
+              <a:t>Source: https://learn.microsoft.com/en-us/agent-framework/concepts/agents/middleware/agent-vs-run-scope?tabs=python</a:t>
             </a:r>
             <a:endParaRPr lang="en-US" sz="820" dirty="0"/>
           </a:p>
@@ -9620,7 +10922,7 @@
               <a:buNone/>
             </a:pPr>
             <a:r>
-              <a:rPr lang="en-US" sz="2500" b="1" dirty="0">
+              <a:rPr lang="en-US" sz="2800" b="1" dirty="0">
                 <a:solidFill>
                   <a:srgbClr val="1E2761"/>
                 </a:solidFill>
@@ -9628,9 +10930,9 @@
                 <a:ea typeface="Calibri" pitchFamily="34" charset="-122"/>
                 <a:cs typeface="Calibri" pitchFamily="34" charset="-120"/>
               </a:rPr>
-              <a:t>Coordinate through context.metadata</a:t>
-            </a:r>
-            <a:endParaRPr lang="en-US" sz="2500" dirty="0"/>
+              <a:t>Middleware executes like an onion</a:t>
+            </a:r>
+            <a:endParaRPr lang="en-US" sz="2800" dirty="0"/>
           </a:p>
         </p:txBody>
       </p:sp>
@@ -9643,17 +10945,159 @@
         <p:spPr>
           <a:xfrm>
             <a:off x="365760" y="1078992"/>
-            <a:ext cx="4105656" cy="1655064"/>
+            <a:ext cx="4114800" cy="3493008"/>
           </a:xfrm>
           <a:prstGeom prst="roundRect">
-            <a:avLst>
-              <a:gd name="adj" fmla="val 3315"/>
-            </a:avLst>
+            <a:avLst/>
+          </a:prstGeom>
+          <a:solidFill>
+            <a:srgbClr val="F3F4F6"/>
+          </a:solidFill>
+          <a:ln w="11430">
+            <a:solidFill>
+              <a:srgbClr val="D1D5DB"/>
+            </a:solidFill>
+            <a:prstDash val="solid"/>
+          </a:ln>
+        </p:spPr>
+      </p:sp>
+      <p:sp>
+        <p:nvSpPr>
+          <p:cNvPr id="6" name="Text 4"/>
+          <p:cNvSpPr/>
+          <p:nvPr/>
+        </p:nvSpPr>
+        <p:spPr>
+          <a:xfrm>
+            <a:off x="566928" y="1298448"/>
+            <a:ext cx="3712464" cy="411480"/>
+          </a:xfrm>
+          <a:prstGeom prst="rect">
+            <a:avLst/>
+          </a:prstGeom>
+          <a:noFill/>
+          <a:ln/>
+        </p:spPr>
+        <p:txBody>
+          <a:bodyPr wrap="square" lIns="0" tIns="0" rIns="0" bIns="0" rtlCol="0" anchor="ctr">
+            <a:normAutofit/>
+          </a:bodyPr>
+          <a:lstStyle/>
+          <a:p>
+            <a:pPr indent="0" marL="0">
+              <a:buNone/>
+            </a:pPr>
+            <a:r>
+              <a:rPr lang="en-US" sz="2000" b="1" dirty="0">
+                <a:solidFill>
+                  <a:srgbClr val="1E2761"/>
+                </a:solidFill>
+                <a:latin typeface="Calibri" pitchFamily="34" charset="0"/>
+                <a:ea typeface="Calibri" pitchFamily="34" charset="-122"/>
+                <a:cs typeface="Calibri" pitchFamily="34" charset="-120"/>
+              </a:rPr>
+              <a:t>Request path</a:t>
+            </a:r>
+            <a:endParaRPr lang="en-US" sz="2000" dirty="0"/>
+          </a:p>
+        </p:txBody>
+      </p:sp>
+      <p:sp>
+        <p:nvSpPr>
+          <p:cNvPr id="7" name="Text 5"/>
+          <p:cNvSpPr/>
+          <p:nvPr/>
+        </p:nvSpPr>
+        <p:spPr>
+          <a:xfrm>
+            <a:off x="594360" y="1828800"/>
+            <a:ext cx="3639312" cy="2395728"/>
+          </a:xfrm>
+          <a:prstGeom prst="rect">
+            <a:avLst/>
+          </a:prstGeom>
+          <a:noFill/>
+          <a:ln/>
+        </p:spPr>
+        <p:txBody>
+          <a:bodyPr wrap="square" lIns="381" tIns="381" rIns="381" bIns="381" rtlCol="0" anchor="ctr">
+            <a:normAutofit/>
+          </a:bodyPr>
+          <a:lstStyle/>
+          <a:p>
+            <a:pPr marL="342900" indent="-342900">
+              <a:buSzPct val="100000"/>
+              <a:buChar char="•"/>
+            </a:pPr>
+            <a:r>
+              <a:rPr lang="en-US" sz="1300" dirty="0">
+                <a:solidFill>
+                  <a:srgbClr val="212121"/>
+                </a:solidFill>
+                <a:latin typeface="Calibri" pitchFamily="34" charset="0"/>
+                <a:ea typeface="Calibri" pitchFamily="34" charset="-122"/>
+                <a:cs typeface="Calibri" pitchFamily="34" charset="-120"/>
+              </a:rPr>
+              <a:t>A1 enters, then A2</a:t>
+            </a:r>
+            <a:endParaRPr lang="en-US" sz="1300" dirty="0"/>
+          </a:p>
+          <a:p>
+            <a:pPr marL="342900" indent="-342900">
+              <a:buSzPct val="100000"/>
+              <a:buChar char="•"/>
+            </a:pPr>
+            <a:r>
+              <a:rPr lang="en-US" sz="1300" dirty="0">
+                <a:solidFill>
+                  <a:srgbClr val="212121"/>
+                </a:solidFill>
+                <a:latin typeface="Calibri" pitchFamily="34" charset="0"/>
+                <a:ea typeface="Calibri" pitchFamily="34" charset="-122"/>
+                <a:cs typeface="Calibri" pitchFamily="34" charset="-120"/>
+              </a:rPr>
+              <a:t>R1 enters, then R2</a:t>
+            </a:r>
+            <a:endParaRPr lang="en-US" sz="1300" dirty="0"/>
+          </a:p>
+          <a:p>
+            <a:pPr marL="342900" indent="-342900">
+              <a:buSzPct val="100000"/>
+              <a:buChar char="•"/>
+            </a:pPr>
+            <a:r>
+              <a:rPr lang="en-US" sz="1300" dirty="0">
+                <a:solidFill>
+                  <a:srgbClr val="212121"/>
+                </a:solidFill>
+                <a:latin typeface="Calibri" pitchFamily="34" charset="0"/>
+                <a:ea typeface="Calibri" pitchFamily="34" charset="-122"/>
+                <a:cs typeface="Calibri" pitchFamily="34" charset="-120"/>
+              </a:rPr>
+              <a:t>Agent executes at the center</a:t>
+            </a:r>
+            <a:endParaRPr lang="en-US" sz="1300" dirty="0"/>
+          </a:p>
+        </p:txBody>
+      </p:sp>
+      <p:sp>
+        <p:nvSpPr>
+          <p:cNvPr id="8" name="Shape 6"/>
+          <p:cNvSpPr/>
+          <p:nvPr/>
+        </p:nvSpPr>
+        <p:spPr>
+          <a:xfrm>
+            <a:off x="4663440" y="1078992"/>
+            <a:ext cx="4114800" cy="3493008"/>
+          </a:xfrm>
+          <a:prstGeom prst="roundRect">
+            <a:avLst/>
           </a:prstGeom>
           <a:solidFill>
             <a:srgbClr val="CADCFC"/>
           </a:solidFill>
-          <a:ln w="10160">
+          <a:ln w="11430">
             <a:solidFill>
               <a:srgbClr val="1E2761"/>
             </a:solidFill>
@@ -9663,14 +11107,14 @@
       </p:sp>
       <p:sp>
         <p:nvSpPr>
-          <p:cNvPr id="6" name="Text 4"/>
-          <p:cNvSpPr/>
-          <p:nvPr/>
-        </p:nvSpPr>
-        <p:spPr>
-          <a:xfrm>
-            <a:off x="512064" y="1197864"/>
-            <a:ext cx="3813048" cy="310896"/>
+          <p:cNvPr id="9" name="Text 7"/>
+          <p:cNvSpPr/>
+          <p:nvPr/>
+        </p:nvSpPr>
+        <p:spPr>
+          <a:xfrm>
+            <a:off x="4864608" y="1298448"/>
+            <a:ext cx="3712464" cy="411480"/>
           </a:xfrm>
           <a:prstGeom prst="rect">
             <a:avLst/>
@@ -9688,7 +11132,7 @@
               <a:buNone/>
             </a:pPr>
             <a:r>
-              <a:rPr lang="en-US" sz="1500" b="1" dirty="0">
+              <a:rPr lang="en-US" sz="2000" b="1" dirty="0">
                 <a:solidFill>
                   <a:srgbClr val="1E2761"/>
                 </a:solidFill>
@@ -9696,40 +11140,41 @@
                 <a:ea typeface="Calibri" pitchFamily="34" charset="-122"/>
                 <a:cs typeface="Calibri" pitchFamily="34" charset="-120"/>
               </a:rPr>
-              <a:t>Outer middleware</a:t>
-            </a:r>
-            <a:endParaRPr lang="en-US" sz="1500" dirty="0"/>
-          </a:p>
-        </p:txBody>
-      </p:sp>
-      <p:sp>
-        <p:nvSpPr>
-          <p:cNvPr id="7" name="Text 5"/>
-          <p:cNvSpPr/>
-          <p:nvPr/>
-        </p:nvSpPr>
-        <p:spPr>
-          <a:xfrm>
-            <a:off x="512064" y="1581912"/>
-            <a:ext cx="3813048" cy="1033272"/>
-          </a:xfrm>
-          <a:prstGeom prst="rect">
-            <a:avLst/>
-          </a:prstGeom>
-          <a:noFill/>
-          <a:ln/>
-        </p:spPr>
-        <p:txBody>
-          <a:bodyPr wrap="square" lIns="0" tIns="0" rIns="0" bIns="0" rtlCol="0" anchor="t">
+              <a:t>Response path</a:t>
+            </a:r>
+            <a:endParaRPr lang="en-US" sz="2000" dirty="0"/>
+          </a:p>
+        </p:txBody>
+      </p:sp>
+      <p:sp>
+        <p:nvSpPr>
+          <p:cNvPr id="10" name="Text 8"/>
+          <p:cNvSpPr/>
+          <p:nvPr/>
+        </p:nvSpPr>
+        <p:spPr>
+          <a:xfrm>
+            <a:off x="4892040" y="1828800"/>
+            <a:ext cx="3639312" cy="2395728"/>
+          </a:xfrm>
+          <a:prstGeom prst="rect">
+            <a:avLst/>
+          </a:prstGeom>
+          <a:noFill/>
+          <a:ln/>
+        </p:spPr>
+        <p:txBody>
+          <a:bodyPr wrap="square" lIns="381" tIns="381" rIns="381" bIns="381" rtlCol="0" anchor="ctr">
             <a:normAutofit/>
           </a:bodyPr>
           <a:lstStyle/>
           <a:p>
-            <a:pPr indent="0" marL="0">
-              <a:buNone/>
-            </a:pPr>
-            <a:r>
-              <a:rPr lang="en-US" sz="1150" dirty="0">
+            <a:pPr marL="342900" indent="-342900">
+              <a:buSzPct val="100000"/>
+              <a:buChar char="•"/>
+            </a:pPr>
+            <a:r>
+              <a:rPr lang="en-US" sz="1300" dirty="0">
                 <a:solidFill>
                   <a:srgbClr val="212121"/>
                 </a:solidFill>
@@ -9737,108 +11182,17 @@
                 <a:ea typeface="Calibri" pitchFamily="34" charset="-122"/>
                 <a:cs typeface="Calibri" pitchFamily="34" charset="-120"/>
               </a:rPr>
-              <a:t>Set correlation ID and start time</a:t>
-            </a:r>
-            <a:endParaRPr lang="en-US" sz="1150" dirty="0"/>
-          </a:p>
-        </p:txBody>
-      </p:sp>
-      <p:sp>
-        <p:nvSpPr>
-          <p:cNvPr id="8" name="Shape 6"/>
-          <p:cNvSpPr/>
-          <p:nvPr/>
-        </p:nvSpPr>
-        <p:spPr>
-          <a:xfrm>
-            <a:off x="4672584" y="1078992"/>
-            <a:ext cx="4105656" cy="1655064"/>
-          </a:xfrm>
-          <a:prstGeom prst="roundRect">
-            <a:avLst>
-              <a:gd name="adj" fmla="val 3315"/>
-            </a:avLst>
-          </a:prstGeom>
-          <a:solidFill>
-            <a:srgbClr val="F3F4F6"/>
-          </a:solidFill>
-          <a:ln w="10160">
-            <a:solidFill>
-              <a:srgbClr val="D1D5DB"/>
-            </a:solidFill>
-            <a:prstDash val="solid"/>
-          </a:ln>
-        </p:spPr>
-      </p:sp>
-      <p:sp>
-        <p:nvSpPr>
-          <p:cNvPr id="9" name="Text 7"/>
-          <p:cNvSpPr/>
-          <p:nvPr/>
-        </p:nvSpPr>
-        <p:spPr>
-          <a:xfrm>
-            <a:off x="4818888" y="1197864"/>
-            <a:ext cx="3813048" cy="310896"/>
-          </a:xfrm>
-          <a:prstGeom prst="rect">
-            <a:avLst/>
-          </a:prstGeom>
-          <a:noFill/>
-          <a:ln/>
-        </p:spPr>
-        <p:txBody>
-          <a:bodyPr wrap="square" lIns="0" tIns="0" rIns="0" bIns="0" rtlCol="0" anchor="ctr">
-            <a:normAutofit/>
-          </a:bodyPr>
-          <a:lstStyle/>
-          <a:p>
-            <a:pPr indent="0" marL="0">
-              <a:buNone/>
-            </a:pPr>
-            <a:r>
-              <a:rPr lang="en-US" sz="1500" b="1" dirty="0">
-                <a:solidFill>
-                  <a:srgbClr val="1E2761"/>
-                </a:solidFill>
-                <a:latin typeface="Calibri" pitchFamily="34" charset="0"/>
-                <a:ea typeface="Calibri" pitchFamily="34" charset="-122"/>
-                <a:cs typeface="Calibri" pitchFamily="34" charset="-120"/>
-              </a:rPr>
-              <a:t>Inner middleware</a:t>
-            </a:r>
-            <a:endParaRPr lang="en-US" sz="1500" dirty="0"/>
-          </a:p>
-        </p:txBody>
-      </p:sp>
-      <p:sp>
-        <p:nvSpPr>
-          <p:cNvPr id="10" name="Text 8"/>
-          <p:cNvSpPr/>
-          <p:nvPr/>
-        </p:nvSpPr>
-        <p:spPr>
-          <a:xfrm>
-            <a:off x="4818888" y="1581912"/>
-            <a:ext cx="3813048" cy="1033272"/>
-          </a:xfrm>
-          <a:prstGeom prst="rect">
-            <a:avLst/>
-          </a:prstGeom>
-          <a:noFill/>
-          <a:ln/>
-        </p:spPr>
-        <p:txBody>
-          <a:bodyPr wrap="square" lIns="0" tIns="0" rIns="0" bIns="0" rtlCol="0" anchor="t">
-            <a:normAutofit/>
-          </a:bodyPr>
-          <a:lstStyle/>
-          <a:p>
-            <a:pPr indent="0" marL="0">
-              <a:buNone/>
-            </a:pPr>
-            <a:r>
-              <a:rPr lang="en-US" sz="1150" dirty="0">
+              <a:t>R2 exits, then R1</a:t>
+            </a:r>
+            <a:endParaRPr lang="en-US" sz="1300" dirty="0"/>
+          </a:p>
+          <a:p>
+            <a:pPr marL="342900" indent="-342900">
+              <a:buSzPct val="100000"/>
+              <a:buChar char="•"/>
+            </a:pPr>
+            <a:r>
+              <a:rPr lang="en-US" sz="1300" dirty="0">
                 <a:solidFill>
                   <a:srgbClr val="212121"/>
                 </a:solidFill>
@@ -9846,233 +11200,33 @@
                 <a:ea typeface="Calibri" pitchFamily="34" charset="-122"/>
                 <a:cs typeface="Calibri" pitchFamily="34" charset="-120"/>
               </a:rPr>
-              <a:t>Read or enrich shared metadata</a:t>
-            </a:r>
-            <a:endParaRPr lang="en-US" sz="1150" dirty="0"/>
+              <a:t>A2 exits, then A1</a:t>
+            </a:r>
+            <a:endParaRPr lang="en-US" sz="1300" dirty="0"/>
+          </a:p>
+          <a:p>
+            <a:pPr marL="342900" indent="-342900">
+              <a:buSzPct val="100000"/>
+              <a:buChar char="•"/>
+            </a:pPr>
+            <a:r>
+              <a:rPr lang="en-US" sz="1300" dirty="0">
+                <a:solidFill>
+                  <a:srgbClr val="212121"/>
+                </a:solidFill>
+                <a:latin typeface="Calibri" pitchFamily="34" charset="0"/>
+                <a:ea typeface="Calibri" pitchFamily="34" charset="-122"/>
+                <a:cs typeface="Calibri" pitchFamily="34" charset="-120"/>
+              </a:rPr>
+              <a:t>The outermost layer finishes last</a:t>
+            </a:r>
+            <a:endParaRPr lang="en-US" sz="1300" dirty="0"/>
           </a:p>
         </p:txBody>
       </p:sp>
       <p:sp>
         <p:nvSpPr>
           <p:cNvPr id="11" name="Shape 9"/>
-          <p:cNvSpPr/>
-          <p:nvPr/>
-        </p:nvSpPr>
-        <p:spPr>
-          <a:xfrm>
-            <a:off x="365760" y="2935224"/>
-            <a:ext cx="4105656" cy="1655064"/>
-          </a:xfrm>
-          <a:prstGeom prst="roundRect">
-            <a:avLst>
-              <a:gd name="adj" fmla="val 3315"/>
-            </a:avLst>
-          </a:prstGeom>
-          <a:solidFill>
-            <a:srgbClr val="F3F4F6"/>
-          </a:solidFill>
-          <a:ln w="10160">
-            <a:solidFill>
-              <a:srgbClr val="D1D5DB"/>
-            </a:solidFill>
-            <a:prstDash val="solid"/>
-          </a:ln>
-        </p:spPr>
-      </p:sp>
-      <p:sp>
-        <p:nvSpPr>
-          <p:cNvPr id="12" name="Text 10"/>
-          <p:cNvSpPr/>
-          <p:nvPr/>
-        </p:nvSpPr>
-        <p:spPr>
-          <a:xfrm>
-            <a:off x="512064" y="3054096"/>
-            <a:ext cx="3813048" cy="310896"/>
-          </a:xfrm>
-          <a:prstGeom prst="rect">
-            <a:avLst/>
-          </a:prstGeom>
-          <a:noFill/>
-          <a:ln/>
-        </p:spPr>
-        <p:txBody>
-          <a:bodyPr wrap="square" lIns="0" tIns="0" rIns="0" bIns="0" rtlCol="0" anchor="ctr">
-            <a:normAutofit/>
-          </a:bodyPr>
-          <a:lstStyle/>
-          <a:p>
-            <a:pPr indent="0" marL="0">
-              <a:buNone/>
-            </a:pPr>
-            <a:r>
-              <a:rPr lang="en-US" sz="1500" b="1" dirty="0">
-                <a:solidFill>
-                  <a:srgbClr val="1E2761"/>
-                </a:solidFill>
-                <a:latin typeface="Calibri" pitchFamily="34" charset="0"/>
-                <a:ea typeface="Calibri" pitchFamily="34" charset="-122"/>
-                <a:cs typeface="Calibri" pitchFamily="34" charset="-120"/>
-              </a:rPr>
-              <a:t>Tool/model interceptors</a:t>
-            </a:r>
-            <a:endParaRPr lang="en-US" sz="1500" dirty="0"/>
-          </a:p>
-        </p:txBody>
-      </p:sp>
-      <p:sp>
-        <p:nvSpPr>
-          <p:cNvPr id="13" name="Text 11"/>
-          <p:cNvSpPr/>
-          <p:nvPr/>
-        </p:nvSpPr>
-        <p:spPr>
-          <a:xfrm>
-            <a:off x="512064" y="3438144"/>
-            <a:ext cx="3813048" cy="1033272"/>
-          </a:xfrm>
-          <a:prstGeom prst="rect">
-            <a:avLst/>
-          </a:prstGeom>
-          <a:noFill/>
-          <a:ln/>
-        </p:spPr>
-        <p:txBody>
-          <a:bodyPr wrap="square" lIns="0" tIns="0" rIns="0" bIns="0" rtlCol="0" anchor="t">
-            <a:normAutofit/>
-          </a:bodyPr>
-          <a:lstStyle/>
-          <a:p>
-            <a:pPr indent="0" marL="0">
-              <a:buNone/>
-            </a:pPr>
-            <a:r>
-              <a:rPr lang="en-US" sz="1150" dirty="0">
-                <a:solidFill>
-                  <a:srgbClr val="212121"/>
-                </a:solidFill>
-                <a:latin typeface="Calibri" pitchFamily="34" charset="0"/>
-                <a:ea typeface="Calibri" pitchFamily="34" charset="-122"/>
-                <a:cs typeface="Calibri" pitchFamily="34" charset="-120"/>
-              </a:rPr>
-              <a:t>Attach trace context and decisions</a:t>
-            </a:r>
-            <a:endParaRPr lang="en-US" sz="1150" dirty="0"/>
-          </a:p>
-        </p:txBody>
-      </p:sp>
-      <p:sp>
-        <p:nvSpPr>
-          <p:cNvPr id="14" name="Shape 12"/>
-          <p:cNvSpPr/>
-          <p:nvPr/>
-        </p:nvSpPr>
-        <p:spPr>
-          <a:xfrm>
-            <a:off x="4672584" y="2935224"/>
-            <a:ext cx="4105656" cy="1655064"/>
-          </a:xfrm>
-          <a:prstGeom prst="roundRect">
-            <a:avLst>
-              <a:gd name="adj" fmla="val 3315"/>
-            </a:avLst>
-          </a:prstGeom>
-          <a:solidFill>
-            <a:srgbClr val="F3F4F6"/>
-          </a:solidFill>
-          <a:ln w="10160">
-            <a:solidFill>
-              <a:srgbClr val="D1D5DB"/>
-            </a:solidFill>
-            <a:prstDash val="solid"/>
-          </a:ln>
-        </p:spPr>
-      </p:sp>
-      <p:sp>
-        <p:nvSpPr>
-          <p:cNvPr id="15" name="Text 13"/>
-          <p:cNvSpPr/>
-          <p:nvPr/>
-        </p:nvSpPr>
-        <p:spPr>
-          <a:xfrm>
-            <a:off x="4818888" y="3054096"/>
-            <a:ext cx="3813048" cy="310896"/>
-          </a:xfrm>
-          <a:prstGeom prst="rect">
-            <a:avLst/>
-          </a:prstGeom>
-          <a:noFill/>
-          <a:ln/>
-        </p:spPr>
-        <p:txBody>
-          <a:bodyPr wrap="square" lIns="0" tIns="0" rIns="0" bIns="0" rtlCol="0" anchor="ctr">
-            <a:normAutofit/>
-          </a:bodyPr>
-          <a:lstStyle/>
-          <a:p>
-            <a:pPr indent="0" marL="0">
-              <a:buNone/>
-            </a:pPr>
-            <a:r>
-              <a:rPr lang="en-US" sz="1500" b="1" dirty="0">
-                <a:solidFill>
-                  <a:srgbClr val="1E2761"/>
-                </a:solidFill>
-                <a:latin typeface="Calibri" pitchFamily="34" charset="0"/>
-                <a:ea typeface="Calibri" pitchFamily="34" charset="-122"/>
-                <a:cs typeface="Calibri" pitchFamily="34" charset="-120"/>
-              </a:rPr>
-              <a:t>Outer unwind</a:t>
-            </a:r>
-            <a:endParaRPr lang="en-US" sz="1500" dirty="0"/>
-          </a:p>
-        </p:txBody>
-      </p:sp>
-      <p:sp>
-        <p:nvSpPr>
-          <p:cNvPr id="16" name="Text 14"/>
-          <p:cNvSpPr/>
-          <p:nvPr/>
-        </p:nvSpPr>
-        <p:spPr>
-          <a:xfrm>
-            <a:off x="4818888" y="3438144"/>
-            <a:ext cx="3813048" cy="1033272"/>
-          </a:xfrm>
-          <a:prstGeom prst="rect">
-            <a:avLst/>
-          </a:prstGeom>
-          <a:noFill/>
-          <a:ln/>
-        </p:spPr>
-        <p:txBody>
-          <a:bodyPr wrap="square" lIns="0" tIns="0" rIns="0" bIns="0" rtlCol="0" anchor="t">
-            <a:normAutofit/>
-          </a:bodyPr>
-          <a:lstStyle/>
-          <a:p>
-            <a:pPr indent="0" marL="0">
-              <a:buNone/>
-            </a:pPr>
-            <a:r>
-              <a:rPr lang="en-US" sz="1150" dirty="0">
-                <a:solidFill>
-                  <a:srgbClr val="212121"/>
-                </a:solidFill>
-                <a:latin typeface="Calibri" pitchFamily="34" charset="0"/>
-                <a:ea typeface="Calibri" pitchFamily="34" charset="-122"/>
-                <a:cs typeface="Calibri" pitchFamily="34" charset="-120"/>
-              </a:rPr>
-              <a:t>Read results and emit one summary</a:t>
-            </a:r>
-            <a:endParaRPr lang="en-US" sz="1150" dirty="0"/>
-          </a:p>
-        </p:txBody>
-      </p:sp>
-      <p:sp>
-        <p:nvSpPr>
-          <p:cNvPr id="17" name="Shape 15"/>
           <p:cNvSpPr/>
           <p:nvPr/>
         </p:nvSpPr>
@@ -10095,7 +11249,7 @@
       </p:sp>
       <p:sp>
         <p:nvSpPr>
-          <p:cNvPr id="18" name="Text 16"/>
+          <p:cNvPr id="12" name="Text 10"/>
           <p:cNvSpPr/>
           <p:nvPr/>
         </p:nvSpPr>
@@ -10128,7 +11282,7 @@
                 <a:ea typeface="Calibri" pitchFamily="34" charset="-122"/>
                 <a:cs typeface="Calibri" pitchFamily="34" charset="-120"/>
               </a:rPr>
-              <a:t>Source: https://learn.microsoft.com/en-us/agent-framework/concepts/agents/middleware/shared-state?tabs=python</a:t>
+              <a:t>Source: https://learn.microsoft.com/en-us/agent-framework/concepts/agents/middleware/?tabs=python</a:t>
             </a:r>
             <a:endParaRPr lang="en-US" sz="820" dirty="0"/>
           </a:p>
@@ -10148,7 +11302,7 @@
     <p:bg>
       <p:bgPr>
         <a:solidFill>
-          <a:srgbClr val="FFFFFF"/>
+          <a:srgbClr val="CADCFC"/>
         </a:solidFill>
       </p:bgPr>
     </p:bg>
@@ -10175,7 +11329,7 @@
         <p:spPr>
           <a:xfrm>
             <a:off x="0" y="0"/>
-            <a:ext cx="54864" cy="5143500"/>
+            <a:ext cx="146304" cy="5143500"/>
           </a:xfrm>
           <a:prstGeom prst="rect">
             <a:avLst/>
@@ -10194,26 +11348,24 @@
         </p:nvSpPr>
         <p:spPr>
           <a:xfrm>
-            <a:off x="5486400" y="256032"/>
-            <a:ext cx="3337560" cy="228600"/>
-          </a:xfrm>
-          <a:prstGeom prst="rect">
-            <a:avLst/>
-          </a:prstGeom>
-          <a:noFill/>
-          <a:ln/>
-        </p:spPr>
-        <p:txBody>
-          <a:bodyPr wrap="square" lIns="0" tIns="0" rIns="0" bIns="0" rtlCol="0" anchor="ctr">
-            <a:normAutofit/>
-          </a:bodyPr>
+            <a:off x="5669280" y="274320"/>
+            <a:ext cx="3291840" cy="274320"/>
+          </a:xfrm>
+          <a:prstGeom prst="rect">
+            <a:avLst/>
+          </a:prstGeom>
+          <a:noFill/>
+          <a:ln/>
+        </p:spPr>
+        <p:txBody>
+          <a:bodyPr wrap="square" lIns="0" tIns="0" rIns="0" bIns="0" rtlCol="0" anchor="ctr"/>
           <a:lstStyle/>
           <a:p>
             <a:pPr algn="r" indent="0" marL="0">
               <a:buNone/>
             </a:pPr>
             <a:r>
-              <a:rPr lang="en-US" sz="950" dirty="0">
+              <a:rPr lang="en-US" sz="1000" dirty="0">
                 <a:solidFill>
                   <a:srgbClr val="6B7280"/>
                 </a:solidFill>
@@ -10221,9 +11373,9 @@
                 <a:ea typeface="Calibri" pitchFamily="34" charset="-122"/>
                 <a:cs typeface="Calibri" pitchFamily="34" charset="-120"/>
               </a:rPr>
-              <a:t>Day 3 · Module 4</a:t>
-            </a:r>
-            <a:endParaRPr lang="en-US" sz="950" dirty="0"/>
+              <a:t>Day 3 · Module 4 · Demo</a:t>
+            </a:r>
+            <a:endParaRPr lang="en-US" sz="1000" dirty="0"/>
           </a:p>
         </p:txBody>
       </p:sp>
@@ -10235,26 +11387,24 @@
         </p:nvSpPr>
         <p:spPr>
           <a:xfrm>
-            <a:off x="365760" y="310896"/>
-            <a:ext cx="6583680" cy="603504"/>
-          </a:xfrm>
-          <a:prstGeom prst="rect">
-            <a:avLst/>
-          </a:prstGeom>
-          <a:noFill/>
-          <a:ln/>
-        </p:spPr>
-        <p:txBody>
-          <a:bodyPr wrap="square" lIns="0" tIns="0" rIns="0" bIns="0" rtlCol="0" anchor="ctr">
-            <a:normAutofit/>
-          </a:bodyPr>
+            <a:off x="548640" y="1051560"/>
+            <a:ext cx="5486400" cy="502920"/>
+          </a:xfrm>
+          <a:prstGeom prst="rect">
+            <a:avLst/>
+          </a:prstGeom>
+          <a:noFill/>
+          <a:ln/>
+        </p:spPr>
+        <p:txBody>
+          <a:bodyPr wrap="square" lIns="0" tIns="0" rIns="0" bIns="0" rtlCol="0" anchor="ctr"/>
           <a:lstStyle/>
           <a:p>
             <a:pPr indent="0" marL="0">
               <a:buNone/>
             </a:pPr>
             <a:r>
-              <a:rPr lang="en-US" sz="2300" b="1" dirty="0">
+              <a:rPr lang="en-US" sz="3200" b="1" spc="800" kern="0" dirty="0">
                 <a:solidFill>
                   <a:srgbClr val="1E2761"/>
                 </a:solidFill>
@@ -10262,36 +11412,50 @@
                 <a:ea typeface="Calibri" pitchFamily="34" charset="-122"/>
                 <a:cs typeface="Calibri" pitchFamily="34" charset="-120"/>
               </a:rPr>
-              <a:t>Logging and timing: the smallest useful pattern</a:t>
-            </a:r>
-            <a:endParaRPr lang="en-US" sz="2300" dirty="0"/>
-          </a:p>
-        </p:txBody>
-      </p:sp>
-      <p:sp>
-        <p:nvSpPr>
-          <p:cNvPr id="5" name="Shape 3"/>
-          <p:cNvSpPr/>
-          <p:nvPr/>
-        </p:nvSpPr>
-        <p:spPr>
-          <a:xfrm>
-            <a:off x="365760" y="1115568"/>
-            <a:ext cx="8412480" cy="2560320"/>
-          </a:xfrm>
-          <a:prstGeom prst="rect">
-            <a:avLst/>
-          </a:prstGeom>
-          <a:solidFill>
-            <a:srgbClr val="1D1E22"/>
-          </a:solidFill>
-          <a:ln w="9525">
-            <a:solidFill>
-              <a:srgbClr val="2A2B2E"/>
-            </a:solidFill>
-            <a:prstDash val="solid"/>
-          </a:ln>
-        </p:spPr>
+              <a:t>DEMO</a:t>
+            </a:r>
+            <a:endParaRPr lang="en-US" sz="3200" dirty="0"/>
+          </a:p>
+        </p:txBody>
+      </p:sp>
+      <p:sp>
+        <p:nvSpPr>
+          <p:cNvPr id="5" name="Text 3"/>
+          <p:cNvSpPr/>
+          <p:nvPr/>
+        </p:nvSpPr>
+        <p:spPr>
+          <a:xfrm>
+            <a:off x="548640" y="1691640"/>
+            <a:ext cx="8046720" cy="914400"/>
+          </a:xfrm>
+          <a:prstGeom prst="rect">
+            <a:avLst/>
+          </a:prstGeom>
+          <a:noFill/>
+          <a:ln/>
+        </p:spPr>
+        <p:txBody>
+          <a:bodyPr wrap="square" lIns="0" tIns="0" rIns="0" bIns="0" rtlCol="0" anchor="ctr"/>
+          <a:lstStyle/>
+          <a:p>
+            <a:pPr indent="0" marL="0">
+              <a:buNone/>
+            </a:pPr>
+            <a:r>
+              <a:rPr lang="en-US" sz="3000" b="1" dirty="0">
+                <a:solidFill>
+                  <a:srgbClr val="1E2761"/>
+                </a:solidFill>
+                <a:latin typeface="Calibri" pitchFamily="34" charset="0"/>
+                <a:ea typeface="Calibri" pitchFamily="34" charset="-122"/>
+                <a:cs typeface="Calibri" pitchFamily="34" charset="-120"/>
+              </a:rPr>
+              <a:t>The onion, printed</a:t>
+            </a:r>
+            <a:endParaRPr lang="en-US" sz="3000" dirty="0"/>
+          </a:p>
+        </p:txBody>
       </p:sp>
       <p:sp>
         <p:nvSpPr>
@@ -10301,390 +11465,121 @@
         </p:nvSpPr>
         <p:spPr>
           <a:xfrm>
-            <a:off x="502920" y="1207008"/>
-            <a:ext cx="8138160" cy="2377440"/>
-          </a:xfrm>
-          <a:prstGeom prst="rect">
-            <a:avLst/>
-          </a:prstGeom>
-          <a:noFill/>
-          <a:ln/>
-        </p:spPr>
-        <p:txBody>
-          <a:bodyPr wrap="square" lIns="0" tIns="0" rIns="0" bIns="0" rtlCol="0" anchor="t"/>
+            <a:off x="6583680" y="1051560"/>
+            <a:ext cx="2194560" cy="502920"/>
+          </a:xfrm>
+          <a:prstGeom prst="rect">
+            <a:avLst/>
+          </a:prstGeom>
+          <a:noFill/>
+          <a:ln/>
+        </p:spPr>
+        <p:txBody>
+          <a:bodyPr wrap="square" lIns="0" tIns="0" rIns="0" bIns="0" rtlCol="0" anchor="ctr"/>
+          <a:lstStyle/>
+          <a:p>
+            <a:pPr algn="r" indent="0" marL="0">
+              <a:buNone/>
+            </a:pPr>
+            <a:r>
+              <a:rPr lang="en-US" sz="1800" i="1" dirty="0">
+                <a:solidFill>
+                  <a:srgbClr val="6B7280"/>
+                </a:solidFill>
+                <a:latin typeface="Calibri" pitchFamily="34" charset="0"/>
+                <a:ea typeface="Calibri" pitchFamily="34" charset="-122"/>
+                <a:cs typeface="Calibri" pitchFamily="34" charset="-120"/>
+              </a:rPr>
+              <a:t>~5 min</a:t>
+            </a:r>
+            <a:endParaRPr lang="en-US" sz="1800" dirty="0"/>
+          </a:p>
+        </p:txBody>
+      </p:sp>
+      <p:sp>
+        <p:nvSpPr>
+          <p:cNvPr id="7" name="Text 5"/>
+          <p:cNvSpPr/>
+          <p:nvPr/>
+        </p:nvSpPr>
+        <p:spPr>
+          <a:xfrm>
+            <a:off x="548640" y="2788920"/>
+            <a:ext cx="8046720" cy="1371600"/>
+          </a:xfrm>
+          <a:prstGeom prst="rect">
+            <a:avLst/>
+          </a:prstGeom>
+          <a:noFill/>
+          <a:ln/>
+        </p:spPr>
+        <p:txBody>
+          <a:bodyPr wrap="square" lIns="0" tIns="0" rIns="0" bIns="0" rtlCol="0" anchor="ctr"/>
           <a:lstStyle/>
           <a:p>
             <a:pPr indent="0" marL="0">
-              <a:buNone/>
-            </a:pPr>
-            <a:r>
-              <a:rPr lang="en-US" sz="1280" dirty="0">
-                <a:solidFill>
-                  <a:srgbClr val="A996B6"/>
-                </a:solidFill>
-                <a:latin typeface="Consolas" pitchFamily="34" charset="0"/>
-                <a:ea typeface="Consolas" pitchFamily="34" charset="-122"/>
-                <a:cs typeface="Consolas" pitchFamily="34" charset="-120"/>
-              </a:rPr>
-              <a:t>async</a:t>
-            </a:r>
+              <a:spcAft>
+                <a:spcPts val="600"/>
+              </a:spcAft>
+              <a:buNone/>
+            </a:pPr>
+            <a:r>
+              <a:rPr lang="en-US" sz="1600" dirty="0">
+                <a:solidFill>
+                  <a:srgbClr val="212121"/>
+                </a:solidFill>
+                <a:latin typeface="Calibri" pitchFamily="34" charset="0"/>
+                <a:ea typeface="Calibri" pitchFamily="34" charset="-122"/>
+                <a:cs typeface="Calibri" pitchFamily="34" charset="-120"/>
+              </a:rPr>
+              <a:t>Run the official agent_and_run_level_middleware.py sample live: printed enter/exit lines match the previous slide's onion diagram exactly — agent-level middleware outermost, run-level middleware inside it, the agent execution at the center.</a:t>
+            </a:r>
+            <a:endParaRPr lang="en-US" sz="1600" dirty="0"/>
+          </a:p>
+        </p:txBody>
+      </p:sp>
+      <p:sp>
+        <p:nvSpPr>
+          <p:cNvPr id="8" name="Text 6"/>
+          <p:cNvSpPr/>
+          <p:nvPr/>
+        </p:nvSpPr>
+        <p:spPr>
+          <a:xfrm>
+            <a:off x="548640" y="4434840"/>
+            <a:ext cx="8046720" cy="320040"/>
+          </a:xfrm>
+          <a:prstGeom prst="rect">
+            <a:avLst/>
+          </a:prstGeom>
+          <a:noFill/>
+          <a:ln/>
+        </p:spPr>
+        <p:txBody>
+          <a:bodyPr wrap="square" lIns="0" tIns="0" rIns="0" bIns="0" rtlCol="0" anchor="ctr"/>
+          <a:lstStyle/>
+          <a:p>
             <a:pPr indent="0" marL="0">
               <a:buNone/>
             </a:pPr>
             <a:r>
-              <a:rPr lang="en-US" sz="1280" dirty="0">
-                <a:solidFill>
-                  <a:srgbClr val="FFFFFF"/>
-                </a:solidFill>
-                <a:latin typeface="Consolas" pitchFamily="34" charset="0"/>
-                <a:ea typeface="Consolas" pitchFamily="34" charset="-122"/>
-                <a:cs typeface="Consolas" pitchFamily="34" charset="-120"/>
-              </a:rPr>
-              <a:t> </a:t>
-            </a:r>
-            <a:pPr indent="0" marL="0">
-              <a:buNone/>
-            </a:pPr>
-            <a:r>
-              <a:rPr lang="en-US" sz="1280" dirty="0">
-                <a:solidFill>
-                  <a:srgbClr val="A996B6"/>
-                </a:solidFill>
-                <a:latin typeface="Consolas" pitchFamily="34" charset="0"/>
-                <a:ea typeface="Consolas" pitchFamily="34" charset="-122"/>
-                <a:cs typeface="Consolas" pitchFamily="34" charset="-120"/>
-              </a:rPr>
-              <a:t>def</a:t>
-            </a:r>
-            <a:pPr indent="0" marL="0">
-              <a:buNone/>
-            </a:pPr>
-            <a:r>
-              <a:rPr lang="en-US" sz="1280" dirty="0">
-                <a:solidFill>
-                  <a:srgbClr val="FFFFFF"/>
-                </a:solidFill>
-                <a:latin typeface="Consolas" pitchFamily="34" charset="0"/>
-                <a:ea typeface="Consolas" pitchFamily="34" charset="-122"/>
-                <a:cs typeface="Consolas" pitchFamily="34" charset="-120"/>
-              </a:rPr>
-              <a:t> timing(context, call_next):</a:t>
-            </a:r>
-            <a:endParaRPr lang="en-US" sz="1280" dirty="0"/>
-          </a:p>
-          <a:p>
-            <a:pPr indent="0" marL="0">
-              <a:buNone/>
-            </a:pPr>
-            <a:r>
-              <a:rPr lang="en-US" sz="1280" dirty="0">
-                <a:solidFill>
-                  <a:srgbClr val="FFFFFF"/>
-                </a:solidFill>
-                <a:latin typeface="Consolas" pitchFamily="34" charset="0"/>
-                <a:ea typeface="Consolas" pitchFamily="34" charset="-122"/>
-                <a:cs typeface="Consolas" pitchFamily="34" charset="-120"/>
-              </a:rPr>
-              <a:t>    started = perf_counter()</a:t>
-            </a:r>
-            <a:endParaRPr lang="en-US" sz="1280" dirty="0"/>
-          </a:p>
-          <a:p>
-            <a:pPr indent="0" marL="0">
-              <a:buNone/>
-            </a:pPr>
-            <a:r>
-              <a:rPr lang="en-US" sz="1280" dirty="0">
-                <a:solidFill>
-                  <a:srgbClr val="FFFFFF"/>
-                </a:solidFill>
-                <a:latin typeface="Consolas" pitchFamily="34" charset="0"/>
-                <a:ea typeface="Consolas" pitchFamily="34" charset="-122"/>
-                <a:cs typeface="Consolas" pitchFamily="34" charset="-120"/>
-              </a:rPr>
-              <a:t>    context.metadata[</a:t>
-            </a:r>
-            <a:endParaRPr lang="en-US" sz="1280" dirty="0"/>
-          </a:p>
-          <a:p>
-            <a:pPr indent="0" marL="0">
-              <a:buNone/>
-            </a:pPr>
-            <a:r>
-              <a:rPr lang="en-US" sz="1280" dirty="0">
-                <a:solidFill>
-                  <a:srgbClr val="E4C98A"/>
-                </a:solidFill>
-                <a:latin typeface="Consolas" pitchFamily="34" charset="0"/>
-                <a:ea typeface="Consolas" pitchFamily="34" charset="-122"/>
-                <a:cs typeface="Consolas" pitchFamily="34" charset="-120"/>
-              </a:rPr>
-              <a:t>"trace_id"</a:t>
-            </a:r>
-            <a:pPr indent="0" marL="0">
-              <a:buNone/>
-            </a:pPr>
-            <a:r>
-              <a:rPr lang="en-US" sz="1280" dirty="0">
-                <a:solidFill>
-                  <a:srgbClr val="FFFFFF"/>
-                </a:solidFill>
-                <a:latin typeface="Consolas" pitchFamily="34" charset="0"/>
-                <a:ea typeface="Consolas" pitchFamily="34" charset="-122"/>
-                <a:cs typeface="Consolas" pitchFamily="34" charset="-120"/>
-              </a:rPr>
-              <a:t>] = new_trace_id()</a:t>
-            </a:r>
-            <a:endParaRPr lang="en-US" sz="1280" dirty="0"/>
-          </a:p>
-          <a:p>
-            <a:pPr indent="0" marL="0">
-              <a:buNone/>
-            </a:pPr>
-            <a:r>
-              <a:rPr lang="en-US" sz="1280" dirty="0">
-                <a:solidFill>
-                  <a:srgbClr val="FFFFFF"/>
-                </a:solidFill>
-                <a:latin typeface="Consolas" pitchFamily="34" charset="0"/>
-                <a:ea typeface="Consolas" pitchFamily="34" charset="-122"/>
-                <a:cs typeface="Consolas" pitchFamily="34" charset="-120"/>
-              </a:rPr>
-              <a:t>    </a:t>
-            </a:r>
-            <a:endParaRPr lang="en-US" sz="1280" dirty="0"/>
-          </a:p>
-          <a:p>
-            <a:pPr indent="0" marL="0">
-              <a:buNone/>
-            </a:pPr>
-            <a:r>
-              <a:rPr lang="en-US" sz="1280" dirty="0">
-                <a:solidFill>
-                  <a:srgbClr val="A996B6"/>
-                </a:solidFill>
-                <a:latin typeface="Consolas" pitchFamily="34" charset="0"/>
-                <a:ea typeface="Consolas" pitchFamily="34" charset="-122"/>
-                <a:cs typeface="Consolas" pitchFamily="34" charset="-120"/>
-              </a:rPr>
-              <a:t>try</a:t>
-            </a:r>
-            <a:pPr indent="0" marL="0">
-              <a:buNone/>
-            </a:pPr>
-            <a:r>
-              <a:rPr lang="en-US" sz="1280" dirty="0">
-                <a:solidFill>
-                  <a:srgbClr val="FFFFFF"/>
-                </a:solidFill>
-                <a:latin typeface="Consolas" pitchFamily="34" charset="0"/>
-                <a:ea typeface="Consolas" pitchFamily="34" charset="-122"/>
-                <a:cs typeface="Consolas" pitchFamily="34" charset="-120"/>
-              </a:rPr>
-              <a:t>:</a:t>
-            </a:r>
-            <a:endParaRPr lang="en-US" sz="1280" dirty="0"/>
-          </a:p>
-          <a:p>
-            <a:pPr indent="0" marL="0">
-              <a:buNone/>
-            </a:pPr>
-            <a:r>
-              <a:rPr lang="en-US" sz="1280" dirty="0">
-                <a:solidFill>
-                  <a:srgbClr val="FFFFFF"/>
-                </a:solidFill>
-                <a:latin typeface="Consolas" pitchFamily="34" charset="0"/>
-                <a:ea typeface="Consolas" pitchFamily="34" charset="-122"/>
-                <a:cs typeface="Consolas" pitchFamily="34" charset="-120"/>
-              </a:rPr>
-              <a:t>        </a:t>
-            </a:r>
-            <a:endParaRPr lang="en-US" sz="1280" dirty="0"/>
-          </a:p>
-          <a:p>
-            <a:pPr indent="0" marL="0">
-              <a:buNone/>
-            </a:pPr>
-            <a:r>
-              <a:rPr lang="en-US" sz="1280" dirty="0">
-                <a:solidFill>
-                  <a:srgbClr val="A996B6"/>
-                </a:solidFill>
-                <a:latin typeface="Consolas" pitchFamily="34" charset="0"/>
-                <a:ea typeface="Consolas" pitchFamily="34" charset="-122"/>
-                <a:cs typeface="Consolas" pitchFamily="34" charset="-120"/>
-              </a:rPr>
-              <a:t>await</a:t>
-            </a:r>
-            <a:pPr indent="0" marL="0">
-              <a:buNone/>
-            </a:pPr>
-            <a:r>
-              <a:rPr lang="en-US" sz="1280" dirty="0">
-                <a:solidFill>
-                  <a:srgbClr val="FFFFFF"/>
-                </a:solidFill>
-                <a:latin typeface="Consolas" pitchFamily="34" charset="0"/>
-                <a:ea typeface="Consolas" pitchFamily="34" charset="-122"/>
-                <a:cs typeface="Consolas" pitchFamily="34" charset="-120"/>
-              </a:rPr>
-              <a:t> call_next()</a:t>
-            </a:r>
-            <a:endParaRPr lang="en-US" sz="1280" dirty="0"/>
-          </a:p>
-          <a:p>
-            <a:pPr indent="0" marL="0">
-              <a:buNone/>
-            </a:pPr>
-            <a:r>
-              <a:rPr lang="en-US" sz="1280" dirty="0">
-                <a:solidFill>
-                  <a:srgbClr val="FFFFFF"/>
-                </a:solidFill>
-                <a:latin typeface="Consolas" pitchFamily="34" charset="0"/>
-                <a:ea typeface="Consolas" pitchFamily="34" charset="-122"/>
-                <a:cs typeface="Consolas" pitchFamily="34" charset="-120"/>
-              </a:rPr>
-              <a:t>    </a:t>
-            </a:r>
-            <a:endParaRPr lang="en-US" sz="1280" dirty="0"/>
-          </a:p>
-          <a:p>
-            <a:pPr indent="0" marL="0">
-              <a:buNone/>
-            </a:pPr>
-            <a:r>
-              <a:rPr lang="en-US" sz="1280" dirty="0">
-                <a:solidFill>
-                  <a:srgbClr val="A996B6"/>
-                </a:solidFill>
-                <a:latin typeface="Consolas" pitchFamily="34" charset="0"/>
-                <a:ea typeface="Consolas" pitchFamily="34" charset="-122"/>
-                <a:cs typeface="Consolas" pitchFamily="34" charset="-120"/>
-              </a:rPr>
-              <a:t>finally</a:t>
-            </a:r>
-            <a:pPr indent="0" marL="0">
-              <a:buNone/>
-            </a:pPr>
-            <a:r>
-              <a:rPr lang="en-US" sz="1280" dirty="0">
-                <a:solidFill>
-                  <a:srgbClr val="FFFFFF"/>
-                </a:solidFill>
-                <a:latin typeface="Consolas" pitchFamily="34" charset="0"/>
-                <a:ea typeface="Consolas" pitchFamily="34" charset="-122"/>
-                <a:cs typeface="Consolas" pitchFamily="34" charset="-120"/>
-              </a:rPr>
-              <a:t>:</a:t>
-            </a:r>
-            <a:endParaRPr lang="en-US" sz="1280" dirty="0"/>
-          </a:p>
-          <a:p>
-            <a:pPr indent="0" marL="0">
-              <a:buNone/>
-            </a:pPr>
-            <a:r>
-              <a:rPr lang="en-US" sz="1280" dirty="0">
-                <a:solidFill>
-                  <a:srgbClr val="FFFFFF"/>
-                </a:solidFill>
-                <a:latin typeface="Consolas" pitchFamily="34" charset="0"/>
-                <a:ea typeface="Consolas" pitchFamily="34" charset="-122"/>
-                <a:cs typeface="Consolas" pitchFamily="34" charset="-120"/>
-              </a:rPr>
-              <a:t>        record_duration(</a:t>
-            </a:r>
-            <a:endParaRPr lang="en-US" sz="1280" dirty="0"/>
-          </a:p>
-          <a:p>
-            <a:pPr indent="0" marL="0">
-              <a:buNone/>
-            </a:pPr>
-            <a:r>
-              <a:rPr lang="en-US" sz="1280" dirty="0">
-                <a:solidFill>
-                  <a:srgbClr val="FFFFFF"/>
-                </a:solidFill>
-                <a:latin typeface="Consolas" pitchFamily="34" charset="0"/>
-                <a:ea typeface="Consolas" pitchFamily="34" charset="-122"/>
-                <a:cs typeface="Consolas" pitchFamily="34" charset="-120"/>
-              </a:rPr>
-              <a:t>            perf_counter() - started,</a:t>
-            </a:r>
-            <a:endParaRPr lang="en-US" sz="1280" dirty="0"/>
-          </a:p>
-          <a:p>
-            <a:pPr indent="0" marL="0">
-              <a:buNone/>
-            </a:pPr>
-            <a:r>
-              <a:rPr lang="en-US" sz="1280" dirty="0">
-                <a:solidFill>
-                  <a:srgbClr val="FFFFFF"/>
-                </a:solidFill>
-                <a:latin typeface="Consolas" pitchFamily="34" charset="0"/>
-                <a:ea typeface="Consolas" pitchFamily="34" charset="-122"/>
-                <a:cs typeface="Consolas" pitchFamily="34" charset="-120"/>
-              </a:rPr>
-              <a:t>            context.metadata[</a:t>
-            </a:r>
-            <a:endParaRPr lang="en-US" sz="1280" dirty="0"/>
-          </a:p>
-          <a:p>
-            <a:pPr indent="0" marL="0">
-              <a:buNone/>
-            </a:pPr>
-            <a:r>
-              <a:rPr lang="en-US" sz="1280" dirty="0">
-                <a:solidFill>
-                  <a:srgbClr val="E4C98A"/>
-                </a:solidFill>
-                <a:latin typeface="Consolas" pitchFamily="34" charset="0"/>
-                <a:ea typeface="Consolas" pitchFamily="34" charset="-122"/>
-                <a:cs typeface="Consolas" pitchFamily="34" charset="-120"/>
-              </a:rPr>
-              <a:t>"trace_id"</a:t>
-            </a:r>
-            <a:pPr indent="0" marL="0">
-              <a:buNone/>
-            </a:pPr>
-            <a:r>
-              <a:rPr lang="en-US" sz="1280" dirty="0">
-                <a:solidFill>
-                  <a:srgbClr val="FFFFFF"/>
-                </a:solidFill>
-                <a:latin typeface="Consolas" pitchFamily="34" charset="0"/>
-                <a:ea typeface="Consolas" pitchFamily="34" charset="-122"/>
-                <a:cs typeface="Consolas" pitchFamily="34" charset="-120"/>
-              </a:rPr>
-              <a:t>],</a:t>
-            </a:r>
-            <a:endParaRPr lang="en-US" sz="1280" dirty="0"/>
-          </a:p>
-          <a:p>
-            <a:pPr indent="0" marL="0">
-              <a:buNone/>
-            </a:pPr>
-            <a:r>
-              <a:rPr lang="en-US" sz="1280" dirty="0">
-                <a:solidFill>
-                  <a:srgbClr val="FFFFFF"/>
-                </a:solidFill>
-                <a:latin typeface="Consolas" pitchFamily="34" charset="0"/>
-                <a:ea typeface="Consolas" pitchFamily="34" charset="-122"/>
-                <a:cs typeface="Consolas" pitchFamily="34" charset="-120"/>
-              </a:rPr>
-              <a:t>        )</a:t>
-            </a:r>
-            <a:endParaRPr lang="en-US" sz="1280" dirty="0"/>
-          </a:p>
-        </p:txBody>
-      </p:sp>
-      <p:sp>
-        <p:nvSpPr>
-          <p:cNvPr id="7" name="Shape 5"/>
+              <a:rPr lang="en-US" sz="1100" i="1" dirty="0">
+                <a:solidFill>
+                  <a:srgbClr val="6B7280"/>
+                </a:solidFill>
+                <a:latin typeface="Calibri" pitchFamily="34" charset="0"/>
+                <a:ea typeface="Calibri" pitchFamily="34" charset="-122"/>
+                <a:cs typeface="Calibri" pitchFamily="34" charset="-120"/>
+              </a:rPr>
+              <a:t>Runbook: demos/day3/module-4-demo-1-onion-order.md</a:t>
+            </a:r>
+            <a:endParaRPr lang="en-US" sz="1100" dirty="0"/>
+          </a:p>
+        </p:txBody>
+      </p:sp>
+      <p:sp>
+        <p:nvSpPr>
+          <p:cNvPr id="9" name="Shape 7"/>
           <p:cNvSpPr/>
           <p:nvPr/>
         </p:nvSpPr>
@@ -10707,7 +11602,7 @@
       </p:sp>
       <p:sp>
         <p:nvSpPr>
-          <p:cNvPr id="8" name="Text 6"/>
+          <p:cNvPr id="10" name="Text 8"/>
           <p:cNvSpPr/>
           <p:nvPr/>
         </p:nvSpPr>
@@ -10740,7 +11635,7 @@
                 <a:ea typeface="Calibri" pitchFamily="34" charset="-122"/>
                 <a:cs typeface="Calibri" pitchFamily="34" charset="-120"/>
               </a:rPr>
-              <a:t>Source: https://learn.microsoft.com/en-us/agent-framework/concepts/agents/middleware/defining-middleware?tabs=python</a:t>
+              <a:t>Source: https://github.com/microsoft/agent-framework/blob/main/python/samples/02-agents/middleware/agent_and_run_level_middleware.py</a:t>
             </a:r>
             <a:endParaRPr lang="en-US" sz="820" dirty="0"/>
           </a:p>
@@ -10866,7 +11761,7 @@
               <a:buNone/>
             </a:pPr>
             <a:r>
-              <a:rPr lang="en-US" sz="2800" b="1" dirty="0">
+              <a:rPr lang="en-US" sz="2500" b="1" dirty="0">
                 <a:solidFill>
                   <a:srgbClr val="1E2761"/>
                 </a:solidFill>
@@ -10874,9 +11769,9 @@
                 <a:ea typeface="Calibri" pitchFamily="34" charset="-122"/>
                 <a:cs typeface="Calibri" pitchFamily="34" charset="-120"/>
               </a:rPr>
-              <a:t>Guardrails can short-circuit</a:t>
-            </a:r>
-            <a:endParaRPr lang="en-US" sz="2800" dirty="0"/>
+              <a:t>Coordinate through context.metadata</a:t>
+            </a:r>
+            <a:endParaRPr lang="en-US" sz="2500" dirty="0"/>
           </a:p>
         </p:txBody>
       </p:sp>
@@ -10888,12 +11783,12 @@
         </p:nvSpPr>
         <p:spPr>
           <a:xfrm>
-            <a:off x="365760" y="1216152"/>
-            <a:ext cx="1911096" cy="2148840"/>
+            <a:off x="365760" y="1078992"/>
+            <a:ext cx="4105656" cy="1655064"/>
           </a:xfrm>
           <a:prstGeom prst="roundRect">
             <a:avLst>
-              <a:gd name="adj" fmla="val 2871"/>
+              <a:gd name="adj" fmla="val 3315"/>
             </a:avLst>
           </a:prstGeom>
           <a:solidFill>
@@ -10909,73 +11804,14 @@
       </p:sp>
       <p:sp>
         <p:nvSpPr>
-          <p:cNvPr id="6" name="Shape 4"/>
-          <p:cNvSpPr/>
-          <p:nvPr/>
-        </p:nvSpPr>
-        <p:spPr>
-          <a:xfrm>
-            <a:off x="475488" y="1335024"/>
-            <a:ext cx="320040" cy="320040"/>
-          </a:xfrm>
-          <a:prstGeom prst="ellipse">
-            <a:avLst/>
-          </a:prstGeom>
-          <a:solidFill>
-            <a:srgbClr val="1E2761"/>
-          </a:solidFill>
-          <a:ln/>
-        </p:spPr>
-      </p:sp>
-      <p:sp>
-        <p:nvSpPr>
-          <p:cNvPr id="7" name="Text 5"/>
-          <p:cNvSpPr/>
-          <p:nvPr/>
-        </p:nvSpPr>
-        <p:spPr>
-          <a:xfrm>
-            <a:off x="475488" y="1385316"/>
-            <a:ext cx="320040" cy="146304"/>
-          </a:xfrm>
-          <a:prstGeom prst="rect">
-            <a:avLst/>
-          </a:prstGeom>
-          <a:noFill/>
-          <a:ln/>
-        </p:spPr>
-        <p:txBody>
-          <a:bodyPr wrap="square" lIns="0" tIns="0" rIns="0" bIns="0" rtlCol="0" anchor="ctr"/>
-          <a:lstStyle/>
-          <a:p>
-            <a:pPr algn="ctr" indent="0" marL="0">
-              <a:buNone/>
-            </a:pPr>
-            <a:r>
-              <a:rPr lang="en-US" sz="900" b="1" dirty="0">
-                <a:solidFill>
-                  <a:srgbClr val="FFFFFF"/>
-                </a:solidFill>
-                <a:latin typeface="Calibri" pitchFamily="34" charset="0"/>
-                <a:ea typeface="Calibri" pitchFamily="34" charset="-122"/>
-                <a:cs typeface="Calibri" pitchFamily="34" charset="-120"/>
-              </a:rPr>
-              <a:t>1</a:t>
-            </a:r>
-            <a:endParaRPr lang="en-US" sz="900" dirty="0"/>
-          </a:p>
-        </p:txBody>
-      </p:sp>
-      <p:sp>
-        <p:nvSpPr>
-          <p:cNvPr id="8" name="Text 6"/>
-          <p:cNvSpPr/>
-          <p:nvPr/>
-        </p:nvSpPr>
-        <p:spPr>
-          <a:xfrm>
-            <a:off x="896112" y="1335024"/>
-            <a:ext cx="1252728" cy="310896"/>
+          <p:cNvPr id="6" name="Text 4"/>
+          <p:cNvSpPr/>
+          <p:nvPr/>
+        </p:nvSpPr>
+        <p:spPr>
+          <a:xfrm>
+            <a:off x="512064" y="1197864"/>
+            <a:ext cx="3813048" cy="310896"/>
           </a:xfrm>
           <a:prstGeom prst="rect">
             <a:avLst/>
@@ -11001,7 +11837,7 @@
                 <a:ea typeface="Calibri" pitchFamily="34" charset="-122"/>
                 <a:cs typeface="Calibri" pitchFamily="34" charset="-120"/>
               </a:rPr>
-              <a:t>Inspect</a:t>
+              <a:t>Outer middleware</a:t>
             </a:r>
             <a:endParaRPr lang="en-US" sz="1500" dirty="0"/>
           </a:p>
@@ -11009,14 +11845,14 @@
       </p:sp>
       <p:sp>
         <p:nvSpPr>
-          <p:cNvPr id="9" name="Text 7"/>
-          <p:cNvSpPr/>
-          <p:nvPr/>
-        </p:nvSpPr>
-        <p:spPr>
-          <a:xfrm>
-            <a:off x="512064" y="1719072"/>
-            <a:ext cx="1618488" cy="1527048"/>
+          <p:cNvPr id="7" name="Text 5"/>
+          <p:cNvSpPr/>
+          <p:nvPr/>
+        </p:nvSpPr>
+        <p:spPr>
+          <a:xfrm>
+            <a:off x="512064" y="1581912"/>
+            <a:ext cx="3813048" cy="1033272"/>
           </a:xfrm>
           <a:prstGeom prst="rect">
             <a:avLst/>
@@ -11042,7 +11878,7 @@
                 <a:ea typeface="Calibri" pitchFamily="34" charset="-122"/>
                 <a:cs typeface="Calibri" pitchFamily="34" charset="-120"/>
               </a:rPr>
-              <a:t>Evaluate request, identity, quota, or policy</a:t>
+              <a:t>Set correlation ID and start time</a:t>
             </a:r>
             <a:endParaRPr lang="en-US" sz="1150" dirty="0"/>
           </a:p>
@@ -11050,38 +11886,18 @@
       </p:sp>
       <p:sp>
         <p:nvSpPr>
-          <p:cNvPr id="10" name="Shape 8"/>
-          <p:cNvSpPr/>
-          <p:nvPr/>
-        </p:nvSpPr>
-        <p:spPr>
-          <a:xfrm>
-            <a:off x="2313432" y="2180844"/>
-            <a:ext cx="164592" cy="219456"/>
-          </a:xfrm>
-          <a:prstGeom prst="chevron">
-            <a:avLst/>
-          </a:prstGeom>
-          <a:solidFill>
-            <a:srgbClr val="E8A87C"/>
-          </a:solidFill>
-          <a:ln/>
-        </p:spPr>
-      </p:sp>
-      <p:sp>
-        <p:nvSpPr>
-          <p:cNvPr id="11" name="Shape 9"/>
-          <p:cNvSpPr/>
-          <p:nvPr/>
-        </p:nvSpPr>
-        <p:spPr>
-          <a:xfrm>
-            <a:off x="2532888" y="1216152"/>
-            <a:ext cx="1911096" cy="2148840"/>
+          <p:cNvPr id="8" name="Shape 6"/>
+          <p:cNvSpPr/>
+          <p:nvPr/>
+        </p:nvSpPr>
+        <p:spPr>
+          <a:xfrm>
+            <a:off x="4672584" y="1078992"/>
+            <a:ext cx="4105656" cy="1655064"/>
           </a:xfrm>
           <a:prstGeom prst="roundRect">
             <a:avLst>
-              <a:gd name="adj" fmla="val 2871"/>
+              <a:gd name="adj" fmla="val 3315"/>
             </a:avLst>
           </a:prstGeom>
           <a:solidFill>
@@ -11097,73 +11913,14 @@
       </p:sp>
       <p:sp>
         <p:nvSpPr>
-          <p:cNvPr id="12" name="Shape 10"/>
-          <p:cNvSpPr/>
-          <p:nvPr/>
-        </p:nvSpPr>
-        <p:spPr>
-          <a:xfrm>
-            <a:off x="2642616" y="1335024"/>
-            <a:ext cx="320040" cy="320040"/>
-          </a:xfrm>
-          <a:prstGeom prst="ellipse">
-            <a:avLst/>
-          </a:prstGeom>
-          <a:solidFill>
-            <a:srgbClr val="1E2761"/>
-          </a:solidFill>
-          <a:ln/>
-        </p:spPr>
-      </p:sp>
-      <p:sp>
-        <p:nvSpPr>
-          <p:cNvPr id="13" name="Text 11"/>
-          <p:cNvSpPr/>
-          <p:nvPr/>
-        </p:nvSpPr>
-        <p:spPr>
-          <a:xfrm>
-            <a:off x="2642616" y="1385316"/>
-            <a:ext cx="320040" cy="146304"/>
-          </a:xfrm>
-          <a:prstGeom prst="rect">
-            <a:avLst/>
-          </a:prstGeom>
-          <a:noFill/>
-          <a:ln/>
-        </p:spPr>
-        <p:txBody>
-          <a:bodyPr wrap="square" lIns="0" tIns="0" rIns="0" bIns="0" rtlCol="0" anchor="ctr"/>
-          <a:lstStyle/>
-          <a:p>
-            <a:pPr algn="ctr" indent="0" marL="0">
-              <a:buNone/>
-            </a:pPr>
-            <a:r>
-              <a:rPr lang="en-US" sz="900" b="1" dirty="0">
-                <a:solidFill>
-                  <a:srgbClr val="FFFFFF"/>
-                </a:solidFill>
-                <a:latin typeface="Calibri" pitchFamily="34" charset="0"/>
-                <a:ea typeface="Calibri" pitchFamily="34" charset="-122"/>
-                <a:cs typeface="Calibri" pitchFamily="34" charset="-120"/>
-              </a:rPr>
-              <a:t>2</a:t>
-            </a:r>
-            <a:endParaRPr lang="en-US" sz="900" dirty="0"/>
-          </a:p>
-        </p:txBody>
-      </p:sp>
-      <p:sp>
-        <p:nvSpPr>
-          <p:cNvPr id="14" name="Text 12"/>
-          <p:cNvSpPr/>
-          <p:nvPr/>
-        </p:nvSpPr>
-        <p:spPr>
-          <a:xfrm>
-            <a:off x="3063240" y="1335024"/>
-            <a:ext cx="1252728" cy="310896"/>
+          <p:cNvPr id="9" name="Text 7"/>
+          <p:cNvSpPr/>
+          <p:nvPr/>
+        </p:nvSpPr>
+        <p:spPr>
+          <a:xfrm>
+            <a:off x="4818888" y="1197864"/>
+            <a:ext cx="3813048" cy="310896"/>
           </a:xfrm>
           <a:prstGeom prst="rect">
             <a:avLst/>
@@ -11189,7 +11946,7 @@
                 <a:ea typeface="Calibri" pitchFamily="34" charset="-122"/>
                 <a:cs typeface="Calibri" pitchFamily="34" charset="-120"/>
               </a:rPr>
-              <a:t>Allow</a:t>
+              <a:t>Inner middleware</a:t>
             </a:r>
             <a:endParaRPr lang="en-US" sz="1500" dirty="0"/>
           </a:p>
@@ -11197,14 +11954,14 @@
       </p:sp>
       <p:sp>
         <p:nvSpPr>
-          <p:cNvPr id="15" name="Text 13"/>
-          <p:cNvSpPr/>
-          <p:nvPr/>
-        </p:nvSpPr>
-        <p:spPr>
-          <a:xfrm>
-            <a:off x="2679192" y="1719072"/>
-            <a:ext cx="1618488" cy="1527048"/>
+          <p:cNvPr id="10" name="Text 8"/>
+          <p:cNvSpPr/>
+          <p:nvPr/>
+        </p:nvSpPr>
+        <p:spPr>
+          <a:xfrm>
+            <a:off x="4818888" y="1581912"/>
+            <a:ext cx="3813048" cy="1033272"/>
           </a:xfrm>
           <a:prstGeom prst="rect">
             <a:avLst/>
@@ -11230,7 +11987,7 @@
                 <a:ea typeface="Calibri" pitchFamily="34" charset="-122"/>
                 <a:cs typeface="Calibri" pitchFamily="34" charset="-120"/>
               </a:rPr>
-              <a:t>Await call_next() when the request is permitted</a:t>
+              <a:t>Read or enrich shared metadata</a:t>
             </a:r>
             <a:endParaRPr lang="en-US" sz="1150" dirty="0"/>
           </a:p>
@@ -11238,38 +11995,18 @@
       </p:sp>
       <p:sp>
         <p:nvSpPr>
-          <p:cNvPr id="16" name="Shape 14"/>
-          <p:cNvSpPr/>
-          <p:nvPr/>
-        </p:nvSpPr>
-        <p:spPr>
-          <a:xfrm>
-            <a:off x="4480560" y="2180844"/>
-            <a:ext cx="164592" cy="219456"/>
-          </a:xfrm>
-          <a:prstGeom prst="chevron">
-            <a:avLst/>
-          </a:prstGeom>
-          <a:solidFill>
-            <a:srgbClr val="E8A87C"/>
-          </a:solidFill>
-          <a:ln/>
-        </p:spPr>
-      </p:sp>
-      <p:sp>
-        <p:nvSpPr>
-          <p:cNvPr id="17" name="Shape 15"/>
-          <p:cNvSpPr/>
-          <p:nvPr/>
-        </p:nvSpPr>
-        <p:spPr>
-          <a:xfrm>
-            <a:off x="4700016" y="1216152"/>
-            <a:ext cx="1911096" cy="2148840"/>
+          <p:cNvPr id="11" name="Shape 9"/>
+          <p:cNvSpPr/>
+          <p:nvPr/>
+        </p:nvSpPr>
+        <p:spPr>
+          <a:xfrm>
+            <a:off x="365760" y="2935224"/>
+            <a:ext cx="4105656" cy="1655064"/>
           </a:xfrm>
           <a:prstGeom prst="roundRect">
             <a:avLst>
-              <a:gd name="adj" fmla="val 2871"/>
+              <a:gd name="adj" fmla="val 3315"/>
             </a:avLst>
           </a:prstGeom>
           <a:solidFill>
@@ -11285,73 +12022,14 @@
       </p:sp>
       <p:sp>
         <p:nvSpPr>
-          <p:cNvPr id="18" name="Shape 16"/>
-          <p:cNvSpPr/>
-          <p:nvPr/>
-        </p:nvSpPr>
-        <p:spPr>
-          <a:xfrm>
-            <a:off x="4809744" y="1335024"/>
-            <a:ext cx="320040" cy="320040"/>
-          </a:xfrm>
-          <a:prstGeom prst="ellipse">
-            <a:avLst/>
-          </a:prstGeom>
-          <a:solidFill>
-            <a:srgbClr val="1E2761"/>
-          </a:solidFill>
-          <a:ln/>
-        </p:spPr>
-      </p:sp>
-      <p:sp>
-        <p:nvSpPr>
-          <p:cNvPr id="19" name="Text 17"/>
-          <p:cNvSpPr/>
-          <p:nvPr/>
-        </p:nvSpPr>
-        <p:spPr>
-          <a:xfrm>
-            <a:off x="4809744" y="1385316"/>
-            <a:ext cx="320040" cy="146304"/>
-          </a:xfrm>
-          <a:prstGeom prst="rect">
-            <a:avLst/>
-          </a:prstGeom>
-          <a:noFill/>
-          <a:ln/>
-        </p:spPr>
-        <p:txBody>
-          <a:bodyPr wrap="square" lIns="0" tIns="0" rIns="0" bIns="0" rtlCol="0" anchor="ctr"/>
-          <a:lstStyle/>
-          <a:p>
-            <a:pPr algn="ctr" indent="0" marL="0">
-              <a:buNone/>
-            </a:pPr>
-            <a:r>
-              <a:rPr lang="en-US" sz="900" b="1" dirty="0">
-                <a:solidFill>
-                  <a:srgbClr val="FFFFFF"/>
-                </a:solidFill>
-                <a:latin typeface="Calibri" pitchFamily="34" charset="0"/>
-                <a:ea typeface="Calibri" pitchFamily="34" charset="-122"/>
-                <a:cs typeface="Calibri" pitchFamily="34" charset="-120"/>
-              </a:rPr>
-              <a:t>3</a:t>
-            </a:r>
-            <a:endParaRPr lang="en-US" sz="900" dirty="0"/>
-          </a:p>
-        </p:txBody>
-      </p:sp>
-      <p:sp>
-        <p:nvSpPr>
-          <p:cNvPr id="20" name="Text 18"/>
-          <p:cNvSpPr/>
-          <p:nvPr/>
-        </p:nvSpPr>
-        <p:spPr>
-          <a:xfrm>
-            <a:off x="5230368" y="1335024"/>
-            <a:ext cx="1252728" cy="310896"/>
+          <p:cNvPr id="12" name="Text 10"/>
+          <p:cNvSpPr/>
+          <p:nvPr/>
+        </p:nvSpPr>
+        <p:spPr>
+          <a:xfrm>
+            <a:off x="512064" y="3054096"/>
+            <a:ext cx="3813048" cy="310896"/>
           </a:xfrm>
           <a:prstGeom prst="rect">
             <a:avLst/>
@@ -11377,7 +12055,7 @@
                 <a:ea typeface="Calibri" pitchFamily="34" charset="-122"/>
                 <a:cs typeface="Calibri" pitchFamily="34" charset="-120"/>
               </a:rPr>
-              <a:t>Set result</a:t>
+              <a:t>Tool/model interceptors</a:t>
             </a:r>
             <a:endParaRPr lang="en-US" sz="1500" dirty="0"/>
           </a:p>
@@ -11385,14 +12063,14 @@
       </p:sp>
       <p:sp>
         <p:nvSpPr>
-          <p:cNvPr id="21" name="Text 19"/>
-          <p:cNvSpPr/>
-          <p:nvPr/>
-        </p:nvSpPr>
-        <p:spPr>
-          <a:xfrm>
-            <a:off x="4846320" y="1719072"/>
-            <a:ext cx="1618488" cy="1527048"/>
+          <p:cNvPr id="13" name="Text 11"/>
+          <p:cNvSpPr/>
+          <p:nvPr/>
+        </p:nvSpPr>
+        <p:spPr>
+          <a:xfrm>
+            <a:off x="512064" y="3438144"/>
+            <a:ext cx="3813048" cy="1033272"/>
           </a:xfrm>
           <a:prstGeom prst="rect">
             <a:avLst/>
@@ -11418,7 +12096,7 @@
                 <a:ea typeface="Calibri" pitchFamily="34" charset="-122"/>
                 <a:cs typeface="Calibri" pitchFamily="34" charset="-120"/>
               </a:rPr>
-              <a:t>Supply a controlled AgentResponse when blocked</a:t>
+              <a:t>Attach trace context and decisions</a:t>
             </a:r>
             <a:endParaRPr lang="en-US" sz="1150" dirty="0"/>
           </a:p>
@@ -11426,46 +12104,26 @@
       </p:sp>
       <p:sp>
         <p:nvSpPr>
-          <p:cNvPr id="22" name="Shape 20"/>
-          <p:cNvSpPr/>
-          <p:nvPr/>
-        </p:nvSpPr>
-        <p:spPr>
-          <a:xfrm>
-            <a:off x="6647688" y="2180844"/>
-            <a:ext cx="164592" cy="219456"/>
-          </a:xfrm>
-          <a:prstGeom prst="chevron">
-            <a:avLst/>
-          </a:prstGeom>
-          <a:solidFill>
-            <a:srgbClr val="E8A87C"/>
-          </a:solidFill>
-          <a:ln/>
-        </p:spPr>
-      </p:sp>
-      <p:sp>
-        <p:nvSpPr>
-          <p:cNvPr id="23" name="Shape 21"/>
-          <p:cNvSpPr/>
-          <p:nvPr/>
-        </p:nvSpPr>
-        <p:spPr>
-          <a:xfrm>
-            <a:off x="6867144" y="1216152"/>
-            <a:ext cx="1911096" cy="2148840"/>
+          <p:cNvPr id="14" name="Shape 12"/>
+          <p:cNvSpPr/>
+          <p:nvPr/>
+        </p:nvSpPr>
+        <p:spPr>
+          <a:xfrm>
+            <a:off x="4672584" y="2935224"/>
+            <a:ext cx="4105656" cy="1655064"/>
           </a:xfrm>
           <a:prstGeom prst="roundRect">
             <a:avLst>
-              <a:gd name="adj" fmla="val 2871"/>
+              <a:gd name="adj" fmla="val 3315"/>
             </a:avLst>
           </a:prstGeom>
           <a:solidFill>
-            <a:srgbClr val="CADCFC"/>
+            <a:srgbClr val="F3F4F6"/>
           </a:solidFill>
           <a:ln w="10160">
             <a:solidFill>
-              <a:srgbClr val="1E2761"/>
+              <a:srgbClr val="D1D5DB"/>
             </a:solidFill>
             <a:prstDash val="solid"/>
           </a:ln>
@@ -11473,73 +12131,14 @@
       </p:sp>
       <p:sp>
         <p:nvSpPr>
-          <p:cNvPr id="24" name="Shape 22"/>
-          <p:cNvSpPr/>
-          <p:nvPr/>
-        </p:nvSpPr>
-        <p:spPr>
-          <a:xfrm>
-            <a:off x="6976872" y="1335024"/>
-            <a:ext cx="320040" cy="320040"/>
-          </a:xfrm>
-          <a:prstGeom prst="ellipse">
-            <a:avLst/>
-          </a:prstGeom>
-          <a:solidFill>
-            <a:srgbClr val="1E2761"/>
-          </a:solidFill>
-          <a:ln/>
-        </p:spPr>
-      </p:sp>
-      <p:sp>
-        <p:nvSpPr>
-          <p:cNvPr id="25" name="Text 23"/>
-          <p:cNvSpPr/>
-          <p:nvPr/>
-        </p:nvSpPr>
-        <p:spPr>
-          <a:xfrm>
-            <a:off x="6976872" y="1385316"/>
-            <a:ext cx="320040" cy="146304"/>
-          </a:xfrm>
-          <a:prstGeom prst="rect">
-            <a:avLst/>
-          </a:prstGeom>
-          <a:noFill/>
-          <a:ln/>
-        </p:spPr>
-        <p:txBody>
-          <a:bodyPr wrap="square" lIns="0" tIns="0" rIns="0" bIns="0" rtlCol="0" anchor="ctr"/>
-          <a:lstStyle/>
-          <a:p>
-            <a:pPr algn="ctr" indent="0" marL="0">
-              <a:buNone/>
-            </a:pPr>
-            <a:r>
-              <a:rPr lang="en-US" sz="900" b="1" dirty="0">
-                <a:solidFill>
-                  <a:srgbClr val="FFFFFF"/>
-                </a:solidFill>
-                <a:latin typeface="Calibri" pitchFamily="34" charset="0"/>
-                <a:ea typeface="Calibri" pitchFamily="34" charset="-122"/>
-                <a:cs typeface="Calibri" pitchFamily="34" charset="-120"/>
-              </a:rPr>
-              <a:t>4</a:t>
-            </a:r>
-            <a:endParaRPr lang="en-US" sz="900" dirty="0"/>
-          </a:p>
-        </p:txBody>
-      </p:sp>
-      <p:sp>
-        <p:nvSpPr>
-          <p:cNvPr id="26" name="Text 24"/>
-          <p:cNvSpPr/>
-          <p:nvPr/>
-        </p:nvSpPr>
-        <p:spPr>
-          <a:xfrm>
-            <a:off x="7397496" y="1335024"/>
-            <a:ext cx="1252728" cy="310896"/>
+          <p:cNvPr id="15" name="Text 13"/>
+          <p:cNvSpPr/>
+          <p:nvPr/>
+        </p:nvSpPr>
+        <p:spPr>
+          <a:xfrm>
+            <a:off x="4818888" y="3054096"/>
+            <a:ext cx="3813048" cy="310896"/>
           </a:xfrm>
           <a:prstGeom prst="rect">
             <a:avLst/>
@@ -11565,7 +12164,7 @@
                 <a:ea typeface="Calibri" pitchFamily="34" charset="-122"/>
                 <a:cs typeface="Calibri" pitchFamily="34" charset="-120"/>
               </a:rPr>
-              <a:t>Raise</a:t>
+              <a:t>Outer unwind</a:t>
             </a:r>
             <a:endParaRPr lang="en-US" sz="1500" dirty="0"/>
           </a:p>
@@ -11573,14 +12172,14 @@
       </p:sp>
       <p:sp>
         <p:nvSpPr>
-          <p:cNvPr id="27" name="Text 25"/>
-          <p:cNvSpPr/>
-          <p:nvPr/>
-        </p:nvSpPr>
-        <p:spPr>
-          <a:xfrm>
-            <a:off x="7013448" y="1719072"/>
-            <a:ext cx="1618488" cy="1527048"/>
+          <p:cNvPr id="16" name="Text 14"/>
+          <p:cNvSpPr/>
+          <p:nvPr/>
+        </p:nvSpPr>
+        <p:spPr>
+          <a:xfrm>
+            <a:off x="4818888" y="3438144"/>
+            <a:ext cx="3813048" cy="1033272"/>
           </a:xfrm>
           <a:prstGeom prst="rect">
             <a:avLst/>
@@ -11606,7 +12205,7 @@
                 <a:ea typeface="Calibri" pitchFamily="34" charset="-122"/>
                 <a:cs typeface="Calibri" pitchFamily="34" charset="-120"/>
               </a:rPr>
-              <a:t>MiddlewareTermination ends the pipeline deliberately</a:t>
+              <a:t>Read results and emit one summary</a:t>
             </a:r>
             <a:endParaRPr lang="en-US" sz="1150" dirty="0"/>
           </a:p>
@@ -11614,7 +12213,7 @@
       </p:sp>
       <p:sp>
         <p:nvSpPr>
-          <p:cNvPr id="28" name="Shape 26"/>
+          <p:cNvPr id="17" name="Shape 15"/>
           <p:cNvSpPr/>
           <p:nvPr/>
         </p:nvSpPr>
@@ -11637,7 +12236,7 @@
       </p:sp>
       <p:sp>
         <p:nvSpPr>
-          <p:cNvPr id="29" name="Text 27"/>
+          <p:cNvPr id="18" name="Text 16"/>
           <p:cNvSpPr/>
           <p:nvPr/>
         </p:nvSpPr>
@@ -11670,7 +12269,7 @@
                 <a:ea typeface="Calibri" pitchFamily="34" charset="-122"/>
                 <a:cs typeface="Calibri" pitchFamily="34" charset="-120"/>
               </a:rPr>
-              <a:t>Source: https://learn.microsoft.com/en-us/agent-framework/concepts/agents/middleware/termination?tabs=python</a:t>
+              <a:t>Source: https://learn.microsoft.com/en-us/agent-framework/concepts/agents/middleware/shared-state?tabs=python</a:t>
             </a:r>
             <a:endParaRPr lang="en-US" sz="820" dirty="0"/>
           </a:p>
@@ -11804,7 +12403,7 @@
                 <a:ea typeface="Calibri" pitchFamily="34" charset="-122"/>
                 <a:cs typeface="Calibri" pitchFamily="34" charset="-120"/>
               </a:rPr>
-              <a:t>Termination has an explicit result</a:t>
+              <a:t>Logging and timing example</a:t>
             </a:r>
             <a:endParaRPr lang="en-US" sz="2800" dirty="0"/>
           </a:p>
@@ -11819,7 +12418,7 @@
         <p:spPr>
           <a:xfrm>
             <a:off x="365760" y="1115568"/>
-            <a:ext cx="8412480" cy="1929384"/>
+            <a:ext cx="8412480" cy="2560320"/>
           </a:xfrm>
           <a:prstGeom prst="rect">
             <a:avLst/>
@@ -11844,16 +12443,18 @@
         <p:spPr>
           <a:xfrm>
             <a:off x="502920" y="1207008"/>
-            <a:ext cx="8138160" cy="1746504"/>
-          </a:xfrm>
-          <a:prstGeom prst="rect">
-            <a:avLst/>
-          </a:prstGeom>
-          <a:noFill/>
-          <a:ln/>
-        </p:spPr>
-        <p:txBody>
-          <a:bodyPr wrap="square" lIns="0" tIns="0" rIns="0" bIns="0" rtlCol="0" anchor="t"/>
+            <a:ext cx="8138160" cy="2377440"/>
+          </a:xfrm>
+          <a:prstGeom prst="rect">
+            <a:avLst/>
+          </a:prstGeom>
+          <a:noFill/>
+          <a:ln/>
+        </p:spPr>
+        <p:txBody>
+          <a:bodyPr wrap="square" lIns="0" tIns="0" rIns="0" bIns="0" rtlCol="0" anchor="t">
+            <a:normAutofit/>
+          </a:bodyPr>
           <a:lstStyle/>
           <a:p>
             <a:pPr indent="0" marL="0">
@@ -11868,7 +12469,7 @@
                 <a:ea typeface="Consolas" pitchFamily="34" charset="-122"/>
                 <a:cs typeface="Consolas" pitchFamily="34" charset="-120"/>
               </a:rPr>
-              <a:t>if</a:t>
+              <a:t>async</a:t>
             </a:r>
             <a:pPr indent="0" marL="0">
               <a:buNone/>
@@ -11882,28 +12483,22 @@
                 <a:ea typeface="Consolas" pitchFamily="34" charset="-122"/>
                 <a:cs typeface="Consolas" pitchFamily="34" charset="-120"/>
               </a:rPr>
-              <a:t> blocked(context.messages):</a:t>
-            </a:r>
-            <a:endParaRPr lang="en-US" sz="1280" dirty="0"/>
-          </a:p>
-          <a:p>
+              <a:t> </a:t>
+            </a:r>
             <a:pPr indent="0" marL="0">
               <a:buNone/>
             </a:pPr>
             <a:r>
               <a:rPr lang="en-US" sz="1280" dirty="0">
                 <a:solidFill>
-                  <a:srgbClr val="FFFFFF"/>
+                  <a:srgbClr val="A996B6"/>
                 </a:solidFill>
                 <a:latin typeface="Consolas" pitchFamily="34" charset="0"/>
                 <a:ea typeface="Consolas" pitchFamily="34" charset="-122"/>
                 <a:cs typeface="Consolas" pitchFamily="34" charset="-120"/>
               </a:rPr>
-              <a:t>    context.result = AgentResponse(</a:t>
-            </a:r>
-            <a:endParaRPr lang="en-US" sz="1280" dirty="0"/>
-          </a:p>
-          <a:p>
+              <a:t>def</a:t>
+            </a:r>
             <a:pPr indent="0" marL="0">
               <a:buNone/>
             </a:pPr>
@@ -11916,7 +12511,7 @@
                 <a:ea typeface="Consolas" pitchFamily="34" charset="-122"/>
                 <a:cs typeface="Consolas" pitchFamily="34" charset="-120"/>
               </a:rPr>
-              <a:t>        messages=[Message(</a:t>
+              <a:t> timing(context, call_next):</a:t>
             </a:r>
             <a:endParaRPr lang="en-US" sz="1280" dirty="0"/>
           </a:p>
@@ -11927,14 +12522,17 @@
             <a:r>
               <a:rPr lang="en-US" sz="1280" dirty="0">
                 <a:solidFill>
-                  <a:srgbClr val="E4C98A"/>
+                  <a:srgbClr val="FFFFFF"/>
                 </a:solidFill>
                 <a:latin typeface="Consolas" pitchFamily="34" charset="0"/>
                 <a:ea typeface="Consolas" pitchFamily="34" charset="-122"/>
                 <a:cs typeface="Consolas" pitchFamily="34" charset="-120"/>
               </a:rPr>
-              <a:t>"assistant"</a:t>
-            </a:r>
+              <a:t>    started = perf_counter()</a:t>
+            </a:r>
+            <a:endParaRPr lang="en-US" sz="1280" dirty="0"/>
+          </a:p>
+          <a:p>
             <a:pPr indent="0" marL="0">
               <a:buNone/>
             </a:pPr>
@@ -11947,7 +12545,7 @@
                 <a:ea typeface="Consolas" pitchFamily="34" charset="-122"/>
                 <a:cs typeface="Consolas" pitchFamily="34" charset="-120"/>
               </a:rPr>
-              <a:t>, [</a:t>
+              <a:t>    context.metadata[</a:t>
             </a:r>
             <a:pPr indent="0" marL="0">
               <a:buNone/>
@@ -11961,7 +12559,7 @@
                 <a:ea typeface="Consolas" pitchFamily="34" charset="-122"/>
                 <a:cs typeface="Consolas" pitchFamily="34" charset="-120"/>
               </a:rPr>
-              <a:t>"I can't process this request."</a:t>
+              <a:t>"trace_id"</a:t>
             </a:r>
             <a:pPr indent="0" marL="0">
               <a:buNone/>
@@ -11975,7 +12573,7 @@
                 <a:ea typeface="Consolas" pitchFamily="34" charset="-122"/>
                 <a:cs typeface="Consolas" pitchFamily="34" charset="-120"/>
               </a:rPr>
-              <a:t>])]</a:t>
+              <a:t>] = new_trace_id()</a:t>
             </a:r>
             <a:endParaRPr lang="en-US" sz="1280" dirty="0"/>
           </a:p>
@@ -11992,42 +12590,39 @@
                 <a:ea typeface="Consolas" pitchFamily="34" charset="-122"/>
                 <a:cs typeface="Consolas" pitchFamily="34" charset="-120"/>
               </a:rPr>
-              <a:t>    )</a:t>
-            </a:r>
-            <a:endParaRPr lang="en-US" sz="1280" dirty="0"/>
-          </a:p>
-          <a:p>
+              <a:t>    </a:t>
+            </a:r>
             <a:pPr indent="0" marL="0">
               <a:buNone/>
             </a:pPr>
             <a:r>
               <a:rPr lang="en-US" sz="1280" dirty="0">
                 <a:solidFill>
-                  <a:srgbClr val="FFFFFF"/>
+                  <a:srgbClr val="A996B6"/>
                 </a:solidFill>
                 <a:latin typeface="Consolas" pitchFamily="34" charset="0"/>
                 <a:ea typeface="Consolas" pitchFamily="34" charset="-122"/>
                 <a:cs typeface="Consolas" pitchFamily="34" charset="-120"/>
               </a:rPr>
-              <a:t>    </a:t>
-            </a:r>
-            <a:endParaRPr lang="en-US" sz="1280" dirty="0"/>
-          </a:p>
-          <a:p>
+              <a:t>try</a:t>
+            </a:r>
             <a:pPr indent="0" marL="0">
               <a:buNone/>
             </a:pPr>
             <a:r>
               <a:rPr lang="en-US" sz="1280" dirty="0">
                 <a:solidFill>
-                  <a:srgbClr val="A996B6"/>
+                  <a:srgbClr val="FFFFFF"/>
                 </a:solidFill>
                 <a:latin typeface="Consolas" pitchFamily="34" charset="0"/>
                 <a:ea typeface="Consolas" pitchFamily="34" charset="-122"/>
                 <a:cs typeface="Consolas" pitchFamily="34" charset="-120"/>
               </a:rPr>
-              <a:t>raise</a:t>
-            </a:r>
+              <a:t>:</a:t>
+            </a:r>
+            <a:endParaRPr lang="en-US" sz="1280" dirty="0"/>
+          </a:p>
+          <a:p>
             <a:pPr indent="0" marL="0">
               <a:buNone/>
             </a:pPr>
@@ -12040,8 +12635,7 @@
                 <a:ea typeface="Consolas" pitchFamily="34" charset="-122"/>
                 <a:cs typeface="Consolas" pitchFamily="34" charset="-120"/>
               </a:rPr>
-              <a:t> MiddlewareTermination()
-</a:t>
+              <a:t>        </a:t>
             </a:r>
             <a:pPr indent="0" marL="0">
               <a:buNone/>
@@ -12073,11 +12667,196 @@
             </a:r>
             <a:endParaRPr lang="en-US" sz="1280" dirty="0"/>
           </a:p>
-        </p:txBody>
-      </p:sp>
-      <p:sp>
-        <p:nvSpPr>
-          <p:cNvPr id="7" name="Shape 5"/>
+          <a:p>
+            <a:pPr indent="0" marL="0">
+              <a:buNone/>
+            </a:pPr>
+            <a:r>
+              <a:rPr lang="en-US" sz="1280" dirty="0">
+                <a:solidFill>
+                  <a:srgbClr val="FFFFFF"/>
+                </a:solidFill>
+                <a:latin typeface="Consolas" pitchFamily="34" charset="0"/>
+                <a:ea typeface="Consolas" pitchFamily="34" charset="-122"/>
+                <a:cs typeface="Consolas" pitchFamily="34" charset="-120"/>
+              </a:rPr>
+              <a:t>    </a:t>
+            </a:r>
+            <a:pPr indent="0" marL="0">
+              <a:buNone/>
+            </a:pPr>
+            <a:r>
+              <a:rPr lang="en-US" sz="1280" dirty="0">
+                <a:solidFill>
+                  <a:srgbClr val="A996B6"/>
+                </a:solidFill>
+                <a:latin typeface="Consolas" pitchFamily="34" charset="0"/>
+                <a:ea typeface="Consolas" pitchFamily="34" charset="-122"/>
+                <a:cs typeface="Consolas" pitchFamily="34" charset="-120"/>
+              </a:rPr>
+              <a:t>finally</a:t>
+            </a:r>
+            <a:pPr indent="0" marL="0">
+              <a:buNone/>
+            </a:pPr>
+            <a:r>
+              <a:rPr lang="en-US" sz="1280" dirty="0">
+                <a:solidFill>
+                  <a:srgbClr val="FFFFFF"/>
+                </a:solidFill>
+                <a:latin typeface="Consolas" pitchFamily="34" charset="0"/>
+                <a:ea typeface="Consolas" pitchFamily="34" charset="-122"/>
+                <a:cs typeface="Consolas" pitchFamily="34" charset="-120"/>
+              </a:rPr>
+              <a:t>:</a:t>
+            </a:r>
+            <a:endParaRPr lang="en-US" sz="1280" dirty="0"/>
+          </a:p>
+          <a:p>
+            <a:pPr indent="0" marL="0">
+              <a:buNone/>
+            </a:pPr>
+            <a:r>
+              <a:rPr lang="en-US" sz="1280" dirty="0">
+                <a:solidFill>
+                  <a:srgbClr val="FFFFFF"/>
+                </a:solidFill>
+                <a:latin typeface="Consolas" pitchFamily="34" charset="0"/>
+                <a:ea typeface="Consolas" pitchFamily="34" charset="-122"/>
+                <a:cs typeface="Consolas" pitchFamily="34" charset="-120"/>
+              </a:rPr>
+              <a:t>        record_duration(</a:t>
+            </a:r>
+            <a:endParaRPr lang="en-US" sz="1280" dirty="0"/>
+          </a:p>
+          <a:p>
+            <a:pPr indent="0" marL="0">
+              <a:buNone/>
+            </a:pPr>
+            <a:r>
+              <a:rPr lang="en-US" sz="1280" dirty="0">
+                <a:solidFill>
+                  <a:srgbClr val="FFFFFF"/>
+                </a:solidFill>
+                <a:latin typeface="Consolas" pitchFamily="34" charset="0"/>
+                <a:ea typeface="Consolas" pitchFamily="34" charset="-122"/>
+                <a:cs typeface="Consolas" pitchFamily="34" charset="-120"/>
+              </a:rPr>
+              <a:t>            perf_counter() - started,</a:t>
+            </a:r>
+            <a:endParaRPr lang="en-US" sz="1280" dirty="0"/>
+          </a:p>
+          <a:p>
+            <a:pPr indent="0" marL="0">
+              <a:buNone/>
+            </a:pPr>
+            <a:r>
+              <a:rPr lang="en-US" sz="1280" dirty="0">
+                <a:solidFill>
+                  <a:srgbClr val="FFFFFF"/>
+                </a:solidFill>
+                <a:latin typeface="Consolas" pitchFamily="34" charset="0"/>
+                <a:ea typeface="Consolas" pitchFamily="34" charset="-122"/>
+                <a:cs typeface="Consolas" pitchFamily="34" charset="-120"/>
+              </a:rPr>
+              <a:t>            context.metadata[</a:t>
+            </a:r>
+            <a:pPr indent="0" marL="0">
+              <a:buNone/>
+            </a:pPr>
+            <a:r>
+              <a:rPr lang="en-US" sz="1280" dirty="0">
+                <a:solidFill>
+                  <a:srgbClr val="E4C98A"/>
+                </a:solidFill>
+                <a:latin typeface="Consolas" pitchFamily="34" charset="0"/>
+                <a:ea typeface="Consolas" pitchFamily="34" charset="-122"/>
+                <a:cs typeface="Consolas" pitchFamily="34" charset="-120"/>
+              </a:rPr>
+              <a:t>"trace_id"</a:t>
+            </a:r>
+            <a:pPr indent="0" marL="0">
+              <a:buNone/>
+            </a:pPr>
+            <a:r>
+              <a:rPr lang="en-US" sz="1280" dirty="0">
+                <a:solidFill>
+                  <a:srgbClr val="FFFFFF"/>
+                </a:solidFill>
+                <a:latin typeface="Consolas" pitchFamily="34" charset="0"/>
+                <a:ea typeface="Consolas" pitchFamily="34" charset="-122"/>
+                <a:cs typeface="Consolas" pitchFamily="34" charset="-120"/>
+              </a:rPr>
+              <a:t>],</a:t>
+            </a:r>
+            <a:endParaRPr lang="en-US" sz="1280" dirty="0"/>
+          </a:p>
+          <a:p>
+            <a:pPr indent="0" marL="0">
+              <a:buNone/>
+            </a:pPr>
+            <a:r>
+              <a:rPr lang="en-US" sz="1280" dirty="0">
+                <a:solidFill>
+                  <a:srgbClr val="FFFFFF"/>
+                </a:solidFill>
+                <a:latin typeface="Consolas" pitchFamily="34" charset="0"/>
+                <a:ea typeface="Consolas" pitchFamily="34" charset="-122"/>
+                <a:cs typeface="Consolas" pitchFamily="34" charset="-120"/>
+              </a:rPr>
+              <a:t>        )</a:t>
+            </a:r>
+            <a:endParaRPr lang="en-US" sz="1280" dirty="0"/>
+          </a:p>
+        </p:txBody>
+      </p:sp>
+      <p:sp>
+        <p:nvSpPr>
+          <p:cNvPr id="7" name="Text 5"/>
+          <p:cNvSpPr/>
+          <p:nvPr/>
+        </p:nvSpPr>
+        <p:spPr>
+          <a:xfrm>
+            <a:off x="365760" y="4338193"/>
+            <a:ext cx="8412480" cy="370967"/>
+          </a:xfrm>
+          <a:prstGeom prst="rect">
+            <a:avLst/>
+          </a:prstGeom>
+          <a:noFill/>
+          <a:ln/>
+        </p:spPr>
+        <p:txBody>
+          <a:bodyPr wrap="square" lIns="0" tIns="0" rIns="0" bIns="0" rtlCol="0" anchor="t">
+            <a:normAutofit/>
+          </a:bodyPr>
+          <a:lstStyle/>
+          <a:p>
+            <a:pPr indent="0" marL="0">
+              <a:spcAft>
+                <a:spcPts val="800"/>
+              </a:spcAft>
+              <a:buNone/>
+            </a:pPr>
+            <a:r>
+              <a:rPr lang="en-US" sz="1300" dirty="0">
+                <a:solidFill>
+                  <a:srgbClr val="6B7280"/>
+                </a:solidFill>
+                <a:latin typeface="Calibri" pitchFamily="34" charset="0"/>
+                <a:ea typeface="Calibri" pitchFamily="34" charset="-122"/>
+                <a:cs typeface="Calibri" pitchFamily="34" charset="-120"/>
+              </a:rPr>
+              <a:t>Then add the middleware when creating your agent: middleware=[(add your middleware here)]</a:t>
+            </a:r>
+            <a:endParaRPr lang="en-US" sz="1300" dirty="0"/>
+          </a:p>
+        </p:txBody>
+      </p:sp>
+      <p:sp>
+        <p:nvSpPr>
+          <p:cNvPr id="8" name="Shape 6"/>
           <p:cNvSpPr/>
           <p:nvPr/>
         </p:nvSpPr>
@@ -12100,7 +12879,7 @@
       </p:sp>
       <p:sp>
         <p:nvSpPr>
-          <p:cNvPr id="8" name="Text 6"/>
+          <p:cNvPr id="9" name="Text 7"/>
           <p:cNvSpPr/>
           <p:nvPr/>
         </p:nvSpPr>
@@ -12133,7 +12912,7 @@
                 <a:ea typeface="Calibri" pitchFamily="34" charset="-122"/>
                 <a:cs typeface="Calibri" pitchFamily="34" charset="-120"/>
               </a:rPr>
-              <a:t>Source: https://learn.microsoft.com/en-us/agent-framework/concepts/agents/middleware/termination?tabs=python</a:t>
+              <a:t>Source: https://learn.microsoft.com/en-us/agent-framework/concepts/agents/middleware/defining-middleware?tabs=python</a:t>
             </a:r>
             <a:endParaRPr lang="en-US" sz="820" dirty="0"/>
           </a:p>

--- a/decks/day3/module-4-middleware.pptx
+++ b/decks/day3/module-4-middleware.pptx
@@ -4579,8 +4579,8 @@
               <a:tblPr/>
               <a:tblGrid>
                 <a:gridCol w="2804160"/>
-                <a:gridCol w="2804160"/>
-                <a:gridCol w="2804160"/>
+                <a:gridCol w="1933903"/>
+                <a:gridCol w="3674417"/>
               </a:tblGrid>
               <a:tr h="658368">
                 <a:tc>
@@ -7608,7 +7608,7 @@
                 <a:ea typeface="Calibri" pitchFamily="34" charset="-122"/>
                 <a:cs typeface="Calibri" pitchFamily="34" charset="-120"/>
               </a:rPr>
-              <a:t>Interceptors return a verdit that can optionally be enforced</a:t>
+              <a:t>Interceptors return a verdict that can optionally be enforced</a:t>
             </a:r>
             <a:endParaRPr lang="en-US" sz="1300" dirty="0"/>
           </a:p>
@@ -8716,7 +8716,7 @@
                 <a:ea typeface="Calibri" pitchFamily="34" charset="-122"/>
                 <a:cs typeface="Calibri" pitchFamily="34" charset="-120"/>
               </a:rPr>
-              <a:t>Security valication</a:t>
+              <a:t>Security validation</a:t>
             </a:r>
             <a:endParaRPr lang="en-US" sz="1600" dirty="0"/>
           </a:p>
@@ -9070,9 +9070,9 @@
             <a:tbl>
               <a:tblPr/>
               <a:tblGrid>
-                <a:gridCol w="2804160"/>
-                <a:gridCol w="2804160"/>
-                <a:gridCol w="2804160"/>
+                <a:gridCol w="2351876"/>
+                <a:gridCol w="2532790"/>
+                <a:gridCol w="3527814"/>
               </a:tblGrid>
               <a:tr h="658368">
                 <a:tc>
@@ -12818,8 +12818,8 @@
         </p:nvSpPr>
         <p:spPr>
           <a:xfrm>
-            <a:off x="365760" y="4338193"/>
-            <a:ext cx="8412480" cy="370967"/>
+            <a:off x="365760" y="4131818"/>
+            <a:ext cx="8412480" cy="577342"/>
           </a:xfrm>
           <a:prstGeom prst="rect">
             <a:avLst/>
@@ -12848,7 +12848,7 @@
                 <a:ea typeface="Calibri" pitchFamily="34" charset="-122"/>
                 <a:cs typeface="Calibri" pitchFamily="34" charset="-120"/>
               </a:rPr>
-              <a:t>Then add the middleware when creating your agent: middleware=[(add your middleware here)]</a:t>
+              <a:t>Then reference the middleware when creating your agent: middleware=[(add your middleware here)]</a:t>
             </a:r>
             <a:endParaRPr lang="en-US" sz="1300" dirty="0"/>
           </a:p>

--- a/decks/day3/module-4-middleware.pptx
+++ b/decks/day3/module-4-middleware.pptx
@@ -2856,16 +2856,16 @@
         <p:spPr>
           <a:xfrm>
             <a:off x="896112" y="1335024"/>
-            <a:ext cx="1252728" cy="310896"/>
-          </a:xfrm>
-          <a:prstGeom prst="rect">
-            <a:avLst/>
-          </a:prstGeom>
-          <a:noFill/>
-          <a:ln/>
-        </p:spPr>
-        <p:txBody>
-          <a:bodyPr wrap="square" lIns="0" tIns="0" rIns="0" bIns="0" rtlCol="0" anchor="ctr">
+            <a:ext cx="1252728" cy="311277"/>
+          </a:xfrm>
+          <a:prstGeom prst="rect">
+            <a:avLst/>
+          </a:prstGeom>
+          <a:noFill/>
+          <a:ln/>
+        </p:spPr>
+        <p:txBody>
+          <a:bodyPr wrap="square" lIns="0" tIns="0" rIns="0" bIns="0" rtlCol="0" anchor="t">
             <a:normAutofit/>
           </a:bodyPr>
           <a:lstStyle/>
@@ -2896,8 +2896,8 @@
         </p:nvSpPr>
         <p:spPr>
           <a:xfrm>
-            <a:off x="512064" y="1719072"/>
-            <a:ext cx="1618488" cy="1527048"/>
+            <a:off x="512064" y="1701165"/>
+            <a:ext cx="1618488" cy="1572387"/>
           </a:xfrm>
           <a:prstGeom prst="rect">
             <a:avLst/>
@@ -3044,16 +3044,16 @@
         <p:spPr>
           <a:xfrm>
             <a:off x="3063240" y="1335024"/>
-            <a:ext cx="1252728" cy="310896"/>
-          </a:xfrm>
-          <a:prstGeom prst="rect">
-            <a:avLst/>
-          </a:prstGeom>
-          <a:noFill/>
-          <a:ln/>
-        </p:spPr>
-        <p:txBody>
-          <a:bodyPr wrap="square" lIns="0" tIns="0" rIns="0" bIns="0" rtlCol="0" anchor="ctr">
+            <a:ext cx="1252728" cy="311277"/>
+          </a:xfrm>
+          <a:prstGeom prst="rect">
+            <a:avLst/>
+          </a:prstGeom>
+          <a:noFill/>
+          <a:ln/>
+        </p:spPr>
+        <p:txBody>
+          <a:bodyPr wrap="square" lIns="0" tIns="0" rIns="0" bIns="0" rtlCol="0" anchor="t">
             <a:normAutofit/>
           </a:bodyPr>
           <a:lstStyle/>
@@ -3084,8 +3084,8 @@
         </p:nvSpPr>
         <p:spPr>
           <a:xfrm>
-            <a:off x="2679192" y="1719072"/>
-            <a:ext cx="1618488" cy="1527048"/>
+            <a:off x="2679192" y="1701165"/>
+            <a:ext cx="1618488" cy="1572387"/>
           </a:xfrm>
           <a:prstGeom prst="rect">
             <a:avLst/>
@@ -3232,16 +3232,16 @@
         <p:spPr>
           <a:xfrm>
             <a:off x="5230368" y="1335024"/>
-            <a:ext cx="1252728" cy="310896"/>
-          </a:xfrm>
-          <a:prstGeom prst="rect">
-            <a:avLst/>
-          </a:prstGeom>
-          <a:noFill/>
-          <a:ln/>
-        </p:spPr>
-        <p:txBody>
-          <a:bodyPr wrap="square" lIns="0" tIns="0" rIns="0" bIns="0" rtlCol="0" anchor="ctr">
+            <a:ext cx="1252728" cy="311277"/>
+          </a:xfrm>
+          <a:prstGeom prst="rect">
+            <a:avLst/>
+          </a:prstGeom>
+          <a:noFill/>
+          <a:ln/>
+        </p:spPr>
+        <p:txBody>
+          <a:bodyPr wrap="square" lIns="0" tIns="0" rIns="0" bIns="0" rtlCol="0" anchor="t">
             <a:normAutofit/>
           </a:bodyPr>
           <a:lstStyle/>
@@ -3272,8 +3272,8 @@
         </p:nvSpPr>
         <p:spPr>
           <a:xfrm>
-            <a:off x="4846320" y="1719072"/>
-            <a:ext cx="1618488" cy="1527048"/>
+            <a:off x="4846320" y="1701165"/>
+            <a:ext cx="1618488" cy="1572387"/>
           </a:xfrm>
           <a:prstGeom prst="rect">
             <a:avLst/>
@@ -3420,16 +3420,16 @@
         <p:spPr>
           <a:xfrm>
             <a:off x="7397496" y="1335024"/>
-            <a:ext cx="1252728" cy="310896"/>
-          </a:xfrm>
-          <a:prstGeom prst="rect">
-            <a:avLst/>
-          </a:prstGeom>
-          <a:noFill/>
-          <a:ln/>
-        </p:spPr>
-        <p:txBody>
-          <a:bodyPr wrap="square" lIns="0" tIns="0" rIns="0" bIns="0" rtlCol="0" anchor="ctr">
+            <a:ext cx="1252728" cy="311277"/>
+          </a:xfrm>
+          <a:prstGeom prst="rect">
+            <a:avLst/>
+          </a:prstGeom>
+          <a:noFill/>
+          <a:ln/>
+        </p:spPr>
+        <p:txBody>
+          <a:bodyPr wrap="square" lIns="0" tIns="0" rIns="0" bIns="0" rtlCol="0" anchor="t">
             <a:normAutofit/>
           </a:bodyPr>
           <a:lstStyle/>
@@ -3460,8 +3460,8 @@
         </p:nvSpPr>
         <p:spPr>
           <a:xfrm>
-            <a:off x="7013448" y="1719072"/>
-            <a:ext cx="1618488" cy="1527048"/>
+            <a:off x="7013448" y="1701165"/>
+            <a:ext cx="1618488" cy="1572387"/>
           </a:xfrm>
           <a:prstGeom prst="rect">
             <a:avLst/>
@@ -5850,16 +5850,16 @@
         <p:spPr>
           <a:xfrm>
             <a:off x="512064" y="1197864"/>
-            <a:ext cx="3813048" cy="310896"/>
-          </a:xfrm>
-          <a:prstGeom prst="rect">
-            <a:avLst/>
-          </a:prstGeom>
-          <a:noFill/>
-          <a:ln/>
-        </p:spPr>
-        <p:txBody>
-          <a:bodyPr wrap="square" lIns="0" tIns="0" rIns="0" bIns="0" rtlCol="0" anchor="ctr">
+            <a:ext cx="3813048" cy="311277"/>
+          </a:xfrm>
+          <a:prstGeom prst="rect">
+            <a:avLst/>
+          </a:prstGeom>
+          <a:noFill/>
+          <a:ln/>
+        </p:spPr>
+        <p:txBody>
+          <a:bodyPr wrap="square" lIns="0" tIns="0" rIns="0" bIns="0" rtlCol="0" anchor="t">
             <a:normAutofit/>
           </a:bodyPr>
           <a:lstStyle/>
@@ -5890,8 +5890,8 @@
         </p:nvSpPr>
         <p:spPr>
           <a:xfrm>
-            <a:off x="512064" y="1581912"/>
-            <a:ext cx="3813048" cy="1033272"/>
+            <a:off x="512064" y="1564005"/>
+            <a:ext cx="3813048" cy="1078611"/>
           </a:xfrm>
           <a:prstGeom prst="rect">
             <a:avLst/>
@@ -5959,16 +5959,16 @@
         <p:spPr>
           <a:xfrm>
             <a:off x="4818888" y="1197864"/>
-            <a:ext cx="3813048" cy="310896"/>
-          </a:xfrm>
-          <a:prstGeom prst="rect">
-            <a:avLst/>
-          </a:prstGeom>
-          <a:noFill/>
-          <a:ln/>
-        </p:spPr>
-        <p:txBody>
-          <a:bodyPr wrap="square" lIns="0" tIns="0" rIns="0" bIns="0" rtlCol="0" anchor="ctr">
+            <a:ext cx="3813048" cy="311277"/>
+          </a:xfrm>
+          <a:prstGeom prst="rect">
+            <a:avLst/>
+          </a:prstGeom>
+          <a:noFill/>
+          <a:ln/>
+        </p:spPr>
+        <p:txBody>
+          <a:bodyPr wrap="square" lIns="0" tIns="0" rIns="0" bIns="0" rtlCol="0" anchor="t">
             <a:normAutofit/>
           </a:bodyPr>
           <a:lstStyle/>
@@ -5999,8 +5999,8 @@
         </p:nvSpPr>
         <p:spPr>
           <a:xfrm>
-            <a:off x="4818888" y="1581912"/>
-            <a:ext cx="3813048" cy="1033272"/>
+            <a:off x="4818888" y="1564005"/>
+            <a:ext cx="3813048" cy="1078611"/>
           </a:xfrm>
           <a:prstGeom prst="rect">
             <a:avLst/>
@@ -6068,16 +6068,16 @@
         <p:spPr>
           <a:xfrm>
             <a:off x="512064" y="3054096"/>
-            <a:ext cx="3813048" cy="310896"/>
-          </a:xfrm>
-          <a:prstGeom prst="rect">
-            <a:avLst/>
-          </a:prstGeom>
-          <a:noFill/>
-          <a:ln/>
-        </p:spPr>
-        <p:txBody>
-          <a:bodyPr wrap="square" lIns="0" tIns="0" rIns="0" bIns="0" rtlCol="0" anchor="ctr">
+            <a:ext cx="3813048" cy="311277"/>
+          </a:xfrm>
+          <a:prstGeom prst="rect">
+            <a:avLst/>
+          </a:prstGeom>
+          <a:noFill/>
+          <a:ln/>
+        </p:spPr>
+        <p:txBody>
+          <a:bodyPr wrap="square" lIns="0" tIns="0" rIns="0" bIns="0" rtlCol="0" anchor="t">
             <a:normAutofit/>
           </a:bodyPr>
           <a:lstStyle/>
@@ -6108,8 +6108,8 @@
         </p:nvSpPr>
         <p:spPr>
           <a:xfrm>
-            <a:off x="512064" y="3438144"/>
-            <a:ext cx="3813048" cy="1033272"/>
+            <a:off x="512064" y="3420237"/>
+            <a:ext cx="3813048" cy="1078611"/>
           </a:xfrm>
           <a:prstGeom prst="rect">
             <a:avLst/>
@@ -6177,16 +6177,16 @@
         <p:spPr>
           <a:xfrm>
             <a:off x="4818888" y="3054096"/>
-            <a:ext cx="3813048" cy="310896"/>
-          </a:xfrm>
-          <a:prstGeom prst="rect">
-            <a:avLst/>
-          </a:prstGeom>
-          <a:noFill/>
-          <a:ln/>
-        </p:spPr>
-        <p:txBody>
-          <a:bodyPr wrap="square" lIns="0" tIns="0" rIns="0" bIns="0" rtlCol="0" anchor="ctr">
+            <a:ext cx="3813048" cy="311277"/>
+          </a:xfrm>
+          <a:prstGeom prst="rect">
+            <a:avLst/>
+          </a:prstGeom>
+          <a:noFill/>
+          <a:ln/>
+        </p:spPr>
+        <p:txBody>
+          <a:bodyPr wrap="square" lIns="0" tIns="0" rIns="0" bIns="0" rtlCol="0" anchor="t">
             <a:normAutofit/>
           </a:bodyPr>
           <a:lstStyle/>
@@ -6217,8 +6217,8 @@
         </p:nvSpPr>
         <p:spPr>
           <a:xfrm>
-            <a:off x="4818888" y="3438144"/>
-            <a:ext cx="3813048" cy="1033272"/>
+            <a:off x="4818888" y="3420237"/>
+            <a:ext cx="3813048" cy="1078611"/>
           </a:xfrm>
           <a:prstGeom prst="rect">
             <a:avLst/>
@@ -11811,16 +11811,16 @@
         <p:spPr>
           <a:xfrm>
             <a:off x="512064" y="1197864"/>
-            <a:ext cx="3813048" cy="310896"/>
-          </a:xfrm>
-          <a:prstGeom prst="rect">
-            <a:avLst/>
-          </a:prstGeom>
-          <a:noFill/>
-          <a:ln/>
-        </p:spPr>
-        <p:txBody>
-          <a:bodyPr wrap="square" lIns="0" tIns="0" rIns="0" bIns="0" rtlCol="0" anchor="ctr">
+            <a:ext cx="3813048" cy="311277"/>
+          </a:xfrm>
+          <a:prstGeom prst="rect">
+            <a:avLst/>
+          </a:prstGeom>
+          <a:noFill/>
+          <a:ln/>
+        </p:spPr>
+        <p:txBody>
+          <a:bodyPr wrap="square" lIns="0" tIns="0" rIns="0" bIns="0" rtlCol="0" anchor="t">
             <a:normAutofit/>
           </a:bodyPr>
           <a:lstStyle/>
@@ -11851,8 +11851,8 @@
         </p:nvSpPr>
         <p:spPr>
           <a:xfrm>
-            <a:off x="512064" y="1581912"/>
-            <a:ext cx="3813048" cy="1033272"/>
+            <a:off x="512064" y="1564005"/>
+            <a:ext cx="3813048" cy="1078611"/>
           </a:xfrm>
           <a:prstGeom prst="rect">
             <a:avLst/>
@@ -11920,16 +11920,16 @@
         <p:spPr>
           <a:xfrm>
             <a:off x="4818888" y="1197864"/>
-            <a:ext cx="3813048" cy="310896"/>
-          </a:xfrm>
-          <a:prstGeom prst="rect">
-            <a:avLst/>
-          </a:prstGeom>
-          <a:noFill/>
-          <a:ln/>
-        </p:spPr>
-        <p:txBody>
-          <a:bodyPr wrap="square" lIns="0" tIns="0" rIns="0" bIns="0" rtlCol="0" anchor="ctr">
+            <a:ext cx="3813048" cy="311277"/>
+          </a:xfrm>
+          <a:prstGeom prst="rect">
+            <a:avLst/>
+          </a:prstGeom>
+          <a:noFill/>
+          <a:ln/>
+        </p:spPr>
+        <p:txBody>
+          <a:bodyPr wrap="square" lIns="0" tIns="0" rIns="0" bIns="0" rtlCol="0" anchor="t">
             <a:normAutofit/>
           </a:bodyPr>
           <a:lstStyle/>
@@ -11960,8 +11960,8 @@
         </p:nvSpPr>
         <p:spPr>
           <a:xfrm>
-            <a:off x="4818888" y="1581912"/>
-            <a:ext cx="3813048" cy="1033272"/>
+            <a:off x="4818888" y="1564005"/>
+            <a:ext cx="3813048" cy="1078611"/>
           </a:xfrm>
           <a:prstGeom prst="rect">
             <a:avLst/>
@@ -12029,16 +12029,16 @@
         <p:spPr>
           <a:xfrm>
             <a:off x="512064" y="3054096"/>
-            <a:ext cx="3813048" cy="310896"/>
-          </a:xfrm>
-          <a:prstGeom prst="rect">
-            <a:avLst/>
-          </a:prstGeom>
-          <a:noFill/>
-          <a:ln/>
-        </p:spPr>
-        <p:txBody>
-          <a:bodyPr wrap="square" lIns="0" tIns="0" rIns="0" bIns="0" rtlCol="0" anchor="ctr">
+            <a:ext cx="3813048" cy="311277"/>
+          </a:xfrm>
+          <a:prstGeom prst="rect">
+            <a:avLst/>
+          </a:prstGeom>
+          <a:noFill/>
+          <a:ln/>
+        </p:spPr>
+        <p:txBody>
+          <a:bodyPr wrap="square" lIns="0" tIns="0" rIns="0" bIns="0" rtlCol="0" anchor="t">
             <a:normAutofit/>
           </a:bodyPr>
           <a:lstStyle/>
@@ -12069,8 +12069,8 @@
         </p:nvSpPr>
         <p:spPr>
           <a:xfrm>
-            <a:off x="512064" y="3438144"/>
-            <a:ext cx="3813048" cy="1033272"/>
+            <a:off x="512064" y="3420237"/>
+            <a:ext cx="3813048" cy="1078611"/>
           </a:xfrm>
           <a:prstGeom prst="rect">
             <a:avLst/>
@@ -12138,16 +12138,16 @@
         <p:spPr>
           <a:xfrm>
             <a:off x="4818888" y="3054096"/>
-            <a:ext cx="3813048" cy="310896"/>
-          </a:xfrm>
-          <a:prstGeom prst="rect">
-            <a:avLst/>
-          </a:prstGeom>
-          <a:noFill/>
-          <a:ln/>
-        </p:spPr>
-        <p:txBody>
-          <a:bodyPr wrap="square" lIns="0" tIns="0" rIns="0" bIns="0" rtlCol="0" anchor="ctr">
+            <a:ext cx="3813048" cy="311277"/>
+          </a:xfrm>
+          <a:prstGeom prst="rect">
+            <a:avLst/>
+          </a:prstGeom>
+          <a:noFill/>
+          <a:ln/>
+        </p:spPr>
+        <p:txBody>
+          <a:bodyPr wrap="square" lIns="0" tIns="0" rIns="0" bIns="0" rtlCol="0" anchor="t">
             <a:normAutofit/>
           </a:bodyPr>
           <a:lstStyle/>
@@ -12178,8 +12178,8 @@
         </p:nvSpPr>
         <p:spPr>
           <a:xfrm>
-            <a:off x="4818888" y="3438144"/>
-            <a:ext cx="3813048" cy="1033272"/>
+            <a:off x="4818888" y="3420237"/>
+            <a:ext cx="3813048" cy="1078611"/>
           </a:xfrm>
           <a:prstGeom prst="rect">
             <a:avLst/>
